--- a/spring_2026_ID/docs/pdf/REPLICATION_RECOMMENDATIONS_BRIEFING.pptx
+++ b/spring_2026_ID/docs/pdf/REPLICATION_RECOMMENDATIONS_BRIEFING.pptx
@@ -32,16 +32,6 @@
     <p:sldId id="274" r:id="rId26"/>
     <p:sldId id="275" r:id="rId27"/>
     <p:sldId id="276" r:id="rId28"/>
-    <p:sldId id="277" r:id="rId29"/>
-    <p:sldId id="278" r:id="rId30"/>
-    <p:sldId id="279" r:id="rId31"/>
-    <p:sldId id="280" r:id="rId32"/>
-    <p:sldId id="281" r:id="rId33"/>
-    <p:sldId id="282" r:id="rId34"/>
-    <p:sldId id="283" r:id="rId35"/>
-    <p:sldId id="284" r:id="rId36"/>
-    <p:sldId id="285" r:id="rId37"/>
-    <p:sldId id="286" r:id="rId38"/>
   </p:sldIdLst>
   <p:sldSz cx="9144000" cy="5143500" type="screen16x9"/>
   <p:notesSz cx="6858000" cy="9144000"/>
@@ -4571,11 +4561,20 @@
                   <a:srgbClr val="1A1A1A"/>
                 </a:solidFill>
               </a:rPr>
-              <a:t>Recommendations for Replication of the OpenRiverCam Station Design</a:t>
+              <a:t>OpenRiverCam in Indonesia</a:t>
             </a:r>
           </a:p>
           <a:p>
             <a:pPr/>
+            <a:r>
+              <a:rPr sz="1200">
+                <a:solidFill>
+                  <a:srgbClr val="6B6A66"/>
+                </a:solidFill>
+              </a:rPr>
+              <a:t>What the pilot taught us, and the path forward</a:t>
+            </a:r>
+            <a:br/>
             <a:r>
               <a:rPr sz="1200">
                 <a:solidFill>
@@ -4649,41 +4648,72 @@
                   <a:srgbClr val="1A1A1A"/>
                 </a:solidFill>
               </a:rPr>
-              <a:t>Field record, April to August 2026</a:t>
-            </a:r>
-          </a:p>
-        </p:txBody>
-      </p:sp>
-      <p:sp>
-        <p:nvSpPr>
-          <p:cNvPr id="3" name="Content Placeholder 2"/>
-          <p:cNvSpPr>
-            <a:spLocks noGrp="1"/>
-          </p:cNvSpPr>
-          <p:nvPr>
-            <p:ph idx="12" sz="quarter"/>
-          </p:nvPr>
-        </p:nvSpPr>
-        <p:spPr/>
-        <p:txBody>
-          <a:bodyPr wrap="square"/>
+              <a:t>The station measures water level reliably only at night</a:t>
+            </a:r>
+          </a:p>
+        </p:txBody>
+      </p:sp>
+      <p:pic>
+        <p:nvPicPr>
+          <p:cNvPr id="3" name="Picture 2" descr="Two panels from 200 captures. The upper panel counts captures by hour of day, split into those that produced a water level and those rejected; every rejection falls between 06:00 and 19:00, with peaks mid-morning and mid-afternoon and fewer in the early afternoon. The lower panel shows how confident each reading was against the threshold at which a water level is accepted."/>
+          <p:cNvPicPr>
+            <a:picLocks noChangeAspect="1"/>
+          </p:cNvPicPr>
+          <p:nvPr/>
+        </p:nvPicPr>
+        <p:blipFill>
+          <a:blip r:embed="rId2"/>
+          <a:stretch>
+            <a:fillRect/>
+          </a:stretch>
+        </p:blipFill>
+        <p:spPr>
+          <a:xfrm>
+            <a:off x="2238269" y="919607"/>
+            <a:ext cx="4667462" cy="3071749"/>
+          </a:xfrm>
+          <a:prstGeom prst="rect">
+            <a:avLst/>
+          </a:prstGeom>
+        </p:spPr>
+      </p:pic>
+      <p:sp>
+        <p:nvSpPr>
+          <p:cNvPr id="4" name="TextBox 3"/>
+          <p:cNvSpPr txBox="1"/>
+          <p:nvPr/>
+        </p:nvSpPr>
+        <p:spPr>
+          <a:xfrm>
+            <a:off x="457200" y="3991356"/>
+            <a:ext cx="8229600" cy="420624"/>
+          </a:xfrm>
+          <a:prstGeom prst="rect">
+            <a:avLst/>
+          </a:prstGeom>
+          <a:noFill/>
+        </p:spPr>
+        <p:txBody>
+          <a:bodyPr wrap="square">
+            <a:spAutoFit/>
+          </a:bodyPr>
           <a:lstStyle/>
           <a:p>
             <a:pPr/>
             <a:r>
-              <a:rPr sz="1100">
+              <a:rPr sz="1000">
                 <a:solidFill>
                   <a:srgbClr val="6B6A66"/>
                 </a:solidFill>
               </a:rPr>
-              <a:t>Report §4 — read as properties of the design</a:t>
-            </a:r>
-          </a:p>
-        </p:txBody>
-      </p:sp>
-      <p:sp>
-        <p:nvSpPr>
-          <p:cNvPr id="4" name="TextBox 3"/>
+              <a:t>The two peaks and the early-afternoon dip are the pattern a sun-angle effect produces.</a:t>
+            </a:r>
+          </a:p>
+        </p:txBody>
+      </p:sp>
+      <p:sp>
+        <p:nvSpPr>
+          <p:cNvPr id="5" name="TextBox 4"/>
           <p:cNvSpPr txBox="1"/>
           <p:nvPr/>
         </p:nvSpPr>
@@ -4711,6 +4741,40 @@
                 </a:solidFill>
               </a:rPr>
               <a:t>ORC Indonesia Deployment — PMI / IPB / BHLK</a:t>
+            </a:r>
+          </a:p>
+        </p:txBody>
+      </p:sp>
+      <p:sp>
+        <p:nvSpPr>
+          <p:cNvPr id="6" name="TextBox 5"/>
+          <p:cNvSpPr txBox="1"/>
+          <p:nvPr/>
+        </p:nvSpPr>
+        <p:spPr>
+          <a:xfrm>
+            <a:off x="6553200" y="4667250"/>
+            <a:ext cx="2133600" cy="274638"/>
+          </a:xfrm>
+          <a:prstGeom prst="rect">
+            <a:avLst/>
+          </a:prstGeom>
+          <a:noFill/>
+        </p:spPr>
+        <p:txBody>
+          <a:bodyPr wrap="square">
+            <a:spAutoFit/>
+          </a:bodyPr>
+          <a:lstStyle/>
+          <a:p>
+            <a:pPr algn="r"/>
+            <a:r>
+              <a:rPr sz="800">
+                <a:solidFill>
+                  <a:srgbClr val="6B6A66"/>
+                </a:solidFill>
+              </a:rPr>
+              <a:t>10 / 21</a:t>
             </a:r>
           </a:p>
         </p:txBody>
@@ -4750,77 +4814,112 @@
           <a:p>
             <a:pPr/>
             <a:r>
-              <a:rPr sz="1800">
+              <a:rPr sz="2000">
                 <a:solidFill>
                   <a:srgbClr val="1A1A1A"/>
                 </a:solidFill>
               </a:rPr>
-              <a:t>13 interruptions across 133.5 days. The distribution is the finding.</a:t>
-            </a:r>
-          </a:p>
-        </p:txBody>
-      </p:sp>
-      <p:pic>
-        <p:nvPicPr>
-          <p:cNvPr id="3" name="Picture 2" descr="Two panels. The upper panel is a timeline of the 133.5-day observation window with each of the 13 interruptions drawn to its true length; nine coincide with maintenance mode and four do not. The lower panel places the same 13 on a logarithmic duration scale: nine fall under 24 hours, one at 38 hours, none at all between 2 and 5 days, and three at 5 days and over."/>
-          <p:cNvPicPr>
-            <a:picLocks noChangeAspect="1"/>
-          </p:cNvPicPr>
-          <p:nvPr/>
-        </p:nvPicPr>
-        <p:blipFill>
-          <a:blip r:embed="rId2"/>
-          <a:stretch>
-            <a:fillRect/>
-          </a:stretch>
-        </p:blipFill>
-        <p:spPr>
-          <a:xfrm>
-            <a:off x="1954010" y="919607"/>
-            <a:ext cx="5235979" cy="3199765"/>
-          </a:xfrm>
-          <a:prstGeom prst="rect">
-            <a:avLst/>
-          </a:prstGeom>
-        </p:spPr>
-      </p:pic>
+              <a:t>Eleven things we would do differently</a:t>
+            </a:r>
+          </a:p>
+        </p:txBody>
+      </p:sp>
+      <p:sp>
+        <p:nvSpPr>
+          <p:cNvPr id="3" name="Text Placeholder 2"/>
+          <p:cNvSpPr>
+            <a:spLocks noGrp="1"/>
+          </p:cNvSpPr>
+          <p:nvPr>
+            <p:ph type="body" idx="12" sz="quarter"/>
+          </p:nvPr>
+        </p:nvSpPr>
+        <p:spPr/>
+        <p:txBody>
+          <a:bodyPr wrap="square"/>
+          <a:lstStyle/>
+          <a:p>
+            <a:pPr/>
+            <a:r>
+              <a:rPr sz="1400">
+                <a:solidFill>
+                  <a:srgbClr val="1A1A1A"/>
+                </a:solidFill>
+              </a:rPr>
+              <a:t>Offered as input to your design, not as corrections to ours. We would not expect them adopted as a set.</a:t>
+            </a:r>
+          </a:p>
+          <a:p>
+            <a:pPr/>
+            <a:r>
+              <a:rPr sz="1400">
+                <a:solidFill>
+                  <a:srgbClr val="1A1A1A"/>
+                </a:solidFill>
+              </a:rPr>
+              <a:t>Let the station account for itself — R4, R5, R6, R7.</a:t>
+            </a:r>
+          </a:p>
+          <a:p>
+            <a:pPr lvl="1"/>
+            <a:r>
+              <a:rPr sz="1250">
+                <a:solidFill>
+                  <a:srgbClr val="6B6A66"/>
+                </a:solidFill>
+              </a:rPr>
+              <a:t>Nothing here is difficult or costly. The setting behind nine of the thirteen interruptions was readable remotely the whole time, and no software asked.</a:t>
+            </a:r>
+          </a:p>
+          <a:p>
+            <a:pPr/>
+            <a:r>
+              <a:rPr sz="1400">
+                <a:solidFill>
+                  <a:srgbClr val="1A1A1A"/>
+                </a:solidFill>
+              </a:rPr>
+              <a:t>Make the measurement trustworthy — R1, R2.</a:t>
+            </a:r>
+          </a:p>
+          <a:p>
+            <a:pPr lvl="1"/>
+            <a:r>
+              <a:rPr sz="1250">
+                <a:solidFill>
+                  <a:srgbClr val="6B6A66"/>
+                </a:solidFill>
+              </a:rPr>
+              <a:t>An independent water-level reference, and survey planned as professional work from the start. We learned that the hard way; IPB's total-station survey is what the station runs on today.</a:t>
+            </a:r>
+          </a:p>
+          <a:p>
+            <a:pPr/>
+            <a:r>
+              <a:rPr sz="1400">
+                <a:solidFill>
+                  <a:srgbClr val="1A1A1A"/>
+                </a:solidFill>
+              </a:rPr>
+              <a:t>Make the units buildable and maintainable in Indonesia — R3, R8, R9, R10, R11.</a:t>
+            </a:r>
+          </a:p>
+          <a:p>
+            <a:pPr lvl="1"/>
+            <a:r>
+              <a:rPr sz="1250">
+                <a:solidFill>
+                  <a:srgbClr val="6B6A66"/>
+                </a:solidFill>
+              </a:rPr>
+              <a:t>You will buy under Indonesian procurement rules, so substitution is the expected case rather than a risk to be managed.</a:t>
+            </a:r>
+          </a:p>
+        </p:txBody>
+      </p:sp>
       <p:sp>
         <p:nvSpPr>
           <p:cNvPr id="4" name="TextBox 3"/>
-          <p:cNvSpPr txBox="1"/>
-          <p:nvPr/>
-        </p:nvSpPr>
-        <p:spPr>
-          <a:xfrm>
-            <a:off x="457200" y="4119372"/>
-            <a:ext cx="8229600" cy="292608"/>
-          </a:xfrm>
-          <a:prstGeom prst="rect">
-            <a:avLst/>
-          </a:prstGeom>
-          <a:noFill/>
-        </p:spPr>
-        <p:txBody>
-          <a:bodyPr wrap="square">
-            <a:spAutoFit/>
-          </a:bodyPr>
-          <a:lstStyle/>
-          <a:p>
-            <a:pPr/>
-            <a:r>
-              <a:rPr sz="1000">
-                <a:solidFill>
-                  <a:srgbClr val="6B6A66"/>
-                </a:solidFill>
-              </a:rPr>
-              <a:t>Nine under a day, three at five days or more, and nothing in between.</a:t>
-            </a:r>
-          </a:p>
-        </p:txBody>
-      </p:sp>
-      <p:sp>
-        <p:nvSpPr>
-          <p:cNvPr id="5" name="TextBox 4"/>
           <p:cNvSpPr txBox="1"/>
           <p:nvPr/>
         </p:nvSpPr>
@@ -4854,7 +4953,7 @@
       </p:sp>
       <p:sp>
         <p:nvSpPr>
-          <p:cNvPr id="6" name="TextBox 5"/>
+          <p:cNvPr id="5" name="TextBox 4"/>
           <p:cNvSpPr txBox="1"/>
           <p:nvPr/>
         </p:nvSpPr>
@@ -4881,7 +4980,7 @@
                   <a:srgbClr val="6B6A66"/>
                 </a:solidFill>
               </a:rPr>
-              <a:t>11 / 31</a:t>
+              <a:t>11 / 21</a:t>
             </a:r>
           </a:p>
         </p:txBody>
@@ -4895,2235 +4994,6 @@
 </file>
 
 <file path=ppt/slides/slide12.xml><?xml version="1.0" encoding="utf-8"?>
-<p:sld xmlns:a="http://schemas.openxmlformats.org/drawingml/2006/main" xmlns:p="http://schemas.openxmlformats.org/presentationml/2006/main" xmlns:r="http://schemas.openxmlformats.org/officeDocument/2006/relationships">
-  <p:cSld>
-    <p:spTree>
-      <p:nvGrpSpPr>
-        <p:cNvPr id="1" name=""/>
-        <p:cNvGrpSpPr/>
-        <p:nvPr/>
-      </p:nvGrpSpPr>
-      <p:grpSpPr/>
-      <p:sp>
-        <p:nvSpPr>
-          <p:cNvPr id="2" name="Title 1"/>
-          <p:cNvSpPr>
-            <a:spLocks noGrp="1"/>
-          </p:cNvSpPr>
-          <p:nvPr>
-            <p:ph type="title"/>
-          </p:nvPr>
-        </p:nvSpPr>
-        <p:spPr/>
-        <p:txBody>
-          <a:bodyPr wrap="square"/>
-          <a:lstStyle/>
-          <a:p>
-            <a:pPr/>
-            <a:r>
-              <a:rPr sz="2000">
-                <a:solidFill>
-                  <a:srgbClr val="1A1A1A"/>
-                </a:solidFill>
-              </a:rPr>
-              <a:t>The absent middle is the signature of a latch</a:t>
-            </a:r>
-          </a:p>
-        </p:txBody>
-      </p:sp>
-      <p:sp>
-        <p:nvSpPr>
-          <p:cNvPr id="3" name="Text Placeholder 2"/>
-          <p:cNvSpPr>
-            <a:spLocks noGrp="1"/>
-          </p:cNvSpPr>
-          <p:nvPr>
-            <p:ph type="body" idx="12" sz="quarter"/>
-          </p:nvPr>
-        </p:nvSpPr>
-        <p:spPr/>
-        <p:txBody>
-          <a:bodyPr wrap="square"/>
-          <a:lstStyle/>
-          <a:p>
-            <a:pPr/>
-            <a:r>
-              <a:rPr sz="1500">
-                <a:solidFill>
-                  <a:srgbClr val="1A1A1A"/>
-                </a:solidFill>
-              </a:rPr>
-              <a:t>A missed wake leaves the scheduler's next-startup alarm in the past, and nothing re-arms it.</a:t>
-            </a:r>
-          </a:p>
-          <a:p>
-            <a:pPr/>
-            <a:r>
-              <a:rPr sz="1500">
-                <a:solidFill>
-                  <a:srgbClr val="1A1A1A"/>
-                </a:solidFill>
-              </a:rPr>
-              <a:t>So the station either catches the next cycle within a day, or stops until something external restarts it. The three long ones ran 5.4, 7.3 and 9.3 days.</a:t>
-            </a:r>
-          </a:p>
-          <a:p>
-            <a:pPr/>
-            <a:r>
-              <a:rPr sz="1500">
-                <a:solidFill>
-                  <a:srgbClr val="1A1A1A"/>
-                </a:solidFill>
-              </a:rPr>
-              <a:t>Two separable faults:</a:t>
-            </a:r>
-          </a:p>
-          <a:p>
-            <a:pPr lvl="1"/>
-            <a:r>
-              <a:rPr sz="1350">
-                <a:solidFill>
-                  <a:srgbClr val="6B6A66"/>
-                </a:solidFill>
-              </a:rPr>
-              <a:t>The trigger — whatever kills the individual wake. A power sizing question.</a:t>
-            </a:r>
-          </a:p>
-          <a:p>
-            <a:pPr lvl="1"/>
-            <a:r>
-              <a:rPr sz="1350">
-                <a:solidFill>
-                  <a:srgbClr val="6B6A66"/>
-                </a:solidFill>
-              </a:rPr>
-              <a:t>The latch — the failure to re-arm. A scheduler question.</a:t>
-            </a:r>
-          </a:p>
-          <a:p>
-            <a:pPr/>
-            <a:r>
-              <a:rPr sz="1500">
-                <a:solidFill>
-                  <a:srgbClr val="1A1A1A"/>
-                </a:solidFill>
-              </a:rPr>
-              <a:t>Fixing the latch converts an open-ended interruption into a 30-minute one, whatever the trigger was. It is the cheaper half and the higher-value one.</a:t>
-            </a:r>
-          </a:p>
-        </p:txBody>
-      </p:sp>
-      <p:sp>
-        <p:nvSpPr>
-          <p:cNvPr id="4" name="TextBox 3"/>
-          <p:cNvSpPr txBox="1"/>
-          <p:nvPr/>
-        </p:nvSpPr>
-        <p:spPr>
-          <a:xfrm>
-            <a:off x="3124200" y="4667250"/>
-            <a:ext cx="2895600" cy="274638"/>
-          </a:xfrm>
-          <a:prstGeom prst="rect">
-            <a:avLst/>
-          </a:prstGeom>
-          <a:noFill/>
-        </p:spPr>
-        <p:txBody>
-          <a:bodyPr wrap="square">
-            <a:spAutoFit/>
-          </a:bodyPr>
-          <a:lstStyle/>
-          <a:p>
-            <a:pPr algn="ctr"/>
-            <a:r>
-              <a:rPr sz="800">
-                <a:solidFill>
-                  <a:srgbClr val="6B6A66"/>
-                </a:solidFill>
-              </a:rPr>
-              <a:t>ORC Indonesia Deployment — PMI / IPB / BHLK</a:t>
-            </a:r>
-          </a:p>
-        </p:txBody>
-      </p:sp>
-      <p:sp>
-        <p:nvSpPr>
-          <p:cNvPr id="5" name="TextBox 4"/>
-          <p:cNvSpPr txBox="1"/>
-          <p:nvPr/>
-        </p:nvSpPr>
-        <p:spPr>
-          <a:xfrm>
-            <a:off x="6553200" y="4667250"/>
-            <a:ext cx="2133600" cy="274638"/>
-          </a:xfrm>
-          <a:prstGeom prst="rect">
-            <a:avLst/>
-          </a:prstGeom>
-          <a:noFill/>
-        </p:spPr>
-        <p:txBody>
-          <a:bodyPr wrap="square">
-            <a:spAutoFit/>
-          </a:bodyPr>
-          <a:lstStyle/>
-          <a:p>
-            <a:pPr algn="r"/>
-            <a:r>
-              <a:rPr sz="800">
-                <a:solidFill>
-                  <a:srgbClr val="6B6A66"/>
-                </a:solidFill>
-              </a:rPr>
-              <a:t>12 / 31</a:t>
-            </a:r>
-          </a:p>
-        </p:txBody>
-      </p:sp>
-    </p:spTree>
-  </p:cSld>
-  <p:clrMapOvr>
-    <a:masterClrMapping/>
-  </p:clrMapOvr>
-</p:sld>
-</file>
-
-<file path=ppt/slides/slide13.xml><?xml version="1.0" encoding="utf-8"?>
-<p:sld xmlns:a="http://schemas.openxmlformats.org/drawingml/2006/main" xmlns:p="http://schemas.openxmlformats.org/presentationml/2006/main" xmlns:r="http://schemas.openxmlformats.org/officeDocument/2006/relationships">
-  <p:cSld>
-    <p:spTree>
-      <p:nvGrpSpPr>
-        <p:cNvPr id="1" name=""/>
-        <p:cNvGrpSpPr/>
-        <p:nvPr/>
-      </p:nvGrpSpPr>
-      <p:grpSpPr/>
-      <p:sp>
-        <p:nvSpPr>
-          <p:cNvPr id="2" name="Title 1"/>
-          <p:cNvSpPr>
-            <a:spLocks noGrp="1"/>
-          </p:cNvSpPr>
-          <p:nvPr>
-            <p:ph type="title"/>
-          </p:nvPr>
-        </p:nvSpPr>
-        <p:spPr/>
-        <p:txBody>
-          <a:bodyPr wrap="square"/>
-          <a:lstStyle/>
-          <a:p>
-            <a:pPr/>
-            <a:r>
-              <a:rPr sz="2000">
-                <a:solidFill>
-                  <a:srgbClr val="1A1A1A"/>
-                </a:solidFill>
-              </a:rPr>
-              <a:t>Maintenance mode coincides with nine of the thirteen</a:t>
-            </a:r>
-          </a:p>
-        </p:txBody>
-      </p:sp>
-      <p:sp>
-        <p:nvSpPr>
-          <p:cNvPr id="3" name="Text Placeholder 2"/>
-          <p:cNvSpPr>
-            <a:spLocks noGrp="1"/>
-          </p:cNvSpPr>
-          <p:nvPr>
-            <p:ph type="body" idx="12" sz="quarter"/>
-          </p:nvPr>
-        </p:nvSpPr>
-        <p:spPr/>
-        <p:txBody>
-          <a:bodyPr wrap="square"/>
-          <a:lstStyle/>
-          <a:p>
-            <a:pPr/>
-            <a:r>
-              <a:rPr sz="1500">
-                <a:solidFill>
-                  <a:srgbClr val="1A1A1A"/>
-                </a:solidFill>
-              </a:rPr>
-              <a:t>A remotely-set flag that suppresses capture and holds the processor awake for the full window — roughly 12× the energy of a normal wake, and no data.</a:t>
-            </a:r>
-          </a:p>
-          <a:p>
-            <a:pPr/>
-            <a:r>
-              <a:rPr sz="1500">
-                <a:solidFill>
-                  <a:srgbClr val="1A1A1A"/>
-                </a:solidFill>
-              </a:rPr>
-              <a:t>Long-wake events: 1.59 per hour inside maintenance windows against 0.18 per hour outside. The nine include the two longest interruptions.</a:t>
-            </a:r>
-          </a:p>
-          <a:p>
-            <a:pPr/>
-            <a:r>
-              <a:rPr sz="1500">
-                <a:solidFill>
-                  <a:srgbClr val="1A1A1A"/>
-                </a:solidFill>
-              </a:rPr>
-              <a:t>The design defect is that the mode has no expiry and no alarm.</a:t>
-            </a:r>
-          </a:p>
-          <a:p>
-            <a:pPr lvl="1"/>
-            <a:r>
-              <a:rPr sz="1350">
-                <a:solidFill>
-                  <a:srgbClr val="6B6A66"/>
-                </a:solidFill>
-              </a:rPr>
-              <a:t>It persists until explicitly cleared, indicates nowhere that it is set, and its energy cost is invisible.</a:t>
-            </a:r>
-          </a:p>
-          <a:p>
-            <a:pPr/>
-            <a:r>
-              <a:rPr sz="1500">
-                <a:solidFill>
-                  <a:srgbClr val="1A1A1A"/>
-                </a:solidFill>
-              </a:rPr>
-              <a:t>Four interruptions are not associated with the mode. Two remain unexplained.</a:t>
-            </a:r>
-          </a:p>
-        </p:txBody>
-      </p:sp>
-      <p:sp>
-        <p:nvSpPr>
-          <p:cNvPr id="4" name="TextBox 3"/>
-          <p:cNvSpPr txBox="1"/>
-          <p:nvPr/>
-        </p:nvSpPr>
-        <p:spPr>
-          <a:xfrm>
-            <a:off x="3124200" y="4667250"/>
-            <a:ext cx="2895600" cy="274638"/>
-          </a:xfrm>
-          <a:prstGeom prst="rect">
-            <a:avLst/>
-          </a:prstGeom>
-          <a:noFill/>
-        </p:spPr>
-        <p:txBody>
-          <a:bodyPr wrap="square">
-            <a:spAutoFit/>
-          </a:bodyPr>
-          <a:lstStyle/>
-          <a:p>
-            <a:pPr algn="ctr"/>
-            <a:r>
-              <a:rPr sz="800">
-                <a:solidFill>
-                  <a:srgbClr val="6B6A66"/>
-                </a:solidFill>
-              </a:rPr>
-              <a:t>ORC Indonesia Deployment — PMI / IPB / BHLK</a:t>
-            </a:r>
-          </a:p>
-        </p:txBody>
-      </p:sp>
-      <p:sp>
-        <p:nvSpPr>
-          <p:cNvPr id="5" name="TextBox 4"/>
-          <p:cNvSpPr txBox="1"/>
-          <p:nvPr/>
-        </p:nvSpPr>
-        <p:spPr>
-          <a:xfrm>
-            <a:off x="6553200" y="4667250"/>
-            <a:ext cx="2133600" cy="274638"/>
-          </a:xfrm>
-          <a:prstGeom prst="rect">
-            <a:avLst/>
-          </a:prstGeom>
-          <a:noFill/>
-        </p:spPr>
-        <p:txBody>
-          <a:bodyPr wrap="square">
-            <a:spAutoFit/>
-          </a:bodyPr>
-          <a:lstStyle/>
-          <a:p>
-            <a:pPr algn="r"/>
-            <a:r>
-              <a:rPr sz="800">
-                <a:solidFill>
-                  <a:srgbClr val="6B6A66"/>
-                </a:solidFill>
-              </a:rPr>
-              <a:t>13 / 31</a:t>
-            </a:r>
-          </a:p>
-        </p:txBody>
-      </p:sp>
-    </p:spTree>
-  </p:cSld>
-  <p:clrMapOvr>
-    <a:masterClrMapping/>
-  </p:clrMapOvr>
-</p:sld>
-</file>
-
-<file path=ppt/slides/slide14.xml><?xml version="1.0" encoding="utf-8"?>
-<p:sld xmlns:a="http://schemas.openxmlformats.org/drawingml/2006/main" xmlns:p="http://schemas.openxmlformats.org/presentationml/2006/main" xmlns:r="http://schemas.openxmlformats.org/officeDocument/2006/relationships">
-  <p:cSld>
-    <p:spTree>
-      <p:nvGrpSpPr>
-        <p:cNvPr id="1" name=""/>
-        <p:cNvGrpSpPr/>
-        <p:nvPr/>
-      </p:nvGrpSpPr>
-      <p:grpSpPr/>
-      <p:sp>
-        <p:nvSpPr>
-          <p:cNvPr id="2" name="Title 1"/>
-          <p:cNvSpPr>
-            <a:spLocks noGrp="1"/>
-          </p:cNvSpPr>
-          <p:nvPr>
-            <p:ph type="title"/>
-          </p:nvPr>
-        </p:nvSpPr>
-        <p:spPr/>
-        <p:txBody>
-          <a:bodyPr wrap="square"/>
-          <a:lstStyle/>
-          <a:p>
-            <a:pPr/>
-            <a:r>
-              <a:rPr sz="2000">
-                <a:solidFill>
-                  <a:srgbClr val="1A1A1A"/>
-                </a:solidFill>
-              </a:rPr>
-              <a:t>Nothing in the design reported any of it</a:t>
-            </a:r>
-          </a:p>
-        </p:txBody>
-      </p:sp>
-      <p:sp>
-        <p:nvSpPr>
-          <p:cNvPr id="3" name="Text Placeholder 2"/>
-          <p:cNvSpPr>
-            <a:spLocks noGrp="1"/>
-          </p:cNvSpPr>
-          <p:nvPr>
-            <p:ph type="body" idx="12" sz="quarter"/>
-          </p:nvPr>
-        </p:nvSpPr>
-        <p:spPr/>
-        <p:txBody>
-          <a:bodyPr wrap="square"/>
-          <a:lstStyle/>
-          <a:p>
-            <a:pPr/>
-            <a:r>
-              <a:rPr sz="1500">
-                <a:solidFill>
-                  <a:srgbClr val="1A1A1A"/>
-                </a:solidFill>
-              </a:rPr>
-              <a:t>No mechanism existed by which an interruption could announce itself.</a:t>
-            </a:r>
-          </a:p>
-          <a:p>
-            <a:pPr/>
-            <a:r>
-              <a:rPr sz="1500">
-                <a:solidFill>
-                  <a:srgbClr val="1A1A1A"/>
-                </a:solidFill>
-              </a:rPr>
-              <a:t>The record could only be reconstructed afterwards, by querying the database directly.</a:t>
-            </a:r>
-          </a:p>
-          <a:p>
-            <a:pPr/>
-            <a:r>
-              <a:rPr sz="1500">
-                <a:solidFill>
-                  <a:srgbClr val="1A1A1A"/>
-                </a:solidFill>
-              </a:rPr>
-              <a:t>A fault the system does not report cannot be detected by monitoring it.</a:t>
-            </a:r>
-          </a:p>
-          <a:p>
-            <a:pPr/>
-            <a:r>
-              <a:rPr sz="1500">
-                <a:solidFill>
-                  <a:srgbClr val="1A1A1A"/>
-                </a:solidFill>
-              </a:rPr>
-              <a:t>This is the common thread behind R4, R5 and R7, and it is the cheapest class of change in the whole set.</a:t>
-            </a:r>
-          </a:p>
-        </p:txBody>
-      </p:sp>
-      <p:sp>
-        <p:nvSpPr>
-          <p:cNvPr id="4" name="TextBox 3"/>
-          <p:cNvSpPr txBox="1"/>
-          <p:nvPr/>
-        </p:nvSpPr>
-        <p:spPr>
-          <a:xfrm>
-            <a:off x="3124200" y="4667250"/>
-            <a:ext cx="2895600" cy="274638"/>
-          </a:xfrm>
-          <a:prstGeom prst="rect">
-            <a:avLst/>
-          </a:prstGeom>
-          <a:noFill/>
-        </p:spPr>
-        <p:txBody>
-          <a:bodyPr wrap="square">
-            <a:spAutoFit/>
-          </a:bodyPr>
-          <a:lstStyle/>
-          <a:p>
-            <a:pPr algn="ctr"/>
-            <a:r>
-              <a:rPr sz="800">
-                <a:solidFill>
-                  <a:srgbClr val="6B6A66"/>
-                </a:solidFill>
-              </a:rPr>
-              <a:t>ORC Indonesia Deployment — PMI / IPB / BHLK</a:t>
-            </a:r>
-          </a:p>
-        </p:txBody>
-      </p:sp>
-      <p:sp>
-        <p:nvSpPr>
-          <p:cNvPr id="5" name="TextBox 4"/>
-          <p:cNvSpPr txBox="1"/>
-          <p:nvPr/>
-        </p:nvSpPr>
-        <p:spPr>
-          <a:xfrm>
-            <a:off x="6553200" y="4667250"/>
-            <a:ext cx="2133600" cy="274638"/>
-          </a:xfrm>
-          <a:prstGeom prst="rect">
-            <a:avLst/>
-          </a:prstGeom>
-          <a:noFill/>
-        </p:spPr>
-        <p:txBody>
-          <a:bodyPr wrap="square">
-            <a:spAutoFit/>
-          </a:bodyPr>
-          <a:lstStyle/>
-          <a:p>
-            <a:pPr algn="r"/>
-            <a:r>
-              <a:rPr sz="800">
-                <a:solidFill>
-                  <a:srgbClr val="6B6A66"/>
-                </a:solidFill>
-              </a:rPr>
-              <a:t>14 / 31</a:t>
-            </a:r>
-          </a:p>
-        </p:txBody>
-      </p:sp>
-    </p:spTree>
-  </p:cSld>
-  <p:clrMapOvr>
-    <a:masterClrMapping/>
-  </p:clrMapOvr>
-</p:sld>
-</file>
-
-<file path=ppt/slides/slide15.xml><?xml version="1.0" encoding="utf-8"?>
-<p:sld xmlns:a="http://schemas.openxmlformats.org/drawingml/2006/main" xmlns:p="http://schemas.openxmlformats.org/presentationml/2006/main" xmlns:r="http://schemas.openxmlformats.org/officeDocument/2006/relationships">
-  <p:cSld>
-    <p:spTree>
-      <p:nvGrpSpPr>
-        <p:cNvPr id="1" name=""/>
-        <p:cNvGrpSpPr/>
-        <p:nvPr/>
-      </p:nvGrpSpPr>
-      <p:grpSpPr/>
-      <p:sp>
-        <p:nvSpPr>
-          <p:cNvPr id="2" name="Title 1"/>
-          <p:cNvSpPr>
-            <a:spLocks noGrp="1"/>
-          </p:cNvSpPr>
-          <p:nvPr>
-            <p:ph type="title"/>
-          </p:nvPr>
-        </p:nvSpPr>
-        <p:spPr/>
-        <p:txBody>
-          <a:bodyPr wrap="square"/>
-          <a:lstStyle/>
-          <a:p>
-            <a:pPr/>
-            <a:r>
-              <a:rPr sz="2000">
-                <a:solidFill>
-                  <a:srgbClr val="1A1A1A"/>
-                </a:solidFill>
-              </a:rPr>
-              <a:t>Optical water-level detection fails throughout daylight</a:t>
-            </a:r>
-          </a:p>
-        </p:txBody>
-      </p:sp>
-      <p:pic>
-        <p:nvPicPr>
-          <p:cNvPr id="3" name="Picture 2" descr="Two panels from 200 sampled captures. The upper panel counts captures by hour of day, split into those that produced a water level and those rejected at the quality gate; every rejection falls between 06:00 and 19:00, with peaks mid-morning and mid-afternoon and a dip in the early afternoon. The lower panel shows the signal-to-noise ratio of all 200 captures against the gate of 2.0."/>
-          <p:cNvPicPr>
-            <a:picLocks noChangeAspect="1"/>
-          </p:cNvPicPr>
-          <p:nvPr/>
-        </p:nvPicPr>
-        <p:blipFill>
-          <a:blip r:embed="rId2"/>
-          <a:stretch>
-            <a:fillRect/>
-          </a:stretch>
-        </p:blipFill>
-        <p:spPr>
-          <a:xfrm>
-            <a:off x="2141010" y="919607"/>
-            <a:ext cx="4861980" cy="3199765"/>
-          </a:xfrm>
-          <a:prstGeom prst="rect">
-            <a:avLst/>
-          </a:prstGeom>
-        </p:spPr>
-      </p:pic>
-      <p:sp>
-        <p:nvSpPr>
-          <p:cNvPr id="4" name="TextBox 3"/>
-          <p:cNvSpPr txBox="1"/>
-          <p:nvPr/>
-        </p:nvSpPr>
-        <p:spPr>
-          <a:xfrm>
-            <a:off x="457200" y="4119372"/>
-            <a:ext cx="8229600" cy="292608"/>
-          </a:xfrm>
-          <a:prstGeom prst="rect">
-            <a:avLst/>
-          </a:prstGeom>
-          <a:noFill/>
-        </p:spPr>
-        <p:txBody>
-          <a:bodyPr wrap="square">
-            <a:spAutoFit/>
-          </a:bodyPr>
-          <a:lstStyle/>
-          <a:p>
-            <a:pPr/>
-            <a:r>
-              <a:rPr sz="1000">
-                <a:solidFill>
-                  <a:srgbClr val="6B6A66"/>
-                </a:solidFill>
-              </a:rPr>
-              <a:t>The two peaks and the midday dip are the shape a sun-angle effect produces. A general brightness effect would not.</a:t>
-            </a:r>
-          </a:p>
-        </p:txBody>
-      </p:sp>
-      <p:sp>
-        <p:nvSpPr>
-          <p:cNvPr id="5" name="TextBox 4"/>
-          <p:cNvSpPr txBox="1"/>
-          <p:nvPr/>
-        </p:nvSpPr>
-        <p:spPr>
-          <a:xfrm>
-            <a:off x="3124200" y="4667250"/>
-            <a:ext cx="2895600" cy="274638"/>
-          </a:xfrm>
-          <a:prstGeom prst="rect">
-            <a:avLst/>
-          </a:prstGeom>
-          <a:noFill/>
-        </p:spPr>
-        <p:txBody>
-          <a:bodyPr wrap="square">
-            <a:spAutoFit/>
-          </a:bodyPr>
-          <a:lstStyle/>
-          <a:p>
-            <a:pPr algn="ctr"/>
-            <a:r>
-              <a:rPr sz="800">
-                <a:solidFill>
-                  <a:srgbClr val="6B6A66"/>
-                </a:solidFill>
-              </a:rPr>
-              <a:t>ORC Indonesia Deployment — PMI / IPB / BHLK</a:t>
-            </a:r>
-          </a:p>
-        </p:txBody>
-      </p:sp>
-      <p:sp>
-        <p:nvSpPr>
-          <p:cNvPr id="6" name="TextBox 5"/>
-          <p:cNvSpPr txBox="1"/>
-          <p:nvPr/>
-        </p:nvSpPr>
-        <p:spPr>
-          <a:xfrm>
-            <a:off x="6553200" y="4667250"/>
-            <a:ext cx="2133600" cy="274638"/>
-          </a:xfrm>
-          <a:prstGeom prst="rect">
-            <a:avLst/>
-          </a:prstGeom>
-          <a:noFill/>
-        </p:spPr>
-        <p:txBody>
-          <a:bodyPr wrap="square">
-            <a:spAutoFit/>
-          </a:bodyPr>
-          <a:lstStyle/>
-          <a:p>
-            <a:pPr algn="r"/>
-            <a:r>
-              <a:rPr sz="800">
-                <a:solidFill>
-                  <a:srgbClr val="6B6A66"/>
-                </a:solidFill>
-              </a:rPr>
-              <a:t>15 / 31</a:t>
-            </a:r>
-          </a:p>
-        </p:txBody>
-      </p:sp>
-    </p:spTree>
-  </p:cSld>
-  <p:clrMapOvr>
-    <a:masterClrMapping/>
-  </p:clrMapOvr>
-</p:sld>
-</file>
-
-<file path=ppt/slides/slide16.xml><?xml version="1.0" encoding="utf-8"?>
-<p:sld xmlns:a="http://schemas.openxmlformats.org/drawingml/2006/main" xmlns:p="http://schemas.openxmlformats.org/presentationml/2006/main" xmlns:r="http://schemas.openxmlformats.org/officeDocument/2006/relationships">
-  <p:cSld>
-    <p:spTree>
-      <p:nvGrpSpPr>
-        <p:cNvPr id="1" name=""/>
-        <p:cNvGrpSpPr/>
-        <p:nvPr/>
-      </p:nvGrpSpPr>
-      <p:grpSpPr/>
-      <p:sp>
-        <p:nvSpPr>
-          <p:cNvPr id="2" name="Title 1"/>
-          <p:cNvSpPr>
-            <a:spLocks noGrp="1"/>
-          </p:cNvSpPr>
-          <p:nvPr>
-            <p:ph type="title"/>
-          </p:nvPr>
-        </p:nvSpPr>
-        <p:spPr/>
-        <p:txBody>
-          <a:bodyPr wrap="square"/>
-          <a:lstStyle/>
-          <a:p>
-            <a:pPr/>
-            <a:r>
-              <a:rPr sz="2000">
-                <a:solidFill>
-                  <a:srgbClr val="1A1A1A"/>
-                </a:solidFill>
-              </a:rPr>
-              <a:t>Optical water-level detection fails throughout daylight</a:t>
-            </a:r>
-          </a:p>
-        </p:txBody>
-      </p:sp>
-      <p:sp>
-        <p:nvSpPr>
-          <p:cNvPr id="3" name="Text Placeholder 2"/>
-          <p:cNvSpPr>
-            <a:spLocks noGrp="1"/>
-          </p:cNvSpPr>
-          <p:nvPr>
-            <p:ph type="body" idx="12" sz="quarter"/>
-          </p:nvPr>
-        </p:nvSpPr>
-        <p:spPr/>
-        <p:txBody>
-          <a:bodyPr wrap="square"/>
-          <a:lstStyle/>
-          <a:p>
-            <a:pPr/>
-            <a:r>
-              <a:rPr sz="1500">
-                <a:solidFill>
-                  <a:srgbClr val="1A1A1A"/>
-                </a:solidFill>
-              </a:rPr>
-              <a:t>Of 200 sampled captures, 8–14 July, every failure was rejected at the same quality gate.</a:t>
-            </a:r>
-          </a:p>
-          <a:p>
-            <a:pPr/>
-            <a:r>
-              <a:rPr sz="1500">
-                <a:solidFill>
-                  <a:srgbClr val="1A1A1A"/>
-                </a:solidFill>
-              </a:rPr>
-              <a:t>Passing captures cluster at a signal-to-noise ratio of 3–5, failing ones at 1.3–1.8, with almost nothing between.</a:t>
-            </a:r>
-          </a:p>
-          <a:p>
-            <a:pPr lvl="1"/>
-            <a:r>
-              <a:rPr sz="1350">
-                <a:solidFill>
-                  <a:srgbClr val="6B6A66"/>
-                </a:solidFill>
-              </a:rPr>
-              <a:t>The gate is separating good captures from bad. Lowering it would admit unreliable levels, not recover good ones.</a:t>
-            </a:r>
-          </a:p>
-          <a:p>
-            <a:pPr/>
-            <a:r>
-              <a:rPr sz="1500">
-                <a:solidFill>
-                  <a:srgbClr val="1A1A1A"/>
-                </a:solidFill>
-              </a:rPr>
-              <a:t>Zero failures between 19:00 and 06:00 WIB. Within daylight, two peaks — mid-morning and mid-afternoon — with a dip at solar noon.</a:t>
-            </a:r>
-          </a:p>
-        </p:txBody>
-      </p:sp>
-      <p:sp>
-        <p:nvSpPr>
-          <p:cNvPr id="4" name="TextBox 3"/>
-          <p:cNvSpPr txBox="1"/>
-          <p:nvPr/>
-        </p:nvSpPr>
-        <p:spPr>
-          <a:xfrm>
-            <a:off x="3124200" y="4667250"/>
-            <a:ext cx="2895600" cy="274638"/>
-          </a:xfrm>
-          <a:prstGeom prst="rect">
-            <a:avLst/>
-          </a:prstGeom>
-          <a:noFill/>
-        </p:spPr>
-        <p:txBody>
-          <a:bodyPr wrap="square">
-            <a:spAutoFit/>
-          </a:bodyPr>
-          <a:lstStyle/>
-          <a:p>
-            <a:pPr algn="ctr"/>
-            <a:r>
-              <a:rPr sz="800">
-                <a:solidFill>
-                  <a:srgbClr val="6B6A66"/>
-                </a:solidFill>
-              </a:rPr>
-              <a:t>ORC Indonesia Deployment — PMI / IPB / BHLK</a:t>
-            </a:r>
-          </a:p>
-        </p:txBody>
-      </p:sp>
-      <p:sp>
-        <p:nvSpPr>
-          <p:cNvPr id="5" name="TextBox 4"/>
-          <p:cNvSpPr txBox="1"/>
-          <p:nvPr/>
-        </p:nvSpPr>
-        <p:spPr>
-          <a:xfrm>
-            <a:off x="6553200" y="4667250"/>
-            <a:ext cx="2133600" cy="274638"/>
-          </a:xfrm>
-          <a:prstGeom prst="rect">
-            <a:avLst/>
-          </a:prstGeom>
-          <a:noFill/>
-        </p:spPr>
-        <p:txBody>
-          <a:bodyPr wrap="square">
-            <a:spAutoFit/>
-          </a:bodyPr>
-          <a:lstStyle/>
-          <a:p>
-            <a:pPr algn="r"/>
-            <a:r>
-              <a:rPr sz="800">
-                <a:solidFill>
-                  <a:srgbClr val="6B6A66"/>
-                </a:solidFill>
-              </a:rPr>
-              <a:t>16 / 31</a:t>
-            </a:r>
-          </a:p>
-        </p:txBody>
-      </p:sp>
-    </p:spTree>
-  </p:cSld>
-  <p:clrMapOvr>
-    <a:masterClrMapping/>
-  </p:clrMapOvr>
-</p:sld>
-</file>
-
-<file path=ppt/slides/slide17.xml><?xml version="1.0" encoding="utf-8"?>
-<p:sld xmlns:a="http://schemas.openxmlformats.org/drawingml/2006/main" xmlns:p="http://schemas.openxmlformats.org/presentationml/2006/main" xmlns:r="http://schemas.openxmlformats.org/officeDocument/2006/relationships">
-  <p:cSld>
-    <p:spTree>
-      <p:nvGrpSpPr>
-        <p:cNvPr id="1" name=""/>
-        <p:cNvGrpSpPr/>
-        <p:nvPr/>
-      </p:nvGrpSpPr>
-      <p:grpSpPr/>
-      <p:sp>
-        <p:nvSpPr>
-          <p:cNvPr id="2" name="Title 1"/>
-          <p:cNvSpPr>
-            <a:spLocks noGrp="1"/>
-          </p:cNvSpPr>
-          <p:nvPr>
-            <p:ph type="title"/>
-          </p:nvPr>
-        </p:nvSpPr>
-        <p:spPr/>
-        <p:txBody>
-          <a:bodyPr wrap="square"/>
-          <a:lstStyle/>
-          <a:p>
-            <a:pPr/>
-            <a:r>
-              <a:rPr sz="2000">
-                <a:solidFill>
-                  <a:srgbClr val="1A1A1A"/>
-                </a:solidFill>
-              </a:rPr>
-              <a:t>What that costs, and what is not yet established</a:t>
-            </a:r>
-          </a:p>
-        </p:txBody>
-      </p:sp>
-      <p:sp>
-        <p:nvSpPr>
-          <p:cNvPr id="3" name="Text Placeholder 2"/>
-          <p:cNvSpPr>
-            <a:spLocks noGrp="1"/>
-          </p:cNvSpPr>
-          <p:nvPr>
-            <p:ph type="body" idx="12" sz="quarter"/>
-          </p:nvPr>
-        </p:nvSpPr>
-        <p:spPr/>
-        <p:txBody>
-          <a:bodyPr wrap="square"/>
-          <a:lstStyle/>
-          <a:p>
-            <a:pPr/>
-            <a:r>
-              <a:rPr sz="1500">
-                <a:solidFill>
-                  <a:srgbClr val="1A1A1A"/>
-                </a:solidFill>
-              </a:rPr>
-              <a:t>Water-level estimation aborts the entire processing run, so each daytime failure costs the whole discharge measurement, not only the level.</a:t>
-            </a:r>
-          </a:p>
-          <a:p>
-            <a:pPr/>
-            <a:r>
-              <a:rPr sz="1500">
-                <a:solidFill>
-                  <a:srgbClr val="1A1A1A"/>
-                </a:solidFill>
-              </a:rPr>
-              <a:t>The failure is measured and not in doubt.</a:t>
-            </a:r>
-          </a:p>
-          <a:p>
-            <a:pPr/>
-            <a:r>
-              <a:rPr sz="1500">
-                <a:solidFill>
-                  <a:srgbClr val="1A1A1A"/>
-                </a:solidFill>
-              </a:rPr>
-              <a:t>Its cause is a well-supported hypothesis, not a settled result: specular sun glint, indicated by the midday dip. Visual confirmation is pending.</a:t>
-            </a:r>
-          </a:p>
-          <a:p>
-            <a:pPr/>
-            <a:r>
-              <a:rPr sz="1500">
-                <a:solidFill>
-                  <a:srgbClr val="1A1A1A"/>
-                </a:solidFill>
-              </a:rPr>
-              <a:t>The recommendation depends only on the failure, not on the mechanism.</a:t>
-            </a:r>
-          </a:p>
-        </p:txBody>
-      </p:sp>
-      <p:sp>
-        <p:nvSpPr>
-          <p:cNvPr id="4" name="TextBox 3"/>
-          <p:cNvSpPr txBox="1"/>
-          <p:nvPr/>
-        </p:nvSpPr>
-        <p:spPr>
-          <a:xfrm>
-            <a:off x="3124200" y="4667250"/>
-            <a:ext cx="2895600" cy="274638"/>
-          </a:xfrm>
-          <a:prstGeom prst="rect">
-            <a:avLst/>
-          </a:prstGeom>
-          <a:noFill/>
-        </p:spPr>
-        <p:txBody>
-          <a:bodyPr wrap="square">
-            <a:spAutoFit/>
-          </a:bodyPr>
-          <a:lstStyle/>
-          <a:p>
-            <a:pPr algn="ctr"/>
-            <a:r>
-              <a:rPr sz="800">
-                <a:solidFill>
-                  <a:srgbClr val="6B6A66"/>
-                </a:solidFill>
-              </a:rPr>
-              <a:t>ORC Indonesia Deployment — PMI / IPB / BHLK</a:t>
-            </a:r>
-          </a:p>
-        </p:txBody>
-      </p:sp>
-      <p:sp>
-        <p:nvSpPr>
-          <p:cNvPr id="5" name="TextBox 4"/>
-          <p:cNvSpPr txBox="1"/>
-          <p:nvPr/>
-        </p:nvSpPr>
-        <p:spPr>
-          <a:xfrm>
-            <a:off x="6553200" y="4667250"/>
-            <a:ext cx="2133600" cy="274638"/>
-          </a:xfrm>
-          <a:prstGeom prst="rect">
-            <a:avLst/>
-          </a:prstGeom>
-          <a:noFill/>
-        </p:spPr>
-        <p:txBody>
-          <a:bodyPr wrap="square">
-            <a:spAutoFit/>
-          </a:bodyPr>
-          <a:lstStyle/>
-          <a:p>
-            <a:pPr algn="r"/>
-            <a:r>
-              <a:rPr sz="800">
-                <a:solidFill>
-                  <a:srgbClr val="6B6A66"/>
-                </a:solidFill>
-              </a:rPr>
-              <a:t>17 / 31</a:t>
-            </a:r>
-          </a:p>
-        </p:txBody>
-      </p:sp>
-    </p:spTree>
-  </p:cSld>
-  <p:clrMapOvr>
-    <a:masterClrMapping/>
-  </p:clrMapOvr>
-</p:sld>
-</file>
-
-<file path=ppt/slides/slide18.xml><?xml version="1.0" encoding="utf-8"?>
-<p:sld xmlns:a="http://schemas.openxmlformats.org/drawingml/2006/main" xmlns:p="http://schemas.openxmlformats.org/presentationml/2006/main" xmlns:r="http://schemas.openxmlformats.org/officeDocument/2006/relationships">
-  <p:cSld>
-    <p:spTree>
-      <p:nvGrpSpPr>
-        <p:cNvPr id="1" name=""/>
-        <p:cNvGrpSpPr/>
-        <p:nvPr/>
-      </p:nvGrpSpPr>
-      <p:grpSpPr/>
-      <p:sp>
-        <p:nvSpPr>
-          <p:cNvPr id="2" name="Title 1"/>
-          <p:cNvSpPr>
-            <a:spLocks noGrp="1"/>
-          </p:cNvSpPr>
-          <p:nvPr>
-            <p:ph type="title"/>
-          </p:nvPr>
-        </p:nvSpPr>
-        <p:spPr/>
-        <p:txBody>
-          <a:bodyPr wrap="square"/>
-          <a:lstStyle/>
-          <a:p>
-            <a:pPr/>
-            <a:r>
-              <a:rPr sz="2000">
-                <a:solidFill>
-                  <a:srgbClr val="1A1A1A"/>
-                </a:solidFill>
-              </a:rPr>
-              <a:t>Half of all captured video never reached the server</a:t>
-            </a:r>
-          </a:p>
-        </p:txBody>
-      </p:sp>
-      <p:sp>
-        <p:nvSpPr>
-          <p:cNvPr id="3" name="Text Placeholder 2"/>
-          <p:cNvSpPr>
-            <a:spLocks noGrp="1"/>
-          </p:cNvSpPr>
-          <p:nvPr>
-            <p:ph type="body" idx="12" sz="quarter"/>
-          </p:nvPr>
-        </p:nvSpPr>
-        <p:spPr/>
-        <p:txBody>
-          <a:bodyPr wrap="square"/>
-          <a:lstStyle/>
-          <a:p>
-            <a:pPr/>
-            <a:r>
-              <a:rPr sz="1500">
-                <a:solidFill>
-                  <a:srgbClr val="1A1A1A"/>
-                </a:solidFill>
-              </a:rPr>
-              <a:t>Of 5,406 videos recorded 8 April to 27 August, 51% were never synchronised. Separately, 43% failed processing on the station.</a:t>
-            </a:r>
-          </a:p>
-          <a:p>
-            <a:pPr/>
-            <a:r>
-              <a:rPr sz="1500">
-                <a:solidFill>
-                  <a:srgbClr val="1A1A1A"/>
-                </a:solidFill>
-              </a:rPr>
-              <a:t>The station disk sat pinned at its automatic purge threshold, so records were deleted before they could be retransmitted.</a:t>
-            </a:r>
-          </a:p>
-          <a:p>
-            <a:pPr/>
-            <a:r>
-              <a:rPr sz="1500">
-                <a:solidFill>
-                  <a:srgbClr val="1A1A1A"/>
-                </a:solidFill>
-              </a:rPr>
-              <a:t>Nothing compared what was captured against what arrived, so this produced no symptom at either end.</a:t>
-            </a:r>
-          </a:p>
-          <a:p>
-            <a:pPr/>
-            <a:r>
-              <a:rPr sz="1500">
-                <a:solidFill>
-                  <a:srgbClr val="1A1A1A"/>
-                </a:solidFill>
-              </a:rPr>
-              <a:t>Video and sensor data travel independent paths and fail independently. Neither confirms the other. Both have been observed here.</a:t>
-            </a:r>
-          </a:p>
-        </p:txBody>
-      </p:sp>
-      <p:sp>
-        <p:nvSpPr>
-          <p:cNvPr id="4" name="TextBox 3"/>
-          <p:cNvSpPr txBox="1"/>
-          <p:nvPr/>
-        </p:nvSpPr>
-        <p:spPr>
-          <a:xfrm>
-            <a:off x="3124200" y="4667250"/>
-            <a:ext cx="2895600" cy="274638"/>
-          </a:xfrm>
-          <a:prstGeom prst="rect">
-            <a:avLst/>
-          </a:prstGeom>
-          <a:noFill/>
-        </p:spPr>
-        <p:txBody>
-          <a:bodyPr wrap="square">
-            <a:spAutoFit/>
-          </a:bodyPr>
-          <a:lstStyle/>
-          <a:p>
-            <a:pPr algn="ctr"/>
-            <a:r>
-              <a:rPr sz="800">
-                <a:solidFill>
-                  <a:srgbClr val="6B6A66"/>
-                </a:solidFill>
-              </a:rPr>
-              <a:t>ORC Indonesia Deployment — PMI / IPB / BHLK</a:t>
-            </a:r>
-          </a:p>
-        </p:txBody>
-      </p:sp>
-      <p:sp>
-        <p:nvSpPr>
-          <p:cNvPr id="5" name="TextBox 4"/>
-          <p:cNvSpPr txBox="1"/>
-          <p:nvPr/>
-        </p:nvSpPr>
-        <p:spPr>
-          <a:xfrm>
-            <a:off x="6553200" y="4667250"/>
-            <a:ext cx="2133600" cy="274638"/>
-          </a:xfrm>
-          <a:prstGeom prst="rect">
-            <a:avLst/>
-          </a:prstGeom>
-          <a:noFill/>
-        </p:spPr>
-        <p:txBody>
-          <a:bodyPr wrap="square">
-            <a:spAutoFit/>
-          </a:bodyPr>
-          <a:lstStyle/>
-          <a:p>
-            <a:pPr algn="r"/>
-            <a:r>
-              <a:rPr sz="800">
-                <a:solidFill>
-                  <a:srgbClr val="6B6A66"/>
-                </a:solidFill>
-              </a:rPr>
-              <a:t>18 / 31</a:t>
-            </a:r>
-          </a:p>
-        </p:txBody>
-      </p:sp>
-    </p:spTree>
-  </p:cSld>
-  <p:clrMapOvr>
-    <a:masterClrMapping/>
-  </p:clrMapOvr>
-</p:sld>
-</file>
-
-<file path=ppt/slides/slide19.xml><?xml version="1.0" encoding="utf-8"?>
-<p:sld xmlns:a="http://schemas.openxmlformats.org/drawingml/2006/main" xmlns:p="http://schemas.openxmlformats.org/presentationml/2006/main" xmlns:r="http://schemas.openxmlformats.org/officeDocument/2006/relationships">
-  <p:cSld>
-    <p:spTree>
-      <p:nvGrpSpPr>
-        <p:cNvPr id="1" name=""/>
-        <p:cNvGrpSpPr/>
-        <p:nvPr/>
-      </p:nvGrpSpPr>
-      <p:grpSpPr/>
-      <p:sp>
-        <p:nvSpPr>
-          <p:cNvPr id="2" name="Title 1"/>
-          <p:cNvSpPr>
-            <a:spLocks noGrp="1"/>
-          </p:cNvSpPr>
-          <p:nvPr>
-            <p:ph type="title"/>
-          </p:nvPr>
-        </p:nvSpPr>
-        <p:spPr/>
-        <p:txBody>
-          <a:bodyPr wrap="square"/>
-          <a:lstStyle/>
-          <a:p>
-            <a:pPr/>
-            <a:r>
-              <a:rPr sz="2000">
-                <a:solidFill>
-                  <a:srgbClr val="1A1A1A"/>
-                </a:solidFill>
-              </a:rPr>
-              <a:t>What the cost ceiling bought</a:t>
-            </a:r>
-          </a:p>
-        </p:txBody>
-      </p:sp>
-      <p:sp>
-        <p:nvSpPr>
-          <p:cNvPr id="3" name="Content Placeholder 2"/>
-          <p:cNvSpPr>
-            <a:spLocks noGrp="1"/>
-          </p:cNvSpPr>
-          <p:nvPr>
-            <p:ph idx="12" sz="quarter"/>
-          </p:nvPr>
-        </p:nvSpPr>
-        <p:spPr/>
-        <p:txBody>
-          <a:bodyPr wrap="square"/>
-          <a:lstStyle/>
-          <a:p>
-            <a:pPr/>
-            <a:r>
-              <a:rPr sz="1100">
-                <a:solidFill>
-                  <a:srgbClr val="6B6A66"/>
-                </a:solidFill>
-              </a:rPr>
-              <a:t>Report §3 — the method, not the part</a:t>
-            </a:r>
-          </a:p>
-        </p:txBody>
-      </p:sp>
-      <p:sp>
-        <p:nvSpPr>
-          <p:cNvPr id="4" name="TextBox 3"/>
-          <p:cNvSpPr txBox="1"/>
-          <p:nvPr/>
-        </p:nvSpPr>
-        <p:spPr>
-          <a:xfrm>
-            <a:off x="3124200" y="4667250"/>
-            <a:ext cx="2895600" cy="274638"/>
-          </a:xfrm>
-          <a:prstGeom prst="rect">
-            <a:avLst/>
-          </a:prstGeom>
-          <a:noFill/>
-        </p:spPr>
-        <p:txBody>
-          <a:bodyPr wrap="square">
-            <a:spAutoFit/>
-          </a:bodyPr>
-          <a:lstStyle/>
-          <a:p>
-            <a:pPr algn="ctr"/>
-            <a:r>
-              <a:rPr sz="800">
-                <a:solidFill>
-                  <a:srgbClr val="6B6A66"/>
-                </a:solidFill>
-              </a:rPr>
-              <a:t>ORC Indonesia Deployment — PMI / IPB / BHLK</a:t>
-            </a:r>
-          </a:p>
-        </p:txBody>
-      </p:sp>
-    </p:spTree>
-  </p:cSld>
-  <p:clrMapOvr>
-    <a:masterClrMapping/>
-  </p:clrMapOvr>
-</p:sld>
-</file>
-
-<file path=ppt/slides/slide2.xml><?xml version="1.0" encoding="utf-8"?>
-<p:sld xmlns:a="http://schemas.openxmlformats.org/drawingml/2006/main" xmlns:p="http://schemas.openxmlformats.org/presentationml/2006/main" xmlns:r="http://schemas.openxmlformats.org/officeDocument/2006/relationships">
-  <p:cSld>
-    <p:spTree>
-      <p:nvGrpSpPr>
-        <p:cNvPr id="1" name=""/>
-        <p:cNvGrpSpPr/>
-        <p:nvPr/>
-      </p:nvGrpSpPr>
-      <p:grpSpPr/>
-      <p:sp>
-        <p:nvSpPr>
-          <p:cNvPr id="2" name="Title 1"/>
-          <p:cNvSpPr>
-            <a:spLocks noGrp="1"/>
-          </p:cNvSpPr>
-          <p:nvPr>
-            <p:ph type="title"/>
-          </p:nvPr>
-        </p:nvSpPr>
-        <p:spPr/>
-        <p:txBody>
-          <a:bodyPr wrap="square"/>
-          <a:lstStyle/>
-          <a:p>
-            <a:pPr/>
-            <a:r>
-              <a:rPr sz="2000">
-                <a:solidFill>
-                  <a:srgbClr val="1A1A1A"/>
-                </a:solidFill>
-              </a:rPr>
-              <a:t>Scope of this briefing</a:t>
-            </a:r>
-          </a:p>
-        </p:txBody>
-      </p:sp>
-      <p:sp>
-        <p:nvSpPr>
-          <p:cNvPr id="3" name="Text Placeholder 2"/>
-          <p:cNvSpPr>
-            <a:spLocks noGrp="1"/>
-          </p:cNvSpPr>
-          <p:nvPr>
-            <p:ph type="body" idx="12" sz="quarter"/>
-          </p:nvPr>
-        </p:nvSpPr>
-        <p:spPr/>
-        <p:txBody>
-          <a:bodyPr wrap="square"/>
-          <a:lstStyle/>
-          <a:p>
-            <a:pPr/>
-            <a:r>
-              <a:rPr sz="1500">
-                <a:solidFill>
-                  <a:srgbClr val="1A1A1A"/>
-                </a:solidFill>
-              </a:rPr>
-              <a:t>The technology only: the station as built, what it did in the field, and what should change before duplicate units are constructed.</a:t>
-            </a:r>
-          </a:p>
-          <a:p>
-            <a:pPr/>
-            <a:r>
-              <a:rPr sz="1500">
-                <a:solidFill>
-                  <a:srgbClr val="1A1A1A"/>
-                </a:solidFill>
-              </a:rPr>
-              <a:t>Not in scope: what the data is fit to support, or what accuracy any given application demands.</a:t>
-            </a:r>
-          </a:p>
-          <a:p>
-            <a:pPr lvl="1"/>
-            <a:r>
-              <a:rPr sz="1350">
-                <a:solidFill>
-                  <a:srgbClr val="6B6A66"/>
-                </a:solidFill>
-              </a:rPr>
-              <a:t>Those judgements are for IPB, BHLK and their federal partners.</a:t>
-            </a:r>
-          </a:p>
-          <a:p>
-            <a:pPr lvl="1"/>
-            <a:r>
-              <a:rPr sz="1350">
-                <a:solidFill>
-                  <a:srgbClr val="6B6A66"/>
-                </a:solidFill>
-              </a:rPr>
-              <a:t>Measurement requirements shown here are recorded from them, not proposed by us.</a:t>
-            </a:r>
-          </a:p>
-          <a:p>
-            <a:pPr/>
-            <a:r>
-              <a:rPr sz="1500">
-                <a:solidFill>
-                  <a:srgbClr val="1A1A1A"/>
-                </a:solidFill>
-              </a:rPr>
-              <a:t>Source: the full report and its appendix, circulated with this deck.</a:t>
-            </a:r>
-          </a:p>
-        </p:txBody>
-      </p:sp>
-      <p:sp>
-        <p:nvSpPr>
-          <p:cNvPr id="4" name="TextBox 3"/>
-          <p:cNvSpPr txBox="1"/>
-          <p:nvPr/>
-        </p:nvSpPr>
-        <p:spPr>
-          <a:xfrm>
-            <a:off x="3124200" y="4667250"/>
-            <a:ext cx="2895600" cy="274638"/>
-          </a:xfrm>
-          <a:prstGeom prst="rect">
-            <a:avLst/>
-          </a:prstGeom>
-          <a:noFill/>
-        </p:spPr>
-        <p:txBody>
-          <a:bodyPr wrap="square">
-            <a:spAutoFit/>
-          </a:bodyPr>
-          <a:lstStyle/>
-          <a:p>
-            <a:pPr algn="ctr"/>
-            <a:r>
-              <a:rPr sz="800">
-                <a:solidFill>
-                  <a:srgbClr val="6B6A66"/>
-                </a:solidFill>
-              </a:rPr>
-              <a:t>ORC Indonesia Deployment — PMI / IPB / BHLK</a:t>
-            </a:r>
-          </a:p>
-        </p:txBody>
-      </p:sp>
-      <p:sp>
-        <p:nvSpPr>
-          <p:cNvPr id="5" name="TextBox 4"/>
-          <p:cNvSpPr txBox="1"/>
-          <p:nvPr/>
-        </p:nvSpPr>
-        <p:spPr>
-          <a:xfrm>
-            <a:off x="6553200" y="4667250"/>
-            <a:ext cx="2133600" cy="274638"/>
-          </a:xfrm>
-          <a:prstGeom prst="rect">
-            <a:avLst/>
-          </a:prstGeom>
-          <a:noFill/>
-        </p:spPr>
-        <p:txBody>
-          <a:bodyPr wrap="square">
-            <a:spAutoFit/>
-          </a:bodyPr>
-          <a:lstStyle/>
-          <a:p>
-            <a:pPr algn="r"/>
-            <a:r>
-              <a:rPr sz="800">
-                <a:solidFill>
-                  <a:srgbClr val="6B6A66"/>
-                </a:solidFill>
-              </a:rPr>
-              <a:t>2 / 31</a:t>
-            </a:r>
-          </a:p>
-        </p:txBody>
-      </p:sp>
-    </p:spTree>
-  </p:cSld>
-  <p:clrMapOvr>
-    <a:masterClrMapping/>
-  </p:clrMapOvr>
-</p:sld>
-</file>
-
-<file path=ppt/slides/slide20.xml><?xml version="1.0" encoding="utf-8"?>
-<p:sld xmlns:a="http://schemas.openxmlformats.org/drawingml/2006/main" xmlns:p="http://schemas.openxmlformats.org/presentationml/2006/main" xmlns:r="http://schemas.openxmlformats.org/officeDocument/2006/relationships">
-  <p:cSld>
-    <p:spTree>
-      <p:nvGrpSpPr>
-        <p:cNvPr id="1" name=""/>
-        <p:cNvGrpSpPr/>
-        <p:nvPr/>
-      </p:nvGrpSpPr>
-      <p:grpSpPr/>
-      <p:sp>
-        <p:nvSpPr>
-          <p:cNvPr id="2" name="Title 1"/>
-          <p:cNvSpPr>
-            <a:spLocks noGrp="1"/>
-          </p:cNvSpPr>
-          <p:nvPr>
-            <p:ph type="title"/>
-          </p:nvPr>
-        </p:nvSpPr>
-        <p:spPr/>
-        <p:txBody>
-          <a:bodyPr wrap="square"/>
-          <a:lstStyle/>
-          <a:p>
-            <a:pPr/>
-            <a:r>
-              <a:rPr sz="1800">
-                <a:solidFill>
-                  <a:srgbClr val="1A1A1A"/>
-                </a:solidFill>
-              </a:rPr>
-              <a:t>The camera met its specification. Three consequences followed.</a:t>
-            </a:r>
-          </a:p>
-        </p:txBody>
-      </p:sp>
-      <p:sp>
-        <p:nvSpPr>
-          <p:cNvPr id="3" name="Text Placeholder 2"/>
-          <p:cNvSpPr>
-            <a:spLocks noGrp="1"/>
-          </p:cNvSpPr>
-          <p:nvPr>
-            <p:ph type="body" idx="12" sz="quarter"/>
-          </p:nvPr>
-        </p:nvSpPr>
-        <p:spPr>
-          <a:xfrm>
-            <a:off x="457200" y="1155065"/>
-            <a:ext cx="4773168" cy="3256915"/>
-          </a:xfrm>
-        </p:spPr>
-        <p:txBody>
-          <a:bodyPr wrap="square"/>
-          <a:lstStyle/>
-          <a:p>
-            <a:pPr/>
-            <a:r>
-              <a:rPr sz="1300">
-                <a:solidFill>
-                  <a:srgbClr val="1A1A1A"/>
-                </a:solidFill>
-              </a:rPr>
-              <a:t>USD 60 per unit against a professional alternative at about USD 1,268.</a:t>
-            </a:r>
-          </a:p>
-          <a:p>
-            <a:pPr/>
-            <a:r>
-              <a:rPr sz="1300">
-                <a:solidFill>
-                  <a:srgbClr val="1A1A1A"/>
-                </a:solidFill>
-              </a:rPr>
-              <a:t>Recorded video cannot be retrieved over HTTP, so capture falls back to a live stream.</a:t>
-            </a:r>
-          </a:p>
-          <a:p>
-            <a:pPr/>
-            <a:r>
-              <a:rPr sz="1300">
-                <a:solidFill>
-                  <a:srgbClr val="1A1A1A"/>
-                </a:solidFill>
-              </a:rPr>
-              <a:t>A white light fires at full brightness on every power-on and cannot be disabled.</a:t>
-            </a:r>
-          </a:p>
-          <a:p>
-            <a:pPr/>
-            <a:r>
-              <a:rPr sz="1300">
-                <a:solidFill>
-                  <a:srgbClr val="1A1A1A"/>
-                </a:solidFill>
-              </a:rPr>
-              <a:t>Boot time is fixed and paid on every wake — 30–60 s.</a:t>
-            </a:r>
-          </a:p>
-          <a:p>
-            <a:pPr/>
-            <a:r>
-              <a:rPr sz="1300">
-                <a:solidFill>
-                  <a:srgbClr val="1A1A1A"/>
-                </a:solidFill>
-              </a:rPr>
-              <a:t>All three are properties of the rebranded firmware, not of the optics or the sensor.</a:t>
-            </a:r>
-          </a:p>
-        </p:txBody>
-      </p:sp>
-      <p:pic>
-        <p:nvPicPr>
-          <p:cNvPr id="4" name="Picture 3" descr="The PoE camera as delivered, on a workbench mat with its mounting hardware, waterproof cable boot and printed user manual."/>
-          <p:cNvPicPr>
-            <a:picLocks noChangeAspect="1"/>
-          </p:cNvPicPr>
-          <p:nvPr/>
-        </p:nvPicPr>
-        <p:blipFill>
-          <a:blip r:embed="rId2"/>
-          <a:stretch>
-            <a:fillRect/>
-          </a:stretch>
-        </p:blipFill>
-        <p:spPr>
-          <a:xfrm>
-            <a:off x="5458968" y="1298765"/>
-            <a:ext cx="3227832" cy="2420874"/>
-          </a:xfrm>
-          <a:prstGeom prst="rect">
-            <a:avLst/>
-          </a:prstGeom>
-        </p:spPr>
-      </p:pic>
-      <p:sp>
-        <p:nvSpPr>
-          <p:cNvPr id="5" name="TextBox 4"/>
-          <p:cNvSpPr txBox="1"/>
-          <p:nvPr/>
-        </p:nvSpPr>
-        <p:spPr>
-          <a:xfrm>
-            <a:off x="5458968" y="3863340"/>
-            <a:ext cx="3227832" cy="548640"/>
-          </a:xfrm>
-          <a:prstGeom prst="rect">
-            <a:avLst/>
-          </a:prstGeom>
-          <a:noFill/>
-        </p:spPr>
-        <p:txBody>
-          <a:bodyPr wrap="square">
-            <a:spAutoFit/>
-          </a:bodyPr>
-          <a:lstStyle/>
-          <a:p>
-            <a:pPr/>
-            <a:r>
-              <a:rPr sz="950">
-                <a:solidFill>
-                  <a:srgbClr val="42413E"/>
-                </a:solidFill>
-              </a:rPr>
-              <a:t>The camera as delivered: capable hardware, a reseller's firmware.</a:t>
-            </a:r>
-          </a:p>
-        </p:txBody>
-      </p:sp>
-      <p:sp>
-        <p:nvSpPr>
-          <p:cNvPr id="6" name="TextBox 5"/>
-          <p:cNvSpPr txBox="1"/>
-          <p:nvPr/>
-        </p:nvSpPr>
-        <p:spPr>
-          <a:xfrm>
-            <a:off x="3124200" y="4667250"/>
-            <a:ext cx="2895600" cy="274638"/>
-          </a:xfrm>
-          <a:prstGeom prst="rect">
-            <a:avLst/>
-          </a:prstGeom>
-          <a:noFill/>
-        </p:spPr>
-        <p:txBody>
-          <a:bodyPr wrap="square">
-            <a:spAutoFit/>
-          </a:bodyPr>
-          <a:lstStyle/>
-          <a:p>
-            <a:pPr algn="ctr"/>
-            <a:r>
-              <a:rPr sz="800">
-                <a:solidFill>
-                  <a:srgbClr val="6B6A66"/>
-                </a:solidFill>
-              </a:rPr>
-              <a:t>ORC Indonesia Deployment — PMI / IPB / BHLK</a:t>
-            </a:r>
-          </a:p>
-        </p:txBody>
-      </p:sp>
-      <p:sp>
-        <p:nvSpPr>
-          <p:cNvPr id="7" name="TextBox 6"/>
-          <p:cNvSpPr txBox="1"/>
-          <p:nvPr/>
-        </p:nvSpPr>
-        <p:spPr>
-          <a:xfrm>
-            <a:off x="6553200" y="4667250"/>
-            <a:ext cx="2133600" cy="274638"/>
-          </a:xfrm>
-          <a:prstGeom prst="rect">
-            <a:avLst/>
-          </a:prstGeom>
-          <a:noFill/>
-        </p:spPr>
-        <p:txBody>
-          <a:bodyPr wrap="square">
-            <a:spAutoFit/>
-          </a:bodyPr>
-          <a:lstStyle/>
-          <a:p>
-            <a:pPr algn="r"/>
-            <a:r>
-              <a:rPr sz="800">
-                <a:solidFill>
-                  <a:srgbClr val="6B6A66"/>
-                </a:solidFill>
-              </a:rPr>
-              <a:t>20 / 31</a:t>
-            </a:r>
-          </a:p>
-        </p:txBody>
-      </p:sp>
-    </p:spTree>
-  </p:cSld>
-  <p:clrMapOvr>
-    <a:masterClrMapping/>
-  </p:clrMapOvr>
-</p:sld>
-</file>
-
-<file path=ppt/slides/slide21.xml><?xml version="1.0" encoding="utf-8"?>
-<p:sld xmlns:a="http://schemas.openxmlformats.org/drawingml/2006/main" xmlns:p="http://schemas.openxmlformats.org/presentationml/2006/main" xmlns:r="http://schemas.openxmlformats.org/officeDocument/2006/relationships">
-  <p:cSld>
-    <p:spTree>
-      <p:nvGrpSpPr>
-        <p:cNvPr id="1" name=""/>
-        <p:cNvGrpSpPr/>
-        <p:nvPr/>
-      </p:nvGrpSpPr>
-      <p:grpSpPr/>
-      <p:sp>
-        <p:nvSpPr>
-          <p:cNvPr id="2" name="Title 1"/>
-          <p:cNvSpPr>
-            <a:spLocks noGrp="1"/>
-          </p:cNvSpPr>
-          <p:nvPr>
-            <p:ph type="title"/>
-          </p:nvPr>
-        </p:nvSpPr>
-        <p:spPr/>
-        <p:txBody>
-          <a:bodyPr wrap="square"/>
-          <a:lstStyle/>
-          <a:p>
-            <a:pPr/>
-            <a:r>
-              <a:rPr sz="2000">
-                <a:solidFill>
-                  <a:srgbClr val="1A1A1A"/>
-                </a:solidFill>
-              </a:rPr>
-              <a:t>What the firmware costs the capture path</a:t>
-            </a:r>
-          </a:p>
-        </p:txBody>
-      </p:sp>
-      <p:pic>
-        <p:nvPicPr>
-          <p:cNvPr id="3" name="Picture 2" descr="Two paths compared. The intended path had the camera record to its own card at full bitrate and the station pull the finished file over Ethernet faster than real time; the single interface call that needs is absent from the rebranded firmware, so the path is blocked. The implemented path pulls a live stream instead, which carries 10 to 20 per cent transport overhead. A bar chart compares 20 Mbps recommended, 16 Mbps configured, and about 15.5 Mbps delivered."/>
-          <p:cNvPicPr>
-            <a:picLocks noChangeAspect="1"/>
-          </p:cNvPicPr>
-          <p:nvPr/>
-        </p:nvPicPr>
-        <p:blipFill>
-          <a:blip r:embed="rId2"/>
-          <a:stretch>
-            <a:fillRect/>
-          </a:stretch>
-        </p:blipFill>
-        <p:spPr>
-          <a:xfrm>
-            <a:off x="1528321" y="919607"/>
-            <a:ext cx="6087357" cy="3199765"/>
-          </a:xfrm>
-          <a:prstGeom prst="rect">
-            <a:avLst/>
-          </a:prstGeom>
-        </p:spPr>
-      </p:pic>
-      <p:sp>
-        <p:nvSpPr>
-          <p:cNvPr id="4" name="TextBox 3"/>
-          <p:cNvSpPr txBox="1"/>
-          <p:nvPr/>
-        </p:nvSpPr>
-        <p:spPr>
-          <a:xfrm>
-            <a:off x="457200" y="4119372"/>
-            <a:ext cx="8229600" cy="292608"/>
-          </a:xfrm>
-          <a:prstGeom prst="rect">
-            <a:avLst/>
-          </a:prstGeom>
-          <a:noFill/>
-        </p:spPr>
-        <p:txBody>
-          <a:bodyPr wrap="square">
-            <a:spAutoFit/>
-          </a:bodyPr>
-          <a:lstStyle/>
-          <a:p>
-            <a:pPr/>
-            <a:r>
-              <a:rPr sz="1000">
-                <a:solidFill>
-                  <a:srgbClr val="6B6A66"/>
-                </a:solidFill>
-              </a:rPr>
-              <a:t>The hardware could do it. The firmware will not expose it.</a:t>
-            </a:r>
-          </a:p>
-        </p:txBody>
-      </p:sp>
-      <p:sp>
-        <p:nvSpPr>
-          <p:cNvPr id="5" name="TextBox 4"/>
-          <p:cNvSpPr txBox="1"/>
-          <p:nvPr/>
-        </p:nvSpPr>
-        <p:spPr>
-          <a:xfrm>
-            <a:off x="3124200" y="4667250"/>
-            <a:ext cx="2895600" cy="274638"/>
-          </a:xfrm>
-          <a:prstGeom prst="rect">
-            <a:avLst/>
-          </a:prstGeom>
-          <a:noFill/>
-        </p:spPr>
-        <p:txBody>
-          <a:bodyPr wrap="square">
-            <a:spAutoFit/>
-          </a:bodyPr>
-          <a:lstStyle/>
-          <a:p>
-            <a:pPr algn="ctr"/>
-            <a:r>
-              <a:rPr sz="800">
-                <a:solidFill>
-                  <a:srgbClr val="6B6A66"/>
-                </a:solidFill>
-              </a:rPr>
-              <a:t>ORC Indonesia Deployment — PMI / IPB / BHLK</a:t>
-            </a:r>
-          </a:p>
-        </p:txBody>
-      </p:sp>
-      <p:sp>
-        <p:nvSpPr>
-          <p:cNvPr id="6" name="TextBox 5"/>
-          <p:cNvSpPr txBox="1"/>
-          <p:nvPr/>
-        </p:nvSpPr>
-        <p:spPr>
-          <a:xfrm>
-            <a:off x="6553200" y="4667250"/>
-            <a:ext cx="2133600" cy="274638"/>
-          </a:xfrm>
-          <a:prstGeom prst="rect">
-            <a:avLst/>
-          </a:prstGeom>
-          <a:noFill/>
-        </p:spPr>
-        <p:txBody>
-          <a:bodyPr wrap="square">
-            <a:spAutoFit/>
-          </a:bodyPr>
-          <a:lstStyle/>
-          <a:p>
-            <a:pPr algn="r"/>
-            <a:r>
-              <a:rPr sz="800">
-                <a:solidFill>
-                  <a:srgbClr val="6B6A66"/>
-                </a:solidFill>
-              </a:rPr>
-              <a:t>21 / 31</a:t>
-            </a:r>
-          </a:p>
-        </p:txBody>
-      </p:sp>
-    </p:spTree>
-  </p:cSld>
-  <p:clrMapOvr>
-    <a:masterClrMapping/>
-  </p:clrMapOvr>
-</p:sld>
-</file>
-
-<file path=ppt/slides/slide22.xml><?xml version="1.0" encoding="utf-8"?>
-<p:sld xmlns:a="http://schemas.openxmlformats.org/drawingml/2006/main" xmlns:p="http://schemas.openxmlformats.org/presentationml/2006/main" xmlns:r="http://schemas.openxmlformats.org/officeDocument/2006/relationships">
-  <p:cSld>
-    <p:spTree>
-      <p:nvGrpSpPr>
-        <p:cNvPr id="1" name=""/>
-        <p:cNvGrpSpPr/>
-        <p:nvPr/>
-      </p:nvGrpSpPr>
-      <p:grpSpPr/>
-      <p:sp>
-        <p:nvSpPr>
-          <p:cNvPr id="2" name="Title 1"/>
-          <p:cNvSpPr>
-            <a:spLocks noGrp="1"/>
-          </p:cNvSpPr>
-          <p:nvPr>
-            <p:ph type="title"/>
-          </p:nvPr>
-        </p:nvSpPr>
-        <p:spPr/>
-        <p:txBody>
-          <a:bodyPr wrap="square"/>
-          <a:lstStyle/>
-          <a:p>
-            <a:pPr/>
-            <a:r>
-              <a:rPr sz="2000">
-                <a:solidFill>
-                  <a:srgbClr val="1A1A1A"/>
-                </a:solidFill>
-              </a:rPr>
-              <a:t>The lesson is about method, not about the part</a:t>
-            </a:r>
-          </a:p>
-        </p:txBody>
-      </p:sp>
-      <p:sp>
-        <p:nvSpPr>
-          <p:cNvPr id="3" name="Text Placeholder 2"/>
-          <p:cNvSpPr>
-            <a:spLocks noGrp="1"/>
-          </p:cNvSpPr>
-          <p:nvPr>
-            <p:ph type="body" idx="12" sz="quarter"/>
-          </p:nvPr>
-        </p:nvSpPr>
-        <p:spPr/>
-        <p:txBody>
-          <a:bodyPr wrap="square"/>
-          <a:lstStyle/>
-          <a:p>
-            <a:pPr/>
-            <a:r>
-              <a:rPr sz="1500">
-                <a:solidFill>
-                  <a:srgbClr val="1A1A1A"/>
-                </a:solidFill>
-              </a:rPr>
-              <a:t>The ceiling was applied component by component: for each function, the cheapest part meeting the stated requirement.</a:t>
-            </a:r>
-          </a:p>
-          <a:p>
-            <a:pPr/>
-            <a:r>
-              <a:rPr sz="1500">
-                <a:solidFill>
-                  <a:srgbClr val="1A1A1A"/>
-                </a:solidFill>
-              </a:rPr>
-              <a:t>That is defensible, and it produced a working station at USD 1,340.</a:t>
-            </a:r>
-          </a:p>
-          <a:p>
-            <a:pPr/>
-            <a:r>
-              <a:rPr sz="1500">
-                <a:solidFill>
-                  <a:srgbClr val="1A1A1A"/>
-                </a:solidFill>
-              </a:rPr>
-              <a:t>It has one failure mode, which this deployment demonstrated: it prices each component against its datasheet, and not against what that component's limitations cost the rest of the system.</a:t>
-            </a:r>
-          </a:p>
-          <a:p>
-            <a:pPr/>
-            <a:r>
-              <a:rPr sz="1500">
-                <a:solidFill>
-                  <a:srgbClr val="1A1A1A"/>
-                </a:solidFill>
-              </a:rPr>
-              <a:t>Keep the per-station ceiling — it is what makes network density achievable. Apply it to the station rather than to each part in isolation.</a:t>
-            </a:r>
-          </a:p>
-        </p:txBody>
-      </p:sp>
-      <p:sp>
-        <p:nvSpPr>
-          <p:cNvPr id="4" name="TextBox 3"/>
-          <p:cNvSpPr txBox="1"/>
-          <p:nvPr/>
-        </p:nvSpPr>
-        <p:spPr>
-          <a:xfrm>
-            <a:off x="3124200" y="4667250"/>
-            <a:ext cx="2895600" cy="274638"/>
-          </a:xfrm>
-          <a:prstGeom prst="rect">
-            <a:avLst/>
-          </a:prstGeom>
-          <a:noFill/>
-        </p:spPr>
-        <p:txBody>
-          <a:bodyPr wrap="square">
-            <a:spAutoFit/>
-          </a:bodyPr>
-          <a:lstStyle/>
-          <a:p>
-            <a:pPr algn="ctr"/>
-            <a:r>
-              <a:rPr sz="800">
-                <a:solidFill>
-                  <a:srgbClr val="6B6A66"/>
-                </a:solidFill>
-              </a:rPr>
-              <a:t>ORC Indonesia Deployment — PMI / IPB / BHLK</a:t>
-            </a:r>
-          </a:p>
-        </p:txBody>
-      </p:sp>
-      <p:sp>
-        <p:nvSpPr>
-          <p:cNvPr id="5" name="TextBox 4"/>
-          <p:cNvSpPr txBox="1"/>
-          <p:nvPr/>
-        </p:nvSpPr>
-        <p:spPr>
-          <a:xfrm>
-            <a:off x="6553200" y="4667250"/>
-            <a:ext cx="2133600" cy="274638"/>
-          </a:xfrm>
-          <a:prstGeom prst="rect">
-            <a:avLst/>
-          </a:prstGeom>
-          <a:noFill/>
-        </p:spPr>
-        <p:txBody>
-          <a:bodyPr wrap="square">
-            <a:spAutoFit/>
-          </a:bodyPr>
-          <a:lstStyle/>
-          <a:p>
-            <a:pPr algn="r"/>
-            <a:r>
-              <a:rPr sz="800">
-                <a:solidFill>
-                  <a:srgbClr val="6B6A66"/>
-                </a:solidFill>
-              </a:rPr>
-              <a:t>22 / 31</a:t>
-            </a:r>
-          </a:p>
-        </p:txBody>
-      </p:sp>
-    </p:spTree>
-  </p:cSld>
-  <p:clrMapOvr>
-    <a:masterClrMapping/>
-  </p:clrMapOvr>
-</p:sld>
-</file>
-
-<file path=ppt/slides/slide23.xml><?xml version="1.0" encoding="utf-8"?>
-<p:sld xmlns:a="http://schemas.openxmlformats.org/drawingml/2006/main" xmlns:p="http://schemas.openxmlformats.org/presentationml/2006/main" xmlns:r="http://schemas.openxmlformats.org/officeDocument/2006/relationships">
-  <p:cSld>
-    <p:spTree>
-      <p:nvGrpSpPr>
-        <p:cNvPr id="1" name=""/>
-        <p:cNvGrpSpPr/>
-        <p:nvPr/>
-      </p:nvGrpSpPr>
-      <p:grpSpPr/>
-      <p:sp>
-        <p:nvSpPr>
-          <p:cNvPr id="2" name="Title 1"/>
-          <p:cNvSpPr>
-            <a:spLocks noGrp="1"/>
-          </p:cNvSpPr>
-          <p:nvPr>
-            <p:ph type="title"/>
-          </p:nvPr>
-        </p:nvSpPr>
-        <p:spPr/>
-        <p:txBody>
-          <a:bodyPr wrap="square"/>
-          <a:lstStyle/>
-          <a:p>
-            <a:pPr/>
-            <a:r>
-              <a:rPr sz="2000">
-                <a:solidFill>
-                  <a:srgbClr val="1A1A1A"/>
-                </a:solidFill>
-              </a:rPr>
-              <a:t>Recommendations for the pilot units</a:t>
-            </a:r>
-          </a:p>
-        </p:txBody>
-      </p:sp>
-      <p:sp>
-        <p:nvSpPr>
-          <p:cNvPr id="3" name="Content Placeholder 2"/>
-          <p:cNvSpPr>
-            <a:spLocks noGrp="1"/>
-          </p:cNvSpPr>
-          <p:nvPr>
-            <p:ph idx="12" sz="quarter"/>
-          </p:nvPr>
-        </p:nvSpPr>
-        <p:spPr/>
-        <p:txBody>
-          <a:bodyPr wrap="square"/>
-          <a:lstStyle/>
-          <a:p>
-            <a:pPr/>
-            <a:r>
-              <a:rPr sz="1100">
-                <a:solidFill>
-                  <a:srgbClr val="6B6A66"/>
-                </a:solidFill>
-              </a:rPr>
-              <a:t>Report §5 — eleven, ordered by effect on reliability and data quality</a:t>
-            </a:r>
-          </a:p>
-        </p:txBody>
-      </p:sp>
-      <p:sp>
-        <p:nvSpPr>
-          <p:cNvPr id="4" name="TextBox 3"/>
-          <p:cNvSpPr txBox="1"/>
-          <p:nvPr/>
-        </p:nvSpPr>
-        <p:spPr>
-          <a:xfrm>
-            <a:off x="3124200" y="4667250"/>
-            <a:ext cx="2895600" cy="274638"/>
-          </a:xfrm>
-          <a:prstGeom prst="rect">
-            <a:avLst/>
-          </a:prstGeom>
-          <a:noFill/>
-        </p:spPr>
-        <p:txBody>
-          <a:bodyPr wrap="square">
-            <a:spAutoFit/>
-          </a:bodyPr>
-          <a:lstStyle/>
-          <a:p>
-            <a:pPr algn="ctr"/>
-            <a:r>
-              <a:rPr sz="800">
-                <a:solidFill>
-                  <a:srgbClr val="6B6A66"/>
-                </a:solidFill>
-              </a:rPr>
-              <a:t>ORC Indonesia Deployment — PMI / IPB / BHLK</a:t>
-            </a:r>
-          </a:p>
-        </p:txBody>
-      </p:sp>
-    </p:spTree>
-  </p:cSld>
-  <p:clrMapOvr>
-    <a:masterClrMapping/>
-  </p:clrMapOvr>
-</p:sld>
-</file>
-
-<file path=ppt/slides/slide24.xml><?xml version="1.0" encoding="utf-8"?>
 <p:sld xmlns:a="http://schemas.openxmlformats.org/drawingml/2006/main" xmlns:p="http://schemas.openxmlformats.org/presentationml/2006/main" xmlns:r="http://schemas.openxmlformats.org/officeDocument/2006/relationships">
   <p:cSld>
     <p:spTree>
@@ -7180,8 +5050,9 @@
               </a:tblPr>
               <a:tblGrid>
                 <a:gridCol w="457200"/>
-                <a:gridCol w="3886200"/>
-                <a:gridCol w="3886200"/>
+                <a:gridCol w="2590800"/>
+                <a:gridCol w="2590800"/>
+                <a:gridCol w="2590800"/>
               </a:tblGrid>
               <a:tr h="310896">
                 <a:tc>
@@ -7212,7 +5083,7 @@
                             <a:srgbClr val="1A1A1A"/>
                           </a:solidFill>
                         </a:rPr>
-                        <a:t>Recommendation</a:t>
+                        <a:t>Change</a:t>
                       </a:r>
                     </a:p>
                   </a:txBody>
@@ -7229,7 +5100,24 @@
                             <a:srgbClr val="1A1A1A"/>
                           </a:solidFill>
                         </a:rPr>
-                        <a:t>Cost of adoption</a:t>
+                        <a:t>What it buys</a:t>
+                      </a:r>
+                    </a:p>
+                  </a:txBody>
+                  <a:tcPr marT="27432" marB="27432"/>
+                </a:tc>
+                <a:tc>
+                  <a:txBody>
+                    <a:bodyPr/>
+                    <a:lstStyle/>
+                    <a:p>
+                      <a:r>
+                        <a:rPr sz="1000" b="1">
+                          <a:solidFill>
+                            <a:srgbClr val="1A1A1A"/>
+                          </a:solidFill>
+                        </a:rPr>
+                        <a:t>Cost</a:t>
                       </a:r>
                     </a:p>
                   </a:txBody>
@@ -7282,7 +5170,24 @@
                             <a:srgbClr val="1A1A1A"/>
                           </a:solidFill>
                         </a:rPr>
-                        <a:t>Level sensor, or a staff gauge in view</a:t>
+                        <a:t>Measurement through the day</a:t>
+                      </a:r>
+                    </a:p>
+                  </a:txBody>
+                  <a:tcPr marT="27432" marB="27432"/>
+                </a:tc>
+                <a:tc>
+                  <a:txBody>
+                    <a:bodyPr/>
+                    <a:lstStyle/>
+                    <a:p>
+                      <a:r>
+                        <a:rPr sz="900" b="0">
+                          <a:solidFill>
+                            <a:srgbClr val="1A1A1A"/>
+                          </a:solidFill>
+                        </a:rPr>
+                        <a:t>A sensor, or a staff gauge in view</a:t>
                       </a:r>
                     </a:p>
                   </a:txBody>
@@ -7318,7 +5223,24 @@
                             <a:srgbClr val="1A1A1A"/>
                           </a:solidFill>
                         </a:rPr>
-                        <a:t>Commission a professional survey before installation</a:t>
+                        <a:t>Commission a professional survey first</a:t>
+                      </a:r>
+                    </a:p>
+                  </a:txBody>
+                  <a:tcPr marT="27432" marB="27432"/>
+                </a:tc>
+                <a:tc>
+                  <a:txBody>
+                    <a:bodyPr/>
+                    <a:lstStyle/>
+                    <a:p>
+                      <a:r>
+                        <a:rPr sz="900" b="0">
+                          <a:solidFill>
+                            <a:srgbClr val="1A1A1A"/>
+                          </a:solidFill>
+                        </a:rPr>
+                        <a:t>The one input processing cannot recover</a:t>
                       </a:r>
                     </a:p>
                   </a:txBody>
@@ -7371,7 +5293,24 @@
                             <a:srgbClr val="1A1A1A"/>
                           </a:solidFill>
                         </a:rPr>
-                        <a:t>Build to interfaces, not to part numbers</a:t>
+                        <a:t>Specify interfaces, not part numbers</a:t>
+                      </a:r>
+                    </a:p>
+                  </a:txBody>
+                  <a:tcPr marT="27432" marB="27432"/>
+                </a:tc>
+                <a:tc>
+                  <a:txBody>
+                    <a:bodyPr/>
+                    <a:lstStyle/>
+                    <a:p>
+                      <a:r>
+                        <a:rPr sz="900" b="0">
+                          <a:solidFill>
+                            <a:srgbClr val="1A1A1A"/>
+                          </a:solidFill>
+                        </a:rPr>
+                        <a:t>Local procurement without referring back to us</a:t>
                       </a:r>
                     </a:p>
                   </a:txBody>
@@ -7424,7 +5363,24 @@
                             <a:srgbClr val="1A1A1A"/>
                           </a:solidFill>
                         </a:rPr>
-                        <a:t>Health telemetry and mode alarms as functional requirements</a:t>
+                        <a:t>Health reporting and mode alarms as requirements</a:t>
+                      </a:r>
+                    </a:p>
+                  </a:txBody>
+                  <a:tcPr marT="27432" marB="27432"/>
+                </a:tc>
+                <a:tc>
+                  <a:txBody>
+                    <a:bodyPr/>
+                    <a:lstStyle/>
+                    <a:p>
+                      <a:r>
+                        <a:rPr sz="900" b="0">
+                          <a:solidFill>
+                            <a:srgbClr val="1A1A1A"/>
+                          </a:solidFill>
+                        </a:rPr>
+                        <a:t>The station reports its own condition</a:t>
                       </a:r>
                     </a:p>
                   </a:txBody>
@@ -7477,7 +5433,24 @@
                             <a:srgbClr val="1A1A1A"/>
                           </a:solidFill>
                         </a:rPr>
-                        <a:t>Push diagnostics rather than requiring a login</a:t>
+                        <a:t>Station sends diagnostics; no login required</a:t>
+                      </a:r>
+                    </a:p>
+                  </a:txBody>
+                  <a:tcPr marT="27432" marB="27432"/>
+                </a:tc>
+                <a:tc>
+                  <a:txBody>
+                    <a:bodyPr/>
+                    <a:lstStyle/>
+                    <a:p>
+                      <a:r>
+                        <a:rPr sz="900" b="0">
+                          <a:solidFill>
+                            <a:srgbClr val="1A1A1A"/>
+                          </a:solidFill>
+                        </a:rPr>
+                        <a:t>Support inside a short waking period</a:t>
                       </a:r>
                     </a:p>
                   </a:txBody>
@@ -7530,7 +5503,7 @@
                             <a:srgbClr val="1A1A1A"/>
                           </a:solidFill>
                         </a:rPr>
-                        <a:t>Instrument power; record voltage and current as pairs</a:t>
+                        <a:t>Record voltage and current together</a:t>
                       </a:r>
                     </a:p>
                   </a:txBody>
@@ -7547,7 +5520,24 @@
                             <a:srgbClr val="1A1A1A"/>
                           </a:solidFill>
                         </a:rPr>
-                        <a:t>Current-sense module and logging</a:t>
+                        <a:t>Separates a failing battery from a heavy load</a:t>
+                      </a:r>
+                    </a:p>
+                  </a:txBody>
+                  <a:tcPr marT="27432" marB="27432"/>
+                </a:tc>
+                <a:tc>
+                  <a:txBody>
+                    <a:bodyPr/>
+                    <a:lstStyle/>
+                    <a:p>
+                      <a:r>
+                        <a:rPr sz="900" b="0">
+                          <a:solidFill>
+                            <a:srgbClr val="1A1A1A"/>
+                          </a:solidFill>
+                        </a:rPr>
+                        <a:t>A sensing module</a:t>
                       </a:r>
                     </a:p>
                   </a:txBody>
@@ -7621,7 +5611,7 @@
                   <a:srgbClr val="6B6A66"/>
                 </a:solidFill>
               </a:rPr>
-              <a:t>24 / 31</a:t>
+              <a:t>12 / 21</a:t>
             </a:r>
           </a:p>
         </p:txBody>
@@ -7634,7 +5624,7 @@
 </p:sld>
 </file>
 
-<file path=ppt/slides/slide25.xml><?xml version="1.0" encoding="utf-8"?>
+<file path=ppt/slides/slide13.xml><?xml version="1.0" encoding="utf-8"?>
 <p:sld xmlns:a="http://schemas.openxmlformats.org/drawingml/2006/main" xmlns:p="http://schemas.openxmlformats.org/presentationml/2006/main" xmlns:r="http://schemas.openxmlformats.org/officeDocument/2006/relationships">
   <p:cSld>
     <p:spTree>
@@ -7691,8 +5681,9 @@
               </a:tblPr>
               <a:tblGrid>
                 <a:gridCol w="457200"/>
-                <a:gridCol w="3886200"/>
-                <a:gridCol w="3886200"/>
+                <a:gridCol w="2590800"/>
+                <a:gridCol w="2590800"/>
+                <a:gridCol w="2590800"/>
               </a:tblGrid>
               <a:tr h="310896">
                 <a:tc>
@@ -7723,7 +5714,7 @@
                             <a:srgbClr val="1A1A1A"/>
                           </a:solidFill>
                         </a:rPr>
-                        <a:t>Recommendation</a:t>
+                        <a:t>Change</a:t>
                       </a:r>
                     </a:p>
                   </a:txBody>
@@ -7740,7 +5731,24 @@
                             <a:srgbClr val="1A1A1A"/>
                           </a:solidFill>
                         </a:rPr>
-                        <a:t>Cost of adoption</a:t>
+                        <a:t>What it buys</a:t>
+                      </a:r>
+                    </a:p>
+                  </a:txBody>
+                  <a:tcPr marT="27432" marB="27432"/>
+                </a:tc>
+                <a:tc>
+                  <a:txBody>
+                    <a:bodyPr/>
+                    <a:lstStyle/>
+                    <a:p>
+                      <a:r>
+                        <a:rPr sz="1000" b="1">
+                          <a:solidFill>
+                            <a:srgbClr val="1A1A1A"/>
+                          </a:solidFill>
+                        </a:rPr>
+                        <a:t>Cost</a:t>
                       </a:r>
                     </a:p>
                   </a:txBody>
@@ -7776,7 +5784,24 @@
                             <a:srgbClr val="1A1A1A"/>
                           </a:solidFill>
                         </a:rPr>
-                        <a:t>Reconcile captured against received data automatically</a:t>
+                        <a:t>Compare recorded against received, automatically</a:t>
+                      </a:r>
+                    </a:p>
+                  </a:txBody>
+                  <a:tcPr marT="27432" marB="27432"/>
+                </a:tc>
+                <a:tc>
+                  <a:txBody>
+                    <a:bodyPr/>
+                    <a:lstStyle/>
+                    <a:p>
+                      <a:r>
+                        <a:rPr sz="900" b="0">
+                          <a:solidFill>
+                            <a:srgbClr val="1A1A1A"/>
+                          </a:solidFill>
+                        </a:rPr>
+                        <a:t>Loss is noticed, not discovered later</a:t>
                       </a:r>
                     </a:p>
                   </a:txBody>
@@ -7829,7 +5854,24 @@
                             <a:srgbClr val="1A1A1A"/>
                           </a:solidFill>
                         </a:rPr>
-                        <a:t>Consider indoor compute for the pilot units</a:t>
+                        <a:t>Put the computer indoors</a:t>
+                      </a:r>
+                    </a:p>
+                  </a:txBody>
+                  <a:tcPr marT="27432" marB="27432"/>
+                </a:tc>
+                <a:tc>
+                  <a:txBody>
+                    <a:bodyPr/>
+                    <a:lstStyle/>
+                    <a:p>
+                      <a:r>
+                        <a:rPr sz="900" b="0">
+                          <a:solidFill>
+                            <a:srgbClr val="1A1A1A"/>
+                          </a:solidFill>
+                        </a:rPr>
+                        <a:t>Removes it from heat, humidity, dust and travel</a:t>
                       </a:r>
                     </a:p>
                   </a:txBody>
@@ -7882,7 +5924,7 @@
                             <a:srgbClr val="1A1A1A"/>
                           </a:solidFill>
                         </a:rPr>
-                        <a:t>Budget per station; check the control interface before buying</a:t>
+                        <a:t>Budget per station; check the interface before buying</a:t>
                       </a:r>
                     </a:p>
                   </a:txBody>
@@ -7899,7 +5941,24 @@
                             <a:srgbClr val="1A1A1A"/>
                           </a:solidFill>
                         </a:rPr>
-                        <a:t>Screening effort; higher per-camera price</a:t>
+                        <a:t>A network that stays affordable</a:t>
+                      </a:r>
+                    </a:p>
+                  </a:txBody>
+                  <a:tcPr marT="27432" marB="27432"/>
+                </a:tc>
+                <a:tc>
+                  <a:txBody>
+                    <a:bodyPr/>
+                    <a:lstStyle/>
+                    <a:p>
+                      <a:r>
+                        <a:rPr sz="900" b="0">
+                          <a:solidFill>
+                            <a:srgbClr val="1A1A1A"/>
+                          </a:solidFill>
+                        </a:rPr>
+                        <a:t>Screening effort</a:t>
                       </a:r>
                     </a:p>
                   </a:txBody>
@@ -7935,7 +5994,7 @@
                             <a:srgbClr val="1A1A1A"/>
                           </a:solidFill>
                         </a:rPr>
-                        <a:t>Use the native RTC instead of an external scheduling board</a:t>
+                        <a:t>Use the computer's own clock where the site allows</a:t>
                       </a:r>
                     </a:p>
                   </a:txBody>
@@ -7952,7 +6011,24 @@
                             <a:srgbClr val="1A1A1A"/>
                           </a:solidFill>
                         </a:rPr>
-                        <a:t>Saves ~USD 50/station; keep the board on solar</a:t>
+                        <a:t>One less board to fail</a:t>
+                      </a:r>
+                    </a:p>
+                  </a:txBody>
+                  <a:tcPr marT="27432" marB="27432"/>
+                </a:tc>
+                <a:tc>
+                  <a:txBody>
+                    <a:bodyPr/>
+                    <a:lstStyle/>
+                    <a:p>
+                      <a:r>
+                        <a:rPr sz="900" b="0">
+                          <a:solidFill>
+                            <a:srgbClr val="1A1A1A"/>
+                          </a:solidFill>
+                        </a:rPr>
+                        <a:t>Saves about USD 50 per station</a:t>
                       </a:r>
                     </a:p>
                   </a:txBody>
@@ -7988,7 +6064,7 @@
                             <a:srgbClr val="1A1A1A"/>
                           </a:solidFill>
                         </a:rPr>
-                        <a:t>Where real-time monitoring is required, build always-on and mains-powered</a:t>
+                        <a:t>Build on mains and leave it running, where continuous reporting is wanted</a:t>
                       </a:r>
                     </a:p>
                   </a:txBody>
@@ -8005,7 +6081,24 @@
                             <a:srgbClr val="1A1A1A"/>
                           </a:solidFill>
                         </a:rPr>
-                        <a:t>Cheaper — ~USD 1,030 against 1,340</a:t>
+                        <a:t>Removes most of the gaps above</a:t>
+                      </a:r>
+                    </a:p>
+                  </a:txBody>
+                  <a:tcPr marT="27432" marB="27432"/>
+                </a:tc>
+                <a:tc>
+                  <a:txBody>
+                    <a:bodyPr/>
+                    <a:lstStyle/>
+                    <a:p>
+                      <a:r>
+                        <a:rPr sz="900" b="0">
+                          <a:solidFill>
+                            <a:srgbClr val="1A1A1A"/>
+                          </a:solidFill>
+                        </a:rPr>
+                        <a:t>No solar array to buy; constrains siting</a:t>
                       </a:r>
                     </a:p>
                   </a:txBody>
@@ -8079,7 +6172,7 @@
                   <a:srgbClr val="6B6A66"/>
                 </a:solidFill>
               </a:rPr>
-              <a:t>25 / 31</a:t>
+              <a:t>13 / 21</a:t>
             </a:r>
           </a:p>
         </p:txBody>
@@ -8092,7 +6185,7 @@
 </p:sld>
 </file>
 
-<file path=ppt/slides/slide26.xml><?xml version="1.0" encoding="utf-8"?>
+<file path=ppt/slides/slide14.xml><?xml version="1.0" encoding="utf-8"?>
 <p:sld xmlns:a="http://schemas.openxmlformats.org/drawingml/2006/main" xmlns:p="http://schemas.openxmlformats.org/presentationml/2006/main" xmlns:r="http://schemas.openxmlformats.org/officeDocument/2006/relationships">
   <p:cSld>
     <p:spTree>
@@ -8119,19 +6212,19 @@
           <a:p>
             <a:pPr/>
             <a:r>
-              <a:rPr sz="2000">
+              <a:rPr sz="1800">
                 <a:solidFill>
                   <a:srgbClr val="1A1A1A"/>
                 </a:solidFill>
               </a:rPr>
-              <a:t>R8 — camera at the river, computer indoors</a:t>
+              <a:t>R8 — the least proven change, and possibly the most useful</a:t>
             </a:r>
           </a:p>
         </p:txBody>
       </p:sp>
       <p:pic>
         <p:nvPicPr>
-          <p:cNvPr id="3" name="Picture 2" descr="Side-by-side comparison. On the left, the configuration as built: camera, computer, modem and power system all sit in an enclosure at the riverbank, so all of it is in the weather and service means opening the enclosure on site. On the right, the configuration proposed for the pilot units: only the camera stays at the river and the computer runs indoors at a BHLK or IPB facility over a network link."/>
+          <p:cNvPr id="3" name="Picture 2" descr="Side-by-side comparison. On the left, the arrangement as built: camera, computer, modem and power system all in an enclosure at the riverbank, so all of it is in the weather and service means opening the enclosure on site. On the right, the arrangement proposed for the pilot units: only the camera stays at the river and the computer runs indoors at a BHLK or IPB facility over a network link."/>
           <p:cNvPicPr>
             <a:picLocks noChangeAspect="1"/>
           </p:cNvPicPr>
@@ -8145,8 +6238,8 @@
         </p:blipFill>
         <p:spPr>
           <a:xfrm>
-            <a:off x="1819261" y="919607"/>
-            <a:ext cx="5505478" cy="3199765"/>
+            <a:off x="1929392" y="919607"/>
+            <a:ext cx="5285215" cy="3071749"/>
           </a:xfrm>
           <a:prstGeom prst="rect">
             <a:avLst/>
@@ -8161,8 +6254,8 @@
         </p:nvSpPr>
         <p:spPr>
           <a:xfrm>
-            <a:off x="457200" y="4119372"/>
-            <a:ext cx="8229600" cy="292608"/>
+            <a:off x="457200" y="3991356"/>
+            <a:ext cx="8229600" cy="420624"/>
           </a:xfrm>
           <a:prstGeom prst="rect">
             <a:avLst/>
@@ -8182,7 +6275,7 @@
                   <a:srgbClr val="6B6A66"/>
                 </a:solidFill>
               </a:rPr>
-              <a:t>Designed, not yet field tested. It is offered as the pilot's first experiment.</a:t>
+              <a:t>Designed and not yet field tested — the pilot's first experiment, not a proven alternative.</a:t>
             </a:r>
           </a:p>
         </p:txBody>
@@ -8250,7 +6343,7 @@
                   <a:srgbClr val="6B6A66"/>
                 </a:solidFill>
               </a:rPr>
-              <a:t>26 / 31</a:t>
+              <a:t>14 / 21</a:t>
             </a:r>
           </a:p>
         </p:txBody>
@@ -8263,7 +6356,7 @@
 </p:sld>
 </file>
 
-<file path=ppt/slides/slide27.xml><?xml version="1.0" encoding="utf-8"?>
+<file path=ppt/slides/slide15.xml><?xml version="1.0" encoding="utf-8"?>
 <p:sld xmlns:a="http://schemas.openxmlformats.org/drawingml/2006/main" xmlns:p="http://schemas.openxmlformats.org/presentationml/2006/main" xmlns:r="http://schemas.openxmlformats.org/officeDocument/2006/relationships">
   <p:cSld>
     <p:spTree>
@@ -8295,7 +6388,7 @@
                   <a:srgbClr val="1A1A1A"/>
                 </a:solidFill>
               </a:rPr>
-              <a:t>The four with the greatest effect</a:t>
+              <a:t>One lesson about method</a:t>
             </a:r>
           </a:p>
         </p:txBody>
@@ -8310,59 +6403,122 @@
             <p:ph type="body" idx="12" sz="quarter"/>
           </p:nvPr>
         </p:nvSpPr>
-        <p:spPr/>
+        <p:spPr>
+          <a:xfrm>
+            <a:off x="457200" y="1155065"/>
+            <a:ext cx="4773168" cy="3256915"/>
+          </a:xfrm>
+        </p:spPr>
         <p:txBody>
           <a:bodyPr wrap="square"/>
           <a:lstStyle/>
           <a:p>
             <a:pPr/>
             <a:r>
-              <a:rPr sz="1500">
+              <a:rPr sz="1200">
                 <a:solidFill>
                   <a:srgbClr val="1A1A1A"/>
                 </a:solidFill>
               </a:rPr>
-              <a:t>R1 — without an independent water-level reference the station measures reliably only at night, and the same block of hours is missing every day.</a:t>
+              <a:t>The budget was applied part by part: the cheapest item meeting each requirement.</a:t>
             </a:r>
           </a:p>
           <a:p>
             <a:pPr/>
             <a:r>
-              <a:rPr sz="1500">
+              <a:rPr sz="1200">
                 <a:solidFill>
                   <a:srgbClr val="1A1A1A"/>
                 </a:solidFill>
               </a:rPr>
-              <a:t>R2 — two RTK surveys, consecutive days, same equipment and crew, reproduced spreads of ~99 cm horizontal and ~139 cm vertical. Roughly 30× tolerance.</a:t>
+              <a:t>It prices each part against its specification sheet, not against what that part's limits cost the rest of the system.</a:t>
             </a:r>
           </a:p>
           <a:p>
             <a:pPr/>
             <a:r>
-              <a:rPr sz="1500">
+              <a:rPr sz="1200">
                 <a:solidFill>
                   <a:srgbClr val="1A1A1A"/>
                 </a:solidFill>
               </a:rPr>
-              <a:t>R3 — BHLK will source in Indonesia under Indonesian procurement rules, so substitution is the expected case, not a risk to be managed.</a:t>
+              <a:t>The camera meets every line of its specification, and still costs a fifth of the video quality and 30–60 s of battery on every waking.</a:t>
             </a:r>
           </a:p>
           <a:p>
             <a:pPr/>
             <a:r>
-              <a:rPr sz="1500">
+              <a:rPr sz="1200">
                 <a:solidFill>
                   <a:srgbClr val="1A1A1A"/>
                 </a:solidFill>
               </a:rPr>
-              <a:t>R11 — the duty cycle is the common cause behind much of the field record, and the always-on configuration is the cheaper of the two.</a:t>
-            </a:r>
-          </a:p>
-        </p:txBody>
-      </p:sp>
-      <p:sp>
-        <p:nvSpPr>
-          <p:cNvPr id="4" name="TextBox 3"/>
+              <a:t>Its light fires whenever it starts and cannot be turned off — 48 flashes a day at the present site.</a:t>
+            </a:r>
+          </a:p>
+        </p:txBody>
+      </p:sp>
+      <p:pic>
+        <p:nvPicPr>
+          <p:cNvPr id="4" name="Picture 3" descr="The camera as delivered, on a workbench mat with its mounting hardware, waterproof cable boot and printed manual."/>
+          <p:cNvPicPr>
+            <a:picLocks noChangeAspect="1"/>
+          </p:cNvPicPr>
+          <p:nvPr/>
+        </p:nvPicPr>
+        <p:blipFill>
+          <a:blip r:embed="rId2"/>
+          <a:stretch>
+            <a:fillRect/>
+          </a:stretch>
+        </p:blipFill>
+        <p:spPr>
+          <a:xfrm>
+            <a:off x="5458968" y="1298765"/>
+            <a:ext cx="3227832" cy="2420874"/>
+          </a:xfrm>
+          <a:prstGeom prst="rect">
+            <a:avLst/>
+          </a:prstGeom>
+        </p:spPr>
+      </p:pic>
+      <p:sp>
+        <p:nvSpPr>
+          <p:cNvPr id="5" name="TextBox 4"/>
+          <p:cNvSpPr txBox="1"/>
+          <p:nvPr/>
+        </p:nvSpPr>
+        <p:spPr>
+          <a:xfrm>
+            <a:off x="5458968" y="3863340"/>
+            <a:ext cx="3227832" cy="548640"/>
+          </a:xfrm>
+          <a:prstGeom prst="rect">
+            <a:avLst/>
+          </a:prstGeom>
+          <a:noFill/>
+        </p:spPr>
+        <p:txBody>
+          <a:bodyPr wrap="square">
+            <a:spAutoFit/>
+          </a:bodyPr>
+          <a:lstStyle/>
+          <a:p>
+            <a:pPr/>
+            <a:r>
+              <a:rPr sz="950">
+                <a:solidFill>
+                  <a:srgbClr val="42413E"/>
+                </a:solidFill>
+              </a:rPr>
+              <a:t>Capable hardware, running a reseller's version of the manufacturer's software.</a:t>
+            </a:r>
+          </a:p>
+        </p:txBody>
+      </p:sp>
+      <p:sp>
+        <p:nvSpPr>
+          <p:cNvPr id="6" name="TextBox 5"/>
           <p:cNvSpPr txBox="1"/>
           <p:nvPr/>
         </p:nvSpPr>
@@ -8396,7 +6552,7 @@
       </p:sp>
       <p:sp>
         <p:nvSpPr>
-          <p:cNvPr id="5" name="TextBox 4"/>
+          <p:cNvPr id="7" name="TextBox 6"/>
           <p:cNvSpPr txBox="1"/>
           <p:nvPr/>
         </p:nvSpPr>
@@ -8423,7 +6579,7 @@
                   <a:srgbClr val="6B6A66"/>
                 </a:solidFill>
               </a:rPr>
-              <a:t>27 / 31</a:t>
+              <a:t>15 / 21</a:t>
             </a:r>
           </a:p>
         </p:txBody>
@@ -8436,7 +6592,7 @@
 </p:sld>
 </file>
 
-<file path=ppt/slides/slide28.xml><?xml version="1.0" encoding="utf-8"?>
+<file path=ppt/slides/slide16.xml><?xml version="1.0" encoding="utf-8"?>
 <p:sld xmlns:a="http://schemas.openxmlformats.org/drawingml/2006/main" xmlns:p="http://schemas.openxmlformats.org/presentationml/2006/main" xmlns:r="http://schemas.openxmlformats.org/officeDocument/2006/relationships">
   <p:cSld>
     <p:spTree>
@@ -8468,7 +6624,7 @@
                   <a:srgbClr val="1A1A1A"/>
                 </a:solidFill>
               </a:rPr>
-              <a:t>Data hosting</a:t>
+              <a:t>Building and looking after the units in Indonesia</a:t>
             </a:r>
           </a:p>
         </p:txBody>
@@ -8495,7 +6651,7 @@
                   <a:srgbClr val="1A1A1A"/>
                 </a:solidFill>
               </a:rPr>
-              <a:t>The server is a containerised deployment, straightforward to stand up on BHLK infrastructure.</a:t>
+              <a:t>The design was made to be built by people who are not electronics specialists, with tools they already own.</a:t>
             </a:r>
           </a:p>
           <a:p>
@@ -8506,29 +6662,7 @@
                   <a:srgbClr val="1A1A1A"/>
                 </a:solidFill>
               </a:rPr>
-              <a:t>Two constraints established in practice, to design for rather than discover:</a:t>
-            </a:r>
-          </a:p>
-          <a:p>
-            <a:pPr lvl="1"/>
-            <a:r>
-              <a:rPr sz="1250">
-                <a:solidFill>
-                  <a:srgbClr val="6B6A66"/>
-                </a:solidFill>
-              </a:rPr>
-              <a:t>Video storage and the database must share a filesystem. Plan them as one volume.</a:t>
-            </a:r>
-          </a:p>
-          <a:p>
-            <a:pPr lvl="1"/>
-            <a:r>
-              <a:rPr sz="1250">
-                <a:solidFill>
-                  <a:srgbClr val="6B6A66"/>
-                </a:solidFill>
-              </a:rPr>
-              <a:t>Server and station software versions are coupled. A duty-cycled remote station cannot be upgraded on demand.</a:t>
+              <a:t>That intent only becomes real if the parts can be bought locally and the documentation supports substitution — R3.</a:t>
             </a:r>
           </a:p>
           <a:p>
@@ -8539,7 +6673,7 @@
                   <a:srgbClr val="1A1A1A"/>
                 </a:solidFill>
               </a:rPr>
-              <a:t>We would propose mirroring in parallel until the BHLK instance has completed a full operating cycle, including an upgrade.</a:t>
+              <a:t>Spares held at the local PMI chapter turn a failure into a part swap rather than a shipment.</a:t>
             </a:r>
           </a:p>
           <a:p>
@@ -8550,7 +6684,18 @@
                   <a:srgbClr val="1A1A1A"/>
                 </a:solidFill>
               </a:rPr>
-              <a:t>Worth agreeing in writing: where the authoritative copy sits, who administers it, who has access, retention and backup.</a:t>
+              <a:t>Where the field unit is a standard security camera, support falls within a supply chain that already exists across Indonesia.</a:t>
+            </a:r>
+          </a:p>
+          <a:p>
+            <a:pPr/>
+            <a:r>
+              <a:rPr sz="1400">
+                <a:solidFill>
+                  <a:srgbClr val="1A1A1A"/>
+                </a:solidFill>
+              </a:rPr>
+              <a:t>We would rather help build the capacity to maintain these stations than remain the place they are sent when they break.</a:t>
             </a:r>
           </a:p>
         </p:txBody>
@@ -8618,7 +6763,7 @@
                   <a:srgbClr val="6B6A66"/>
                 </a:solidFill>
               </a:rPr>
-              <a:t>28 / 31</a:t>
+              <a:t>16 / 21</a:t>
             </a:r>
           </a:p>
         </p:txBody>
@@ -8631,7 +6776,7 @@
 </p:sld>
 </file>
 
-<file path=ppt/slides/slide29.xml><?xml version="1.0" encoding="utf-8"?>
+<file path=ppt/slides/slide17.xml><?xml version="1.0" encoding="utf-8"?>
 <p:sld xmlns:a="http://schemas.openxmlformats.org/drawingml/2006/main" xmlns:p="http://schemas.openxmlformats.org/presentationml/2006/main" xmlns:r="http://schemas.openxmlformats.org/officeDocument/2006/relationships">
   <p:cSld>
     <p:spTree>
@@ -8663,7 +6808,7 @@
                   <a:srgbClr val="1A1A1A"/>
                 </a:solidFill>
               </a:rPr>
-              <a:t>Site selection</a:t>
+              <a:t>Hosting the data in Indonesia</a:t>
             </a:r>
           </a:p>
         </p:txBody>
@@ -8685,67 +6830,67 @@
           <a:p>
             <a:pPr/>
             <a:r>
-              <a:rPr sz="1500">
+              <a:rPr sz="1400">
                 <a:solidFill>
                   <a:srgbClr val="1A1A1A"/>
                 </a:solidFill>
               </a:rPr>
-              <a:t>An open site addresses three separate problems at once:</a:t>
+              <a:t>BHLK's offer suits the pilot, and holding the data in Indonesia carries a clear benefit for a government-partnered deployment.</a:t>
+            </a:r>
+          </a:p>
+          <a:p>
+            <a:pPr/>
+            <a:r>
+              <a:rPr sz="1400">
+                <a:solidFill>
+                  <a:srgbClr val="1A1A1A"/>
+                </a:solidFill>
+              </a:rPr>
+              <a:t>Two constraints to design for rather than discover:</a:t>
             </a:r>
           </a:p>
           <a:p>
             <a:pPr lvl="1"/>
             <a:r>
-              <a:rPr sz="1350">
+              <a:rPr sz="1250">
                 <a:solidFill>
                   <a:srgbClr val="6B6A66"/>
                 </a:solidFill>
               </a:rPr>
-              <a:t>GNSS multipath and sky obstruction — among the leading candidate causes of the survey noise at the present urban canal site.</a:t>
+              <a:t>The video store and the database must share one filesystem. Plan storage as a single volume.</a:t>
             </a:r>
           </a:p>
           <a:p>
             <a:pPr lvl="1"/>
             <a:r>
-              <a:rPr sz="1350">
+              <a:rPr sz="1250">
                 <a:solidFill>
                   <a:srgbClr val="6B6A66"/>
                 </a:solidFill>
               </a:rPr>
-              <a:t>Camera-to-sun geometry — a site free to choose azimuth can avoid the alignment through more of the day.</a:t>
-            </a:r>
-          </a:p>
-          <a:p>
-            <a:pPr lvl="1"/>
-            <a:r>
-              <a:rPr sz="1350">
-                <a:solidFill>
-                  <a:srgbClr val="6B6A66"/>
-                </a:solidFill>
-              </a:rPr>
-              <a:t>View geometry across the section, which sets how much of the flow the camera resolves.</a:t>
+              <a:t>Server and station software versions are tied together, and a remote station cannot be upgraded on demand.</a:t>
             </a:r>
           </a:p>
           <a:p>
             <a:pPr/>
             <a:r>
-              <a:rPr sz="1500">
+              <a:rPr sz="1400">
                 <a:solidFill>
                   <a:srgbClr val="1A1A1A"/>
                 </a:solidFill>
               </a:rPr>
-              <a:t>A move costs a re-survey and a re-calibration. The survey is the expensive part.</a:t>
+              <a:t>We would suggest running both instances in parallel until the new one has completed a full operating cycle, including an upgrade.</a:t>
             </a:r>
           </a:p>
           <a:p>
             <a:pPr/>
             <a:r>
-              <a:rPr sz="1500">
+              <a:rPr sz="1400">
                 <a:solidFill>
                   <a:srgbClr val="1A1A1A"/>
                 </a:solidFill>
               </a:rPr>
-              <a:t>Written site permission should be in hand before any unit is built for a specific site.</a:t>
+              <a:t>Worth agreeing in writing: where the authoritative copy sits, who administers it, who has access, and the retention policy.</a:t>
             </a:r>
           </a:p>
         </p:txBody>
@@ -8813,7 +6958,982 @@
                   <a:srgbClr val="6B6A66"/>
                 </a:solidFill>
               </a:rPr>
-              <a:t>29 / 31</a:t>
+              <a:t>17 / 21</a:t>
+            </a:r>
+          </a:p>
+        </p:txBody>
+      </p:sp>
+    </p:spTree>
+  </p:cSld>
+  <p:clrMapOvr>
+    <a:masterClrMapping/>
+  </p:clrMapOvr>
+</p:sld>
+</file>
+
+<file path=ppt/slides/slide18.xml><?xml version="1.0" encoding="utf-8"?>
+<p:sld xmlns:a="http://schemas.openxmlformats.org/drawingml/2006/main" xmlns:p="http://schemas.openxmlformats.org/presentationml/2006/main" xmlns:r="http://schemas.openxmlformats.org/officeDocument/2006/relationships">
+  <p:cSld>
+    <p:spTree>
+      <p:nvGrpSpPr>
+        <p:cNvPr id="1" name=""/>
+        <p:cNvGrpSpPr/>
+        <p:nvPr/>
+      </p:nvGrpSpPr>
+      <p:grpSpPr/>
+      <p:sp>
+        <p:nvSpPr>
+          <p:cNvPr id="2" name="Title 1"/>
+          <p:cNvSpPr>
+            <a:spLocks noGrp="1"/>
+          </p:cNvSpPr>
+          <p:nvPr>
+            <p:ph type="title"/>
+          </p:nvPr>
+        </p:nvSpPr>
+        <p:spPr/>
+        <p:txBody>
+          <a:bodyPr wrap="square"/>
+          <a:lstStyle/>
+          <a:p>
+            <a:pPr/>
+            <a:r>
+              <a:rPr sz="2000">
+                <a:solidFill>
+                  <a:srgbClr val="1A1A1A"/>
+                </a:solidFill>
+              </a:rPr>
+              <a:t>Choosing the sites</a:t>
+            </a:r>
+          </a:p>
+        </p:txBody>
+      </p:sp>
+      <p:sp>
+        <p:nvSpPr>
+          <p:cNvPr id="3" name="Text Placeholder 2"/>
+          <p:cNvSpPr>
+            <a:spLocks noGrp="1"/>
+          </p:cNvSpPr>
+          <p:nvPr>
+            <p:ph type="body" idx="12" sz="quarter"/>
+          </p:nvPr>
+        </p:nvSpPr>
+        <p:spPr/>
+        <p:txBody>
+          <a:bodyPr wrap="square"/>
+          <a:lstStyle/>
+          <a:p>
+            <a:pPr/>
+            <a:r>
+              <a:rPr sz="1250">
+                <a:solidFill>
+                  <a:srgbClr val="1A1A1A"/>
+                </a:solidFill>
+              </a:rPr>
+              <a:t>An open site helps with three problems at once: satellite positioning, the sun-water-camera angle, and the view across the section.</a:t>
+            </a:r>
+          </a:p>
+          <a:p>
+            <a:pPr/>
+            <a:r>
+              <a:rPr sz="1250">
+                <a:solidFill>
+                  <a:srgbClr val="1A1A1A"/>
+                </a:solidFill>
+              </a:rPr>
+              <a:t>A move costs a fresh survey and a fresh calibration, not only a relocation. The survey is the expensive part.</a:t>
+            </a:r>
+          </a:p>
+          <a:p>
+            <a:pPr/>
+            <a:r>
+              <a:rPr sz="1250">
+                <a:solidFill>
+                  <a:srgbClr val="1A1A1A"/>
+                </a:solidFill>
+              </a:rPr>
+              <a:t>Site permission should be settled before a unit is built for a particular site.</a:t>
+            </a:r>
+          </a:p>
+          <a:p>
+            <a:pPr lvl="1"/>
+            <a:r>
+              <a:rPr sz="1100">
+                <a:solidFill>
+                  <a:srgbClr val="6B6A66"/>
+                </a:solidFill>
+              </a:rPr>
+              <a:t>A complete station was built and tested for an intended Jakarta site. Permission fell through during the April visit.</a:t>
+            </a:r>
+          </a:p>
+          <a:p>
+            <a:pPr/>
+            <a:r>
+              <a:rPr sz="1250">
+                <a:solidFill>
+                  <a:srgbClr val="1A1A1A"/>
+                </a:solidFill>
+              </a:rPr>
+              <a:t>That station is still available. We suggest it serves best as a study and test unit.</a:t>
+            </a:r>
+          </a:p>
+          <a:p>
+            <a:pPr lvl="1"/>
+            <a:r>
+              <a:rPr sz="1100">
+                <a:solidFill>
+                  <a:srgbClr val="6B6A66"/>
+                </a:solidFill>
+              </a:rPr>
+              <a:t>Open it, trace it, power it up, take it apart — and install it somewhere convenient and local if that is useful, so it can be exercised against real water.</a:t>
+            </a:r>
+          </a:p>
+          <a:p>
+            <a:pPr lvl="1"/>
+            <a:r>
+              <a:rPr sz="1100">
+                <a:solidFill>
+                  <a:srgbClr val="6B6A66"/>
+                </a:solidFill>
+              </a:rPr>
+              <a:t>Not as an operational station with expectations of availability and consistent data. It carries the design this briefing recommends changing.</a:t>
+            </a:r>
+          </a:p>
+          <a:p>
+            <a:pPr/>
+            <a:r>
+              <a:rPr sz="1250">
+                <a:solidFill>
+                  <a:srgbClr val="1A1A1A"/>
+                </a:solidFill>
+              </a:rPr>
+              <a:t>We would not build to a site again before you tell us the permission is in place.</a:t>
+            </a:r>
+          </a:p>
+        </p:txBody>
+      </p:sp>
+      <p:sp>
+        <p:nvSpPr>
+          <p:cNvPr id="4" name="TextBox 3"/>
+          <p:cNvSpPr txBox="1"/>
+          <p:nvPr/>
+        </p:nvSpPr>
+        <p:spPr>
+          <a:xfrm>
+            <a:off x="3124200" y="4667250"/>
+            <a:ext cx="2895600" cy="274638"/>
+          </a:xfrm>
+          <a:prstGeom prst="rect">
+            <a:avLst/>
+          </a:prstGeom>
+          <a:noFill/>
+        </p:spPr>
+        <p:txBody>
+          <a:bodyPr wrap="square">
+            <a:spAutoFit/>
+          </a:bodyPr>
+          <a:lstStyle/>
+          <a:p>
+            <a:pPr algn="ctr"/>
+            <a:r>
+              <a:rPr sz="800">
+                <a:solidFill>
+                  <a:srgbClr val="6B6A66"/>
+                </a:solidFill>
+              </a:rPr>
+              <a:t>ORC Indonesia Deployment — PMI / IPB / BHLK</a:t>
+            </a:r>
+          </a:p>
+        </p:txBody>
+      </p:sp>
+      <p:sp>
+        <p:nvSpPr>
+          <p:cNvPr id="5" name="TextBox 4"/>
+          <p:cNvSpPr txBox="1"/>
+          <p:nvPr/>
+        </p:nvSpPr>
+        <p:spPr>
+          <a:xfrm>
+            <a:off x="6553200" y="4667250"/>
+            <a:ext cx="2133600" cy="274638"/>
+          </a:xfrm>
+          <a:prstGeom prst="rect">
+            <a:avLst/>
+          </a:prstGeom>
+          <a:noFill/>
+        </p:spPr>
+        <p:txBody>
+          <a:bodyPr wrap="square">
+            <a:spAutoFit/>
+          </a:bodyPr>
+          <a:lstStyle/>
+          <a:p>
+            <a:pPr algn="r"/>
+            <a:r>
+              <a:rPr sz="800">
+                <a:solidFill>
+                  <a:srgbClr val="6B6A66"/>
+                </a:solidFill>
+              </a:rPr>
+              <a:t>18 / 21</a:t>
+            </a:r>
+          </a:p>
+        </p:txBody>
+      </p:sp>
+    </p:spTree>
+  </p:cSld>
+  <p:clrMapOvr>
+    <a:masterClrMapping/>
+  </p:clrMapOvr>
+</p:sld>
+</file>
+
+<file path=ppt/slides/slide19.xml><?xml version="1.0" encoding="utf-8"?>
+<p:sld xmlns:a="http://schemas.openxmlformats.org/drawingml/2006/main" xmlns:p="http://schemas.openxmlformats.org/presentationml/2006/main" xmlns:r="http://schemas.openxmlformats.org/officeDocument/2006/relationships">
+  <p:cSld>
+    <p:spTree>
+      <p:nvGrpSpPr>
+        <p:cNvPr id="1" name=""/>
+        <p:cNvGrpSpPr/>
+        <p:nvPr/>
+      </p:nvGrpSpPr>
+      <p:grpSpPr/>
+      <p:sp>
+        <p:nvSpPr>
+          <p:cNvPr id="2" name="Title 1"/>
+          <p:cNvSpPr>
+            <a:spLocks noGrp="1"/>
+          </p:cNvSpPr>
+          <p:nvPr>
+            <p:ph type="title"/>
+          </p:nvPr>
+        </p:nvSpPr>
+        <p:spPr/>
+        <p:txBody>
+          <a:bodyPr wrap="square"/>
+          <a:lstStyle/>
+          <a:p>
+            <a:pPr/>
+            <a:r>
+              <a:rPr sz="2000">
+                <a:solidFill>
+                  <a:srgbClr val="1A1A1A"/>
+                </a:solidFill>
+              </a:rPr>
+              <a:t>Working together</a:t>
+            </a:r>
+          </a:p>
+        </p:txBody>
+      </p:sp>
+      <p:sp>
+        <p:nvSpPr>
+          <p:cNvPr id="3" name="Text Placeholder 2"/>
+          <p:cNvSpPr>
+            <a:spLocks noGrp="1"/>
+          </p:cNvSpPr>
+          <p:nvPr>
+            <p:ph type="body" idx="12" sz="quarter"/>
+          </p:nvPr>
+        </p:nvSpPr>
+        <p:spPr/>
+        <p:txBody>
+          <a:bodyPr wrap="square"/>
+          <a:lstStyle/>
+          <a:p>
+            <a:pPr/>
+            <a:r>
+              <a:rPr sz="1400">
+                <a:solidFill>
+                  <a:srgbClr val="1A1A1A"/>
+                </a:solidFill>
+              </a:rPr>
+              <a:t>BHLK — data processing, conformance with standards, and the route to acceptance within PUPR data systems. Offers server capacity.</a:t>
+            </a:r>
+          </a:p>
+          <a:p>
+            <a:pPr/>
+            <a:r>
+              <a:rPr sz="1400">
+                <a:solidFill>
+                  <a:srgbClr val="1A1A1A"/>
+                </a:solidFill>
+              </a:rPr>
+              <a:t>IPB — design, calibration methodology, training material, and the development path for future sensor types.</a:t>
+            </a:r>
+          </a:p>
+          <a:p>
+            <a:pPr/>
+            <a:r>
+              <a:rPr sz="1400">
+                <a:solidFill>
+                  <a:srgbClr val="1A1A1A"/>
+                </a:solidFill>
+              </a:rPr>
+              <a:t>PMI — user of the information, and the operational side: installation, maintenance, siting, response, and spares.</a:t>
+            </a:r>
+          </a:p>
+          <a:p>
+            <a:pPr/>
+            <a:r>
+              <a:rPr sz="1400">
+                <a:solidFill>
+                  <a:srgbClr val="1A1A1A"/>
+                </a:solidFill>
+              </a:rPr>
+              <a:t>Offered for your consideration: write the split into the collaboration agreement so it survives staff changes, and keep a light joint forum for what does not sort into one role.</a:t>
+            </a:r>
+          </a:p>
+          <a:p>
+            <a:pPr/>
+            <a:r>
+              <a:rPr sz="1400">
+                <a:solidFill>
+                  <a:srgbClr val="1A1A1A"/>
+                </a:solidFill>
+              </a:rPr>
+              <a:t>The commitments this implies for PMI have not been discussed with PMI National Headquarters.</a:t>
+            </a:r>
+          </a:p>
+        </p:txBody>
+      </p:sp>
+      <p:sp>
+        <p:nvSpPr>
+          <p:cNvPr id="4" name="TextBox 3"/>
+          <p:cNvSpPr txBox="1"/>
+          <p:nvPr/>
+        </p:nvSpPr>
+        <p:spPr>
+          <a:xfrm>
+            <a:off x="3124200" y="4667250"/>
+            <a:ext cx="2895600" cy="274638"/>
+          </a:xfrm>
+          <a:prstGeom prst="rect">
+            <a:avLst/>
+          </a:prstGeom>
+          <a:noFill/>
+        </p:spPr>
+        <p:txBody>
+          <a:bodyPr wrap="square">
+            <a:spAutoFit/>
+          </a:bodyPr>
+          <a:lstStyle/>
+          <a:p>
+            <a:pPr algn="ctr"/>
+            <a:r>
+              <a:rPr sz="800">
+                <a:solidFill>
+                  <a:srgbClr val="6B6A66"/>
+                </a:solidFill>
+              </a:rPr>
+              <a:t>ORC Indonesia Deployment — PMI / IPB / BHLK</a:t>
+            </a:r>
+          </a:p>
+        </p:txBody>
+      </p:sp>
+      <p:sp>
+        <p:nvSpPr>
+          <p:cNvPr id="5" name="TextBox 4"/>
+          <p:cNvSpPr txBox="1"/>
+          <p:nvPr/>
+        </p:nvSpPr>
+        <p:spPr>
+          <a:xfrm>
+            <a:off x="6553200" y="4667250"/>
+            <a:ext cx="2133600" cy="274638"/>
+          </a:xfrm>
+          <a:prstGeom prst="rect">
+            <a:avLst/>
+          </a:prstGeom>
+          <a:noFill/>
+        </p:spPr>
+        <p:txBody>
+          <a:bodyPr wrap="square">
+            <a:spAutoFit/>
+          </a:bodyPr>
+          <a:lstStyle/>
+          <a:p>
+            <a:pPr algn="r"/>
+            <a:r>
+              <a:rPr sz="800">
+                <a:solidFill>
+                  <a:srgbClr val="6B6A66"/>
+                </a:solidFill>
+              </a:rPr>
+              <a:t>19 / 21</a:t>
+            </a:r>
+          </a:p>
+        </p:txBody>
+      </p:sp>
+    </p:spTree>
+  </p:cSld>
+  <p:clrMapOvr>
+    <a:masterClrMapping/>
+  </p:clrMapOvr>
+</p:sld>
+</file>
+
+<file path=ppt/slides/slide2.xml><?xml version="1.0" encoding="utf-8"?>
+<p:sld xmlns:a="http://schemas.openxmlformats.org/drawingml/2006/main" xmlns:p="http://schemas.openxmlformats.org/presentationml/2006/main" xmlns:r="http://schemas.openxmlformats.org/officeDocument/2006/relationships">
+  <p:cSld>
+    <p:spTree>
+      <p:nvGrpSpPr>
+        <p:cNvPr id="1" name=""/>
+        <p:cNvGrpSpPr/>
+        <p:nvPr/>
+      </p:nvGrpSpPr>
+      <p:grpSpPr/>
+      <p:sp>
+        <p:nvSpPr>
+          <p:cNvPr id="2" name="Title 1"/>
+          <p:cNvSpPr>
+            <a:spLocks noGrp="1"/>
+          </p:cNvSpPr>
+          <p:nvPr>
+            <p:ph type="title"/>
+          </p:nvPr>
+        </p:nvSpPr>
+        <p:spPr/>
+        <p:txBody>
+          <a:bodyPr wrap="square"/>
+          <a:lstStyle/>
+          <a:p>
+            <a:pPr/>
+            <a:r>
+              <a:rPr sz="2000">
+                <a:solidFill>
+                  <a:srgbClr val="1A1A1A"/>
+                </a:solidFill>
+              </a:rPr>
+              <a:t>The pilot, and what we think comes next</a:t>
+            </a:r>
+          </a:p>
+        </p:txBody>
+      </p:sp>
+      <p:sp>
+        <p:nvSpPr>
+          <p:cNvPr id="3" name="Text Placeholder 2"/>
+          <p:cNvSpPr>
+            <a:spLocks noGrp="1"/>
+          </p:cNvSpPr>
+          <p:nvPr>
+            <p:ph type="body" idx="12" sz="quarter"/>
+          </p:nvPr>
+        </p:nvSpPr>
+        <p:spPr/>
+        <p:txBody>
+          <a:bodyPr wrap="square"/>
+          <a:lstStyle/>
+          <a:p>
+            <a:pPr/>
+            <a:r>
+              <a:rPr sz="1500">
+                <a:solidFill>
+                  <a:srgbClr val="1A1A1A"/>
+                </a:solidFill>
+              </a:rPr>
+              <a:t>The pilot has been a good experience. A station in the water, four months of behaviour to learn from, and a working relationship between PMI, IPB and BHLK that did not exist before.</a:t>
+            </a:r>
+          </a:p>
+          <a:p>
+            <a:pPr/>
+            <a:r>
+              <a:rPr sz="1500">
+                <a:solidFill>
+                  <a:srgbClr val="1A1A1A"/>
+                </a:solidFill>
+              </a:rPr>
+              <a:t>Our recommendation is that the next step is yours.</a:t>
+            </a:r>
+          </a:p>
+          <a:p>
+            <a:pPr lvl="1"/>
+            <a:r>
+              <a:rPr sz="1350">
+                <a:solidFill>
+                  <a:srgbClr val="6B6A66"/>
+                </a:solidFill>
+              </a:rPr>
+              <a:t>Not because the partnership has run its course, but because of what the pilot produced: knowledge, not a body of measurements.</a:t>
+            </a:r>
+          </a:p>
+          <a:p>
+            <a:pPr lvl="1"/>
+            <a:r>
+              <a:rPr sz="1350">
+                <a:solidFill>
+                  <a:srgbClr val="6B6A66"/>
+                </a:solidFill>
+              </a:rPr>
+              <a:t>Knowledge is worth more to you as an input to your own approach than as a set of parts to copy.</a:t>
+            </a:r>
+          </a:p>
+          <a:p>
+            <a:pPr/>
+            <a:r>
+              <a:rPr sz="1500">
+                <a:solidFill>
+                  <a:srgbClr val="1A1A1A"/>
+                </a:solidFill>
+              </a:rPr>
+              <a:t>We would rather help you start your own design than hand you ours to maintain.</a:t>
+            </a:r>
+          </a:p>
+        </p:txBody>
+      </p:sp>
+      <p:sp>
+        <p:nvSpPr>
+          <p:cNvPr id="4" name="TextBox 3"/>
+          <p:cNvSpPr txBox="1"/>
+          <p:nvPr/>
+        </p:nvSpPr>
+        <p:spPr>
+          <a:xfrm>
+            <a:off x="3124200" y="4667250"/>
+            <a:ext cx="2895600" cy="274638"/>
+          </a:xfrm>
+          <a:prstGeom prst="rect">
+            <a:avLst/>
+          </a:prstGeom>
+          <a:noFill/>
+        </p:spPr>
+        <p:txBody>
+          <a:bodyPr wrap="square">
+            <a:spAutoFit/>
+          </a:bodyPr>
+          <a:lstStyle/>
+          <a:p>
+            <a:pPr algn="ctr"/>
+            <a:r>
+              <a:rPr sz="800">
+                <a:solidFill>
+                  <a:srgbClr val="6B6A66"/>
+                </a:solidFill>
+              </a:rPr>
+              <a:t>ORC Indonesia Deployment — PMI / IPB / BHLK</a:t>
+            </a:r>
+          </a:p>
+        </p:txBody>
+      </p:sp>
+      <p:sp>
+        <p:nvSpPr>
+          <p:cNvPr id="5" name="TextBox 4"/>
+          <p:cNvSpPr txBox="1"/>
+          <p:nvPr/>
+        </p:nvSpPr>
+        <p:spPr>
+          <a:xfrm>
+            <a:off x="6553200" y="4667250"/>
+            <a:ext cx="2133600" cy="274638"/>
+          </a:xfrm>
+          <a:prstGeom prst="rect">
+            <a:avLst/>
+          </a:prstGeom>
+          <a:noFill/>
+        </p:spPr>
+        <p:txBody>
+          <a:bodyPr wrap="square">
+            <a:spAutoFit/>
+          </a:bodyPr>
+          <a:lstStyle/>
+          <a:p>
+            <a:pPr algn="r"/>
+            <a:r>
+              <a:rPr sz="800">
+                <a:solidFill>
+                  <a:srgbClr val="6B6A66"/>
+                </a:solidFill>
+              </a:rPr>
+              <a:t>2 / 21</a:t>
+            </a:r>
+          </a:p>
+        </p:txBody>
+      </p:sp>
+    </p:spTree>
+  </p:cSld>
+  <p:clrMapOvr>
+    <a:masterClrMapping/>
+  </p:clrMapOvr>
+</p:sld>
+</file>
+
+<file path=ppt/slides/slide20.xml><?xml version="1.0" encoding="utf-8"?>
+<p:sld xmlns:a="http://schemas.openxmlformats.org/drawingml/2006/main" xmlns:p="http://schemas.openxmlformats.org/presentationml/2006/main" xmlns:r="http://schemas.openxmlformats.org/officeDocument/2006/relationships">
+  <p:cSld>
+    <p:spTree>
+      <p:nvGrpSpPr>
+        <p:cNvPr id="1" name=""/>
+        <p:cNvGrpSpPr/>
+        <p:nvPr/>
+      </p:nvGrpSpPr>
+      <p:grpSpPr/>
+      <p:sp>
+        <p:nvSpPr>
+          <p:cNvPr id="2" name="Title 1"/>
+          <p:cNvSpPr>
+            <a:spLocks noGrp="1"/>
+          </p:cNvSpPr>
+          <p:nvPr>
+            <p:ph type="title"/>
+          </p:nvPr>
+        </p:nvSpPr>
+        <p:spPr/>
+        <p:txBody>
+          <a:bodyPr wrap="square"/>
+          <a:lstStyle/>
+          <a:p>
+            <a:pPr/>
+            <a:r>
+              <a:rPr sz="2000">
+                <a:solidFill>
+                  <a:srgbClr val="1A1A1A"/>
+                </a:solidFill>
+              </a:rPr>
+              <a:t>Questions for consideration</a:t>
+            </a:r>
+          </a:p>
+        </p:txBody>
+      </p:sp>
+      <p:sp>
+        <p:nvSpPr>
+          <p:cNvPr id="3" name="Text Placeholder 2"/>
+          <p:cNvSpPr>
+            <a:spLocks noGrp="1"/>
+          </p:cNvSpPr>
+          <p:nvPr>
+            <p:ph type="body" idx="12" sz="quarter"/>
+          </p:nvPr>
+        </p:nvSpPr>
+        <p:spPr/>
+        <p:txBody>
+          <a:bodyPr wrap="square"/>
+          <a:lstStyle/>
+          <a:p>
+            <a:pPr/>
+            <a:r>
+              <a:rPr sz="1400">
+                <a:solidFill>
+                  <a:srgbClr val="1A1A1A"/>
+                </a:solidFill>
+              </a:rPr>
+              <a:t>Who should hold the Jakarta station as a study and test unit? It was to transfer to IPB for deployment. Whether IPB or BHLK is better placed to hold it is for the two of you.</a:t>
+            </a:r>
+          </a:p>
+          <a:p>
+            <a:pPr/>
+            <a:r>
+              <a:rPr sz="1400">
+                <a:solidFill>
+                  <a:srgbClr val="1A1A1A"/>
+                </a:solidFill>
+              </a:rPr>
+              <a:t>Can a staff gauge be read from the camera image accurately enough? If it can, R1 needs no separate sensor.</a:t>
+            </a:r>
+          </a:p>
+          <a:p>
+            <a:pPr/>
+            <a:r>
+              <a:rPr sz="1400">
+                <a:solidFill>
+                  <a:srgbClr val="1A1A1A"/>
+                </a:solidFill>
+              </a:rPr>
+              <a:t>Two of the thirteen interruptions remain unexplained.</a:t>
+            </a:r>
+          </a:p>
+          <a:p>
+            <a:pPr/>
+            <a:r>
+              <a:rPr sz="1400">
+                <a:solidFill>
+                  <a:srgbClr val="1A1A1A"/>
+                </a:solidFill>
+              </a:rPr>
+              <a:t>Does the recovery-voltage threshold bound how long an interruption lasts, or hold the station off?</a:t>
+            </a:r>
+          </a:p>
+          <a:p>
+            <a:pPr/>
+            <a:r>
+              <a:rPr sz="1400">
+                <a:solidFill>
+                  <a:srgbClr val="1A1A1A"/>
+                </a:solidFill>
+              </a:rPr>
+              <a:t>How does the velocity measurement perform across the surface conditions the pilot sites present?</a:t>
+            </a:r>
+          </a:p>
+          <a:p>
+            <a:pPr/>
+            <a:r>
+              <a:rPr sz="1400">
+                <a:solidFill>
+                  <a:srgbClr val="1A1A1A"/>
+                </a:solidFill>
+              </a:rPr>
+              <a:t>Absolute discharge accuracy at Sukabumi, unresolved pending the survey.</a:t>
+            </a:r>
+          </a:p>
+          <a:p>
+            <a:pPr/>
+            <a:r>
+              <a:rPr sz="1400">
+                <a:solidFill>
+                  <a:srgbClr val="1A1A1A"/>
+                </a:solidFill>
+              </a:rPr>
+              <a:t>We expect your work to change some of what is written here. That is the point of handing it over rather than handing it down.</a:t>
+            </a:r>
+          </a:p>
+        </p:txBody>
+      </p:sp>
+      <p:sp>
+        <p:nvSpPr>
+          <p:cNvPr id="4" name="TextBox 3"/>
+          <p:cNvSpPr txBox="1"/>
+          <p:nvPr/>
+        </p:nvSpPr>
+        <p:spPr>
+          <a:xfrm>
+            <a:off x="3124200" y="4667250"/>
+            <a:ext cx="2895600" cy="274638"/>
+          </a:xfrm>
+          <a:prstGeom prst="rect">
+            <a:avLst/>
+          </a:prstGeom>
+          <a:noFill/>
+        </p:spPr>
+        <p:txBody>
+          <a:bodyPr wrap="square">
+            <a:spAutoFit/>
+          </a:bodyPr>
+          <a:lstStyle/>
+          <a:p>
+            <a:pPr algn="ctr"/>
+            <a:r>
+              <a:rPr sz="800">
+                <a:solidFill>
+                  <a:srgbClr val="6B6A66"/>
+                </a:solidFill>
+              </a:rPr>
+              <a:t>ORC Indonesia Deployment — PMI / IPB / BHLK</a:t>
+            </a:r>
+          </a:p>
+        </p:txBody>
+      </p:sp>
+      <p:sp>
+        <p:nvSpPr>
+          <p:cNvPr id="5" name="TextBox 4"/>
+          <p:cNvSpPr txBox="1"/>
+          <p:nvPr/>
+        </p:nvSpPr>
+        <p:spPr>
+          <a:xfrm>
+            <a:off x="6553200" y="4667250"/>
+            <a:ext cx="2133600" cy="274638"/>
+          </a:xfrm>
+          <a:prstGeom prst="rect">
+            <a:avLst/>
+          </a:prstGeom>
+          <a:noFill/>
+        </p:spPr>
+        <p:txBody>
+          <a:bodyPr wrap="square">
+            <a:spAutoFit/>
+          </a:bodyPr>
+          <a:lstStyle/>
+          <a:p>
+            <a:pPr algn="r"/>
+            <a:r>
+              <a:rPr sz="800">
+                <a:solidFill>
+                  <a:srgbClr val="6B6A66"/>
+                </a:solidFill>
+              </a:rPr>
+              <a:t>20 / 21</a:t>
+            </a:r>
+          </a:p>
+        </p:txBody>
+      </p:sp>
+    </p:spTree>
+  </p:cSld>
+  <p:clrMapOvr>
+    <a:masterClrMapping/>
+  </p:clrMapOvr>
+</p:sld>
+</file>
+
+<file path=ppt/slides/slide21.xml><?xml version="1.0" encoding="utf-8"?>
+<p:sld xmlns:a="http://schemas.openxmlformats.org/drawingml/2006/main" xmlns:p="http://schemas.openxmlformats.org/presentationml/2006/main" xmlns:r="http://schemas.openxmlformats.org/officeDocument/2006/relationships">
+  <p:cSld>
+    <p:spTree>
+      <p:nvGrpSpPr>
+        <p:cNvPr id="1" name=""/>
+        <p:cNvGrpSpPr/>
+        <p:nvPr/>
+      </p:nvGrpSpPr>
+      <p:grpSpPr/>
+      <p:sp>
+        <p:nvSpPr>
+          <p:cNvPr id="2" name="Title 1"/>
+          <p:cNvSpPr>
+            <a:spLocks noGrp="1"/>
+          </p:cNvSpPr>
+          <p:nvPr>
+            <p:ph type="title"/>
+          </p:nvPr>
+        </p:nvSpPr>
+        <p:spPr/>
+        <p:txBody>
+          <a:bodyPr wrap="square"/>
+          <a:lstStyle/>
+          <a:p>
+            <a:pPr/>
+            <a:r>
+              <a:rPr sz="2000">
+                <a:solidFill>
+                  <a:srgbClr val="1A1A1A"/>
+                </a:solidFill>
+              </a:rPr>
+              <a:t>What we can offer from here</a:t>
+            </a:r>
+          </a:p>
+        </p:txBody>
+      </p:sp>
+      <p:sp>
+        <p:nvSpPr>
+          <p:cNvPr id="3" name="Text Placeholder 2"/>
+          <p:cNvSpPr>
+            <a:spLocks noGrp="1"/>
+          </p:cNvSpPr>
+          <p:nvPr>
+            <p:ph type="body" idx="12" sz="quarter"/>
+          </p:nvPr>
+        </p:nvSpPr>
+        <p:spPr/>
+        <p:txBody>
+          <a:bodyPr wrap="square"/>
+          <a:lstStyle/>
+          <a:p>
+            <a:pPr/>
+            <a:r>
+              <a:rPr sz="1400">
+                <a:solidFill>
+                  <a:srgbClr val="1A1A1A"/>
+                </a:solidFill>
+              </a:rPr>
+              <a:t>We are not proposing to build your stations.</a:t>
+            </a:r>
+          </a:p>
+          <a:p>
+            <a:pPr/>
+            <a:r>
+              <a:rPr sz="1400">
+                <a:solidFill>
+                  <a:srgbClr val="1A1A1A"/>
+                </a:solidFill>
+              </a:rPr>
+              <a:t>What we can offer is the record: this briefing and its report, the appendix, the operator and assembly documentation in English and Bahasa Indonesia, the software, and the built station at Wisma PMI to take apart.</a:t>
+            </a:r>
+          </a:p>
+          <a:p>
+            <a:pPr/>
+            <a:r>
+              <a:rPr sz="1400">
+                <a:solidFill>
+                  <a:srgbClr val="1A1A1A"/>
+                </a:solidFill>
+              </a:rPr>
+              <a:t>Beyond that, whatever is useful — reviewing a design, answering a question about something that surprised us, looking at data that does not behave.</a:t>
+            </a:r>
+          </a:p>
+          <a:p>
+            <a:pPr/>
+            <a:r>
+              <a:rPr sz="1400">
+                <a:solidFill>
+                  <a:srgbClr val="1A1A1A"/>
+                </a:solidFill>
+              </a:rPr>
+              <a:t>Sukabumi will keep running, and we will keep reporting what it does, including the parts that go wrong.</a:t>
+            </a:r>
+          </a:p>
+          <a:p>
+            <a:pPr/>
+            <a:r>
+              <a:rPr sz="1400">
+                <a:solidFill>
+                  <a:srgbClr val="1A1A1A"/>
+                </a:solidFill>
+              </a:rPr>
+              <a:t>The pilot found the problems while they were still cheap, and it introduced three organisations to one another. The next station in this story should be one you designed.</a:t>
+            </a:r>
+          </a:p>
+        </p:txBody>
+      </p:sp>
+      <p:sp>
+        <p:nvSpPr>
+          <p:cNvPr id="4" name="TextBox 3"/>
+          <p:cNvSpPr txBox="1"/>
+          <p:nvPr/>
+        </p:nvSpPr>
+        <p:spPr>
+          <a:xfrm>
+            <a:off x="3124200" y="4667250"/>
+            <a:ext cx="2895600" cy="274638"/>
+          </a:xfrm>
+          <a:prstGeom prst="rect">
+            <a:avLst/>
+          </a:prstGeom>
+          <a:noFill/>
+        </p:spPr>
+        <p:txBody>
+          <a:bodyPr wrap="square">
+            <a:spAutoFit/>
+          </a:bodyPr>
+          <a:lstStyle/>
+          <a:p>
+            <a:pPr algn="ctr"/>
+            <a:r>
+              <a:rPr sz="800">
+                <a:solidFill>
+                  <a:srgbClr val="6B6A66"/>
+                </a:solidFill>
+              </a:rPr>
+              <a:t>ORC Indonesia Deployment — PMI / IPB / BHLK</a:t>
+            </a:r>
+          </a:p>
+        </p:txBody>
+      </p:sp>
+      <p:sp>
+        <p:nvSpPr>
+          <p:cNvPr id="5" name="TextBox 4"/>
+          <p:cNvSpPr txBox="1"/>
+          <p:nvPr/>
+        </p:nvSpPr>
+        <p:spPr>
+          <a:xfrm>
+            <a:off x="6553200" y="4667250"/>
+            <a:ext cx="2133600" cy="274638"/>
+          </a:xfrm>
+          <a:prstGeom prst="rect">
+            <a:avLst/>
+          </a:prstGeom>
+          <a:noFill/>
+        </p:spPr>
+        <p:txBody>
+          <a:bodyPr wrap="square">
+            <a:spAutoFit/>
+          </a:bodyPr>
+          <a:lstStyle/>
+          <a:p>
+            <a:pPr algn="r"/>
+            <a:r>
+              <a:rPr sz="800">
+                <a:solidFill>
+                  <a:srgbClr val="6B6A66"/>
+                </a:solidFill>
+              </a:rPr>
+              <a:t>21 / 21</a:t>
             </a:r>
           </a:p>
         </p:txBody>
@@ -8853,12 +7973,12 @@
           <a:p>
             <a:pPr/>
             <a:r>
-              <a:rPr sz="1800">
+              <a:rPr sz="2000">
                 <a:solidFill>
                   <a:srgbClr val="1A1A1A"/>
                 </a:solidFill>
               </a:rPr>
-              <a:t>Three offers were made on 21 August. All three are welcomed.</a:t>
+              <a:t>What this briefing covers, and what it leaves to you</a:t>
             </a:r>
           </a:p>
         </p:txBody>
@@ -8885,7 +8005,18 @@
                   <a:srgbClr val="1A1A1A"/>
                 </a:solidFill>
               </a:rPr>
-              <a:t>Duplicate one to three ORC devices as a pilot.</a:t>
+              <a:t>The technology only: the station as built, what four months in the field revealed, and what we would change before more units are constructed.</a:t>
+            </a:r>
+          </a:p>
+          <a:p>
+            <a:pPr/>
+            <a:r>
+              <a:rPr sz="1500">
+                <a:solidFill>
+                  <a:srgbClr val="1A1A1A"/>
+                </a:solidFill>
+              </a:rPr>
+              <a:t>Not in scope: what the data is fit to support, or what accuracy any application requires.</a:t>
             </a:r>
           </a:p>
           <a:p>
@@ -8896,7 +8027,18 @@
                   <a:srgbClr val="6B6A66"/>
                 </a:solidFill>
               </a:rPr>
-              <a:t>Supported. This deck is what we would change first.</a:t>
+              <a:t>Those judgements belong with IPB, BHLK and their federal partners.</a:t>
+            </a:r>
+          </a:p>
+          <a:p>
+            <a:pPr lvl="1"/>
+            <a:r>
+              <a:rPr sz="1350">
+                <a:solidFill>
+                  <a:srgbClr val="6B6A66"/>
+                </a:solidFill>
+              </a:rPr>
+              <a:t>Measurement requirements shown here are recorded from you, not proposed by us.</a:t>
             </a:r>
           </a:p>
           <a:p>
@@ -8907,40 +8049,7 @@
                   <a:srgbClr val="1A1A1A"/>
                 </a:solidFill>
               </a:rPr>
-              <a:t>Provide server capacity for ORC data.</a:t>
-            </a:r>
-          </a:p>
-          <a:p>
-            <a:pPr lvl="1"/>
-            <a:r>
-              <a:rPr sz="1350">
-                <a:solidFill>
-                  <a:srgbClr val="6B6A66"/>
-                </a:solidFill>
-              </a:rPr>
-              <a:t>Well matched to the pilot, with a clear data-sovereignty benefit. Two operational constraints to plan for.</a:t>
-            </a:r>
-          </a:p>
-          <a:p>
-            <a:pPr/>
-            <a:r>
-              <a:rPr sz="1500">
-                <a:solidFill>
-                  <a:srgbClr val="1A1A1A"/>
-                </a:solidFill>
-              </a:rPr>
-              <a:t>Relocate the present site to an open area free of obstruction.</a:t>
-            </a:r>
-          </a:p>
-          <a:p>
-            <a:pPr lvl="1"/>
-            <a:r>
-              <a:rPr sz="1350">
-                <a:solidFill>
-                  <a:srgbClr val="6B6A66"/>
-                </a:solidFill>
-              </a:rPr>
-              <a:t>Supported. The field record adds independent evidence for it.</a:t>
+              <a:t>Written to give an accurate basis for your decision rather than an encouraging one.</a:t>
             </a:r>
           </a:p>
         </p:txBody>
@@ -9008,375 +8117,7 @@
                   <a:srgbClr val="6B6A66"/>
                 </a:solidFill>
               </a:rPr>
-              <a:t>3 / 31</a:t>
-            </a:r>
-          </a:p>
-        </p:txBody>
-      </p:sp>
-    </p:spTree>
-  </p:cSld>
-  <p:clrMapOvr>
-    <a:masterClrMapping/>
-  </p:clrMapOvr>
-</p:sld>
-</file>
-
-<file path=ppt/slides/slide30.xml><?xml version="1.0" encoding="utf-8"?>
-<p:sld xmlns:a="http://schemas.openxmlformats.org/drawingml/2006/main" xmlns:p="http://schemas.openxmlformats.org/presentationml/2006/main" xmlns:r="http://schemas.openxmlformats.org/officeDocument/2006/relationships">
-  <p:cSld>
-    <p:spTree>
-      <p:nvGrpSpPr>
-        <p:cNvPr id="1" name=""/>
-        <p:cNvGrpSpPr/>
-        <p:nvPr/>
-      </p:nvGrpSpPr>
-      <p:grpSpPr/>
-      <p:sp>
-        <p:nvSpPr>
-          <p:cNvPr id="2" name="Title 1"/>
-          <p:cNvSpPr>
-            <a:spLocks noGrp="1"/>
-          </p:cNvSpPr>
-          <p:nvPr>
-            <p:ph type="title"/>
-          </p:nvPr>
-        </p:nvSpPr>
-        <p:spPr/>
-        <p:txBody>
-          <a:bodyPr wrap="square"/>
-          <a:lstStyle/>
-          <a:p>
-            <a:pPr/>
-            <a:r>
-              <a:rPr sz="2000">
-                <a:solidFill>
-                  <a:srgbClr val="1A1A1A"/>
-                </a:solidFill>
-              </a:rPr>
-              <a:t>Division of responsibility</a:t>
-            </a:r>
-          </a:p>
-        </p:txBody>
-      </p:sp>
-      <p:sp>
-        <p:nvSpPr>
-          <p:cNvPr id="3" name="Text Placeholder 2"/>
-          <p:cNvSpPr>
-            <a:spLocks noGrp="1"/>
-          </p:cNvSpPr>
-          <p:nvPr>
-            <p:ph type="body" idx="12" sz="quarter"/>
-          </p:nvPr>
-        </p:nvSpPr>
-        <p:spPr/>
-        <p:txBody>
-          <a:bodyPr wrap="square"/>
-          <a:lstStyle/>
-          <a:p>
-            <a:pPr/>
-            <a:r>
-              <a:rPr sz="1400">
-                <a:solidFill>
-                  <a:srgbClr val="1A1A1A"/>
-                </a:solidFill>
-              </a:rPr>
-              <a:t>BHLK — data processing, standards conformance, and the route to acceptance within PUPR data systems. Offers server capacity.</a:t>
-            </a:r>
-          </a:p>
-          <a:p>
-            <a:pPr/>
-            <a:r>
-              <a:rPr sz="1400">
-                <a:solidFill>
-                  <a:srgbClr val="1A1A1A"/>
-                </a:solidFill>
-              </a:rPr>
-              <a:t>IPB — design, calibration methodology, training material, and the pipeline for future sensor types.</a:t>
-            </a:r>
-          </a:p>
-          <a:p>
-            <a:pPr/>
-            <a:r>
-              <a:rPr sz="1400">
-                <a:solidFill>
-                  <a:srgbClr val="1A1A1A"/>
-                </a:solidFill>
-              </a:rPr>
-              <a:t>PMI — user of the derived information, and the operational side: installation, maintenance, incident response, spares at the local chapter.</a:t>
-            </a:r>
-          </a:p>
-          <a:p>
-            <a:pPr/>
-            <a:r>
-              <a:rPr sz="1400">
-                <a:solidFill>
-                  <a:srgbClr val="1A1A1A"/>
-                </a:solidFill>
-              </a:rPr>
-              <a:t>Two suggestions: write the split into the collaboration agreement, and keep a lightweight joint forum for cases that do not sort into one role.</a:t>
-            </a:r>
-          </a:p>
-          <a:p>
-            <a:pPr/>
-            <a:r>
-              <a:rPr sz="1400">
-                <a:solidFill>
-                  <a:srgbClr val="1A1A1A"/>
-                </a:solidFill>
-              </a:rPr>
-              <a:t>The commitments this implies for PMI have not been discussed with PMI National Headquarters.</a:t>
-            </a:r>
-          </a:p>
-        </p:txBody>
-      </p:sp>
-      <p:sp>
-        <p:nvSpPr>
-          <p:cNvPr id="4" name="TextBox 3"/>
-          <p:cNvSpPr txBox="1"/>
-          <p:nvPr/>
-        </p:nvSpPr>
-        <p:spPr>
-          <a:xfrm>
-            <a:off x="3124200" y="4667250"/>
-            <a:ext cx="2895600" cy="274638"/>
-          </a:xfrm>
-          <a:prstGeom prst="rect">
-            <a:avLst/>
-          </a:prstGeom>
-          <a:noFill/>
-        </p:spPr>
-        <p:txBody>
-          <a:bodyPr wrap="square">
-            <a:spAutoFit/>
-          </a:bodyPr>
-          <a:lstStyle/>
-          <a:p>
-            <a:pPr algn="ctr"/>
-            <a:r>
-              <a:rPr sz="800">
-                <a:solidFill>
-                  <a:srgbClr val="6B6A66"/>
-                </a:solidFill>
-              </a:rPr>
-              <a:t>ORC Indonesia Deployment — PMI / IPB / BHLK</a:t>
-            </a:r>
-          </a:p>
-        </p:txBody>
-      </p:sp>
-      <p:sp>
-        <p:nvSpPr>
-          <p:cNvPr id="5" name="TextBox 4"/>
-          <p:cNvSpPr txBox="1"/>
-          <p:nvPr/>
-        </p:nvSpPr>
-        <p:spPr>
-          <a:xfrm>
-            <a:off x="6553200" y="4667250"/>
-            <a:ext cx="2133600" cy="274638"/>
-          </a:xfrm>
-          <a:prstGeom prst="rect">
-            <a:avLst/>
-          </a:prstGeom>
-          <a:noFill/>
-        </p:spPr>
-        <p:txBody>
-          <a:bodyPr wrap="square">
-            <a:spAutoFit/>
-          </a:bodyPr>
-          <a:lstStyle/>
-          <a:p>
-            <a:pPr algn="r"/>
-            <a:r>
-              <a:rPr sz="800">
-                <a:solidFill>
-                  <a:srgbClr val="6B6A66"/>
-                </a:solidFill>
-              </a:rPr>
-              <a:t>30 / 31</a:t>
-            </a:r>
-          </a:p>
-        </p:txBody>
-      </p:sp>
-    </p:spTree>
-  </p:cSld>
-  <p:clrMapOvr>
-    <a:masterClrMapping/>
-  </p:clrMapOvr>
-</p:sld>
-</file>
-
-<file path=ppt/slides/slide31.xml><?xml version="1.0" encoding="utf-8"?>
-<p:sld xmlns:a="http://schemas.openxmlformats.org/drawingml/2006/main" xmlns:p="http://schemas.openxmlformats.org/presentationml/2006/main" xmlns:r="http://schemas.openxmlformats.org/officeDocument/2006/relationships">
-  <p:cSld>
-    <p:spTree>
-      <p:nvGrpSpPr>
-        <p:cNvPr id="1" name=""/>
-        <p:cNvGrpSpPr/>
-        <p:nvPr/>
-      </p:nvGrpSpPr>
-      <p:grpSpPr/>
-      <p:sp>
-        <p:nvSpPr>
-          <p:cNvPr id="2" name="Title 1"/>
-          <p:cNvSpPr>
-            <a:spLocks noGrp="1"/>
-          </p:cNvSpPr>
-          <p:nvPr>
-            <p:ph type="title"/>
-          </p:nvPr>
-        </p:nvSpPr>
-        <p:spPr/>
-        <p:txBody>
-          <a:bodyPr wrap="square"/>
-          <a:lstStyle/>
-          <a:p>
-            <a:pPr/>
-            <a:r>
-              <a:rPr sz="2000">
-                <a:solidFill>
-                  <a:srgbClr val="1A1A1A"/>
-                </a:solidFill>
-              </a:rPr>
-              <a:t>Open questions</a:t>
-            </a:r>
-          </a:p>
-        </p:txBody>
-      </p:sp>
-      <p:sp>
-        <p:nvSpPr>
-          <p:cNvPr id="3" name="Text Placeholder 2"/>
-          <p:cNvSpPr>
-            <a:spLocks noGrp="1"/>
-          </p:cNvSpPr>
-          <p:nvPr>
-            <p:ph type="body" idx="12" sz="quarter"/>
-          </p:nvPr>
-        </p:nvSpPr>
-        <p:spPr/>
-        <p:txBody>
-          <a:bodyPr wrap="square"/>
-          <a:lstStyle/>
-          <a:p>
-            <a:pPr/>
-            <a:r>
-              <a:rPr sz="1500">
-                <a:solidFill>
-                  <a:srgbClr val="1A1A1A"/>
-                </a:solidFill>
-              </a:rPr>
-              <a:t>The cause of the two unexplained interruptions.</a:t>
-            </a:r>
-          </a:p>
-          <a:p>
-            <a:pPr/>
-            <a:r>
-              <a:rPr sz="1500">
-                <a:solidFill>
-                  <a:srgbClr val="1A1A1A"/>
-                </a:solidFill>
-              </a:rPr>
-              <a:t>Whether the recovery-voltage setting bounds interruption duration. One observation is not a result.</a:t>
-            </a:r>
-          </a:p>
-          <a:p>
-            <a:pPr/>
-            <a:r>
-              <a:rPr sz="1500">
-                <a:solidFill>
-                  <a:srgbClr val="1A1A1A"/>
-                </a:solidFill>
-              </a:rPr>
-              <a:t>Whether a staff gauge can be read from the camera image to sufficient precision. If it can, R1 needs no separate sensor.</a:t>
-            </a:r>
-          </a:p>
-          <a:p>
-            <a:pPr/>
-            <a:r>
-              <a:rPr sz="1500">
-                <a:solidFill>
-                  <a:srgbClr val="1A1A1A"/>
-                </a:solidFill>
-              </a:rPr>
-              <a:t>Absolute discharge accuracy at Sukabumi, unresolved pending the survey.</a:t>
-            </a:r>
-          </a:p>
-          <a:p>
-            <a:pPr/>
-            <a:r>
-              <a:rPr sz="1500">
-                <a:solidFill>
-                  <a:srgbClr val="1A1A1A"/>
-                </a:solidFill>
-              </a:rPr>
-              <a:t>Velocimetry performance across the surface conditions the pilot sites present.</a:t>
-            </a:r>
-          </a:p>
-        </p:txBody>
-      </p:sp>
-      <p:sp>
-        <p:nvSpPr>
-          <p:cNvPr id="4" name="TextBox 3"/>
-          <p:cNvSpPr txBox="1"/>
-          <p:nvPr/>
-        </p:nvSpPr>
-        <p:spPr>
-          <a:xfrm>
-            <a:off x="3124200" y="4667250"/>
-            <a:ext cx="2895600" cy="274638"/>
-          </a:xfrm>
-          <a:prstGeom prst="rect">
-            <a:avLst/>
-          </a:prstGeom>
-          <a:noFill/>
-        </p:spPr>
-        <p:txBody>
-          <a:bodyPr wrap="square">
-            <a:spAutoFit/>
-          </a:bodyPr>
-          <a:lstStyle/>
-          <a:p>
-            <a:pPr algn="ctr"/>
-            <a:r>
-              <a:rPr sz="800">
-                <a:solidFill>
-                  <a:srgbClr val="6B6A66"/>
-                </a:solidFill>
-              </a:rPr>
-              <a:t>ORC Indonesia Deployment — PMI / IPB / BHLK</a:t>
-            </a:r>
-          </a:p>
-        </p:txBody>
-      </p:sp>
-      <p:sp>
-        <p:nvSpPr>
-          <p:cNvPr id="5" name="TextBox 4"/>
-          <p:cNvSpPr txBox="1"/>
-          <p:nvPr/>
-        </p:nvSpPr>
-        <p:spPr>
-          <a:xfrm>
-            <a:off x="6553200" y="4667250"/>
-            <a:ext cx="2133600" cy="274638"/>
-          </a:xfrm>
-          <a:prstGeom prst="rect">
-            <a:avLst/>
-          </a:prstGeom>
-          <a:noFill/>
-        </p:spPr>
-        <p:txBody>
-          <a:bodyPr wrap="square">
-            <a:spAutoFit/>
-          </a:bodyPr>
-          <a:lstStyle/>
-          <a:p>
-            <a:pPr algn="r"/>
-            <a:r>
-              <a:rPr sz="800">
-                <a:solidFill>
-                  <a:srgbClr val="6B6A66"/>
-                </a:solidFill>
-              </a:rPr>
-              <a:t>31 / 31</a:t>
+              <a:t>3 / 21</a:t>
             </a:r>
           </a:p>
         </p:txBody>
@@ -9416,12 +8157,12 @@
           <a:p>
             <a:pPr/>
             <a:r>
-              <a:rPr sz="2000">
+              <a:rPr sz="1800">
                 <a:solidFill>
                   <a:srgbClr val="1A1A1A"/>
                 </a:solidFill>
               </a:rPr>
-              <a:t>What is being offered for study</a:t>
+              <a:t>Three offers were made on 21 August. We welcome all three.</a:t>
             </a:r>
           </a:p>
         </p:txBody>
@@ -9448,7 +8189,18 @@
                   <a:srgbClr val="1A1A1A"/>
                 </a:solidFill>
               </a:rPr>
-              <a:t>PoE camera on a pole, Raspberry Pi 5 in a weatherproof enclosure, on-station processing, LTE upload. Commodity parts throughout.</a:t>
+              <a:t>Build one to three stations as a pilot.</a:t>
+            </a:r>
+          </a:p>
+          <a:p>
+            <a:pPr lvl="1"/>
+            <a:r>
+              <a:rPr sz="1350">
+                <a:solidFill>
+                  <a:srgbClr val="6B6A66"/>
+                </a:solidFill>
+              </a:rPr>
+              <a:t>Supported. What follows is what we would change first.</a:t>
             </a:r>
           </a:p>
           <a:p>
@@ -9459,7 +8211,7 @@
                   <a:srgbClr val="1A1A1A"/>
                 </a:solidFill>
               </a:rPr>
-              <a:t>USD 1,340 in materials solar; approximately USD 1,030 mains-powered.</a:t>
+              <a:t>Provide server capacity for the data.</a:t>
             </a:r>
           </a:p>
           <a:p>
@@ -9470,7 +8222,7 @@
                   <a:srgbClr val="6B6A66"/>
                 </a:solidFill>
               </a:rPr>
-              <a:t>Materials only — excludes shipping, duty, labour, pole, civil works, survey.</a:t>
+              <a:t>Well matched to the pilot, and holding the data in Indonesia carries a clear benefit.</a:t>
             </a:r>
           </a:p>
           <a:p>
@@ -9481,18 +8233,18 @@
                   <a:srgbClr val="1A1A1A"/>
                 </a:solidFill>
               </a:rPr>
-              <a:t>Lowest-cost automatic water-level station on the INAPROC e-catalogue: approximately USD 3,600 ex-VAT, stage only.</a:t>
-            </a:r>
-          </a:p>
-          <a:p>
-            <a:pPr/>
-            <a:r>
-              <a:rPr sz="1500">
-                <a:solidFill>
-                  <a:srgbClr val="1A1A1A"/>
-                </a:solidFill>
-              </a:rPr>
-              <a:t>Five constraints governed every part: commodity electronics, no soldering, no specialist skills, common tools, five-minute replacement.</a:t>
+              <a:t>Move the present site to open ground.</a:t>
+            </a:r>
+          </a:p>
+          <a:p>
+            <a:pPr lvl="1"/>
+            <a:r>
+              <a:rPr sz="1350">
+                <a:solidFill>
+                  <a:srgbClr val="6B6A66"/>
+                </a:solidFill>
+              </a:rPr>
+              <a:t>Supported, and the field record adds independent evidence for it.</a:t>
             </a:r>
           </a:p>
         </p:txBody>
@@ -9560,7 +8312,7 @@
                   <a:srgbClr val="6B6A66"/>
                 </a:solidFill>
               </a:rPr>
-              <a:t>4 / 31</a:t>
+              <a:t>4 / 21</a:t>
             </a:r>
           </a:p>
         </p:txBody>
@@ -9600,169 +8352,90 @@
           <a:p>
             <a:pPr/>
             <a:r>
-              <a:rPr sz="1800">
+              <a:rPr sz="2000">
                 <a:solidFill>
                   <a:srgbClr val="1A1A1A"/>
                 </a:solidFill>
               </a:rPr>
-              <a:t>Commodity parts, and no fabrication anywhere in the build</a:t>
-            </a:r>
-          </a:p>
-        </p:txBody>
-      </p:sp>
-      <p:pic>
-        <p:nvPicPr>
-          <p:cNvPr id="3" name="Picture 2" descr="Components laid out on a workbench: enclosure mounting plate, two lengths of DIN rail, three fuse holders, the PoE camera, the rain gauge dome, a Raspberry Pi 5 with its GPIO terminal riser, a DC-DC converter, terminal blocks, a relay board, the LTE modem and its antenna."/>
-          <p:cNvPicPr>
-            <a:picLocks noChangeAspect="1"/>
-          </p:cNvPicPr>
-          <p:nvPr/>
-        </p:nvPicPr>
-        <p:blipFill>
-          <a:blip r:embed="rId2"/>
-          <a:stretch>
-            <a:fillRect/>
-          </a:stretch>
-        </p:blipFill>
-        <p:spPr>
-          <a:xfrm>
-            <a:off x="1498997" y="1155065"/>
-            <a:ext cx="1894046" cy="2525395"/>
-          </a:xfrm>
-          <a:prstGeom prst="rect">
-            <a:avLst/>
-          </a:prstGeom>
-        </p:spPr>
-      </p:pic>
+              <a:t>Why a low-cost station is worth studying</a:t>
+            </a:r>
+          </a:p>
+        </p:txBody>
+      </p:sp>
+      <p:sp>
+        <p:nvSpPr>
+          <p:cNvPr id="3" name="Text Placeholder 2"/>
+          <p:cNvSpPr>
+            <a:spLocks noGrp="1"/>
+          </p:cNvSpPr>
+          <p:nvPr>
+            <p:ph type="body" idx="12" sz="quarter"/>
+          </p:nvPr>
+        </p:nvSpPr>
+        <p:spPr/>
+        <p:txBody>
+          <a:bodyPr wrap="square"/>
+          <a:lstStyle/>
+          <a:p>
+            <a:pPr/>
+            <a:r>
+              <a:rPr sz="1400">
+                <a:solidFill>
+                  <a:srgbClr val="1A1A1A"/>
+                </a:solidFill>
+              </a:rPr>
+              <a:t>A river gauge is only useful if there are enough of them. How many an agency can afford decides how much of a catchment it can observe.</a:t>
+            </a:r>
+          </a:p>
+          <a:p>
+            <a:pPr/>
+            <a:r>
+              <a:rPr sz="1400">
+                <a:solidFill>
+                  <a:srgbClr val="1A1A1A"/>
+                </a:solidFill>
+              </a:rPr>
+              <a:t>This station: USD 1,340 in materials — electronics and enclosure only. Sukabumi already had its panel and battery, so a new solar site would add an array. A mains site would not.</a:t>
+            </a:r>
+          </a:p>
+          <a:p>
+            <a:pPr/>
+            <a:r>
+              <a:rPr sz="1400">
+                <a:solidFill>
+                  <a:srgbClr val="1A1A1A"/>
+                </a:solidFill>
+              </a:rPr>
+              <a:t>Lowest-cost automatic water-level station on the government e-catalogue: about USD 3,600 before VAT, measuring stage only.</a:t>
+            </a:r>
+          </a:p>
+          <a:p>
+            <a:pPr lvl="1"/>
+            <a:r>
+              <a:rPr sz="1250">
+                <a:solidFill>
+                  <a:srgbClr val="6B6A66"/>
+                </a:solidFill>
+              </a:rPr>
+              <a:t>Not like for like — that is a supported commercial instrument, this is a pilot-stage assembly.</a:t>
+            </a:r>
+          </a:p>
+          <a:p>
+            <a:pPr/>
+            <a:r>
+              <a:rPr sz="1400">
+                <a:solidFill>
+                  <a:srgbClr val="1A1A1A"/>
+                </a:solidFill>
+              </a:rPr>
+              <a:t>At this price a basin authority can consider a network where it might otherwise consider a single gauge. That possibility is the whole of the argument.</a:t>
+            </a:r>
+          </a:p>
+        </p:txBody>
+      </p:sp>
       <p:sp>
         <p:nvSpPr>
           <p:cNvPr id="4" name="TextBox 3"/>
-          <p:cNvSpPr txBox="1"/>
-          <p:nvPr/>
-        </p:nvSpPr>
-        <p:spPr>
-          <a:xfrm>
-            <a:off x="457200" y="3717036"/>
-            <a:ext cx="3977640" cy="457200"/>
-          </a:xfrm>
-          <a:prstGeom prst="rect">
-            <a:avLst/>
-          </a:prstGeom>
-          <a:noFill/>
-        </p:spPr>
-        <p:txBody>
-          <a:bodyPr wrap="square">
-            <a:spAutoFit/>
-          </a:bodyPr>
-          <a:lstStyle/>
-          <a:p>
-            <a:pPr/>
-            <a:r>
-              <a:rPr sz="1000">
-                <a:solidFill>
-                  <a:srgbClr val="42413E"/>
-                </a:solidFill>
-              </a:rPr>
-              <a:t>The parts for one station, before assembly.</a:t>
-            </a:r>
-          </a:p>
-        </p:txBody>
-      </p:sp>
-      <p:pic>
-        <p:nvPicPr>
-          <p:cNvPr id="5" name="Picture 4" descr="The same components assembled onto the mounting plate and wired: Pi 5 and PoE switch on the upper DIN rail, relays, terminal blocks and DC-DC converter on the lower rail, with a bench power supply alongside reading 12.08 volts."/>
-          <p:cNvPicPr>
-            <a:picLocks noChangeAspect="1"/>
-          </p:cNvPicPr>
-          <p:nvPr/>
-        </p:nvPicPr>
-        <p:blipFill>
-          <a:blip r:embed="rId3"/>
-          <a:stretch>
-            <a:fillRect/>
-          </a:stretch>
-        </p:blipFill>
-        <p:spPr>
-          <a:xfrm>
-            <a:off x="5750957" y="1155065"/>
-            <a:ext cx="1894046" cy="2525395"/>
-          </a:xfrm>
-          <a:prstGeom prst="rect">
-            <a:avLst/>
-          </a:prstGeom>
-        </p:spPr>
-      </p:pic>
-      <p:sp>
-        <p:nvSpPr>
-          <p:cNvPr id="6" name="TextBox 5"/>
-          <p:cNvSpPr txBox="1"/>
-          <p:nvPr/>
-        </p:nvSpPr>
-        <p:spPr>
-          <a:xfrm>
-            <a:off x="4709160" y="3717036"/>
-            <a:ext cx="3977640" cy="457200"/>
-          </a:xfrm>
-          <a:prstGeom prst="rect">
-            <a:avLst/>
-          </a:prstGeom>
-          <a:noFill/>
-        </p:spPr>
-        <p:txBody>
-          <a:bodyPr wrap="square">
-            <a:spAutoFit/>
-          </a:bodyPr>
-          <a:lstStyle/>
-          <a:p>
-            <a:pPr/>
-            <a:r>
-              <a:rPr sz="1000">
-                <a:solidFill>
-                  <a:srgbClr val="42413E"/>
-                </a:solidFill>
-              </a:rPr>
-              <a:t>The same parts wired onto the plate, under bench power at 12.08 V.</a:t>
-            </a:r>
-          </a:p>
-        </p:txBody>
-      </p:sp>
-      <p:sp>
-        <p:nvSpPr>
-          <p:cNvPr id="7" name="TextBox 6"/>
-          <p:cNvSpPr txBox="1"/>
-          <p:nvPr/>
-        </p:nvSpPr>
-        <p:spPr>
-          <a:xfrm>
-            <a:off x="457200" y="4137660"/>
-            <a:ext cx="8229600" cy="274320"/>
-          </a:xfrm>
-          <a:prstGeom prst="rect">
-            <a:avLst/>
-          </a:prstGeom>
-          <a:noFill/>
-        </p:spPr>
-        <p:txBody>
-          <a:bodyPr wrap="square">
-            <a:spAutoFit/>
-          </a:bodyPr>
-          <a:lstStyle/>
-          <a:p>
-            <a:pPr/>
-            <a:r>
-              <a:rPr sz="1000">
-                <a:solidFill>
-                  <a:srgbClr val="6B6A66"/>
-                </a:solidFill>
-              </a:rPr>
-              <a:t>Every connection is a screw terminal, a plug or a header. That is what makes the design duplicable.</a:t>
-            </a:r>
-          </a:p>
-        </p:txBody>
-      </p:sp>
-      <p:sp>
-        <p:nvSpPr>
-          <p:cNvPr id="8" name="TextBox 7"/>
           <p:cNvSpPr txBox="1"/>
           <p:nvPr/>
         </p:nvSpPr>
@@ -9796,7 +8469,7 @@
       </p:sp>
       <p:sp>
         <p:nvSpPr>
-          <p:cNvPr id="9" name="TextBox 8"/>
+          <p:cNvPr id="5" name="TextBox 4"/>
           <p:cNvSpPr txBox="1"/>
           <p:nvPr/>
         </p:nvSpPr>
@@ -9823,7 +8496,7 @@
                   <a:srgbClr val="6B6A66"/>
                 </a:solidFill>
               </a:rPr>
-              <a:t>5 / 31</a:t>
+              <a:t>5 / 21</a:t>
             </a:r>
           </a:p>
         </p:txBody>
@@ -9868,14 +8541,14 @@
                   <a:srgbClr val="1A1A1A"/>
                 </a:solidFill>
               </a:rPr>
-              <a:t>How a measurement is made</a:t>
+              <a:t>What is being offered for study</a:t>
             </a:r>
           </a:p>
         </p:txBody>
       </p:sp>
       <p:pic>
         <p:nvPicPr>
-          <p:cNvPr id="3" name="Picture 2" descr="Flow diagram. A camera on a pole at the river sends video to a station computer, which works out a water level and a discharge figure; both travel over LTE to a central server that keeps the record. Beneath the computer are the three things it depends on: a solar panel and battery, a scheduler that wakes it every 30 minutes, and a rain gauge that keeps recording while the station sleeps. A note records that 30 to 60 seconds of every wake is spent booting the camera before any video exists."/>
+          <p:cNvPr id="3" name="Picture 2" descr="Flow diagram. A camera on a pole at the river sends video to a station computer, which works out a water level and a discharge figure; both travel over the mobile network to a server that keeps the record. Beneath the computer are the three things it depends on: a solar panel and battery, a scheduler that wakes it every 30 minutes, and a rain gauge that keeps recording while the station sleeps."/>
           <p:cNvPicPr>
             <a:picLocks noChangeAspect="1"/>
           </p:cNvPicPr>
@@ -9960,7 +8633,7 @@
                   <a:srgbClr val="6B6A66"/>
                 </a:solidFill>
               </a:rPr>
-              <a:t>6 / 31</a:t>
+              <a:t>6 / 21</a:t>
             </a:r>
           </a:p>
         </p:txBody>
@@ -10005,85 +8678,164 @@
                   <a:srgbClr val="1A1A1A"/>
                 </a:solidFill>
               </a:rPr>
-              <a:t>The evidence base is narrow, and should be treated as such</a:t>
-            </a:r>
-          </a:p>
-        </p:txBody>
-      </p:sp>
-      <p:sp>
-        <p:nvSpPr>
-          <p:cNvPr id="3" name="Text Placeholder 2"/>
-          <p:cNvSpPr>
-            <a:spLocks noGrp="1"/>
-          </p:cNvSpPr>
-          <p:nvPr>
-            <p:ph type="body" idx="12" sz="quarter"/>
-          </p:nvPr>
-        </p:nvSpPr>
-        <p:spPr/>
-        <p:txBody>
-          <a:bodyPr wrap="square"/>
+              <a:t>Built from commodity parts, so it can be repaired locally</a:t>
+            </a:r>
+          </a:p>
+        </p:txBody>
+      </p:sp>
+      <p:pic>
+        <p:nvPicPr>
+          <p:cNvPr id="3" name="Picture 2" descr="Components laid out on a workbench: enclosure mounting plate, two lengths of DIN rail, three fuse holders, the camera, the rain gauge dome, a small computer with its screw-terminal riser, a power converter, terminal blocks, a relay board, the mobile data modem and its antenna."/>
+          <p:cNvPicPr>
+            <a:picLocks noChangeAspect="1"/>
+          </p:cNvPicPr>
+          <p:nvPr/>
+        </p:nvPicPr>
+        <p:blipFill>
+          <a:blip r:embed="rId2"/>
+          <a:stretch>
+            <a:fillRect/>
+          </a:stretch>
+        </p:blipFill>
+        <p:spPr>
+          <a:xfrm>
+            <a:off x="1547003" y="1155065"/>
+            <a:ext cx="1798034" cy="2397379"/>
+          </a:xfrm>
+          <a:prstGeom prst="rect">
+            <a:avLst/>
+          </a:prstGeom>
+        </p:spPr>
+      </p:pic>
+      <p:sp>
+        <p:nvSpPr>
+          <p:cNvPr id="4" name="TextBox 3"/>
+          <p:cNvSpPr txBox="1"/>
+          <p:nvPr/>
+        </p:nvSpPr>
+        <p:spPr>
+          <a:xfrm>
+            <a:off x="457200" y="3589020"/>
+            <a:ext cx="3977640" cy="457200"/>
+          </a:xfrm>
+          <a:prstGeom prst="rect">
+            <a:avLst/>
+          </a:prstGeom>
+          <a:noFill/>
+        </p:spPr>
+        <p:txBody>
+          <a:bodyPr wrap="square">
+            <a:spAutoFit/>
+          </a:bodyPr>
           <a:lstStyle/>
           <a:p>
             <a:pPr/>
             <a:r>
-              <a:rPr sz="1500">
-                <a:solidFill>
-                  <a:srgbClr val="1A1A1A"/>
-                </a:solidFill>
-              </a:rPr>
-              <a:t>One deployed station, at Sukabumi, on one river.</a:t>
-            </a:r>
-          </a:p>
+              <a:rPr sz="1000">
+                <a:solidFill>
+                  <a:srgbClr val="42413E"/>
+                </a:solidFill>
+              </a:rPr>
+              <a:t>The parts for one station, before assembly.</a:t>
+            </a:r>
+          </a:p>
+        </p:txBody>
+      </p:sp>
+      <p:pic>
+        <p:nvPicPr>
+          <p:cNvPr id="5" name="Picture 4" descr="The same components assembled onto the mounting plate and wired, with a bench power supply alongside reading 12.08 volts."/>
+          <p:cNvPicPr>
+            <a:picLocks noChangeAspect="1"/>
+          </p:cNvPicPr>
+          <p:nvPr/>
+        </p:nvPicPr>
+        <p:blipFill>
+          <a:blip r:embed="rId3"/>
+          <a:stretch>
+            <a:fillRect/>
+          </a:stretch>
+        </p:blipFill>
+        <p:spPr>
+          <a:xfrm>
+            <a:off x="5798963" y="1155065"/>
+            <a:ext cx="1798034" cy="2397379"/>
+          </a:xfrm>
+          <a:prstGeom prst="rect">
+            <a:avLst/>
+          </a:prstGeom>
+        </p:spPr>
+      </p:pic>
+      <p:sp>
+        <p:nvSpPr>
+          <p:cNvPr id="6" name="TextBox 5"/>
+          <p:cNvSpPr txBox="1"/>
+          <p:nvPr/>
+        </p:nvSpPr>
+        <p:spPr>
+          <a:xfrm>
+            <a:off x="4709160" y="3589020"/>
+            <a:ext cx="3977640" cy="457200"/>
+          </a:xfrm>
+          <a:prstGeom prst="rect">
+            <a:avLst/>
+          </a:prstGeom>
+          <a:noFill/>
+        </p:spPr>
+        <p:txBody>
+          <a:bodyPr wrap="square">
+            <a:spAutoFit/>
+          </a:bodyPr>
+          <a:lstStyle/>
           <a:p>
             <a:pPr/>
             <a:r>
-              <a:rPr sz="1500">
-                <a:solidFill>
-                  <a:srgbClr val="1A1A1A"/>
-                </a:solidFill>
-              </a:rPr>
-              <a:t>Part of one season — 133.5 days, 16 April to 28 August 2026.</a:t>
-            </a:r>
-          </a:p>
+              <a:rPr sz="1000">
+                <a:solidFill>
+                  <a:srgbClr val="42413E"/>
+                </a:solidFill>
+              </a:rPr>
+              <a:t>The same parts wired onto the plate, under bench power.</a:t>
+            </a:r>
+          </a:p>
+        </p:txBody>
+      </p:sp>
+      <p:sp>
+        <p:nvSpPr>
+          <p:cNvPr id="7" name="TextBox 6"/>
+          <p:cNvSpPr txBox="1"/>
+          <p:nvPr/>
+        </p:nvSpPr>
+        <p:spPr>
+          <a:xfrm>
+            <a:off x="457200" y="4009644"/>
+            <a:ext cx="8229600" cy="402336"/>
+          </a:xfrm>
+          <a:prstGeom prst="rect">
+            <a:avLst/>
+          </a:prstGeom>
+          <a:noFill/>
+        </p:spPr>
+        <p:txBody>
+          <a:bodyPr wrap="square">
+            <a:spAutoFit/>
+          </a:bodyPr>
+          <a:lstStyle/>
           <a:p>
             <a:pPr/>
             <a:r>
-              <a:rPr sz="1500">
-                <a:solidFill>
-                  <a:srgbClr val="1A1A1A"/>
-                </a:solidFill>
-              </a:rPr>
-              <a:t>A second station was built but never deployed.</a:t>
-            </a:r>
-          </a:p>
-          <a:p>
-            <a:pPr/>
-            <a:r>
-              <a:rPr sz="1500">
-                <a:solidFill>
-                  <a:srgbClr val="1A1A1A"/>
-                </a:solidFill>
-              </a:rPr>
-              <a:t>The calibration now running is a salvage calibration recovered from a failed survey.</a:t>
-            </a:r>
-          </a:p>
-          <a:p>
-            <a:pPr/>
-            <a:r>
-              <a:rPr sz="1500">
-                <a:solidFill>
-                  <a:srgbClr val="1A1A1A"/>
-                </a:solidFill>
-              </a:rPr>
-              <a:t>Sukabumi is a technology pilot. Its value to date is what it has revealed about the design, not the measurements it produced.</a:t>
-            </a:r>
-          </a:p>
-        </p:txBody>
-      </p:sp>
-      <p:sp>
-        <p:nvSpPr>
-          <p:cNvPr id="4" name="TextBox 3"/>
+              <a:rPr sz="1000">
+                <a:solidFill>
+                  <a:srgbClr val="6B6A66"/>
+                </a:solidFill>
+              </a:rPr>
+              <a:t>No soldering, no fabrication, nothing single-source.</a:t>
+            </a:r>
+          </a:p>
+        </p:txBody>
+      </p:sp>
+      <p:sp>
+        <p:nvSpPr>
+          <p:cNvPr id="8" name="TextBox 7"/>
           <p:cNvSpPr txBox="1"/>
           <p:nvPr/>
         </p:nvSpPr>
@@ -10117,7 +8869,7 @@
       </p:sp>
       <p:sp>
         <p:nvSpPr>
-          <p:cNvPr id="5" name="TextBox 4"/>
+          <p:cNvPr id="9" name="TextBox 8"/>
           <p:cNvSpPr txBox="1"/>
           <p:nvPr/>
         </p:nvSpPr>
@@ -10144,7 +8896,7 @@
                   <a:srgbClr val="6B6A66"/>
                 </a:solidFill>
               </a:rPr>
-              <a:t>7 / 31</a:t>
+              <a:t>7 / 21</a:t>
             </a:r>
           </a:p>
         </p:txBody>
@@ -10184,24 +8936,24 @@
           <a:p>
             <a:pPr/>
             <a:r>
-              <a:rPr sz="2000">
+              <a:rPr sz="1800">
                 <a:solidFill>
                   <a:srgbClr val="1A1A1A"/>
                 </a:solidFill>
               </a:rPr>
-              <a:t>What the pilot requires of the design</a:t>
-            </a:r>
-          </a:p>
-        </p:txBody>
-      </p:sp>
-      <p:sp>
-        <p:nvSpPr>
-          <p:cNvPr id="3" name="Content Placeholder 2"/>
+              <a:t>The evidence is thin, and we ask you to treat it as thin</a:t>
+            </a:r>
+          </a:p>
+        </p:txBody>
+      </p:sp>
+      <p:sp>
+        <p:nvSpPr>
+          <p:cNvPr id="3" name="Text Placeholder 2"/>
           <p:cNvSpPr>
             <a:spLocks noGrp="1"/>
           </p:cNvSpPr>
           <p:nvPr>
-            <p:ph idx="12" sz="quarter"/>
+            <p:ph type="body" idx="12" sz="quarter"/>
           </p:nvPr>
         </p:nvSpPr>
         <p:spPr/>
@@ -10211,12 +8963,67 @@
           <a:p>
             <a:pPr/>
             <a:r>
-              <a:rPr sz="1100">
+              <a:rPr sz="1400">
+                <a:solidFill>
+                  <a:srgbClr val="1A1A1A"/>
+                </a:solidFill>
+              </a:rPr>
+              <a:t>One station, on one river, watched across part of one season — 16 April to 28 August 2026.</a:t>
+            </a:r>
+          </a:p>
+          <a:p>
+            <a:pPr/>
+            <a:r>
+              <a:rPr sz="1400">
+                <a:solidFill>
+                  <a:srgbClr val="1A1A1A"/>
+                </a:solidFill>
+              </a:rPr>
+              <a:t>A second station was built but never installed.</a:t>
+            </a:r>
+          </a:p>
+          <a:p>
+            <a:pPr/>
+            <a:r>
+              <a:rPr sz="1400">
+                <a:solidFill>
+                  <a:srgbClr val="1A1A1A"/>
+                </a:solidFill>
+              </a:rPr>
+              <a:t>What the deployment has produced so far is knowledge about the design, not a body of measurements.</a:t>
+            </a:r>
+          </a:p>
+          <a:p>
+            <a:pPr/>
+            <a:r>
+              <a:rPr sz="1400">
+                <a:solidFill>
+                  <a:srgbClr val="1A1A1A"/>
+                </a:solidFill>
+              </a:rPr>
+              <a:t>It is a volunteer pilot and should be read as one.</a:t>
+            </a:r>
+          </a:p>
+          <a:p>
+            <a:pPr lvl="1"/>
+            <a:r>
+              <a:rPr sz="1250">
                 <a:solidFill>
                   <a:srgbClr val="6B6A66"/>
                 </a:solidFill>
               </a:rPr>
-              <a:t>Report §2</a:t>
+              <a:t>Never built to production standards of availability or record continuity. Measuring it against an industrial instrument would be the wrong test, and unfair to the people who kept it running.</a:t>
+            </a:r>
+          </a:p>
+          <a:p>
+            <a:pPr lvl="1"/>
+            <a:r>
+              <a:rPr sz="1250">
+                <a:solidFill>
+                  <a:srgbClr val="6B6A66"/>
+                </a:solidFill>
+              </a:rPr>
+              <a:t>The useful question is narrower: what does this design make hard, and what should be built differently.</a:t>
             </a:r>
           </a:p>
         </p:txBody>
@@ -10251,6 +9058,40 @@
                 </a:solidFill>
               </a:rPr>
               <a:t>ORC Indonesia Deployment — PMI / IPB / BHLK</a:t>
+            </a:r>
+          </a:p>
+        </p:txBody>
+      </p:sp>
+      <p:sp>
+        <p:nvSpPr>
+          <p:cNvPr id="5" name="TextBox 4"/>
+          <p:cNvSpPr txBox="1"/>
+          <p:nvPr/>
+        </p:nvSpPr>
+        <p:spPr>
+          <a:xfrm>
+            <a:off x="6553200" y="4667250"/>
+            <a:ext cx="2133600" cy="274638"/>
+          </a:xfrm>
+          <a:prstGeom prst="rect">
+            <a:avLst/>
+          </a:prstGeom>
+          <a:noFill/>
+        </p:spPr>
+        <p:txBody>
+          <a:bodyPr wrap="square">
+            <a:spAutoFit/>
+          </a:bodyPr>
+          <a:lstStyle/>
+          <a:p>
+            <a:pPr algn="r"/>
+            <a:r>
+              <a:rPr sz="800">
+                <a:solidFill>
+                  <a:srgbClr val="6B6A66"/>
+                </a:solidFill>
+              </a:rPr>
+              <a:t>8 / 21</a:t>
             </a:r>
           </a:p>
         </p:txBody>
@@ -10290,12 +9131,12 @@
           <a:p>
             <a:pPr/>
             <a:r>
-              <a:rPr sz="1800">
+              <a:rPr sz="2000">
                 <a:solidFill>
                   <a:srgbClr val="1A1A1A"/>
                 </a:solidFill>
               </a:rPr>
-              <a:t>Three properties of the technology constrain any duplicate unit</a:t>
+              <a:t>Three design gaps we would not repeat</a:t>
             </a:r>
           </a:p>
         </p:txBody>
@@ -10322,7 +9163,7 @@
                   <a:srgbClr val="1A1A1A"/>
                 </a:solidFill>
               </a:rPr>
-              <a:t>Surface velocimetry depends on trackable features on the water surface.</a:t>
+              <a:t>The station cannot report its own condition.</a:t>
             </a:r>
           </a:p>
           <a:p>
@@ -10333,7 +9174,7 @@
                   <a:srgbClr val="6B6A66"/>
                 </a:solidFill>
               </a:rPr>
-              <a:t>Performance follows surface state, not the camera. Not characterised at Sukabumi — measure it at the pilot sites.</a:t>
+              <a:t>When it stopped, it stopped quietly. Nothing let an interruption announce itself. A fault the system never reports cannot be found by watching for it.</a:t>
             </a:r>
           </a:p>
           <a:p>
@@ -10344,7 +9185,7 @@
                   <a:srgbClr val="1A1A1A"/>
                 </a:solidFill>
               </a:rPr>
-              <a:t>The surveyed geometry is an input the processing chain cannot recover.</a:t>
+              <a:t>Nothing reconciles what was recorded against what arrived.</a:t>
             </a:r>
           </a:p>
           <a:p>
@@ -10355,7 +9196,7 @@
                   <a:srgbClr val="6B6A66"/>
                 </a:solidFill>
               </a:rPr>
-              <a:t>Nothing in the video constrains the bed, so survey error passes straight through to the result.</a:t>
+              <a:t>The station knows what it captured, the server knows what it received, and no part of the design compares them.</a:t>
             </a:r>
           </a:p>
           <a:p>
@@ -10366,7 +9207,7 @@
                   <a:srgbClr val="1A1A1A"/>
                 </a:solidFill>
               </a:rPr>
-              <a:t>Reporting cadence is a design parameter, separate from measurement quality.</a:t>
+              <a:t>Water level is read from the image, and daylight defeats it.</a:t>
             </a:r>
           </a:p>
           <a:p>
@@ -10377,7 +9218,7 @@
                   <a:srgbClr val="6B6A66"/>
                 </a:solidFill>
               </a:rPr>
-              <a:t>Set by the power architecture. Every wake pays a fixed 30–60 s camera boot.</a:t>
+              <a:t>Every rejection fell between 06:00 and 19:00. A daytime rejection costs the whole discharge measurement, not only the level.</a:t>
             </a:r>
           </a:p>
         </p:txBody>
@@ -10445,7 +9286,7 @@
                   <a:srgbClr val="6B6A66"/>
                 </a:solidFill>
               </a:rPr>
-              <a:t>9 / 31</a:t>
+              <a:t>9 / 21</a:t>
             </a:r>
           </a:p>
         </p:txBody>

--- a/spring_2026_ID/docs/pdf/REPLICATION_RECOMMENDATIONS_BRIEFING.pptx
+++ b/spring_2026_ID/docs/pdf/REPLICATION_RECOMMENDATIONS_BRIEFING.pptx
@@ -9136,7 +9136,7 @@
                   <a:srgbClr val="1A1A1A"/>
                 </a:solidFill>
               </a:rPr>
-              <a:t>Three design gaps we would not repeat</a:t>
+              <a:t>Three design gaps, and what we would build instead</a:t>
             </a:r>
           </a:p>
         </p:txBody>
@@ -9163,7 +9163,7 @@
                   <a:srgbClr val="1A1A1A"/>
                 </a:solidFill>
               </a:rPr>
-              <a:t>The station cannot report its own condition.</a:t>
+              <a:t>The station cannot report its own condition. When it stopped, it stopped quietly.</a:t>
             </a:r>
           </a:p>
           <a:p>
@@ -9174,7 +9174,7 @@
                   <a:srgbClr val="6B6A66"/>
                 </a:solidFill>
               </a:rPr>
-              <a:t>When it stopped, it stopped quietly. Nothing let an interruption announce itself. A fault the system never reports cannot be found by watching for it.</a:t>
+              <a:t>Instead: report state on every waking, and make any mode that suppresses data expire on its own and raise an alert. R4, R5.</a:t>
             </a:r>
           </a:p>
           <a:p>
@@ -9196,7 +9196,7 @@
                   <a:srgbClr val="6B6A66"/>
                 </a:solidFill>
               </a:rPr>
-              <a:t>The station knows what it captured, the server knows what it received, and no part of the design compares them.</a:t>
+              <a:t>Instead: compare the station's record against the server's on a schedule. Small piece of software; should have been in version one. R7.</a:t>
             </a:r>
           </a:p>
           <a:p>
@@ -9218,7 +9218,7 @@
                   <a:srgbClr val="6B6A66"/>
                 </a:solidFill>
               </a:rPr>
-              <a:t>Every rejection fell between 06:00 and 19:00. A daytime rejection costs the whole discharge measurement, not only the level.</a:t>
+              <a:t>Instead: an independent water-level reference, so the measurement does not rest on one optical method succeeding. R1.</a:t>
             </a:r>
           </a:p>
         </p:txBody>

--- a/spring_2026_ID/docs/pdf/REPLICATION_RECOMMENDATIONS_BRIEFING.pptx
+++ b/spring_2026_ID/docs/pdf/REPLICATION_RECOMMENDATIONS_BRIEFING.pptx
@@ -4592,7 +4592,7 @@
                   <a:srgbClr val="6B6A66"/>
                 </a:solidFill>
               </a:rPr>
-              <a:t>Palang Merah Indonesia  ·  Institut Pertanian Bogor  ·  Balai Hidrologi dan Lingkungan Keairan</a:t>
+              <a:t>Palang Merah Indonesia  ·  Institut Pertanian Bogor  ·  Balai Hidrologi dan Lingkungan Keairan  ·  American Red Cross</a:t>
             </a:r>
           </a:p>
           <a:p>
@@ -4740,7 +4740,7 @@
                   <a:srgbClr val="6B6A66"/>
                 </a:solidFill>
               </a:rPr>
-              <a:t>ORC Indonesia Deployment — PMI / IPB / BHLK</a:t>
+              <a:t>ORC Indonesia — PMI · IPB · BHLK · American Red Cross</a:t>
             </a:r>
           </a:p>
         </p:txBody>
@@ -4946,7 +4946,7 @@
                   <a:srgbClr val="6B6A66"/>
                 </a:solidFill>
               </a:rPr>
-              <a:t>ORC Indonesia Deployment — PMI / IPB / BHLK</a:t>
+              <a:t>ORC Indonesia — PMI · IPB · BHLK · American Red Cross</a:t>
             </a:r>
           </a:p>
         </p:txBody>
@@ -5577,7 +5577,7 @@
                   <a:srgbClr val="6B6A66"/>
                 </a:solidFill>
               </a:rPr>
-              <a:t>ORC Indonesia Deployment — PMI / IPB / BHLK</a:t>
+              <a:t>ORC Indonesia — PMI · IPB · BHLK · American Red Cross</a:t>
             </a:r>
           </a:p>
         </p:txBody>
@@ -6138,7 +6138,7 @@
                   <a:srgbClr val="6B6A66"/>
                 </a:solidFill>
               </a:rPr>
-              <a:t>ORC Indonesia Deployment — PMI / IPB / BHLK</a:t>
+              <a:t>ORC Indonesia — PMI · IPB · BHLK · American Red Cross</a:t>
             </a:r>
           </a:p>
         </p:txBody>
@@ -6309,7 +6309,7 @@
                   <a:srgbClr val="6B6A66"/>
                 </a:solidFill>
               </a:rPr>
-              <a:t>ORC Indonesia Deployment — PMI / IPB / BHLK</a:t>
+              <a:t>ORC Indonesia — PMI · IPB · BHLK · American Red Cross</a:t>
             </a:r>
           </a:p>
         </p:txBody>
@@ -6545,7 +6545,7 @@
                   <a:srgbClr val="6B6A66"/>
                 </a:solidFill>
               </a:rPr>
-              <a:t>ORC Indonesia Deployment — PMI / IPB / BHLK</a:t>
+              <a:t>ORC Indonesia — PMI · IPB · BHLK · American Red Cross</a:t>
             </a:r>
           </a:p>
         </p:txBody>
@@ -6729,7 +6729,7 @@
                   <a:srgbClr val="6B6A66"/>
                 </a:solidFill>
               </a:rPr>
-              <a:t>ORC Indonesia Deployment — PMI / IPB / BHLK</a:t>
+              <a:t>ORC Indonesia — PMI · IPB · BHLK · American Red Cross</a:t>
             </a:r>
           </a:p>
         </p:txBody>
@@ -6924,7 +6924,7 @@
                   <a:srgbClr val="6B6A66"/>
                 </a:solidFill>
               </a:rPr>
-              <a:t>ORC Indonesia Deployment — PMI / IPB / BHLK</a:t>
+              <a:t>ORC Indonesia — PMI · IPB · BHLK · American Red Cross</a:t>
             </a:r>
           </a:p>
         </p:txBody>
@@ -7141,7 +7141,7 @@
                   <a:srgbClr val="6B6A66"/>
                 </a:solidFill>
               </a:rPr>
-              <a:t>ORC Indonesia Deployment — PMI / IPB / BHLK</a:t>
+              <a:t>ORC Indonesia — PMI · IPB · BHLK · American Red Cross</a:t>
             </a:r>
           </a:p>
         </p:txBody>
@@ -7325,7 +7325,7 @@
                   <a:srgbClr val="6B6A66"/>
                 </a:solidFill>
               </a:rPr>
-              <a:t>ORC Indonesia Deployment — PMI / IPB / BHLK</a:t>
+              <a:t>ORC Indonesia — PMI · IPB · BHLK · American Red Cross</a:t>
             </a:r>
           </a:p>
         </p:txBody>
@@ -7509,7 +7509,7 @@
                   <a:srgbClr val="6B6A66"/>
                 </a:solidFill>
               </a:rPr>
-              <a:t>ORC Indonesia Deployment — PMI / IPB / BHLK</a:t>
+              <a:t>ORC Indonesia — PMI · IPB · BHLK · American Red Cross</a:t>
             </a:r>
           </a:p>
         </p:txBody>
@@ -7715,7 +7715,7 @@
                   <a:srgbClr val="6B6A66"/>
                 </a:solidFill>
               </a:rPr>
-              <a:t>ORC Indonesia Deployment — PMI / IPB / BHLK</a:t>
+              <a:t>ORC Indonesia — PMI · IPB · BHLK · American Red Cross</a:t>
             </a:r>
           </a:p>
         </p:txBody>
@@ -7899,7 +7899,7 @@
                   <a:srgbClr val="6B6A66"/>
                 </a:solidFill>
               </a:rPr>
-              <a:t>ORC Indonesia Deployment — PMI / IPB / BHLK</a:t>
+              <a:t>ORC Indonesia — PMI · IPB · BHLK · American Red Cross</a:t>
             </a:r>
           </a:p>
         </p:txBody>
@@ -8083,7 +8083,7 @@
                   <a:srgbClr val="6B6A66"/>
                 </a:solidFill>
               </a:rPr>
-              <a:t>ORC Indonesia Deployment — PMI / IPB / BHLK</a:t>
+              <a:t>ORC Indonesia — PMI · IPB · BHLK · American Red Cross</a:t>
             </a:r>
           </a:p>
         </p:txBody>
@@ -8278,7 +8278,7 @@
                   <a:srgbClr val="6B6A66"/>
                 </a:solidFill>
               </a:rPr>
-              <a:t>ORC Indonesia Deployment — PMI / IPB / BHLK</a:t>
+              <a:t>ORC Indonesia — PMI · IPB · BHLK · American Red Cross</a:t>
             </a:r>
           </a:p>
         </p:txBody>
@@ -8462,7 +8462,7 @@
                   <a:srgbClr val="6B6A66"/>
                 </a:solidFill>
               </a:rPr>
-              <a:t>ORC Indonesia Deployment — PMI / IPB / BHLK</a:t>
+              <a:t>ORC Indonesia — PMI · IPB · BHLK · American Red Cross</a:t>
             </a:r>
           </a:p>
         </p:txBody>
@@ -8599,7 +8599,7 @@
                   <a:srgbClr val="6B6A66"/>
                 </a:solidFill>
               </a:rPr>
-              <a:t>ORC Indonesia Deployment — PMI / IPB / BHLK</a:t>
+              <a:t>ORC Indonesia — PMI · IPB · BHLK · American Red Cross</a:t>
             </a:r>
           </a:p>
         </p:txBody>
@@ -8862,7 +8862,7 @@
                   <a:srgbClr val="6B6A66"/>
                 </a:solidFill>
               </a:rPr>
-              <a:t>ORC Indonesia Deployment — PMI / IPB / BHLK</a:t>
+              <a:t>ORC Indonesia — PMI · IPB · BHLK · American Red Cross</a:t>
             </a:r>
           </a:p>
         </p:txBody>
@@ -9057,7 +9057,7 @@
                   <a:srgbClr val="6B6A66"/>
                 </a:solidFill>
               </a:rPr>
-              <a:t>ORC Indonesia Deployment — PMI / IPB / BHLK</a:t>
+              <a:t>ORC Indonesia — PMI · IPB · BHLK · American Red Cross</a:t>
             </a:r>
           </a:p>
         </p:txBody>
@@ -9252,7 +9252,7 @@
                   <a:srgbClr val="6B6A66"/>
                 </a:solidFill>
               </a:rPr>
-              <a:t>ORC Indonesia Deployment — PMI / IPB / BHLK</a:t>
+              <a:t>ORC Indonesia — PMI · IPB · BHLK · American Red Cross</a:t>
             </a:r>
           </a:p>
         </p:txBody>

--- a/spring_2026_ID/docs/pdf/REPLICATION_RECOMMENDATIONS_BRIEFING.pptx
+++ b/spring_2026_ID/docs/pdf/REPLICATION_RECOMMENDATIONS_BRIEFING.pptx
@@ -4541,22 +4541,27 @@
       <p:grpSpPr/>
       <p:sp>
         <p:nvSpPr>
-          <p:cNvPr id="2" name="Text Placeholder 1"/>
+          <p:cNvPr id="2" name="Title 1"/>
           <p:cNvSpPr>
             <a:spLocks noGrp="1"/>
           </p:cNvSpPr>
           <p:nvPr>
-            <p:ph type="body" idx="12" sz="quarter"/>
+            <p:ph type="title"/>
           </p:nvPr>
         </p:nvSpPr>
-        <p:spPr/>
+        <p:spPr>
+          <a:xfrm>
+            <a:off x="457200" y="1783080"/>
+            <a:ext cx="8229600" cy="777240"/>
+          </a:xfrm>
+        </p:spPr>
         <p:txBody>
           <a:bodyPr wrap="square"/>
           <a:lstStyle/>
           <a:p>
             <a:pPr/>
             <a:r>
-              <a:rPr sz="2000">
+              <a:rPr sz="2200">
                 <a:solidFill>
                   <a:srgbClr val="1A1A1A"/>
                 </a:solidFill>
@@ -4564,8 +4569,157 @@
               <a:t>OpenRiverCam in Indonesia</a:t>
             </a:r>
           </a:p>
-          <a:p>
-            <a:pPr/>
+        </p:txBody>
+      </p:sp>
+      <p:sp>
+        <p:nvSpPr>
+          <p:cNvPr id="3" name="Rectangle 2" descr=""/>
+          <p:cNvSpPr/>
+          <p:nvPr/>
+        </p:nvSpPr>
+        <p:spPr>
+          <a:xfrm>
+            <a:off x="274320" y="4443984"/>
+            <a:ext cx="1517904" cy="676656"/>
+          </a:xfrm>
+          <a:prstGeom prst="rect">
+            <a:avLst/>
+          </a:prstGeom>
+          <a:solidFill>
+            <a:srgbClr val="FFFFFF"/>
+          </a:solidFill>
+          <a:ln>
+            <a:noFill/>
+          </a:ln>
+          <a:effectLst/>
+        </p:spPr>
+        <p:txBody>
+          <a:bodyPr rtlCol="0" anchor="ctr"/>
+          <a:lstStyle/>
+          <a:p>
+            <a:pPr algn="ctr"/>
+          </a:p>
+        </p:txBody>
+      </p:sp>
+      <p:pic>
+        <p:nvPicPr>
+          <p:cNvPr id="4" name="Picture 3" descr="Palang Merah Indonesia logo"/>
+          <p:cNvPicPr>
+            <a:picLocks noChangeAspect="1"/>
+          </p:cNvPicPr>
+          <p:nvPr/>
+        </p:nvPicPr>
+        <p:blipFill>
+          <a:blip r:embed="rId2"/>
+          <a:stretch>
+            <a:fillRect/>
+          </a:stretch>
+        </p:blipFill>
+        <p:spPr>
+          <a:xfrm>
+            <a:off x="1848366" y="658368"/>
+            <a:ext cx="1456873" cy="566928"/>
+          </a:xfrm>
+          <a:prstGeom prst="rect">
+            <a:avLst/>
+          </a:prstGeom>
+        </p:spPr>
+      </p:pic>
+      <p:pic>
+        <p:nvPicPr>
+          <p:cNvPr id="5" name="Picture 4" descr="Institut Pertanian Bogor logo"/>
+          <p:cNvPicPr>
+            <a:picLocks noChangeAspect="1"/>
+          </p:cNvPicPr>
+          <p:nvPr/>
+        </p:nvPicPr>
+        <p:blipFill>
+          <a:blip r:embed="rId3"/>
+          <a:stretch>
+            <a:fillRect/>
+          </a:stretch>
+        </p:blipFill>
+        <p:spPr>
+          <a:xfrm>
+            <a:off x="3597847" y="658368"/>
+            <a:ext cx="835472" cy="566928"/>
+          </a:xfrm>
+          <a:prstGeom prst="rect">
+            <a:avLst/>
+          </a:prstGeom>
+        </p:spPr>
+      </p:pic>
+      <p:pic>
+        <p:nvPicPr>
+          <p:cNvPr id="6" name="Picture 5" descr="Balai Hidrologi dan Lingkungan Keairan logo"/>
+          <p:cNvPicPr>
+            <a:picLocks noChangeAspect="1"/>
+          </p:cNvPicPr>
+          <p:nvPr/>
+        </p:nvPicPr>
+        <p:blipFill>
+          <a:blip r:embed="rId4"/>
+          <a:stretch>
+            <a:fillRect/>
+          </a:stretch>
+        </p:blipFill>
+        <p:spPr>
+          <a:xfrm>
+            <a:off x="4725927" y="658368"/>
+            <a:ext cx="566928" cy="566928"/>
+          </a:xfrm>
+          <a:prstGeom prst="rect">
+            <a:avLst/>
+          </a:prstGeom>
+        </p:spPr>
+      </p:pic>
+      <p:pic>
+        <p:nvPicPr>
+          <p:cNvPr id="7" name="Picture 6" descr="American Red Cross logo"/>
+          <p:cNvPicPr>
+            <a:picLocks noChangeAspect="1"/>
+          </p:cNvPicPr>
+          <p:nvPr/>
+        </p:nvPicPr>
+        <p:blipFill>
+          <a:blip r:embed="rId5"/>
+          <a:stretch>
+            <a:fillRect/>
+          </a:stretch>
+        </p:blipFill>
+        <p:spPr>
+          <a:xfrm>
+            <a:off x="5585463" y="658368"/>
+            <a:ext cx="1710170" cy="566928"/>
+          </a:xfrm>
+          <a:prstGeom prst="rect">
+            <a:avLst/>
+          </a:prstGeom>
+        </p:spPr>
+      </p:pic>
+      <p:sp>
+        <p:nvSpPr>
+          <p:cNvPr id="8" name="TextBox 7"/>
+          <p:cNvSpPr txBox="1"/>
+          <p:nvPr/>
+        </p:nvSpPr>
+        <p:spPr>
+          <a:xfrm>
+            <a:off x="822960" y="2697480"/>
+            <a:ext cx="7498080" cy="1371600"/>
+          </a:xfrm>
+          <a:prstGeom prst="rect">
+            <a:avLst/>
+          </a:prstGeom>
+          <a:noFill/>
+        </p:spPr>
+        <p:txBody>
+          <a:bodyPr wrap="square">
+            <a:spAutoFit/>
+          </a:bodyPr>
+          <a:lstStyle/>
+          <a:p>
+            <a:pPr algn="ctr"/>
             <a:r>
               <a:rPr sz="1200">
                 <a:solidFill>
@@ -4585,7 +4739,7 @@
             </a:r>
           </a:p>
           <a:p>
-            <a:pPr/>
+            <a:pPr algn="ctr"/>
             <a:r>
               <a:rPr sz="1000">
                 <a:solidFill>
@@ -4596,7 +4750,7 @@
             </a:r>
           </a:p>
           <a:p>
-            <a:pPr/>
+            <a:pPr algn="ctr"/>
             <a:r>
               <a:rPr sz="900">
                 <a:solidFill>
@@ -4713,41 +4867,133 @@
       </p:sp>
       <p:sp>
         <p:nvSpPr>
-          <p:cNvPr id="5" name="TextBox 4"/>
-          <p:cNvSpPr txBox="1"/>
-          <p:nvPr/>
-        </p:nvSpPr>
-        <p:spPr>
-          <a:xfrm>
-            <a:off x="3124200" y="4667250"/>
-            <a:ext cx="2895600" cy="274638"/>
-          </a:xfrm>
-          <a:prstGeom prst="rect">
-            <a:avLst/>
-          </a:prstGeom>
-          <a:noFill/>
-        </p:spPr>
-        <p:txBody>
-          <a:bodyPr wrap="square">
-            <a:spAutoFit/>
-          </a:bodyPr>
+          <p:cNvPr id="5" name="Rectangle 4" descr=""/>
+          <p:cNvSpPr/>
+          <p:nvPr/>
+        </p:nvSpPr>
+        <p:spPr>
+          <a:xfrm>
+            <a:off x="274320" y="4443984"/>
+            <a:ext cx="1517904" cy="676656"/>
+          </a:xfrm>
+          <a:prstGeom prst="rect">
+            <a:avLst/>
+          </a:prstGeom>
+          <a:solidFill>
+            <a:srgbClr val="FFFFFF"/>
+          </a:solidFill>
+          <a:ln>
+            <a:noFill/>
+          </a:ln>
+          <a:effectLst/>
+        </p:spPr>
+        <p:txBody>
+          <a:bodyPr rtlCol="0" anchor="ctr"/>
           <a:lstStyle/>
           <a:p>
             <a:pPr algn="ctr"/>
-            <a:r>
-              <a:rPr sz="800">
-                <a:solidFill>
-                  <a:srgbClr val="6B6A66"/>
-                </a:solidFill>
-              </a:rPr>
-              <a:t>ORC Indonesia — PMI · IPB · BHLK · American Red Cross</a:t>
-            </a:r>
-          </a:p>
-        </p:txBody>
-      </p:sp>
-      <p:sp>
-        <p:nvSpPr>
-          <p:cNvPr id="6" name="TextBox 5"/>
+          </a:p>
+        </p:txBody>
+      </p:sp>
+      <p:pic>
+        <p:nvPicPr>
+          <p:cNvPr id="6" name="Picture 5" descr="Palang Merah Indonesia logo"/>
+          <p:cNvPicPr>
+            <a:picLocks noChangeAspect="1"/>
+          </p:cNvPicPr>
+          <p:nvPr/>
+        </p:nvPicPr>
+        <p:blipFill>
+          <a:blip r:embed="rId3"/>
+          <a:stretch>
+            <a:fillRect/>
+          </a:stretch>
+        </p:blipFill>
+        <p:spPr>
+          <a:xfrm>
+            <a:off x="1369770" y="4576572"/>
+            <a:ext cx="939918" cy="365760"/>
+          </a:xfrm>
+          <a:prstGeom prst="rect">
+            <a:avLst/>
+          </a:prstGeom>
+        </p:spPr>
+      </p:pic>
+      <p:pic>
+        <p:nvPicPr>
+          <p:cNvPr id="7" name="Picture 6" descr="Institut Pertanian Bogor logo"/>
+          <p:cNvPicPr>
+            <a:picLocks noChangeAspect="1"/>
+          </p:cNvPicPr>
+          <p:nvPr/>
+        </p:nvPicPr>
+        <p:blipFill>
+          <a:blip r:embed="rId4"/>
+          <a:stretch>
+            <a:fillRect/>
+          </a:stretch>
+        </p:blipFill>
+        <p:spPr>
+          <a:xfrm>
+            <a:off x="2602296" y="4576572"/>
+            <a:ext cx="539014" cy="365760"/>
+          </a:xfrm>
+          <a:prstGeom prst="rect">
+            <a:avLst/>
+          </a:prstGeom>
+        </p:spPr>
+      </p:pic>
+      <p:pic>
+        <p:nvPicPr>
+          <p:cNvPr id="8" name="Picture 7" descr="Balai Hidrologi dan Lingkungan Keairan logo"/>
+          <p:cNvPicPr>
+            <a:picLocks noChangeAspect="1"/>
+          </p:cNvPicPr>
+          <p:nvPr/>
+        </p:nvPicPr>
+        <p:blipFill>
+          <a:blip r:embed="rId5"/>
+          <a:stretch>
+            <a:fillRect/>
+          </a:stretch>
+        </p:blipFill>
+        <p:spPr>
+          <a:xfrm>
+            <a:off x="3433918" y="4576572"/>
+            <a:ext cx="365760" cy="365760"/>
+          </a:xfrm>
+          <a:prstGeom prst="rect">
+            <a:avLst/>
+          </a:prstGeom>
+        </p:spPr>
+      </p:pic>
+      <p:pic>
+        <p:nvPicPr>
+          <p:cNvPr id="9" name="Picture 8" descr="American Red Cross logo"/>
+          <p:cNvPicPr>
+            <a:picLocks noChangeAspect="1"/>
+          </p:cNvPicPr>
+          <p:nvPr/>
+        </p:nvPicPr>
+        <p:blipFill>
+          <a:blip r:embed="rId6"/>
+          <a:stretch>
+            <a:fillRect/>
+          </a:stretch>
+        </p:blipFill>
+        <p:spPr>
+          <a:xfrm>
+            <a:off x="4092286" y="4576572"/>
+            <a:ext cx="1103335" cy="365760"/>
+          </a:xfrm>
+          <a:prstGeom prst="rect">
+            <a:avLst/>
+          </a:prstGeom>
+        </p:spPr>
+      </p:pic>
+      <p:sp>
+        <p:nvSpPr>
+          <p:cNvPr id="10" name="TextBox 9"/>
           <p:cNvSpPr txBox="1"/>
           <p:nvPr/>
         </p:nvSpPr>
@@ -4919,41 +5165,133 @@
       </p:sp>
       <p:sp>
         <p:nvSpPr>
-          <p:cNvPr id="4" name="TextBox 3"/>
-          <p:cNvSpPr txBox="1"/>
-          <p:nvPr/>
-        </p:nvSpPr>
-        <p:spPr>
-          <a:xfrm>
-            <a:off x="3124200" y="4667250"/>
-            <a:ext cx="2895600" cy="274638"/>
-          </a:xfrm>
-          <a:prstGeom prst="rect">
-            <a:avLst/>
-          </a:prstGeom>
-          <a:noFill/>
-        </p:spPr>
-        <p:txBody>
-          <a:bodyPr wrap="square">
-            <a:spAutoFit/>
-          </a:bodyPr>
+          <p:cNvPr id="4" name="Rectangle 3" descr=""/>
+          <p:cNvSpPr/>
+          <p:nvPr/>
+        </p:nvSpPr>
+        <p:spPr>
+          <a:xfrm>
+            <a:off x="274320" y="4443984"/>
+            <a:ext cx="1517904" cy="676656"/>
+          </a:xfrm>
+          <a:prstGeom prst="rect">
+            <a:avLst/>
+          </a:prstGeom>
+          <a:solidFill>
+            <a:srgbClr val="FFFFFF"/>
+          </a:solidFill>
+          <a:ln>
+            <a:noFill/>
+          </a:ln>
+          <a:effectLst/>
+        </p:spPr>
+        <p:txBody>
+          <a:bodyPr rtlCol="0" anchor="ctr"/>
           <a:lstStyle/>
           <a:p>
             <a:pPr algn="ctr"/>
-            <a:r>
-              <a:rPr sz="800">
-                <a:solidFill>
-                  <a:srgbClr val="6B6A66"/>
-                </a:solidFill>
-              </a:rPr>
-              <a:t>ORC Indonesia — PMI · IPB · BHLK · American Red Cross</a:t>
-            </a:r>
-          </a:p>
-        </p:txBody>
-      </p:sp>
-      <p:sp>
-        <p:nvSpPr>
-          <p:cNvPr id="5" name="TextBox 4"/>
+          </a:p>
+        </p:txBody>
+      </p:sp>
+      <p:pic>
+        <p:nvPicPr>
+          <p:cNvPr id="5" name="Picture 4" descr="Palang Merah Indonesia logo"/>
+          <p:cNvPicPr>
+            <a:picLocks noChangeAspect="1"/>
+          </p:cNvPicPr>
+          <p:nvPr/>
+        </p:nvPicPr>
+        <p:blipFill>
+          <a:blip r:embed="rId2"/>
+          <a:stretch>
+            <a:fillRect/>
+          </a:stretch>
+        </p:blipFill>
+        <p:spPr>
+          <a:xfrm>
+            <a:off x="1369770" y="4576572"/>
+            <a:ext cx="939918" cy="365760"/>
+          </a:xfrm>
+          <a:prstGeom prst="rect">
+            <a:avLst/>
+          </a:prstGeom>
+        </p:spPr>
+      </p:pic>
+      <p:pic>
+        <p:nvPicPr>
+          <p:cNvPr id="6" name="Picture 5" descr="Institut Pertanian Bogor logo"/>
+          <p:cNvPicPr>
+            <a:picLocks noChangeAspect="1"/>
+          </p:cNvPicPr>
+          <p:nvPr/>
+        </p:nvPicPr>
+        <p:blipFill>
+          <a:blip r:embed="rId3"/>
+          <a:stretch>
+            <a:fillRect/>
+          </a:stretch>
+        </p:blipFill>
+        <p:spPr>
+          <a:xfrm>
+            <a:off x="2602296" y="4576572"/>
+            <a:ext cx="539014" cy="365760"/>
+          </a:xfrm>
+          <a:prstGeom prst="rect">
+            <a:avLst/>
+          </a:prstGeom>
+        </p:spPr>
+      </p:pic>
+      <p:pic>
+        <p:nvPicPr>
+          <p:cNvPr id="7" name="Picture 6" descr="Balai Hidrologi dan Lingkungan Keairan logo"/>
+          <p:cNvPicPr>
+            <a:picLocks noChangeAspect="1"/>
+          </p:cNvPicPr>
+          <p:nvPr/>
+        </p:nvPicPr>
+        <p:blipFill>
+          <a:blip r:embed="rId4"/>
+          <a:stretch>
+            <a:fillRect/>
+          </a:stretch>
+        </p:blipFill>
+        <p:spPr>
+          <a:xfrm>
+            <a:off x="3433918" y="4576572"/>
+            <a:ext cx="365760" cy="365760"/>
+          </a:xfrm>
+          <a:prstGeom prst="rect">
+            <a:avLst/>
+          </a:prstGeom>
+        </p:spPr>
+      </p:pic>
+      <p:pic>
+        <p:nvPicPr>
+          <p:cNvPr id="8" name="Picture 7" descr="American Red Cross logo"/>
+          <p:cNvPicPr>
+            <a:picLocks noChangeAspect="1"/>
+          </p:cNvPicPr>
+          <p:nvPr/>
+        </p:nvPicPr>
+        <p:blipFill>
+          <a:blip r:embed="rId5"/>
+          <a:stretch>
+            <a:fillRect/>
+          </a:stretch>
+        </p:blipFill>
+        <p:spPr>
+          <a:xfrm>
+            <a:off x="4092286" y="4576572"/>
+            <a:ext cx="1103335" cy="365760"/>
+          </a:xfrm>
+          <a:prstGeom prst="rect">
+            <a:avLst/>
+          </a:prstGeom>
+        </p:spPr>
+      </p:pic>
+      <p:sp>
+        <p:nvSpPr>
+          <p:cNvPr id="9" name="TextBox 8"/>
           <p:cNvSpPr txBox="1"/>
           <p:nvPr/>
         </p:nvSpPr>
@@ -5550,41 +5888,133 @@
       </p:graphicFrame>
       <p:sp>
         <p:nvSpPr>
-          <p:cNvPr id="4" name="TextBox 3"/>
-          <p:cNvSpPr txBox="1"/>
-          <p:nvPr/>
-        </p:nvSpPr>
-        <p:spPr>
-          <a:xfrm>
-            <a:off x="3124200" y="4667250"/>
-            <a:ext cx="2895600" cy="274638"/>
-          </a:xfrm>
-          <a:prstGeom prst="rect">
-            <a:avLst/>
-          </a:prstGeom>
-          <a:noFill/>
-        </p:spPr>
-        <p:txBody>
-          <a:bodyPr wrap="square">
-            <a:spAutoFit/>
-          </a:bodyPr>
+          <p:cNvPr id="4" name="Rectangle 3" descr=""/>
+          <p:cNvSpPr/>
+          <p:nvPr/>
+        </p:nvSpPr>
+        <p:spPr>
+          <a:xfrm>
+            <a:off x="274320" y="4443984"/>
+            <a:ext cx="1517904" cy="676656"/>
+          </a:xfrm>
+          <a:prstGeom prst="rect">
+            <a:avLst/>
+          </a:prstGeom>
+          <a:solidFill>
+            <a:srgbClr val="FFFFFF"/>
+          </a:solidFill>
+          <a:ln>
+            <a:noFill/>
+          </a:ln>
+          <a:effectLst/>
+        </p:spPr>
+        <p:txBody>
+          <a:bodyPr rtlCol="0" anchor="ctr"/>
           <a:lstStyle/>
           <a:p>
             <a:pPr algn="ctr"/>
-            <a:r>
-              <a:rPr sz="800">
-                <a:solidFill>
-                  <a:srgbClr val="6B6A66"/>
-                </a:solidFill>
-              </a:rPr>
-              <a:t>ORC Indonesia — PMI · IPB · BHLK · American Red Cross</a:t>
-            </a:r>
-          </a:p>
-        </p:txBody>
-      </p:sp>
-      <p:sp>
-        <p:nvSpPr>
-          <p:cNvPr id="5" name="TextBox 4"/>
+          </a:p>
+        </p:txBody>
+      </p:sp>
+      <p:pic>
+        <p:nvPicPr>
+          <p:cNvPr id="5" name="Picture 4" descr="Palang Merah Indonesia logo"/>
+          <p:cNvPicPr>
+            <a:picLocks noChangeAspect="1"/>
+          </p:cNvPicPr>
+          <p:nvPr/>
+        </p:nvPicPr>
+        <p:blipFill>
+          <a:blip r:embed="rId2"/>
+          <a:stretch>
+            <a:fillRect/>
+          </a:stretch>
+        </p:blipFill>
+        <p:spPr>
+          <a:xfrm>
+            <a:off x="1369770" y="4576572"/>
+            <a:ext cx="939918" cy="365760"/>
+          </a:xfrm>
+          <a:prstGeom prst="rect">
+            <a:avLst/>
+          </a:prstGeom>
+        </p:spPr>
+      </p:pic>
+      <p:pic>
+        <p:nvPicPr>
+          <p:cNvPr id="6" name="Picture 5" descr="Institut Pertanian Bogor logo"/>
+          <p:cNvPicPr>
+            <a:picLocks noChangeAspect="1"/>
+          </p:cNvPicPr>
+          <p:nvPr/>
+        </p:nvPicPr>
+        <p:blipFill>
+          <a:blip r:embed="rId3"/>
+          <a:stretch>
+            <a:fillRect/>
+          </a:stretch>
+        </p:blipFill>
+        <p:spPr>
+          <a:xfrm>
+            <a:off x="2602296" y="4576572"/>
+            <a:ext cx="539014" cy="365760"/>
+          </a:xfrm>
+          <a:prstGeom prst="rect">
+            <a:avLst/>
+          </a:prstGeom>
+        </p:spPr>
+      </p:pic>
+      <p:pic>
+        <p:nvPicPr>
+          <p:cNvPr id="7" name="Picture 6" descr="Balai Hidrologi dan Lingkungan Keairan logo"/>
+          <p:cNvPicPr>
+            <a:picLocks noChangeAspect="1"/>
+          </p:cNvPicPr>
+          <p:nvPr/>
+        </p:nvPicPr>
+        <p:blipFill>
+          <a:blip r:embed="rId4"/>
+          <a:stretch>
+            <a:fillRect/>
+          </a:stretch>
+        </p:blipFill>
+        <p:spPr>
+          <a:xfrm>
+            <a:off x="3433918" y="4576572"/>
+            <a:ext cx="365760" cy="365760"/>
+          </a:xfrm>
+          <a:prstGeom prst="rect">
+            <a:avLst/>
+          </a:prstGeom>
+        </p:spPr>
+      </p:pic>
+      <p:pic>
+        <p:nvPicPr>
+          <p:cNvPr id="8" name="Picture 7" descr="American Red Cross logo"/>
+          <p:cNvPicPr>
+            <a:picLocks noChangeAspect="1"/>
+          </p:cNvPicPr>
+          <p:nvPr/>
+        </p:nvPicPr>
+        <p:blipFill>
+          <a:blip r:embed="rId5"/>
+          <a:stretch>
+            <a:fillRect/>
+          </a:stretch>
+        </p:blipFill>
+        <p:spPr>
+          <a:xfrm>
+            <a:off x="4092286" y="4576572"/>
+            <a:ext cx="1103335" cy="365760"/>
+          </a:xfrm>
+          <a:prstGeom prst="rect">
+            <a:avLst/>
+          </a:prstGeom>
+        </p:spPr>
+      </p:pic>
+      <p:sp>
+        <p:nvSpPr>
+          <p:cNvPr id="9" name="TextBox 8"/>
           <p:cNvSpPr txBox="1"/>
           <p:nvPr/>
         </p:nvSpPr>
@@ -6111,41 +6541,133 @@
       </p:graphicFrame>
       <p:sp>
         <p:nvSpPr>
-          <p:cNvPr id="4" name="TextBox 3"/>
-          <p:cNvSpPr txBox="1"/>
-          <p:nvPr/>
-        </p:nvSpPr>
-        <p:spPr>
-          <a:xfrm>
-            <a:off x="3124200" y="4667250"/>
-            <a:ext cx="2895600" cy="274638"/>
-          </a:xfrm>
-          <a:prstGeom prst="rect">
-            <a:avLst/>
-          </a:prstGeom>
-          <a:noFill/>
-        </p:spPr>
-        <p:txBody>
-          <a:bodyPr wrap="square">
-            <a:spAutoFit/>
-          </a:bodyPr>
+          <p:cNvPr id="4" name="Rectangle 3" descr=""/>
+          <p:cNvSpPr/>
+          <p:nvPr/>
+        </p:nvSpPr>
+        <p:spPr>
+          <a:xfrm>
+            <a:off x="274320" y="4443984"/>
+            <a:ext cx="1517904" cy="676656"/>
+          </a:xfrm>
+          <a:prstGeom prst="rect">
+            <a:avLst/>
+          </a:prstGeom>
+          <a:solidFill>
+            <a:srgbClr val="FFFFFF"/>
+          </a:solidFill>
+          <a:ln>
+            <a:noFill/>
+          </a:ln>
+          <a:effectLst/>
+        </p:spPr>
+        <p:txBody>
+          <a:bodyPr rtlCol="0" anchor="ctr"/>
           <a:lstStyle/>
           <a:p>
             <a:pPr algn="ctr"/>
-            <a:r>
-              <a:rPr sz="800">
-                <a:solidFill>
-                  <a:srgbClr val="6B6A66"/>
-                </a:solidFill>
-              </a:rPr>
-              <a:t>ORC Indonesia — PMI · IPB · BHLK · American Red Cross</a:t>
-            </a:r>
-          </a:p>
-        </p:txBody>
-      </p:sp>
-      <p:sp>
-        <p:nvSpPr>
-          <p:cNvPr id="5" name="TextBox 4"/>
+          </a:p>
+        </p:txBody>
+      </p:sp>
+      <p:pic>
+        <p:nvPicPr>
+          <p:cNvPr id="5" name="Picture 4" descr="Palang Merah Indonesia logo"/>
+          <p:cNvPicPr>
+            <a:picLocks noChangeAspect="1"/>
+          </p:cNvPicPr>
+          <p:nvPr/>
+        </p:nvPicPr>
+        <p:blipFill>
+          <a:blip r:embed="rId2"/>
+          <a:stretch>
+            <a:fillRect/>
+          </a:stretch>
+        </p:blipFill>
+        <p:spPr>
+          <a:xfrm>
+            <a:off x="1369770" y="4576572"/>
+            <a:ext cx="939918" cy="365760"/>
+          </a:xfrm>
+          <a:prstGeom prst="rect">
+            <a:avLst/>
+          </a:prstGeom>
+        </p:spPr>
+      </p:pic>
+      <p:pic>
+        <p:nvPicPr>
+          <p:cNvPr id="6" name="Picture 5" descr="Institut Pertanian Bogor logo"/>
+          <p:cNvPicPr>
+            <a:picLocks noChangeAspect="1"/>
+          </p:cNvPicPr>
+          <p:nvPr/>
+        </p:nvPicPr>
+        <p:blipFill>
+          <a:blip r:embed="rId3"/>
+          <a:stretch>
+            <a:fillRect/>
+          </a:stretch>
+        </p:blipFill>
+        <p:spPr>
+          <a:xfrm>
+            <a:off x="2602296" y="4576572"/>
+            <a:ext cx="539014" cy="365760"/>
+          </a:xfrm>
+          <a:prstGeom prst="rect">
+            <a:avLst/>
+          </a:prstGeom>
+        </p:spPr>
+      </p:pic>
+      <p:pic>
+        <p:nvPicPr>
+          <p:cNvPr id="7" name="Picture 6" descr="Balai Hidrologi dan Lingkungan Keairan logo"/>
+          <p:cNvPicPr>
+            <a:picLocks noChangeAspect="1"/>
+          </p:cNvPicPr>
+          <p:nvPr/>
+        </p:nvPicPr>
+        <p:blipFill>
+          <a:blip r:embed="rId4"/>
+          <a:stretch>
+            <a:fillRect/>
+          </a:stretch>
+        </p:blipFill>
+        <p:spPr>
+          <a:xfrm>
+            <a:off x="3433918" y="4576572"/>
+            <a:ext cx="365760" cy="365760"/>
+          </a:xfrm>
+          <a:prstGeom prst="rect">
+            <a:avLst/>
+          </a:prstGeom>
+        </p:spPr>
+      </p:pic>
+      <p:pic>
+        <p:nvPicPr>
+          <p:cNvPr id="8" name="Picture 7" descr="American Red Cross logo"/>
+          <p:cNvPicPr>
+            <a:picLocks noChangeAspect="1"/>
+          </p:cNvPicPr>
+          <p:nvPr/>
+        </p:nvPicPr>
+        <p:blipFill>
+          <a:blip r:embed="rId5"/>
+          <a:stretch>
+            <a:fillRect/>
+          </a:stretch>
+        </p:blipFill>
+        <p:spPr>
+          <a:xfrm>
+            <a:off x="4092286" y="4576572"/>
+            <a:ext cx="1103335" cy="365760"/>
+          </a:xfrm>
+          <a:prstGeom prst="rect">
+            <a:avLst/>
+          </a:prstGeom>
+        </p:spPr>
+      </p:pic>
+      <p:sp>
+        <p:nvSpPr>
+          <p:cNvPr id="9" name="TextBox 8"/>
           <p:cNvSpPr txBox="1"/>
           <p:nvPr/>
         </p:nvSpPr>
@@ -6282,41 +6804,133 @@
       </p:sp>
       <p:sp>
         <p:nvSpPr>
-          <p:cNvPr id="5" name="TextBox 4"/>
-          <p:cNvSpPr txBox="1"/>
-          <p:nvPr/>
-        </p:nvSpPr>
-        <p:spPr>
-          <a:xfrm>
-            <a:off x="3124200" y="4667250"/>
-            <a:ext cx="2895600" cy="274638"/>
-          </a:xfrm>
-          <a:prstGeom prst="rect">
-            <a:avLst/>
-          </a:prstGeom>
-          <a:noFill/>
-        </p:spPr>
-        <p:txBody>
-          <a:bodyPr wrap="square">
-            <a:spAutoFit/>
-          </a:bodyPr>
+          <p:cNvPr id="5" name="Rectangle 4" descr=""/>
+          <p:cNvSpPr/>
+          <p:nvPr/>
+        </p:nvSpPr>
+        <p:spPr>
+          <a:xfrm>
+            <a:off x="274320" y="4443984"/>
+            <a:ext cx="1517904" cy="676656"/>
+          </a:xfrm>
+          <a:prstGeom prst="rect">
+            <a:avLst/>
+          </a:prstGeom>
+          <a:solidFill>
+            <a:srgbClr val="FFFFFF"/>
+          </a:solidFill>
+          <a:ln>
+            <a:noFill/>
+          </a:ln>
+          <a:effectLst/>
+        </p:spPr>
+        <p:txBody>
+          <a:bodyPr rtlCol="0" anchor="ctr"/>
           <a:lstStyle/>
           <a:p>
             <a:pPr algn="ctr"/>
-            <a:r>
-              <a:rPr sz="800">
-                <a:solidFill>
-                  <a:srgbClr val="6B6A66"/>
-                </a:solidFill>
-              </a:rPr>
-              <a:t>ORC Indonesia — PMI · IPB · BHLK · American Red Cross</a:t>
-            </a:r>
-          </a:p>
-        </p:txBody>
-      </p:sp>
-      <p:sp>
-        <p:nvSpPr>
-          <p:cNvPr id="6" name="TextBox 5"/>
+          </a:p>
+        </p:txBody>
+      </p:sp>
+      <p:pic>
+        <p:nvPicPr>
+          <p:cNvPr id="6" name="Picture 5" descr="Palang Merah Indonesia logo"/>
+          <p:cNvPicPr>
+            <a:picLocks noChangeAspect="1"/>
+          </p:cNvPicPr>
+          <p:nvPr/>
+        </p:nvPicPr>
+        <p:blipFill>
+          <a:blip r:embed="rId3"/>
+          <a:stretch>
+            <a:fillRect/>
+          </a:stretch>
+        </p:blipFill>
+        <p:spPr>
+          <a:xfrm>
+            <a:off x="1369770" y="4576572"/>
+            <a:ext cx="939918" cy="365760"/>
+          </a:xfrm>
+          <a:prstGeom prst="rect">
+            <a:avLst/>
+          </a:prstGeom>
+        </p:spPr>
+      </p:pic>
+      <p:pic>
+        <p:nvPicPr>
+          <p:cNvPr id="7" name="Picture 6" descr="Institut Pertanian Bogor logo"/>
+          <p:cNvPicPr>
+            <a:picLocks noChangeAspect="1"/>
+          </p:cNvPicPr>
+          <p:nvPr/>
+        </p:nvPicPr>
+        <p:blipFill>
+          <a:blip r:embed="rId4"/>
+          <a:stretch>
+            <a:fillRect/>
+          </a:stretch>
+        </p:blipFill>
+        <p:spPr>
+          <a:xfrm>
+            <a:off x="2602296" y="4576572"/>
+            <a:ext cx="539014" cy="365760"/>
+          </a:xfrm>
+          <a:prstGeom prst="rect">
+            <a:avLst/>
+          </a:prstGeom>
+        </p:spPr>
+      </p:pic>
+      <p:pic>
+        <p:nvPicPr>
+          <p:cNvPr id="8" name="Picture 7" descr="Balai Hidrologi dan Lingkungan Keairan logo"/>
+          <p:cNvPicPr>
+            <a:picLocks noChangeAspect="1"/>
+          </p:cNvPicPr>
+          <p:nvPr/>
+        </p:nvPicPr>
+        <p:blipFill>
+          <a:blip r:embed="rId5"/>
+          <a:stretch>
+            <a:fillRect/>
+          </a:stretch>
+        </p:blipFill>
+        <p:spPr>
+          <a:xfrm>
+            <a:off x="3433918" y="4576572"/>
+            <a:ext cx="365760" cy="365760"/>
+          </a:xfrm>
+          <a:prstGeom prst="rect">
+            <a:avLst/>
+          </a:prstGeom>
+        </p:spPr>
+      </p:pic>
+      <p:pic>
+        <p:nvPicPr>
+          <p:cNvPr id="9" name="Picture 8" descr="American Red Cross logo"/>
+          <p:cNvPicPr>
+            <a:picLocks noChangeAspect="1"/>
+          </p:cNvPicPr>
+          <p:nvPr/>
+        </p:nvPicPr>
+        <p:blipFill>
+          <a:blip r:embed="rId6"/>
+          <a:stretch>
+            <a:fillRect/>
+          </a:stretch>
+        </p:blipFill>
+        <p:spPr>
+          <a:xfrm>
+            <a:off x="4092286" y="4576572"/>
+            <a:ext cx="1103335" cy="365760"/>
+          </a:xfrm>
+          <a:prstGeom prst="rect">
+            <a:avLst/>
+          </a:prstGeom>
+        </p:spPr>
+      </p:pic>
+      <p:sp>
+        <p:nvSpPr>
+          <p:cNvPr id="10" name="TextBox 9"/>
           <p:cNvSpPr txBox="1"/>
           <p:nvPr/>
         </p:nvSpPr>
@@ -6518,41 +7132,133 @@
       </p:sp>
       <p:sp>
         <p:nvSpPr>
-          <p:cNvPr id="6" name="TextBox 5"/>
-          <p:cNvSpPr txBox="1"/>
-          <p:nvPr/>
-        </p:nvSpPr>
-        <p:spPr>
-          <a:xfrm>
-            <a:off x="3124200" y="4667250"/>
-            <a:ext cx="2895600" cy="274638"/>
-          </a:xfrm>
-          <a:prstGeom prst="rect">
-            <a:avLst/>
-          </a:prstGeom>
-          <a:noFill/>
-        </p:spPr>
-        <p:txBody>
-          <a:bodyPr wrap="square">
-            <a:spAutoFit/>
-          </a:bodyPr>
+          <p:cNvPr id="6" name="Rectangle 5" descr=""/>
+          <p:cNvSpPr/>
+          <p:nvPr/>
+        </p:nvSpPr>
+        <p:spPr>
+          <a:xfrm>
+            <a:off x="274320" y="4443984"/>
+            <a:ext cx="1517904" cy="676656"/>
+          </a:xfrm>
+          <a:prstGeom prst="rect">
+            <a:avLst/>
+          </a:prstGeom>
+          <a:solidFill>
+            <a:srgbClr val="FFFFFF"/>
+          </a:solidFill>
+          <a:ln>
+            <a:noFill/>
+          </a:ln>
+          <a:effectLst/>
+        </p:spPr>
+        <p:txBody>
+          <a:bodyPr rtlCol="0" anchor="ctr"/>
           <a:lstStyle/>
           <a:p>
             <a:pPr algn="ctr"/>
-            <a:r>
-              <a:rPr sz="800">
-                <a:solidFill>
-                  <a:srgbClr val="6B6A66"/>
-                </a:solidFill>
-              </a:rPr>
-              <a:t>ORC Indonesia — PMI · IPB · BHLK · American Red Cross</a:t>
-            </a:r>
-          </a:p>
-        </p:txBody>
-      </p:sp>
-      <p:sp>
-        <p:nvSpPr>
-          <p:cNvPr id="7" name="TextBox 6"/>
+          </a:p>
+        </p:txBody>
+      </p:sp>
+      <p:pic>
+        <p:nvPicPr>
+          <p:cNvPr id="7" name="Picture 6" descr="Palang Merah Indonesia logo"/>
+          <p:cNvPicPr>
+            <a:picLocks noChangeAspect="1"/>
+          </p:cNvPicPr>
+          <p:nvPr/>
+        </p:nvPicPr>
+        <p:blipFill>
+          <a:blip r:embed="rId3"/>
+          <a:stretch>
+            <a:fillRect/>
+          </a:stretch>
+        </p:blipFill>
+        <p:spPr>
+          <a:xfrm>
+            <a:off x="1369770" y="4576572"/>
+            <a:ext cx="939918" cy="365760"/>
+          </a:xfrm>
+          <a:prstGeom prst="rect">
+            <a:avLst/>
+          </a:prstGeom>
+        </p:spPr>
+      </p:pic>
+      <p:pic>
+        <p:nvPicPr>
+          <p:cNvPr id="8" name="Picture 7" descr="Institut Pertanian Bogor logo"/>
+          <p:cNvPicPr>
+            <a:picLocks noChangeAspect="1"/>
+          </p:cNvPicPr>
+          <p:nvPr/>
+        </p:nvPicPr>
+        <p:blipFill>
+          <a:blip r:embed="rId4"/>
+          <a:stretch>
+            <a:fillRect/>
+          </a:stretch>
+        </p:blipFill>
+        <p:spPr>
+          <a:xfrm>
+            <a:off x="2602296" y="4576572"/>
+            <a:ext cx="539014" cy="365760"/>
+          </a:xfrm>
+          <a:prstGeom prst="rect">
+            <a:avLst/>
+          </a:prstGeom>
+        </p:spPr>
+      </p:pic>
+      <p:pic>
+        <p:nvPicPr>
+          <p:cNvPr id="9" name="Picture 8" descr="Balai Hidrologi dan Lingkungan Keairan logo"/>
+          <p:cNvPicPr>
+            <a:picLocks noChangeAspect="1"/>
+          </p:cNvPicPr>
+          <p:nvPr/>
+        </p:nvPicPr>
+        <p:blipFill>
+          <a:blip r:embed="rId5"/>
+          <a:stretch>
+            <a:fillRect/>
+          </a:stretch>
+        </p:blipFill>
+        <p:spPr>
+          <a:xfrm>
+            <a:off x="3433918" y="4576572"/>
+            <a:ext cx="365760" cy="365760"/>
+          </a:xfrm>
+          <a:prstGeom prst="rect">
+            <a:avLst/>
+          </a:prstGeom>
+        </p:spPr>
+      </p:pic>
+      <p:pic>
+        <p:nvPicPr>
+          <p:cNvPr id="10" name="Picture 9" descr="American Red Cross logo"/>
+          <p:cNvPicPr>
+            <a:picLocks noChangeAspect="1"/>
+          </p:cNvPicPr>
+          <p:nvPr/>
+        </p:nvPicPr>
+        <p:blipFill>
+          <a:blip r:embed="rId6"/>
+          <a:stretch>
+            <a:fillRect/>
+          </a:stretch>
+        </p:blipFill>
+        <p:spPr>
+          <a:xfrm>
+            <a:off x="4092286" y="4576572"/>
+            <a:ext cx="1103335" cy="365760"/>
+          </a:xfrm>
+          <a:prstGeom prst="rect">
+            <a:avLst/>
+          </a:prstGeom>
+        </p:spPr>
+      </p:pic>
+      <p:sp>
+        <p:nvSpPr>
+          <p:cNvPr id="11" name="TextBox 10"/>
           <p:cNvSpPr txBox="1"/>
           <p:nvPr/>
         </p:nvSpPr>
@@ -6702,41 +7408,133 @@
       </p:sp>
       <p:sp>
         <p:nvSpPr>
-          <p:cNvPr id="4" name="TextBox 3"/>
-          <p:cNvSpPr txBox="1"/>
-          <p:nvPr/>
-        </p:nvSpPr>
-        <p:spPr>
-          <a:xfrm>
-            <a:off x="3124200" y="4667250"/>
-            <a:ext cx="2895600" cy="274638"/>
-          </a:xfrm>
-          <a:prstGeom prst="rect">
-            <a:avLst/>
-          </a:prstGeom>
-          <a:noFill/>
-        </p:spPr>
-        <p:txBody>
-          <a:bodyPr wrap="square">
-            <a:spAutoFit/>
-          </a:bodyPr>
+          <p:cNvPr id="4" name="Rectangle 3" descr=""/>
+          <p:cNvSpPr/>
+          <p:nvPr/>
+        </p:nvSpPr>
+        <p:spPr>
+          <a:xfrm>
+            <a:off x="274320" y="4443984"/>
+            <a:ext cx="1517904" cy="676656"/>
+          </a:xfrm>
+          <a:prstGeom prst="rect">
+            <a:avLst/>
+          </a:prstGeom>
+          <a:solidFill>
+            <a:srgbClr val="FFFFFF"/>
+          </a:solidFill>
+          <a:ln>
+            <a:noFill/>
+          </a:ln>
+          <a:effectLst/>
+        </p:spPr>
+        <p:txBody>
+          <a:bodyPr rtlCol="0" anchor="ctr"/>
           <a:lstStyle/>
           <a:p>
             <a:pPr algn="ctr"/>
-            <a:r>
-              <a:rPr sz="800">
-                <a:solidFill>
-                  <a:srgbClr val="6B6A66"/>
-                </a:solidFill>
-              </a:rPr>
-              <a:t>ORC Indonesia — PMI · IPB · BHLK · American Red Cross</a:t>
-            </a:r>
-          </a:p>
-        </p:txBody>
-      </p:sp>
-      <p:sp>
-        <p:nvSpPr>
-          <p:cNvPr id="5" name="TextBox 4"/>
+          </a:p>
+        </p:txBody>
+      </p:sp>
+      <p:pic>
+        <p:nvPicPr>
+          <p:cNvPr id="5" name="Picture 4" descr="Palang Merah Indonesia logo"/>
+          <p:cNvPicPr>
+            <a:picLocks noChangeAspect="1"/>
+          </p:cNvPicPr>
+          <p:nvPr/>
+        </p:nvPicPr>
+        <p:blipFill>
+          <a:blip r:embed="rId2"/>
+          <a:stretch>
+            <a:fillRect/>
+          </a:stretch>
+        </p:blipFill>
+        <p:spPr>
+          <a:xfrm>
+            <a:off x="1369770" y="4576572"/>
+            <a:ext cx="939918" cy="365760"/>
+          </a:xfrm>
+          <a:prstGeom prst="rect">
+            <a:avLst/>
+          </a:prstGeom>
+        </p:spPr>
+      </p:pic>
+      <p:pic>
+        <p:nvPicPr>
+          <p:cNvPr id="6" name="Picture 5" descr="Institut Pertanian Bogor logo"/>
+          <p:cNvPicPr>
+            <a:picLocks noChangeAspect="1"/>
+          </p:cNvPicPr>
+          <p:nvPr/>
+        </p:nvPicPr>
+        <p:blipFill>
+          <a:blip r:embed="rId3"/>
+          <a:stretch>
+            <a:fillRect/>
+          </a:stretch>
+        </p:blipFill>
+        <p:spPr>
+          <a:xfrm>
+            <a:off x="2602296" y="4576572"/>
+            <a:ext cx="539014" cy="365760"/>
+          </a:xfrm>
+          <a:prstGeom prst="rect">
+            <a:avLst/>
+          </a:prstGeom>
+        </p:spPr>
+      </p:pic>
+      <p:pic>
+        <p:nvPicPr>
+          <p:cNvPr id="7" name="Picture 6" descr="Balai Hidrologi dan Lingkungan Keairan logo"/>
+          <p:cNvPicPr>
+            <a:picLocks noChangeAspect="1"/>
+          </p:cNvPicPr>
+          <p:nvPr/>
+        </p:nvPicPr>
+        <p:blipFill>
+          <a:blip r:embed="rId4"/>
+          <a:stretch>
+            <a:fillRect/>
+          </a:stretch>
+        </p:blipFill>
+        <p:spPr>
+          <a:xfrm>
+            <a:off x="3433918" y="4576572"/>
+            <a:ext cx="365760" cy="365760"/>
+          </a:xfrm>
+          <a:prstGeom prst="rect">
+            <a:avLst/>
+          </a:prstGeom>
+        </p:spPr>
+      </p:pic>
+      <p:pic>
+        <p:nvPicPr>
+          <p:cNvPr id="8" name="Picture 7" descr="American Red Cross logo"/>
+          <p:cNvPicPr>
+            <a:picLocks noChangeAspect="1"/>
+          </p:cNvPicPr>
+          <p:nvPr/>
+        </p:nvPicPr>
+        <p:blipFill>
+          <a:blip r:embed="rId5"/>
+          <a:stretch>
+            <a:fillRect/>
+          </a:stretch>
+        </p:blipFill>
+        <p:spPr>
+          <a:xfrm>
+            <a:off x="4092286" y="4576572"/>
+            <a:ext cx="1103335" cy="365760"/>
+          </a:xfrm>
+          <a:prstGeom prst="rect">
+            <a:avLst/>
+          </a:prstGeom>
+        </p:spPr>
+      </p:pic>
+      <p:sp>
+        <p:nvSpPr>
+          <p:cNvPr id="9" name="TextBox 8"/>
           <p:cNvSpPr txBox="1"/>
           <p:nvPr/>
         </p:nvSpPr>
@@ -6897,41 +7695,133 @@
       </p:sp>
       <p:sp>
         <p:nvSpPr>
-          <p:cNvPr id="4" name="TextBox 3"/>
-          <p:cNvSpPr txBox="1"/>
-          <p:nvPr/>
-        </p:nvSpPr>
-        <p:spPr>
-          <a:xfrm>
-            <a:off x="3124200" y="4667250"/>
-            <a:ext cx="2895600" cy="274638"/>
-          </a:xfrm>
-          <a:prstGeom prst="rect">
-            <a:avLst/>
-          </a:prstGeom>
-          <a:noFill/>
-        </p:spPr>
-        <p:txBody>
-          <a:bodyPr wrap="square">
-            <a:spAutoFit/>
-          </a:bodyPr>
+          <p:cNvPr id="4" name="Rectangle 3" descr=""/>
+          <p:cNvSpPr/>
+          <p:nvPr/>
+        </p:nvSpPr>
+        <p:spPr>
+          <a:xfrm>
+            <a:off x="274320" y="4443984"/>
+            <a:ext cx="1517904" cy="676656"/>
+          </a:xfrm>
+          <a:prstGeom prst="rect">
+            <a:avLst/>
+          </a:prstGeom>
+          <a:solidFill>
+            <a:srgbClr val="FFFFFF"/>
+          </a:solidFill>
+          <a:ln>
+            <a:noFill/>
+          </a:ln>
+          <a:effectLst/>
+        </p:spPr>
+        <p:txBody>
+          <a:bodyPr rtlCol="0" anchor="ctr"/>
           <a:lstStyle/>
           <a:p>
             <a:pPr algn="ctr"/>
-            <a:r>
-              <a:rPr sz="800">
-                <a:solidFill>
-                  <a:srgbClr val="6B6A66"/>
-                </a:solidFill>
-              </a:rPr>
-              <a:t>ORC Indonesia — PMI · IPB · BHLK · American Red Cross</a:t>
-            </a:r>
-          </a:p>
-        </p:txBody>
-      </p:sp>
-      <p:sp>
-        <p:nvSpPr>
-          <p:cNvPr id="5" name="TextBox 4"/>
+          </a:p>
+        </p:txBody>
+      </p:sp>
+      <p:pic>
+        <p:nvPicPr>
+          <p:cNvPr id="5" name="Picture 4" descr="Palang Merah Indonesia logo"/>
+          <p:cNvPicPr>
+            <a:picLocks noChangeAspect="1"/>
+          </p:cNvPicPr>
+          <p:nvPr/>
+        </p:nvPicPr>
+        <p:blipFill>
+          <a:blip r:embed="rId2"/>
+          <a:stretch>
+            <a:fillRect/>
+          </a:stretch>
+        </p:blipFill>
+        <p:spPr>
+          <a:xfrm>
+            <a:off x="1369770" y="4576572"/>
+            <a:ext cx="939918" cy="365760"/>
+          </a:xfrm>
+          <a:prstGeom prst="rect">
+            <a:avLst/>
+          </a:prstGeom>
+        </p:spPr>
+      </p:pic>
+      <p:pic>
+        <p:nvPicPr>
+          <p:cNvPr id="6" name="Picture 5" descr="Institut Pertanian Bogor logo"/>
+          <p:cNvPicPr>
+            <a:picLocks noChangeAspect="1"/>
+          </p:cNvPicPr>
+          <p:nvPr/>
+        </p:nvPicPr>
+        <p:blipFill>
+          <a:blip r:embed="rId3"/>
+          <a:stretch>
+            <a:fillRect/>
+          </a:stretch>
+        </p:blipFill>
+        <p:spPr>
+          <a:xfrm>
+            <a:off x="2602296" y="4576572"/>
+            <a:ext cx="539014" cy="365760"/>
+          </a:xfrm>
+          <a:prstGeom prst="rect">
+            <a:avLst/>
+          </a:prstGeom>
+        </p:spPr>
+      </p:pic>
+      <p:pic>
+        <p:nvPicPr>
+          <p:cNvPr id="7" name="Picture 6" descr="Balai Hidrologi dan Lingkungan Keairan logo"/>
+          <p:cNvPicPr>
+            <a:picLocks noChangeAspect="1"/>
+          </p:cNvPicPr>
+          <p:nvPr/>
+        </p:nvPicPr>
+        <p:blipFill>
+          <a:blip r:embed="rId4"/>
+          <a:stretch>
+            <a:fillRect/>
+          </a:stretch>
+        </p:blipFill>
+        <p:spPr>
+          <a:xfrm>
+            <a:off x="3433918" y="4576572"/>
+            <a:ext cx="365760" cy="365760"/>
+          </a:xfrm>
+          <a:prstGeom prst="rect">
+            <a:avLst/>
+          </a:prstGeom>
+        </p:spPr>
+      </p:pic>
+      <p:pic>
+        <p:nvPicPr>
+          <p:cNvPr id="8" name="Picture 7" descr="American Red Cross logo"/>
+          <p:cNvPicPr>
+            <a:picLocks noChangeAspect="1"/>
+          </p:cNvPicPr>
+          <p:nvPr/>
+        </p:nvPicPr>
+        <p:blipFill>
+          <a:blip r:embed="rId5"/>
+          <a:stretch>
+            <a:fillRect/>
+          </a:stretch>
+        </p:blipFill>
+        <p:spPr>
+          <a:xfrm>
+            <a:off x="4092286" y="4576572"/>
+            <a:ext cx="1103335" cy="365760"/>
+          </a:xfrm>
+          <a:prstGeom prst="rect">
+            <a:avLst/>
+          </a:prstGeom>
+        </p:spPr>
+      </p:pic>
+      <p:sp>
+        <p:nvSpPr>
+          <p:cNvPr id="9" name="TextBox 8"/>
           <p:cNvSpPr txBox="1"/>
           <p:nvPr/>
         </p:nvSpPr>
@@ -7114,41 +8004,133 @@
       </p:sp>
       <p:sp>
         <p:nvSpPr>
-          <p:cNvPr id="4" name="TextBox 3"/>
-          <p:cNvSpPr txBox="1"/>
-          <p:nvPr/>
-        </p:nvSpPr>
-        <p:spPr>
-          <a:xfrm>
-            <a:off x="3124200" y="4667250"/>
-            <a:ext cx="2895600" cy="274638"/>
-          </a:xfrm>
-          <a:prstGeom prst="rect">
-            <a:avLst/>
-          </a:prstGeom>
-          <a:noFill/>
-        </p:spPr>
-        <p:txBody>
-          <a:bodyPr wrap="square">
-            <a:spAutoFit/>
-          </a:bodyPr>
+          <p:cNvPr id="4" name="Rectangle 3" descr=""/>
+          <p:cNvSpPr/>
+          <p:nvPr/>
+        </p:nvSpPr>
+        <p:spPr>
+          <a:xfrm>
+            <a:off x="274320" y="4443984"/>
+            <a:ext cx="1517904" cy="676656"/>
+          </a:xfrm>
+          <a:prstGeom prst="rect">
+            <a:avLst/>
+          </a:prstGeom>
+          <a:solidFill>
+            <a:srgbClr val="FFFFFF"/>
+          </a:solidFill>
+          <a:ln>
+            <a:noFill/>
+          </a:ln>
+          <a:effectLst/>
+        </p:spPr>
+        <p:txBody>
+          <a:bodyPr rtlCol="0" anchor="ctr"/>
           <a:lstStyle/>
           <a:p>
             <a:pPr algn="ctr"/>
-            <a:r>
-              <a:rPr sz="800">
-                <a:solidFill>
-                  <a:srgbClr val="6B6A66"/>
-                </a:solidFill>
-              </a:rPr>
-              <a:t>ORC Indonesia — PMI · IPB · BHLK · American Red Cross</a:t>
-            </a:r>
-          </a:p>
-        </p:txBody>
-      </p:sp>
-      <p:sp>
-        <p:nvSpPr>
-          <p:cNvPr id="5" name="TextBox 4"/>
+          </a:p>
+        </p:txBody>
+      </p:sp>
+      <p:pic>
+        <p:nvPicPr>
+          <p:cNvPr id="5" name="Picture 4" descr="Palang Merah Indonesia logo"/>
+          <p:cNvPicPr>
+            <a:picLocks noChangeAspect="1"/>
+          </p:cNvPicPr>
+          <p:nvPr/>
+        </p:nvPicPr>
+        <p:blipFill>
+          <a:blip r:embed="rId2"/>
+          <a:stretch>
+            <a:fillRect/>
+          </a:stretch>
+        </p:blipFill>
+        <p:spPr>
+          <a:xfrm>
+            <a:off x="1369770" y="4576572"/>
+            <a:ext cx="939918" cy="365760"/>
+          </a:xfrm>
+          <a:prstGeom prst="rect">
+            <a:avLst/>
+          </a:prstGeom>
+        </p:spPr>
+      </p:pic>
+      <p:pic>
+        <p:nvPicPr>
+          <p:cNvPr id="6" name="Picture 5" descr="Institut Pertanian Bogor logo"/>
+          <p:cNvPicPr>
+            <a:picLocks noChangeAspect="1"/>
+          </p:cNvPicPr>
+          <p:nvPr/>
+        </p:nvPicPr>
+        <p:blipFill>
+          <a:blip r:embed="rId3"/>
+          <a:stretch>
+            <a:fillRect/>
+          </a:stretch>
+        </p:blipFill>
+        <p:spPr>
+          <a:xfrm>
+            <a:off x="2602296" y="4576572"/>
+            <a:ext cx="539014" cy="365760"/>
+          </a:xfrm>
+          <a:prstGeom prst="rect">
+            <a:avLst/>
+          </a:prstGeom>
+        </p:spPr>
+      </p:pic>
+      <p:pic>
+        <p:nvPicPr>
+          <p:cNvPr id="7" name="Picture 6" descr="Balai Hidrologi dan Lingkungan Keairan logo"/>
+          <p:cNvPicPr>
+            <a:picLocks noChangeAspect="1"/>
+          </p:cNvPicPr>
+          <p:nvPr/>
+        </p:nvPicPr>
+        <p:blipFill>
+          <a:blip r:embed="rId4"/>
+          <a:stretch>
+            <a:fillRect/>
+          </a:stretch>
+        </p:blipFill>
+        <p:spPr>
+          <a:xfrm>
+            <a:off x="3433918" y="4576572"/>
+            <a:ext cx="365760" cy="365760"/>
+          </a:xfrm>
+          <a:prstGeom prst="rect">
+            <a:avLst/>
+          </a:prstGeom>
+        </p:spPr>
+      </p:pic>
+      <p:pic>
+        <p:nvPicPr>
+          <p:cNvPr id="8" name="Picture 7" descr="American Red Cross logo"/>
+          <p:cNvPicPr>
+            <a:picLocks noChangeAspect="1"/>
+          </p:cNvPicPr>
+          <p:nvPr/>
+        </p:nvPicPr>
+        <p:blipFill>
+          <a:blip r:embed="rId5"/>
+          <a:stretch>
+            <a:fillRect/>
+          </a:stretch>
+        </p:blipFill>
+        <p:spPr>
+          <a:xfrm>
+            <a:off x="4092286" y="4576572"/>
+            <a:ext cx="1103335" cy="365760"/>
+          </a:xfrm>
+          <a:prstGeom prst="rect">
+            <a:avLst/>
+          </a:prstGeom>
+        </p:spPr>
+      </p:pic>
+      <p:sp>
+        <p:nvSpPr>
+          <p:cNvPr id="9" name="TextBox 8"/>
           <p:cNvSpPr txBox="1"/>
           <p:nvPr/>
         </p:nvSpPr>
@@ -7298,41 +8280,133 @@
       </p:sp>
       <p:sp>
         <p:nvSpPr>
-          <p:cNvPr id="4" name="TextBox 3"/>
-          <p:cNvSpPr txBox="1"/>
-          <p:nvPr/>
-        </p:nvSpPr>
-        <p:spPr>
-          <a:xfrm>
-            <a:off x="3124200" y="4667250"/>
-            <a:ext cx="2895600" cy="274638"/>
-          </a:xfrm>
-          <a:prstGeom prst="rect">
-            <a:avLst/>
-          </a:prstGeom>
-          <a:noFill/>
-        </p:spPr>
-        <p:txBody>
-          <a:bodyPr wrap="square">
-            <a:spAutoFit/>
-          </a:bodyPr>
+          <p:cNvPr id="4" name="Rectangle 3" descr=""/>
+          <p:cNvSpPr/>
+          <p:nvPr/>
+        </p:nvSpPr>
+        <p:spPr>
+          <a:xfrm>
+            <a:off x="274320" y="4443984"/>
+            <a:ext cx="1517904" cy="676656"/>
+          </a:xfrm>
+          <a:prstGeom prst="rect">
+            <a:avLst/>
+          </a:prstGeom>
+          <a:solidFill>
+            <a:srgbClr val="FFFFFF"/>
+          </a:solidFill>
+          <a:ln>
+            <a:noFill/>
+          </a:ln>
+          <a:effectLst/>
+        </p:spPr>
+        <p:txBody>
+          <a:bodyPr rtlCol="0" anchor="ctr"/>
           <a:lstStyle/>
           <a:p>
             <a:pPr algn="ctr"/>
-            <a:r>
-              <a:rPr sz="800">
-                <a:solidFill>
-                  <a:srgbClr val="6B6A66"/>
-                </a:solidFill>
-              </a:rPr>
-              <a:t>ORC Indonesia — PMI · IPB · BHLK · American Red Cross</a:t>
-            </a:r>
-          </a:p>
-        </p:txBody>
-      </p:sp>
-      <p:sp>
-        <p:nvSpPr>
-          <p:cNvPr id="5" name="TextBox 4"/>
+          </a:p>
+        </p:txBody>
+      </p:sp>
+      <p:pic>
+        <p:nvPicPr>
+          <p:cNvPr id="5" name="Picture 4" descr="Palang Merah Indonesia logo"/>
+          <p:cNvPicPr>
+            <a:picLocks noChangeAspect="1"/>
+          </p:cNvPicPr>
+          <p:nvPr/>
+        </p:nvPicPr>
+        <p:blipFill>
+          <a:blip r:embed="rId2"/>
+          <a:stretch>
+            <a:fillRect/>
+          </a:stretch>
+        </p:blipFill>
+        <p:spPr>
+          <a:xfrm>
+            <a:off x="1369770" y="4576572"/>
+            <a:ext cx="939918" cy="365760"/>
+          </a:xfrm>
+          <a:prstGeom prst="rect">
+            <a:avLst/>
+          </a:prstGeom>
+        </p:spPr>
+      </p:pic>
+      <p:pic>
+        <p:nvPicPr>
+          <p:cNvPr id="6" name="Picture 5" descr="Institut Pertanian Bogor logo"/>
+          <p:cNvPicPr>
+            <a:picLocks noChangeAspect="1"/>
+          </p:cNvPicPr>
+          <p:nvPr/>
+        </p:nvPicPr>
+        <p:blipFill>
+          <a:blip r:embed="rId3"/>
+          <a:stretch>
+            <a:fillRect/>
+          </a:stretch>
+        </p:blipFill>
+        <p:spPr>
+          <a:xfrm>
+            <a:off x="2602296" y="4576572"/>
+            <a:ext cx="539014" cy="365760"/>
+          </a:xfrm>
+          <a:prstGeom prst="rect">
+            <a:avLst/>
+          </a:prstGeom>
+        </p:spPr>
+      </p:pic>
+      <p:pic>
+        <p:nvPicPr>
+          <p:cNvPr id="7" name="Picture 6" descr="Balai Hidrologi dan Lingkungan Keairan logo"/>
+          <p:cNvPicPr>
+            <a:picLocks noChangeAspect="1"/>
+          </p:cNvPicPr>
+          <p:nvPr/>
+        </p:nvPicPr>
+        <p:blipFill>
+          <a:blip r:embed="rId4"/>
+          <a:stretch>
+            <a:fillRect/>
+          </a:stretch>
+        </p:blipFill>
+        <p:spPr>
+          <a:xfrm>
+            <a:off x="3433918" y="4576572"/>
+            <a:ext cx="365760" cy="365760"/>
+          </a:xfrm>
+          <a:prstGeom prst="rect">
+            <a:avLst/>
+          </a:prstGeom>
+        </p:spPr>
+      </p:pic>
+      <p:pic>
+        <p:nvPicPr>
+          <p:cNvPr id="8" name="Picture 7" descr="American Red Cross logo"/>
+          <p:cNvPicPr>
+            <a:picLocks noChangeAspect="1"/>
+          </p:cNvPicPr>
+          <p:nvPr/>
+        </p:nvPicPr>
+        <p:blipFill>
+          <a:blip r:embed="rId5"/>
+          <a:stretch>
+            <a:fillRect/>
+          </a:stretch>
+        </p:blipFill>
+        <p:spPr>
+          <a:xfrm>
+            <a:off x="4092286" y="4576572"/>
+            <a:ext cx="1103335" cy="365760"/>
+          </a:xfrm>
+          <a:prstGeom prst="rect">
+            <a:avLst/>
+          </a:prstGeom>
+        </p:spPr>
+      </p:pic>
+      <p:sp>
+        <p:nvSpPr>
+          <p:cNvPr id="9" name="TextBox 8"/>
           <p:cNvSpPr txBox="1"/>
           <p:nvPr/>
         </p:nvSpPr>
@@ -7482,41 +8556,133 @@
       </p:sp>
       <p:sp>
         <p:nvSpPr>
-          <p:cNvPr id="4" name="TextBox 3"/>
-          <p:cNvSpPr txBox="1"/>
-          <p:nvPr/>
-        </p:nvSpPr>
-        <p:spPr>
-          <a:xfrm>
-            <a:off x="3124200" y="4667250"/>
-            <a:ext cx="2895600" cy="274638"/>
-          </a:xfrm>
-          <a:prstGeom prst="rect">
-            <a:avLst/>
-          </a:prstGeom>
-          <a:noFill/>
-        </p:spPr>
-        <p:txBody>
-          <a:bodyPr wrap="square">
-            <a:spAutoFit/>
-          </a:bodyPr>
+          <p:cNvPr id="4" name="Rectangle 3" descr=""/>
+          <p:cNvSpPr/>
+          <p:nvPr/>
+        </p:nvSpPr>
+        <p:spPr>
+          <a:xfrm>
+            <a:off x="274320" y="4443984"/>
+            <a:ext cx="1517904" cy="676656"/>
+          </a:xfrm>
+          <a:prstGeom prst="rect">
+            <a:avLst/>
+          </a:prstGeom>
+          <a:solidFill>
+            <a:srgbClr val="FFFFFF"/>
+          </a:solidFill>
+          <a:ln>
+            <a:noFill/>
+          </a:ln>
+          <a:effectLst/>
+        </p:spPr>
+        <p:txBody>
+          <a:bodyPr rtlCol="0" anchor="ctr"/>
           <a:lstStyle/>
           <a:p>
             <a:pPr algn="ctr"/>
-            <a:r>
-              <a:rPr sz="800">
-                <a:solidFill>
-                  <a:srgbClr val="6B6A66"/>
-                </a:solidFill>
-              </a:rPr>
-              <a:t>ORC Indonesia — PMI · IPB · BHLK · American Red Cross</a:t>
-            </a:r>
-          </a:p>
-        </p:txBody>
-      </p:sp>
-      <p:sp>
-        <p:nvSpPr>
-          <p:cNvPr id="5" name="TextBox 4"/>
+          </a:p>
+        </p:txBody>
+      </p:sp>
+      <p:pic>
+        <p:nvPicPr>
+          <p:cNvPr id="5" name="Picture 4" descr="Palang Merah Indonesia logo"/>
+          <p:cNvPicPr>
+            <a:picLocks noChangeAspect="1"/>
+          </p:cNvPicPr>
+          <p:nvPr/>
+        </p:nvPicPr>
+        <p:blipFill>
+          <a:blip r:embed="rId2"/>
+          <a:stretch>
+            <a:fillRect/>
+          </a:stretch>
+        </p:blipFill>
+        <p:spPr>
+          <a:xfrm>
+            <a:off x="1369770" y="4576572"/>
+            <a:ext cx="939918" cy="365760"/>
+          </a:xfrm>
+          <a:prstGeom prst="rect">
+            <a:avLst/>
+          </a:prstGeom>
+        </p:spPr>
+      </p:pic>
+      <p:pic>
+        <p:nvPicPr>
+          <p:cNvPr id="6" name="Picture 5" descr="Institut Pertanian Bogor logo"/>
+          <p:cNvPicPr>
+            <a:picLocks noChangeAspect="1"/>
+          </p:cNvPicPr>
+          <p:nvPr/>
+        </p:nvPicPr>
+        <p:blipFill>
+          <a:blip r:embed="rId3"/>
+          <a:stretch>
+            <a:fillRect/>
+          </a:stretch>
+        </p:blipFill>
+        <p:spPr>
+          <a:xfrm>
+            <a:off x="2602296" y="4576572"/>
+            <a:ext cx="539014" cy="365760"/>
+          </a:xfrm>
+          <a:prstGeom prst="rect">
+            <a:avLst/>
+          </a:prstGeom>
+        </p:spPr>
+      </p:pic>
+      <p:pic>
+        <p:nvPicPr>
+          <p:cNvPr id="7" name="Picture 6" descr="Balai Hidrologi dan Lingkungan Keairan logo"/>
+          <p:cNvPicPr>
+            <a:picLocks noChangeAspect="1"/>
+          </p:cNvPicPr>
+          <p:nvPr/>
+        </p:nvPicPr>
+        <p:blipFill>
+          <a:blip r:embed="rId4"/>
+          <a:stretch>
+            <a:fillRect/>
+          </a:stretch>
+        </p:blipFill>
+        <p:spPr>
+          <a:xfrm>
+            <a:off x="3433918" y="4576572"/>
+            <a:ext cx="365760" cy="365760"/>
+          </a:xfrm>
+          <a:prstGeom prst="rect">
+            <a:avLst/>
+          </a:prstGeom>
+        </p:spPr>
+      </p:pic>
+      <p:pic>
+        <p:nvPicPr>
+          <p:cNvPr id="8" name="Picture 7" descr="American Red Cross logo"/>
+          <p:cNvPicPr>
+            <a:picLocks noChangeAspect="1"/>
+          </p:cNvPicPr>
+          <p:nvPr/>
+        </p:nvPicPr>
+        <p:blipFill>
+          <a:blip r:embed="rId5"/>
+          <a:stretch>
+            <a:fillRect/>
+          </a:stretch>
+        </p:blipFill>
+        <p:spPr>
+          <a:xfrm>
+            <a:off x="4092286" y="4576572"/>
+            <a:ext cx="1103335" cy="365760"/>
+          </a:xfrm>
+          <a:prstGeom prst="rect">
+            <a:avLst/>
+          </a:prstGeom>
+        </p:spPr>
+      </p:pic>
+      <p:sp>
+        <p:nvSpPr>
+          <p:cNvPr id="9" name="TextBox 8"/>
           <p:cNvSpPr txBox="1"/>
           <p:nvPr/>
         </p:nvSpPr>
@@ -7688,41 +8854,133 @@
       </p:sp>
       <p:sp>
         <p:nvSpPr>
-          <p:cNvPr id="4" name="TextBox 3"/>
-          <p:cNvSpPr txBox="1"/>
-          <p:nvPr/>
-        </p:nvSpPr>
-        <p:spPr>
-          <a:xfrm>
-            <a:off x="3124200" y="4667250"/>
-            <a:ext cx="2895600" cy="274638"/>
-          </a:xfrm>
-          <a:prstGeom prst="rect">
-            <a:avLst/>
-          </a:prstGeom>
-          <a:noFill/>
-        </p:spPr>
-        <p:txBody>
-          <a:bodyPr wrap="square">
-            <a:spAutoFit/>
-          </a:bodyPr>
+          <p:cNvPr id="4" name="Rectangle 3" descr=""/>
+          <p:cNvSpPr/>
+          <p:nvPr/>
+        </p:nvSpPr>
+        <p:spPr>
+          <a:xfrm>
+            <a:off x="274320" y="4443984"/>
+            <a:ext cx="1517904" cy="676656"/>
+          </a:xfrm>
+          <a:prstGeom prst="rect">
+            <a:avLst/>
+          </a:prstGeom>
+          <a:solidFill>
+            <a:srgbClr val="FFFFFF"/>
+          </a:solidFill>
+          <a:ln>
+            <a:noFill/>
+          </a:ln>
+          <a:effectLst/>
+        </p:spPr>
+        <p:txBody>
+          <a:bodyPr rtlCol="0" anchor="ctr"/>
           <a:lstStyle/>
           <a:p>
             <a:pPr algn="ctr"/>
-            <a:r>
-              <a:rPr sz="800">
-                <a:solidFill>
-                  <a:srgbClr val="6B6A66"/>
-                </a:solidFill>
-              </a:rPr>
-              <a:t>ORC Indonesia — PMI · IPB · BHLK · American Red Cross</a:t>
-            </a:r>
-          </a:p>
-        </p:txBody>
-      </p:sp>
-      <p:sp>
-        <p:nvSpPr>
-          <p:cNvPr id="5" name="TextBox 4"/>
+          </a:p>
+        </p:txBody>
+      </p:sp>
+      <p:pic>
+        <p:nvPicPr>
+          <p:cNvPr id="5" name="Picture 4" descr="Palang Merah Indonesia logo"/>
+          <p:cNvPicPr>
+            <a:picLocks noChangeAspect="1"/>
+          </p:cNvPicPr>
+          <p:nvPr/>
+        </p:nvPicPr>
+        <p:blipFill>
+          <a:blip r:embed="rId2"/>
+          <a:stretch>
+            <a:fillRect/>
+          </a:stretch>
+        </p:blipFill>
+        <p:spPr>
+          <a:xfrm>
+            <a:off x="1369770" y="4576572"/>
+            <a:ext cx="939918" cy="365760"/>
+          </a:xfrm>
+          <a:prstGeom prst="rect">
+            <a:avLst/>
+          </a:prstGeom>
+        </p:spPr>
+      </p:pic>
+      <p:pic>
+        <p:nvPicPr>
+          <p:cNvPr id="6" name="Picture 5" descr="Institut Pertanian Bogor logo"/>
+          <p:cNvPicPr>
+            <a:picLocks noChangeAspect="1"/>
+          </p:cNvPicPr>
+          <p:nvPr/>
+        </p:nvPicPr>
+        <p:blipFill>
+          <a:blip r:embed="rId3"/>
+          <a:stretch>
+            <a:fillRect/>
+          </a:stretch>
+        </p:blipFill>
+        <p:spPr>
+          <a:xfrm>
+            <a:off x="2602296" y="4576572"/>
+            <a:ext cx="539014" cy="365760"/>
+          </a:xfrm>
+          <a:prstGeom prst="rect">
+            <a:avLst/>
+          </a:prstGeom>
+        </p:spPr>
+      </p:pic>
+      <p:pic>
+        <p:nvPicPr>
+          <p:cNvPr id="7" name="Picture 6" descr="Balai Hidrologi dan Lingkungan Keairan logo"/>
+          <p:cNvPicPr>
+            <a:picLocks noChangeAspect="1"/>
+          </p:cNvPicPr>
+          <p:nvPr/>
+        </p:nvPicPr>
+        <p:blipFill>
+          <a:blip r:embed="rId4"/>
+          <a:stretch>
+            <a:fillRect/>
+          </a:stretch>
+        </p:blipFill>
+        <p:spPr>
+          <a:xfrm>
+            <a:off x="3433918" y="4576572"/>
+            <a:ext cx="365760" cy="365760"/>
+          </a:xfrm>
+          <a:prstGeom prst="rect">
+            <a:avLst/>
+          </a:prstGeom>
+        </p:spPr>
+      </p:pic>
+      <p:pic>
+        <p:nvPicPr>
+          <p:cNvPr id="8" name="Picture 7" descr="American Red Cross logo"/>
+          <p:cNvPicPr>
+            <a:picLocks noChangeAspect="1"/>
+          </p:cNvPicPr>
+          <p:nvPr/>
+        </p:nvPicPr>
+        <p:blipFill>
+          <a:blip r:embed="rId5"/>
+          <a:stretch>
+            <a:fillRect/>
+          </a:stretch>
+        </p:blipFill>
+        <p:spPr>
+          <a:xfrm>
+            <a:off x="4092286" y="4576572"/>
+            <a:ext cx="1103335" cy="365760"/>
+          </a:xfrm>
+          <a:prstGeom prst="rect">
+            <a:avLst/>
+          </a:prstGeom>
+        </p:spPr>
+      </p:pic>
+      <p:sp>
+        <p:nvSpPr>
+          <p:cNvPr id="9" name="TextBox 8"/>
           <p:cNvSpPr txBox="1"/>
           <p:nvPr/>
         </p:nvSpPr>
@@ -7872,41 +9130,133 @@
       </p:sp>
       <p:sp>
         <p:nvSpPr>
-          <p:cNvPr id="4" name="TextBox 3"/>
-          <p:cNvSpPr txBox="1"/>
-          <p:nvPr/>
-        </p:nvSpPr>
-        <p:spPr>
-          <a:xfrm>
-            <a:off x="3124200" y="4667250"/>
-            <a:ext cx="2895600" cy="274638"/>
-          </a:xfrm>
-          <a:prstGeom prst="rect">
-            <a:avLst/>
-          </a:prstGeom>
-          <a:noFill/>
-        </p:spPr>
-        <p:txBody>
-          <a:bodyPr wrap="square">
-            <a:spAutoFit/>
-          </a:bodyPr>
+          <p:cNvPr id="4" name="Rectangle 3" descr=""/>
+          <p:cNvSpPr/>
+          <p:nvPr/>
+        </p:nvSpPr>
+        <p:spPr>
+          <a:xfrm>
+            <a:off x="274320" y="4443984"/>
+            <a:ext cx="1517904" cy="676656"/>
+          </a:xfrm>
+          <a:prstGeom prst="rect">
+            <a:avLst/>
+          </a:prstGeom>
+          <a:solidFill>
+            <a:srgbClr val="FFFFFF"/>
+          </a:solidFill>
+          <a:ln>
+            <a:noFill/>
+          </a:ln>
+          <a:effectLst/>
+        </p:spPr>
+        <p:txBody>
+          <a:bodyPr rtlCol="0" anchor="ctr"/>
           <a:lstStyle/>
           <a:p>
             <a:pPr algn="ctr"/>
-            <a:r>
-              <a:rPr sz="800">
-                <a:solidFill>
-                  <a:srgbClr val="6B6A66"/>
-                </a:solidFill>
-              </a:rPr>
-              <a:t>ORC Indonesia — PMI · IPB · BHLK · American Red Cross</a:t>
-            </a:r>
-          </a:p>
-        </p:txBody>
-      </p:sp>
-      <p:sp>
-        <p:nvSpPr>
-          <p:cNvPr id="5" name="TextBox 4"/>
+          </a:p>
+        </p:txBody>
+      </p:sp>
+      <p:pic>
+        <p:nvPicPr>
+          <p:cNvPr id="5" name="Picture 4" descr="Palang Merah Indonesia logo"/>
+          <p:cNvPicPr>
+            <a:picLocks noChangeAspect="1"/>
+          </p:cNvPicPr>
+          <p:nvPr/>
+        </p:nvPicPr>
+        <p:blipFill>
+          <a:blip r:embed="rId2"/>
+          <a:stretch>
+            <a:fillRect/>
+          </a:stretch>
+        </p:blipFill>
+        <p:spPr>
+          <a:xfrm>
+            <a:off x="1369770" y="4576572"/>
+            <a:ext cx="939918" cy="365760"/>
+          </a:xfrm>
+          <a:prstGeom prst="rect">
+            <a:avLst/>
+          </a:prstGeom>
+        </p:spPr>
+      </p:pic>
+      <p:pic>
+        <p:nvPicPr>
+          <p:cNvPr id="6" name="Picture 5" descr="Institut Pertanian Bogor logo"/>
+          <p:cNvPicPr>
+            <a:picLocks noChangeAspect="1"/>
+          </p:cNvPicPr>
+          <p:nvPr/>
+        </p:nvPicPr>
+        <p:blipFill>
+          <a:blip r:embed="rId3"/>
+          <a:stretch>
+            <a:fillRect/>
+          </a:stretch>
+        </p:blipFill>
+        <p:spPr>
+          <a:xfrm>
+            <a:off x="2602296" y="4576572"/>
+            <a:ext cx="539014" cy="365760"/>
+          </a:xfrm>
+          <a:prstGeom prst="rect">
+            <a:avLst/>
+          </a:prstGeom>
+        </p:spPr>
+      </p:pic>
+      <p:pic>
+        <p:nvPicPr>
+          <p:cNvPr id="7" name="Picture 6" descr="Balai Hidrologi dan Lingkungan Keairan logo"/>
+          <p:cNvPicPr>
+            <a:picLocks noChangeAspect="1"/>
+          </p:cNvPicPr>
+          <p:nvPr/>
+        </p:nvPicPr>
+        <p:blipFill>
+          <a:blip r:embed="rId4"/>
+          <a:stretch>
+            <a:fillRect/>
+          </a:stretch>
+        </p:blipFill>
+        <p:spPr>
+          <a:xfrm>
+            <a:off x="3433918" y="4576572"/>
+            <a:ext cx="365760" cy="365760"/>
+          </a:xfrm>
+          <a:prstGeom prst="rect">
+            <a:avLst/>
+          </a:prstGeom>
+        </p:spPr>
+      </p:pic>
+      <p:pic>
+        <p:nvPicPr>
+          <p:cNvPr id="8" name="Picture 7" descr="American Red Cross logo"/>
+          <p:cNvPicPr>
+            <a:picLocks noChangeAspect="1"/>
+          </p:cNvPicPr>
+          <p:nvPr/>
+        </p:nvPicPr>
+        <p:blipFill>
+          <a:blip r:embed="rId5"/>
+          <a:stretch>
+            <a:fillRect/>
+          </a:stretch>
+        </p:blipFill>
+        <p:spPr>
+          <a:xfrm>
+            <a:off x="4092286" y="4576572"/>
+            <a:ext cx="1103335" cy="365760"/>
+          </a:xfrm>
+          <a:prstGeom prst="rect">
+            <a:avLst/>
+          </a:prstGeom>
+        </p:spPr>
+      </p:pic>
+      <p:sp>
+        <p:nvSpPr>
+          <p:cNvPr id="9" name="TextBox 8"/>
           <p:cNvSpPr txBox="1"/>
           <p:nvPr/>
         </p:nvSpPr>
@@ -8056,41 +9406,133 @@
       </p:sp>
       <p:sp>
         <p:nvSpPr>
-          <p:cNvPr id="4" name="TextBox 3"/>
-          <p:cNvSpPr txBox="1"/>
-          <p:nvPr/>
-        </p:nvSpPr>
-        <p:spPr>
-          <a:xfrm>
-            <a:off x="3124200" y="4667250"/>
-            <a:ext cx="2895600" cy="274638"/>
-          </a:xfrm>
-          <a:prstGeom prst="rect">
-            <a:avLst/>
-          </a:prstGeom>
-          <a:noFill/>
-        </p:spPr>
-        <p:txBody>
-          <a:bodyPr wrap="square">
-            <a:spAutoFit/>
-          </a:bodyPr>
+          <p:cNvPr id="4" name="Rectangle 3" descr=""/>
+          <p:cNvSpPr/>
+          <p:nvPr/>
+        </p:nvSpPr>
+        <p:spPr>
+          <a:xfrm>
+            <a:off x="274320" y="4443984"/>
+            <a:ext cx="1517904" cy="676656"/>
+          </a:xfrm>
+          <a:prstGeom prst="rect">
+            <a:avLst/>
+          </a:prstGeom>
+          <a:solidFill>
+            <a:srgbClr val="FFFFFF"/>
+          </a:solidFill>
+          <a:ln>
+            <a:noFill/>
+          </a:ln>
+          <a:effectLst/>
+        </p:spPr>
+        <p:txBody>
+          <a:bodyPr rtlCol="0" anchor="ctr"/>
           <a:lstStyle/>
           <a:p>
             <a:pPr algn="ctr"/>
-            <a:r>
-              <a:rPr sz="800">
-                <a:solidFill>
-                  <a:srgbClr val="6B6A66"/>
-                </a:solidFill>
-              </a:rPr>
-              <a:t>ORC Indonesia — PMI · IPB · BHLK · American Red Cross</a:t>
-            </a:r>
-          </a:p>
-        </p:txBody>
-      </p:sp>
-      <p:sp>
-        <p:nvSpPr>
-          <p:cNvPr id="5" name="TextBox 4"/>
+          </a:p>
+        </p:txBody>
+      </p:sp>
+      <p:pic>
+        <p:nvPicPr>
+          <p:cNvPr id="5" name="Picture 4" descr="Palang Merah Indonesia logo"/>
+          <p:cNvPicPr>
+            <a:picLocks noChangeAspect="1"/>
+          </p:cNvPicPr>
+          <p:nvPr/>
+        </p:nvPicPr>
+        <p:blipFill>
+          <a:blip r:embed="rId2"/>
+          <a:stretch>
+            <a:fillRect/>
+          </a:stretch>
+        </p:blipFill>
+        <p:spPr>
+          <a:xfrm>
+            <a:off x="1369770" y="4576572"/>
+            <a:ext cx="939918" cy="365760"/>
+          </a:xfrm>
+          <a:prstGeom prst="rect">
+            <a:avLst/>
+          </a:prstGeom>
+        </p:spPr>
+      </p:pic>
+      <p:pic>
+        <p:nvPicPr>
+          <p:cNvPr id="6" name="Picture 5" descr="Institut Pertanian Bogor logo"/>
+          <p:cNvPicPr>
+            <a:picLocks noChangeAspect="1"/>
+          </p:cNvPicPr>
+          <p:nvPr/>
+        </p:nvPicPr>
+        <p:blipFill>
+          <a:blip r:embed="rId3"/>
+          <a:stretch>
+            <a:fillRect/>
+          </a:stretch>
+        </p:blipFill>
+        <p:spPr>
+          <a:xfrm>
+            <a:off x="2602296" y="4576572"/>
+            <a:ext cx="539014" cy="365760"/>
+          </a:xfrm>
+          <a:prstGeom prst="rect">
+            <a:avLst/>
+          </a:prstGeom>
+        </p:spPr>
+      </p:pic>
+      <p:pic>
+        <p:nvPicPr>
+          <p:cNvPr id="7" name="Picture 6" descr="Balai Hidrologi dan Lingkungan Keairan logo"/>
+          <p:cNvPicPr>
+            <a:picLocks noChangeAspect="1"/>
+          </p:cNvPicPr>
+          <p:nvPr/>
+        </p:nvPicPr>
+        <p:blipFill>
+          <a:blip r:embed="rId4"/>
+          <a:stretch>
+            <a:fillRect/>
+          </a:stretch>
+        </p:blipFill>
+        <p:spPr>
+          <a:xfrm>
+            <a:off x="3433918" y="4576572"/>
+            <a:ext cx="365760" cy="365760"/>
+          </a:xfrm>
+          <a:prstGeom prst="rect">
+            <a:avLst/>
+          </a:prstGeom>
+        </p:spPr>
+      </p:pic>
+      <p:pic>
+        <p:nvPicPr>
+          <p:cNvPr id="8" name="Picture 7" descr="American Red Cross logo"/>
+          <p:cNvPicPr>
+            <a:picLocks noChangeAspect="1"/>
+          </p:cNvPicPr>
+          <p:nvPr/>
+        </p:nvPicPr>
+        <p:blipFill>
+          <a:blip r:embed="rId5"/>
+          <a:stretch>
+            <a:fillRect/>
+          </a:stretch>
+        </p:blipFill>
+        <p:spPr>
+          <a:xfrm>
+            <a:off x="4092286" y="4576572"/>
+            <a:ext cx="1103335" cy="365760"/>
+          </a:xfrm>
+          <a:prstGeom prst="rect">
+            <a:avLst/>
+          </a:prstGeom>
+        </p:spPr>
+      </p:pic>
+      <p:sp>
+        <p:nvSpPr>
+          <p:cNvPr id="9" name="TextBox 8"/>
           <p:cNvSpPr txBox="1"/>
           <p:nvPr/>
         </p:nvSpPr>
@@ -8251,41 +9693,133 @@
       </p:sp>
       <p:sp>
         <p:nvSpPr>
-          <p:cNvPr id="4" name="TextBox 3"/>
-          <p:cNvSpPr txBox="1"/>
-          <p:nvPr/>
-        </p:nvSpPr>
-        <p:spPr>
-          <a:xfrm>
-            <a:off x="3124200" y="4667250"/>
-            <a:ext cx="2895600" cy="274638"/>
-          </a:xfrm>
-          <a:prstGeom prst="rect">
-            <a:avLst/>
-          </a:prstGeom>
-          <a:noFill/>
-        </p:spPr>
-        <p:txBody>
-          <a:bodyPr wrap="square">
-            <a:spAutoFit/>
-          </a:bodyPr>
+          <p:cNvPr id="4" name="Rectangle 3" descr=""/>
+          <p:cNvSpPr/>
+          <p:nvPr/>
+        </p:nvSpPr>
+        <p:spPr>
+          <a:xfrm>
+            <a:off x="274320" y="4443984"/>
+            <a:ext cx="1517904" cy="676656"/>
+          </a:xfrm>
+          <a:prstGeom prst="rect">
+            <a:avLst/>
+          </a:prstGeom>
+          <a:solidFill>
+            <a:srgbClr val="FFFFFF"/>
+          </a:solidFill>
+          <a:ln>
+            <a:noFill/>
+          </a:ln>
+          <a:effectLst/>
+        </p:spPr>
+        <p:txBody>
+          <a:bodyPr rtlCol="0" anchor="ctr"/>
           <a:lstStyle/>
           <a:p>
             <a:pPr algn="ctr"/>
-            <a:r>
-              <a:rPr sz="800">
-                <a:solidFill>
-                  <a:srgbClr val="6B6A66"/>
-                </a:solidFill>
-              </a:rPr>
-              <a:t>ORC Indonesia — PMI · IPB · BHLK · American Red Cross</a:t>
-            </a:r>
-          </a:p>
-        </p:txBody>
-      </p:sp>
-      <p:sp>
-        <p:nvSpPr>
-          <p:cNvPr id="5" name="TextBox 4"/>
+          </a:p>
+        </p:txBody>
+      </p:sp>
+      <p:pic>
+        <p:nvPicPr>
+          <p:cNvPr id="5" name="Picture 4" descr="Palang Merah Indonesia logo"/>
+          <p:cNvPicPr>
+            <a:picLocks noChangeAspect="1"/>
+          </p:cNvPicPr>
+          <p:nvPr/>
+        </p:nvPicPr>
+        <p:blipFill>
+          <a:blip r:embed="rId2"/>
+          <a:stretch>
+            <a:fillRect/>
+          </a:stretch>
+        </p:blipFill>
+        <p:spPr>
+          <a:xfrm>
+            <a:off x="1369770" y="4576572"/>
+            <a:ext cx="939918" cy="365760"/>
+          </a:xfrm>
+          <a:prstGeom prst="rect">
+            <a:avLst/>
+          </a:prstGeom>
+        </p:spPr>
+      </p:pic>
+      <p:pic>
+        <p:nvPicPr>
+          <p:cNvPr id="6" name="Picture 5" descr="Institut Pertanian Bogor logo"/>
+          <p:cNvPicPr>
+            <a:picLocks noChangeAspect="1"/>
+          </p:cNvPicPr>
+          <p:nvPr/>
+        </p:nvPicPr>
+        <p:blipFill>
+          <a:blip r:embed="rId3"/>
+          <a:stretch>
+            <a:fillRect/>
+          </a:stretch>
+        </p:blipFill>
+        <p:spPr>
+          <a:xfrm>
+            <a:off x="2602296" y="4576572"/>
+            <a:ext cx="539014" cy="365760"/>
+          </a:xfrm>
+          <a:prstGeom prst="rect">
+            <a:avLst/>
+          </a:prstGeom>
+        </p:spPr>
+      </p:pic>
+      <p:pic>
+        <p:nvPicPr>
+          <p:cNvPr id="7" name="Picture 6" descr="Balai Hidrologi dan Lingkungan Keairan logo"/>
+          <p:cNvPicPr>
+            <a:picLocks noChangeAspect="1"/>
+          </p:cNvPicPr>
+          <p:nvPr/>
+        </p:nvPicPr>
+        <p:blipFill>
+          <a:blip r:embed="rId4"/>
+          <a:stretch>
+            <a:fillRect/>
+          </a:stretch>
+        </p:blipFill>
+        <p:spPr>
+          <a:xfrm>
+            <a:off x="3433918" y="4576572"/>
+            <a:ext cx="365760" cy="365760"/>
+          </a:xfrm>
+          <a:prstGeom prst="rect">
+            <a:avLst/>
+          </a:prstGeom>
+        </p:spPr>
+      </p:pic>
+      <p:pic>
+        <p:nvPicPr>
+          <p:cNvPr id="8" name="Picture 7" descr="American Red Cross logo"/>
+          <p:cNvPicPr>
+            <a:picLocks noChangeAspect="1"/>
+          </p:cNvPicPr>
+          <p:nvPr/>
+        </p:nvPicPr>
+        <p:blipFill>
+          <a:blip r:embed="rId5"/>
+          <a:stretch>
+            <a:fillRect/>
+          </a:stretch>
+        </p:blipFill>
+        <p:spPr>
+          <a:xfrm>
+            <a:off x="4092286" y="4576572"/>
+            <a:ext cx="1103335" cy="365760"/>
+          </a:xfrm>
+          <a:prstGeom prst="rect">
+            <a:avLst/>
+          </a:prstGeom>
+        </p:spPr>
+      </p:pic>
+      <p:sp>
+        <p:nvSpPr>
+          <p:cNvPr id="9" name="TextBox 8"/>
           <p:cNvSpPr txBox="1"/>
           <p:nvPr/>
         </p:nvSpPr>
@@ -8435,41 +9969,133 @@
       </p:sp>
       <p:sp>
         <p:nvSpPr>
-          <p:cNvPr id="4" name="TextBox 3"/>
-          <p:cNvSpPr txBox="1"/>
-          <p:nvPr/>
-        </p:nvSpPr>
-        <p:spPr>
-          <a:xfrm>
-            <a:off x="3124200" y="4667250"/>
-            <a:ext cx="2895600" cy="274638"/>
-          </a:xfrm>
-          <a:prstGeom prst="rect">
-            <a:avLst/>
-          </a:prstGeom>
-          <a:noFill/>
-        </p:spPr>
-        <p:txBody>
-          <a:bodyPr wrap="square">
-            <a:spAutoFit/>
-          </a:bodyPr>
+          <p:cNvPr id="4" name="Rectangle 3" descr=""/>
+          <p:cNvSpPr/>
+          <p:nvPr/>
+        </p:nvSpPr>
+        <p:spPr>
+          <a:xfrm>
+            <a:off x="274320" y="4443984"/>
+            <a:ext cx="1517904" cy="676656"/>
+          </a:xfrm>
+          <a:prstGeom prst="rect">
+            <a:avLst/>
+          </a:prstGeom>
+          <a:solidFill>
+            <a:srgbClr val="FFFFFF"/>
+          </a:solidFill>
+          <a:ln>
+            <a:noFill/>
+          </a:ln>
+          <a:effectLst/>
+        </p:spPr>
+        <p:txBody>
+          <a:bodyPr rtlCol="0" anchor="ctr"/>
           <a:lstStyle/>
           <a:p>
             <a:pPr algn="ctr"/>
-            <a:r>
-              <a:rPr sz="800">
-                <a:solidFill>
-                  <a:srgbClr val="6B6A66"/>
-                </a:solidFill>
-              </a:rPr>
-              <a:t>ORC Indonesia — PMI · IPB · BHLK · American Red Cross</a:t>
-            </a:r>
-          </a:p>
-        </p:txBody>
-      </p:sp>
-      <p:sp>
-        <p:nvSpPr>
-          <p:cNvPr id="5" name="TextBox 4"/>
+          </a:p>
+        </p:txBody>
+      </p:sp>
+      <p:pic>
+        <p:nvPicPr>
+          <p:cNvPr id="5" name="Picture 4" descr="Palang Merah Indonesia logo"/>
+          <p:cNvPicPr>
+            <a:picLocks noChangeAspect="1"/>
+          </p:cNvPicPr>
+          <p:nvPr/>
+        </p:nvPicPr>
+        <p:blipFill>
+          <a:blip r:embed="rId2"/>
+          <a:stretch>
+            <a:fillRect/>
+          </a:stretch>
+        </p:blipFill>
+        <p:spPr>
+          <a:xfrm>
+            <a:off x="1369770" y="4576572"/>
+            <a:ext cx="939918" cy="365760"/>
+          </a:xfrm>
+          <a:prstGeom prst="rect">
+            <a:avLst/>
+          </a:prstGeom>
+        </p:spPr>
+      </p:pic>
+      <p:pic>
+        <p:nvPicPr>
+          <p:cNvPr id="6" name="Picture 5" descr="Institut Pertanian Bogor logo"/>
+          <p:cNvPicPr>
+            <a:picLocks noChangeAspect="1"/>
+          </p:cNvPicPr>
+          <p:nvPr/>
+        </p:nvPicPr>
+        <p:blipFill>
+          <a:blip r:embed="rId3"/>
+          <a:stretch>
+            <a:fillRect/>
+          </a:stretch>
+        </p:blipFill>
+        <p:spPr>
+          <a:xfrm>
+            <a:off x="2602296" y="4576572"/>
+            <a:ext cx="539014" cy="365760"/>
+          </a:xfrm>
+          <a:prstGeom prst="rect">
+            <a:avLst/>
+          </a:prstGeom>
+        </p:spPr>
+      </p:pic>
+      <p:pic>
+        <p:nvPicPr>
+          <p:cNvPr id="7" name="Picture 6" descr="Balai Hidrologi dan Lingkungan Keairan logo"/>
+          <p:cNvPicPr>
+            <a:picLocks noChangeAspect="1"/>
+          </p:cNvPicPr>
+          <p:nvPr/>
+        </p:nvPicPr>
+        <p:blipFill>
+          <a:blip r:embed="rId4"/>
+          <a:stretch>
+            <a:fillRect/>
+          </a:stretch>
+        </p:blipFill>
+        <p:spPr>
+          <a:xfrm>
+            <a:off x="3433918" y="4576572"/>
+            <a:ext cx="365760" cy="365760"/>
+          </a:xfrm>
+          <a:prstGeom prst="rect">
+            <a:avLst/>
+          </a:prstGeom>
+        </p:spPr>
+      </p:pic>
+      <p:pic>
+        <p:nvPicPr>
+          <p:cNvPr id="8" name="Picture 7" descr="American Red Cross logo"/>
+          <p:cNvPicPr>
+            <a:picLocks noChangeAspect="1"/>
+          </p:cNvPicPr>
+          <p:nvPr/>
+        </p:nvPicPr>
+        <p:blipFill>
+          <a:blip r:embed="rId5"/>
+          <a:stretch>
+            <a:fillRect/>
+          </a:stretch>
+        </p:blipFill>
+        <p:spPr>
+          <a:xfrm>
+            <a:off x="4092286" y="4576572"/>
+            <a:ext cx="1103335" cy="365760"/>
+          </a:xfrm>
+          <a:prstGeom prst="rect">
+            <a:avLst/>
+          </a:prstGeom>
+        </p:spPr>
+      </p:pic>
+      <p:sp>
+        <p:nvSpPr>
+          <p:cNvPr id="9" name="TextBox 8"/>
           <p:cNvSpPr txBox="1"/>
           <p:nvPr/>
         </p:nvSpPr>
@@ -8572,41 +10198,133 @@
       </p:pic>
       <p:sp>
         <p:nvSpPr>
-          <p:cNvPr id="4" name="TextBox 3"/>
-          <p:cNvSpPr txBox="1"/>
-          <p:nvPr/>
-        </p:nvSpPr>
-        <p:spPr>
-          <a:xfrm>
-            <a:off x="3124200" y="4667250"/>
-            <a:ext cx="2895600" cy="274638"/>
-          </a:xfrm>
-          <a:prstGeom prst="rect">
-            <a:avLst/>
-          </a:prstGeom>
-          <a:noFill/>
-        </p:spPr>
-        <p:txBody>
-          <a:bodyPr wrap="square">
-            <a:spAutoFit/>
-          </a:bodyPr>
+          <p:cNvPr id="4" name="Rectangle 3" descr=""/>
+          <p:cNvSpPr/>
+          <p:nvPr/>
+        </p:nvSpPr>
+        <p:spPr>
+          <a:xfrm>
+            <a:off x="274320" y="4443984"/>
+            <a:ext cx="1517904" cy="676656"/>
+          </a:xfrm>
+          <a:prstGeom prst="rect">
+            <a:avLst/>
+          </a:prstGeom>
+          <a:solidFill>
+            <a:srgbClr val="FFFFFF"/>
+          </a:solidFill>
+          <a:ln>
+            <a:noFill/>
+          </a:ln>
+          <a:effectLst/>
+        </p:spPr>
+        <p:txBody>
+          <a:bodyPr rtlCol="0" anchor="ctr"/>
           <a:lstStyle/>
           <a:p>
             <a:pPr algn="ctr"/>
-            <a:r>
-              <a:rPr sz="800">
-                <a:solidFill>
-                  <a:srgbClr val="6B6A66"/>
-                </a:solidFill>
-              </a:rPr>
-              <a:t>ORC Indonesia — PMI · IPB · BHLK · American Red Cross</a:t>
-            </a:r>
-          </a:p>
-        </p:txBody>
-      </p:sp>
-      <p:sp>
-        <p:nvSpPr>
-          <p:cNvPr id="5" name="TextBox 4"/>
+          </a:p>
+        </p:txBody>
+      </p:sp>
+      <p:pic>
+        <p:nvPicPr>
+          <p:cNvPr id="5" name="Picture 4" descr="Palang Merah Indonesia logo"/>
+          <p:cNvPicPr>
+            <a:picLocks noChangeAspect="1"/>
+          </p:cNvPicPr>
+          <p:nvPr/>
+        </p:nvPicPr>
+        <p:blipFill>
+          <a:blip r:embed="rId3"/>
+          <a:stretch>
+            <a:fillRect/>
+          </a:stretch>
+        </p:blipFill>
+        <p:spPr>
+          <a:xfrm>
+            <a:off x="1369770" y="4576572"/>
+            <a:ext cx="939918" cy="365760"/>
+          </a:xfrm>
+          <a:prstGeom prst="rect">
+            <a:avLst/>
+          </a:prstGeom>
+        </p:spPr>
+      </p:pic>
+      <p:pic>
+        <p:nvPicPr>
+          <p:cNvPr id="6" name="Picture 5" descr="Institut Pertanian Bogor logo"/>
+          <p:cNvPicPr>
+            <a:picLocks noChangeAspect="1"/>
+          </p:cNvPicPr>
+          <p:nvPr/>
+        </p:nvPicPr>
+        <p:blipFill>
+          <a:blip r:embed="rId4"/>
+          <a:stretch>
+            <a:fillRect/>
+          </a:stretch>
+        </p:blipFill>
+        <p:spPr>
+          <a:xfrm>
+            <a:off x="2602296" y="4576572"/>
+            <a:ext cx="539014" cy="365760"/>
+          </a:xfrm>
+          <a:prstGeom prst="rect">
+            <a:avLst/>
+          </a:prstGeom>
+        </p:spPr>
+      </p:pic>
+      <p:pic>
+        <p:nvPicPr>
+          <p:cNvPr id="7" name="Picture 6" descr="Balai Hidrologi dan Lingkungan Keairan logo"/>
+          <p:cNvPicPr>
+            <a:picLocks noChangeAspect="1"/>
+          </p:cNvPicPr>
+          <p:nvPr/>
+        </p:nvPicPr>
+        <p:blipFill>
+          <a:blip r:embed="rId5"/>
+          <a:stretch>
+            <a:fillRect/>
+          </a:stretch>
+        </p:blipFill>
+        <p:spPr>
+          <a:xfrm>
+            <a:off x="3433918" y="4576572"/>
+            <a:ext cx="365760" cy="365760"/>
+          </a:xfrm>
+          <a:prstGeom prst="rect">
+            <a:avLst/>
+          </a:prstGeom>
+        </p:spPr>
+      </p:pic>
+      <p:pic>
+        <p:nvPicPr>
+          <p:cNvPr id="8" name="Picture 7" descr="American Red Cross logo"/>
+          <p:cNvPicPr>
+            <a:picLocks noChangeAspect="1"/>
+          </p:cNvPicPr>
+          <p:nvPr/>
+        </p:nvPicPr>
+        <p:blipFill>
+          <a:blip r:embed="rId6"/>
+          <a:stretch>
+            <a:fillRect/>
+          </a:stretch>
+        </p:blipFill>
+        <p:spPr>
+          <a:xfrm>
+            <a:off x="4092286" y="4576572"/>
+            <a:ext cx="1103335" cy="365760"/>
+          </a:xfrm>
+          <a:prstGeom prst="rect">
+            <a:avLst/>
+          </a:prstGeom>
+        </p:spPr>
+      </p:pic>
+      <p:sp>
+        <p:nvSpPr>
+          <p:cNvPr id="9" name="TextBox 8"/>
           <p:cNvSpPr txBox="1"/>
           <p:nvPr/>
         </p:nvSpPr>
@@ -8835,41 +10553,133 @@
       </p:sp>
       <p:sp>
         <p:nvSpPr>
-          <p:cNvPr id="8" name="TextBox 7"/>
-          <p:cNvSpPr txBox="1"/>
-          <p:nvPr/>
-        </p:nvSpPr>
-        <p:spPr>
-          <a:xfrm>
-            <a:off x="3124200" y="4667250"/>
-            <a:ext cx="2895600" cy="274638"/>
-          </a:xfrm>
-          <a:prstGeom prst="rect">
-            <a:avLst/>
-          </a:prstGeom>
-          <a:noFill/>
-        </p:spPr>
-        <p:txBody>
-          <a:bodyPr wrap="square">
-            <a:spAutoFit/>
-          </a:bodyPr>
+          <p:cNvPr id="8" name="Rectangle 7" descr=""/>
+          <p:cNvSpPr/>
+          <p:nvPr/>
+        </p:nvSpPr>
+        <p:spPr>
+          <a:xfrm>
+            <a:off x="274320" y="4443984"/>
+            <a:ext cx="1517904" cy="676656"/>
+          </a:xfrm>
+          <a:prstGeom prst="rect">
+            <a:avLst/>
+          </a:prstGeom>
+          <a:solidFill>
+            <a:srgbClr val="FFFFFF"/>
+          </a:solidFill>
+          <a:ln>
+            <a:noFill/>
+          </a:ln>
+          <a:effectLst/>
+        </p:spPr>
+        <p:txBody>
+          <a:bodyPr rtlCol="0" anchor="ctr"/>
           <a:lstStyle/>
           <a:p>
             <a:pPr algn="ctr"/>
-            <a:r>
-              <a:rPr sz="800">
-                <a:solidFill>
-                  <a:srgbClr val="6B6A66"/>
-                </a:solidFill>
-              </a:rPr>
-              <a:t>ORC Indonesia — PMI · IPB · BHLK · American Red Cross</a:t>
-            </a:r>
-          </a:p>
-        </p:txBody>
-      </p:sp>
-      <p:sp>
-        <p:nvSpPr>
-          <p:cNvPr id="9" name="TextBox 8"/>
+          </a:p>
+        </p:txBody>
+      </p:sp>
+      <p:pic>
+        <p:nvPicPr>
+          <p:cNvPr id="9" name="Picture 8" descr="Palang Merah Indonesia logo"/>
+          <p:cNvPicPr>
+            <a:picLocks noChangeAspect="1"/>
+          </p:cNvPicPr>
+          <p:nvPr/>
+        </p:nvPicPr>
+        <p:blipFill>
+          <a:blip r:embed="rId4"/>
+          <a:stretch>
+            <a:fillRect/>
+          </a:stretch>
+        </p:blipFill>
+        <p:spPr>
+          <a:xfrm>
+            <a:off x="1369770" y="4576572"/>
+            <a:ext cx="939918" cy="365760"/>
+          </a:xfrm>
+          <a:prstGeom prst="rect">
+            <a:avLst/>
+          </a:prstGeom>
+        </p:spPr>
+      </p:pic>
+      <p:pic>
+        <p:nvPicPr>
+          <p:cNvPr id="10" name="Picture 9" descr="Institut Pertanian Bogor logo"/>
+          <p:cNvPicPr>
+            <a:picLocks noChangeAspect="1"/>
+          </p:cNvPicPr>
+          <p:nvPr/>
+        </p:nvPicPr>
+        <p:blipFill>
+          <a:blip r:embed="rId5"/>
+          <a:stretch>
+            <a:fillRect/>
+          </a:stretch>
+        </p:blipFill>
+        <p:spPr>
+          <a:xfrm>
+            <a:off x="2602296" y="4576572"/>
+            <a:ext cx="539014" cy="365760"/>
+          </a:xfrm>
+          <a:prstGeom prst="rect">
+            <a:avLst/>
+          </a:prstGeom>
+        </p:spPr>
+      </p:pic>
+      <p:pic>
+        <p:nvPicPr>
+          <p:cNvPr id="11" name="Picture 10" descr="Balai Hidrologi dan Lingkungan Keairan logo"/>
+          <p:cNvPicPr>
+            <a:picLocks noChangeAspect="1"/>
+          </p:cNvPicPr>
+          <p:nvPr/>
+        </p:nvPicPr>
+        <p:blipFill>
+          <a:blip r:embed="rId6"/>
+          <a:stretch>
+            <a:fillRect/>
+          </a:stretch>
+        </p:blipFill>
+        <p:spPr>
+          <a:xfrm>
+            <a:off x="3433918" y="4576572"/>
+            <a:ext cx="365760" cy="365760"/>
+          </a:xfrm>
+          <a:prstGeom prst="rect">
+            <a:avLst/>
+          </a:prstGeom>
+        </p:spPr>
+      </p:pic>
+      <p:pic>
+        <p:nvPicPr>
+          <p:cNvPr id="12" name="Picture 11" descr="American Red Cross logo"/>
+          <p:cNvPicPr>
+            <a:picLocks noChangeAspect="1"/>
+          </p:cNvPicPr>
+          <p:nvPr/>
+        </p:nvPicPr>
+        <p:blipFill>
+          <a:blip r:embed="rId7"/>
+          <a:stretch>
+            <a:fillRect/>
+          </a:stretch>
+        </p:blipFill>
+        <p:spPr>
+          <a:xfrm>
+            <a:off x="4092286" y="4576572"/>
+            <a:ext cx="1103335" cy="365760"/>
+          </a:xfrm>
+          <a:prstGeom prst="rect">
+            <a:avLst/>
+          </a:prstGeom>
+        </p:spPr>
+      </p:pic>
+      <p:sp>
+        <p:nvSpPr>
+          <p:cNvPr id="13" name="TextBox 12"/>
           <p:cNvSpPr txBox="1"/>
           <p:nvPr/>
         </p:nvSpPr>
@@ -9030,41 +10840,133 @@
       </p:sp>
       <p:sp>
         <p:nvSpPr>
-          <p:cNvPr id="4" name="TextBox 3"/>
-          <p:cNvSpPr txBox="1"/>
-          <p:nvPr/>
-        </p:nvSpPr>
-        <p:spPr>
-          <a:xfrm>
-            <a:off x="3124200" y="4667250"/>
-            <a:ext cx="2895600" cy="274638"/>
-          </a:xfrm>
-          <a:prstGeom prst="rect">
-            <a:avLst/>
-          </a:prstGeom>
-          <a:noFill/>
-        </p:spPr>
-        <p:txBody>
-          <a:bodyPr wrap="square">
-            <a:spAutoFit/>
-          </a:bodyPr>
+          <p:cNvPr id="4" name="Rectangle 3" descr=""/>
+          <p:cNvSpPr/>
+          <p:nvPr/>
+        </p:nvSpPr>
+        <p:spPr>
+          <a:xfrm>
+            <a:off x="274320" y="4443984"/>
+            <a:ext cx="1517904" cy="676656"/>
+          </a:xfrm>
+          <a:prstGeom prst="rect">
+            <a:avLst/>
+          </a:prstGeom>
+          <a:solidFill>
+            <a:srgbClr val="FFFFFF"/>
+          </a:solidFill>
+          <a:ln>
+            <a:noFill/>
+          </a:ln>
+          <a:effectLst/>
+        </p:spPr>
+        <p:txBody>
+          <a:bodyPr rtlCol="0" anchor="ctr"/>
           <a:lstStyle/>
           <a:p>
             <a:pPr algn="ctr"/>
-            <a:r>
-              <a:rPr sz="800">
-                <a:solidFill>
-                  <a:srgbClr val="6B6A66"/>
-                </a:solidFill>
-              </a:rPr>
-              <a:t>ORC Indonesia — PMI · IPB · BHLK · American Red Cross</a:t>
-            </a:r>
-          </a:p>
-        </p:txBody>
-      </p:sp>
-      <p:sp>
-        <p:nvSpPr>
-          <p:cNvPr id="5" name="TextBox 4"/>
+          </a:p>
+        </p:txBody>
+      </p:sp>
+      <p:pic>
+        <p:nvPicPr>
+          <p:cNvPr id="5" name="Picture 4" descr="Palang Merah Indonesia logo"/>
+          <p:cNvPicPr>
+            <a:picLocks noChangeAspect="1"/>
+          </p:cNvPicPr>
+          <p:nvPr/>
+        </p:nvPicPr>
+        <p:blipFill>
+          <a:blip r:embed="rId2"/>
+          <a:stretch>
+            <a:fillRect/>
+          </a:stretch>
+        </p:blipFill>
+        <p:spPr>
+          <a:xfrm>
+            <a:off x="1369770" y="4576572"/>
+            <a:ext cx="939918" cy="365760"/>
+          </a:xfrm>
+          <a:prstGeom prst="rect">
+            <a:avLst/>
+          </a:prstGeom>
+        </p:spPr>
+      </p:pic>
+      <p:pic>
+        <p:nvPicPr>
+          <p:cNvPr id="6" name="Picture 5" descr="Institut Pertanian Bogor logo"/>
+          <p:cNvPicPr>
+            <a:picLocks noChangeAspect="1"/>
+          </p:cNvPicPr>
+          <p:nvPr/>
+        </p:nvPicPr>
+        <p:blipFill>
+          <a:blip r:embed="rId3"/>
+          <a:stretch>
+            <a:fillRect/>
+          </a:stretch>
+        </p:blipFill>
+        <p:spPr>
+          <a:xfrm>
+            <a:off x="2602296" y="4576572"/>
+            <a:ext cx="539014" cy="365760"/>
+          </a:xfrm>
+          <a:prstGeom prst="rect">
+            <a:avLst/>
+          </a:prstGeom>
+        </p:spPr>
+      </p:pic>
+      <p:pic>
+        <p:nvPicPr>
+          <p:cNvPr id="7" name="Picture 6" descr="Balai Hidrologi dan Lingkungan Keairan logo"/>
+          <p:cNvPicPr>
+            <a:picLocks noChangeAspect="1"/>
+          </p:cNvPicPr>
+          <p:nvPr/>
+        </p:nvPicPr>
+        <p:blipFill>
+          <a:blip r:embed="rId4"/>
+          <a:stretch>
+            <a:fillRect/>
+          </a:stretch>
+        </p:blipFill>
+        <p:spPr>
+          <a:xfrm>
+            <a:off x="3433918" y="4576572"/>
+            <a:ext cx="365760" cy="365760"/>
+          </a:xfrm>
+          <a:prstGeom prst="rect">
+            <a:avLst/>
+          </a:prstGeom>
+        </p:spPr>
+      </p:pic>
+      <p:pic>
+        <p:nvPicPr>
+          <p:cNvPr id="8" name="Picture 7" descr="American Red Cross logo"/>
+          <p:cNvPicPr>
+            <a:picLocks noChangeAspect="1"/>
+          </p:cNvPicPr>
+          <p:nvPr/>
+        </p:nvPicPr>
+        <p:blipFill>
+          <a:blip r:embed="rId5"/>
+          <a:stretch>
+            <a:fillRect/>
+          </a:stretch>
+        </p:blipFill>
+        <p:spPr>
+          <a:xfrm>
+            <a:off x="4092286" y="4576572"/>
+            <a:ext cx="1103335" cy="365760"/>
+          </a:xfrm>
+          <a:prstGeom prst="rect">
+            <a:avLst/>
+          </a:prstGeom>
+        </p:spPr>
+      </p:pic>
+      <p:sp>
+        <p:nvSpPr>
+          <p:cNvPr id="9" name="TextBox 8"/>
           <p:cNvSpPr txBox="1"/>
           <p:nvPr/>
         </p:nvSpPr>
@@ -9225,41 +11127,133 @@
       </p:sp>
       <p:sp>
         <p:nvSpPr>
-          <p:cNvPr id="4" name="TextBox 3"/>
-          <p:cNvSpPr txBox="1"/>
-          <p:nvPr/>
-        </p:nvSpPr>
-        <p:spPr>
-          <a:xfrm>
-            <a:off x="3124200" y="4667250"/>
-            <a:ext cx="2895600" cy="274638"/>
-          </a:xfrm>
-          <a:prstGeom prst="rect">
-            <a:avLst/>
-          </a:prstGeom>
-          <a:noFill/>
-        </p:spPr>
-        <p:txBody>
-          <a:bodyPr wrap="square">
-            <a:spAutoFit/>
-          </a:bodyPr>
+          <p:cNvPr id="4" name="Rectangle 3" descr=""/>
+          <p:cNvSpPr/>
+          <p:nvPr/>
+        </p:nvSpPr>
+        <p:spPr>
+          <a:xfrm>
+            <a:off x="274320" y="4443984"/>
+            <a:ext cx="1517904" cy="676656"/>
+          </a:xfrm>
+          <a:prstGeom prst="rect">
+            <a:avLst/>
+          </a:prstGeom>
+          <a:solidFill>
+            <a:srgbClr val="FFFFFF"/>
+          </a:solidFill>
+          <a:ln>
+            <a:noFill/>
+          </a:ln>
+          <a:effectLst/>
+        </p:spPr>
+        <p:txBody>
+          <a:bodyPr rtlCol="0" anchor="ctr"/>
           <a:lstStyle/>
           <a:p>
             <a:pPr algn="ctr"/>
-            <a:r>
-              <a:rPr sz="800">
-                <a:solidFill>
-                  <a:srgbClr val="6B6A66"/>
-                </a:solidFill>
-              </a:rPr>
-              <a:t>ORC Indonesia — PMI · IPB · BHLK · American Red Cross</a:t>
-            </a:r>
-          </a:p>
-        </p:txBody>
-      </p:sp>
-      <p:sp>
-        <p:nvSpPr>
-          <p:cNvPr id="5" name="TextBox 4"/>
+          </a:p>
+        </p:txBody>
+      </p:sp>
+      <p:pic>
+        <p:nvPicPr>
+          <p:cNvPr id="5" name="Picture 4" descr="Palang Merah Indonesia logo"/>
+          <p:cNvPicPr>
+            <a:picLocks noChangeAspect="1"/>
+          </p:cNvPicPr>
+          <p:nvPr/>
+        </p:nvPicPr>
+        <p:blipFill>
+          <a:blip r:embed="rId2"/>
+          <a:stretch>
+            <a:fillRect/>
+          </a:stretch>
+        </p:blipFill>
+        <p:spPr>
+          <a:xfrm>
+            <a:off x="1369770" y="4576572"/>
+            <a:ext cx="939918" cy="365760"/>
+          </a:xfrm>
+          <a:prstGeom prst="rect">
+            <a:avLst/>
+          </a:prstGeom>
+        </p:spPr>
+      </p:pic>
+      <p:pic>
+        <p:nvPicPr>
+          <p:cNvPr id="6" name="Picture 5" descr="Institut Pertanian Bogor logo"/>
+          <p:cNvPicPr>
+            <a:picLocks noChangeAspect="1"/>
+          </p:cNvPicPr>
+          <p:nvPr/>
+        </p:nvPicPr>
+        <p:blipFill>
+          <a:blip r:embed="rId3"/>
+          <a:stretch>
+            <a:fillRect/>
+          </a:stretch>
+        </p:blipFill>
+        <p:spPr>
+          <a:xfrm>
+            <a:off x="2602296" y="4576572"/>
+            <a:ext cx="539014" cy="365760"/>
+          </a:xfrm>
+          <a:prstGeom prst="rect">
+            <a:avLst/>
+          </a:prstGeom>
+        </p:spPr>
+      </p:pic>
+      <p:pic>
+        <p:nvPicPr>
+          <p:cNvPr id="7" name="Picture 6" descr="Balai Hidrologi dan Lingkungan Keairan logo"/>
+          <p:cNvPicPr>
+            <a:picLocks noChangeAspect="1"/>
+          </p:cNvPicPr>
+          <p:nvPr/>
+        </p:nvPicPr>
+        <p:blipFill>
+          <a:blip r:embed="rId4"/>
+          <a:stretch>
+            <a:fillRect/>
+          </a:stretch>
+        </p:blipFill>
+        <p:spPr>
+          <a:xfrm>
+            <a:off x="3433918" y="4576572"/>
+            <a:ext cx="365760" cy="365760"/>
+          </a:xfrm>
+          <a:prstGeom prst="rect">
+            <a:avLst/>
+          </a:prstGeom>
+        </p:spPr>
+      </p:pic>
+      <p:pic>
+        <p:nvPicPr>
+          <p:cNvPr id="8" name="Picture 7" descr="American Red Cross logo"/>
+          <p:cNvPicPr>
+            <a:picLocks noChangeAspect="1"/>
+          </p:cNvPicPr>
+          <p:nvPr/>
+        </p:nvPicPr>
+        <p:blipFill>
+          <a:blip r:embed="rId5"/>
+          <a:stretch>
+            <a:fillRect/>
+          </a:stretch>
+        </p:blipFill>
+        <p:spPr>
+          <a:xfrm>
+            <a:off x="4092286" y="4576572"/>
+            <a:ext cx="1103335" cy="365760"/>
+          </a:xfrm>
+          <a:prstGeom prst="rect">
+            <a:avLst/>
+          </a:prstGeom>
+        </p:spPr>
+      </p:pic>
+      <p:sp>
+        <p:nvSpPr>
+          <p:cNvPr id="9" name="TextBox 8"/>
           <p:cNvSpPr txBox="1"/>
           <p:nvPr/>
         </p:nvSpPr>

--- a/spring_2026_ID/docs/pdf/REPLICATION_RECOMMENDATIONS_BRIEFING.pptx
+++ b/spring_2026_ID/docs/pdf/REPLICATION_RECOMMENDATIONS_BRIEFING.pptx
@@ -32,6 +32,10 @@
     <p:sldId id="274" r:id="rId26"/>
     <p:sldId id="275" r:id="rId27"/>
     <p:sldId id="276" r:id="rId28"/>
+    <p:sldId id="277" r:id="rId29"/>
+    <p:sldId id="278" r:id="rId30"/>
+    <p:sldId id="279" r:id="rId31"/>
+    <p:sldId id="280" r:id="rId32"/>
   </p:sldIdLst>
   <p:sldSz cx="9144000" cy="5143500" type="screen16x9"/>
   <p:notesSz cx="6858000" cy="9144000"/>
@@ -4802,14 +4806,126 @@
                   <a:srgbClr val="1A1A1A"/>
                 </a:solidFill>
               </a:rPr>
-              <a:t>The station measures water level reliably only at night</a:t>
-            </a:r>
+              <a:t>Three design gaps, and what we would build instead</a:t>
+            </a:r>
+          </a:p>
+        </p:txBody>
+      </p:sp>
+      <p:sp>
+        <p:nvSpPr>
+          <p:cNvPr id="3" name="Text Placeholder 2"/>
+          <p:cNvSpPr>
+            <a:spLocks noGrp="1"/>
+          </p:cNvSpPr>
+          <p:nvPr>
+            <p:ph type="body" idx="12" sz="quarter"/>
+          </p:nvPr>
+        </p:nvSpPr>
+        <p:spPr/>
+        <p:txBody>
+          <a:bodyPr wrap="square"/>
+          <a:lstStyle/>
+          <a:p>
+            <a:pPr/>
+            <a:r>
+              <a:rPr sz="1500">
+                <a:solidFill>
+                  <a:srgbClr val="1A1A1A"/>
+                </a:solidFill>
+              </a:rPr>
+              <a:t>The station cannot report its own condition. When it stopped, it stopped quietly.</a:t>
+            </a:r>
+          </a:p>
+          <a:p>
+            <a:pPr lvl="1"/>
+            <a:r>
+              <a:rPr sz="1350">
+                <a:solidFill>
+                  <a:srgbClr val="6B6A66"/>
+                </a:solidFill>
+              </a:rPr>
+              <a:t>Instead: report state on every waking, and make any mode that suppresses data expire on its own and raise an alert. R4, R5.</a:t>
+            </a:r>
+          </a:p>
+          <a:p>
+            <a:pPr/>
+            <a:r>
+              <a:rPr sz="1500">
+                <a:solidFill>
+                  <a:srgbClr val="1A1A1A"/>
+                </a:solidFill>
+              </a:rPr>
+              <a:t>Nothing reconciles what was recorded against what arrived.</a:t>
+            </a:r>
+          </a:p>
+          <a:p>
+            <a:pPr lvl="1"/>
+            <a:r>
+              <a:rPr sz="1350">
+                <a:solidFill>
+                  <a:srgbClr val="6B6A66"/>
+                </a:solidFill>
+              </a:rPr>
+              <a:t>Instead: compare the station's record against the server's on a schedule. Small piece of software; should have been in version one. R7.</a:t>
+            </a:r>
+          </a:p>
+          <a:p>
+            <a:pPr/>
+            <a:r>
+              <a:rPr sz="1500">
+                <a:solidFill>
+                  <a:srgbClr val="1A1A1A"/>
+                </a:solidFill>
+              </a:rPr>
+              <a:t>Water level is read from the image, and daylight defeats it.</a:t>
+            </a:r>
+          </a:p>
+          <a:p>
+            <a:pPr lvl="1"/>
+            <a:r>
+              <a:rPr sz="1350">
+                <a:solidFill>
+                  <a:srgbClr val="6B6A66"/>
+                </a:solidFill>
+              </a:rPr>
+              <a:t>Instead: an independent water-level reference, so the measurement does not rest on one optical method succeeding. R1.</a:t>
+            </a:r>
+          </a:p>
+        </p:txBody>
+      </p:sp>
+      <p:sp>
+        <p:nvSpPr>
+          <p:cNvPr id="4" name="Rectangle 3" descr=""/>
+          <p:cNvSpPr/>
+          <p:nvPr/>
+        </p:nvSpPr>
+        <p:spPr>
+          <a:xfrm>
+            <a:off x="274320" y="4443984"/>
+            <a:ext cx="1517904" cy="676656"/>
+          </a:xfrm>
+          <a:prstGeom prst="rect">
+            <a:avLst/>
+          </a:prstGeom>
+          <a:solidFill>
+            <a:srgbClr val="FFFFFF"/>
+          </a:solidFill>
+          <a:ln>
+            <a:noFill/>
+          </a:ln>
+          <a:effectLst/>
+        </p:spPr>
+        <p:txBody>
+          <a:bodyPr rtlCol="0" anchor="ctr"/>
+          <a:lstStyle/>
+          <a:p>
+            <a:pPr algn="ctr"/>
           </a:p>
         </p:txBody>
       </p:sp>
       <p:pic>
         <p:nvPicPr>
-          <p:cNvPr id="3" name="Picture 2" descr="Two panels from 200 captures. The upper panel counts captures by hour of day, split into those that produced a water level and those rejected; every rejection falls between 06:00 and 19:00, with peaks mid-morning and mid-afternoon and fewer in the early afternoon. The lower panel shows how confident each reading was against the threshold at which a water level is accepted."/>
+          <p:cNvPr id="5" name="Picture 4" descr="Palang Merah Indonesia logo"/>
           <p:cNvPicPr>
             <a:picLocks noChangeAspect="1"/>
           </p:cNvPicPr>
@@ -4823,81 +4939,17 @@
         </p:blipFill>
         <p:spPr>
           <a:xfrm>
-            <a:off x="2238269" y="919607"/>
-            <a:ext cx="4667462" cy="3071749"/>
+            <a:off x="1369770" y="4576572"/>
+            <a:ext cx="939918" cy="365760"/>
           </a:xfrm>
           <a:prstGeom prst="rect">
             <a:avLst/>
           </a:prstGeom>
         </p:spPr>
       </p:pic>
-      <p:sp>
-        <p:nvSpPr>
-          <p:cNvPr id="4" name="TextBox 3"/>
-          <p:cNvSpPr txBox="1"/>
-          <p:nvPr/>
-        </p:nvSpPr>
-        <p:spPr>
-          <a:xfrm>
-            <a:off x="457200" y="3991356"/>
-            <a:ext cx="8229600" cy="420624"/>
-          </a:xfrm>
-          <a:prstGeom prst="rect">
-            <a:avLst/>
-          </a:prstGeom>
-          <a:noFill/>
-        </p:spPr>
-        <p:txBody>
-          <a:bodyPr wrap="square">
-            <a:spAutoFit/>
-          </a:bodyPr>
-          <a:lstStyle/>
-          <a:p>
-            <a:pPr/>
-            <a:r>
-              <a:rPr sz="1000">
-                <a:solidFill>
-                  <a:srgbClr val="6B6A66"/>
-                </a:solidFill>
-              </a:rPr>
-              <a:t>The two peaks and the early-afternoon dip are the pattern a sun-angle effect produces.</a:t>
-            </a:r>
-          </a:p>
-        </p:txBody>
-      </p:sp>
-      <p:sp>
-        <p:nvSpPr>
-          <p:cNvPr id="5" name="Rectangle 4" descr=""/>
-          <p:cNvSpPr/>
-          <p:nvPr/>
-        </p:nvSpPr>
-        <p:spPr>
-          <a:xfrm>
-            <a:off x="274320" y="4443984"/>
-            <a:ext cx="1517904" cy="676656"/>
-          </a:xfrm>
-          <a:prstGeom prst="rect">
-            <a:avLst/>
-          </a:prstGeom>
-          <a:solidFill>
-            <a:srgbClr val="FFFFFF"/>
-          </a:solidFill>
-          <a:ln>
-            <a:noFill/>
-          </a:ln>
-          <a:effectLst/>
-        </p:spPr>
-        <p:txBody>
-          <a:bodyPr rtlCol="0" anchor="ctr"/>
-          <a:lstStyle/>
-          <a:p>
-            <a:pPr algn="ctr"/>
-          </a:p>
-        </p:txBody>
-      </p:sp>
       <p:pic>
         <p:nvPicPr>
-          <p:cNvPr id="6" name="Picture 5" descr="Palang Merah Indonesia logo"/>
+          <p:cNvPr id="6" name="Picture 5" descr="Institut Pertanian Bogor logo"/>
           <p:cNvPicPr>
             <a:picLocks noChangeAspect="1"/>
           </p:cNvPicPr>
@@ -4911,8 +4963,8 @@
         </p:blipFill>
         <p:spPr>
           <a:xfrm>
-            <a:off x="1369770" y="4576572"/>
-            <a:ext cx="939918" cy="365760"/>
+            <a:off x="2602296" y="4576572"/>
+            <a:ext cx="539014" cy="365760"/>
           </a:xfrm>
           <a:prstGeom prst="rect">
             <a:avLst/>
@@ -4921,7 +4973,7 @@
       </p:pic>
       <p:pic>
         <p:nvPicPr>
-          <p:cNvPr id="7" name="Picture 6" descr="Institut Pertanian Bogor logo"/>
+          <p:cNvPr id="7" name="Picture 6" descr="Balai Hidrologi dan Lingkungan Keairan logo"/>
           <p:cNvPicPr>
             <a:picLocks noChangeAspect="1"/>
           </p:cNvPicPr>
@@ -4935,8 +4987,8 @@
         </p:blipFill>
         <p:spPr>
           <a:xfrm>
-            <a:off x="2602296" y="4576572"/>
-            <a:ext cx="539014" cy="365760"/>
+            <a:off x="3433918" y="4576572"/>
+            <a:ext cx="365760" cy="365760"/>
           </a:xfrm>
           <a:prstGeom prst="rect">
             <a:avLst/>
@@ -4945,7 +4997,7 @@
       </p:pic>
       <p:pic>
         <p:nvPicPr>
-          <p:cNvPr id="8" name="Picture 7" descr="Balai Hidrologi dan Lingkungan Keairan logo"/>
+          <p:cNvPr id="8" name="Picture 7" descr="American Red Cross logo"/>
           <p:cNvPicPr>
             <a:picLocks noChangeAspect="1"/>
           </p:cNvPicPr>
@@ -4959,30 +5011,6 @@
         </p:blipFill>
         <p:spPr>
           <a:xfrm>
-            <a:off x="3433918" y="4576572"/>
-            <a:ext cx="365760" cy="365760"/>
-          </a:xfrm>
-          <a:prstGeom prst="rect">
-            <a:avLst/>
-          </a:prstGeom>
-        </p:spPr>
-      </p:pic>
-      <p:pic>
-        <p:nvPicPr>
-          <p:cNvPr id="9" name="Picture 8" descr="American Red Cross logo"/>
-          <p:cNvPicPr>
-            <a:picLocks noChangeAspect="1"/>
-          </p:cNvPicPr>
-          <p:nvPr/>
-        </p:nvPicPr>
-        <p:blipFill>
-          <a:blip r:embed="rId6"/>
-          <a:stretch>
-            <a:fillRect/>
-          </a:stretch>
-        </p:blipFill>
-        <p:spPr>
-          <a:xfrm>
             <a:off x="4092286" y="4576572"/>
             <a:ext cx="1103335" cy="365760"/>
           </a:xfrm>
@@ -4993,7 +5021,7 @@
       </p:pic>
       <p:sp>
         <p:nvSpPr>
-          <p:cNvPr id="10" name="TextBox 9"/>
+          <p:cNvPr id="9" name="TextBox 8"/>
           <p:cNvSpPr txBox="1"/>
           <p:nvPr/>
         </p:nvSpPr>
@@ -5020,7 +5048,7 @@
                   <a:srgbClr val="6B6A66"/>
                 </a:solidFill>
               </a:rPr>
-              <a:t>10 / 21</a:t>
+              <a:t>10 / 25</a:t>
             </a:r>
           </a:p>
         </p:txBody>
@@ -5060,12 +5088,12 @@
           <a:p>
             <a:pPr/>
             <a:r>
-              <a:rPr sz="2000">
+              <a:rPr sz="1800">
                 <a:solidFill>
                   <a:srgbClr val="1A1A1A"/>
                 </a:solidFill>
               </a:rPr>
-              <a:t>Eleven things we would do differently</a:t>
+              <a:t>A twenty-five dollar decision caused most of the outages</a:t>
             </a:r>
           </a:p>
         </p:txBody>
@@ -5092,7 +5120,62 @@
                   <a:srgbClr val="1A1A1A"/>
                 </a:solidFill>
               </a:rPr>
-              <a:t>Offered as input to your design, not as corrections to ours. We would not expect them adopted as a set.</a:t>
+              <a:t>No single step in the chain looks like a mistake.</a:t>
+            </a:r>
+          </a:p>
+          <a:p>
+            <a:pPr lvl="1"/>
+            <a:r>
+              <a:rPr sz="1250">
+                <a:solidFill>
+                  <a:srgbClr val="6B6A66"/>
+                </a:solidFill>
+              </a:rPr>
+              <a:t>The USB storage drive caused a driver fault at boot, so it was removed rather than fixed.</a:t>
+            </a:r>
+          </a:p>
+          <a:p>
+            <a:pPr lvl="1"/>
+            <a:r>
+              <a:rPr sz="1250">
+                <a:solidFill>
+                  <a:srgbClr val="6B6A66"/>
+                </a:solidFill>
+              </a:rPr>
+              <a:t>That left the SD card as the only volume — small enough to sit at the level where it deletes old recordings.</a:t>
+            </a:r>
+          </a:p>
+          <a:p>
+            <a:pPr lvl="1"/>
+            <a:r>
+              <a:rPr sz="1250">
+                <a:solidFill>
+                  <a:srgbClr val="6B6A66"/>
+                </a:solidFill>
+              </a:rPr>
+              <a:t>That caused processing to fail on 43% of videos.</a:t>
+            </a:r>
+          </a:p>
+          <a:p>
+            <a:pPr lvl="1"/>
+            <a:r>
+              <a:rPr sz="1250">
+                <a:solidFill>
+                  <a:srgbClr val="6B6A66"/>
+                </a:solidFill>
+              </a:rPr>
+              <a:t>The station shuts down after processing finishes, so a failed run never shut down: awake to a 25-minute backstop instead of two minutes, about twelve times the energy.</a:t>
+            </a:r>
+          </a:p>
+          <a:p>
+            <a:pPr lvl="1"/>
+            <a:r>
+              <a:rPr sz="1250">
+                <a:solidFill>
+                  <a:srgbClr val="6B6A66"/>
+                </a:solidFill>
+              </a:rPr>
+              <a:t>Repeated across a night, that flattened the battery. A missed wake then left the next-startup alarm in the past.</a:t>
             </a:r>
           </a:p>
           <a:p>
@@ -5103,62 +5186,7 @@
                   <a:srgbClr val="1A1A1A"/>
                 </a:solidFill>
               </a:rPr>
-              <a:t>Let the station account for itself — R4, R5, R6, R7.</a:t>
-            </a:r>
-          </a:p>
-          <a:p>
-            <a:pPr lvl="1"/>
-            <a:r>
-              <a:rPr sz="1250">
-                <a:solidFill>
-                  <a:srgbClr val="6B6A66"/>
-                </a:solidFill>
-              </a:rPr>
-              <a:t>Nothing here is difficult or costly. The setting behind nine of the thirteen interruptions was readable remotely the whole time, and no software asked.</a:t>
-            </a:r>
-          </a:p>
-          <a:p>
-            <a:pPr/>
-            <a:r>
-              <a:rPr sz="1400">
-                <a:solidFill>
-                  <a:srgbClr val="1A1A1A"/>
-                </a:solidFill>
-              </a:rPr>
-              <a:t>Make the measurement trustworthy — R1, R2.</a:t>
-            </a:r>
-          </a:p>
-          <a:p>
-            <a:pPr lvl="1"/>
-            <a:r>
-              <a:rPr sz="1250">
-                <a:solidFill>
-                  <a:srgbClr val="6B6A66"/>
-                </a:solidFill>
-              </a:rPr>
-              <a:t>An independent water-level reference, and survey planned as professional work from the start. We learned that the hard way; IPB's total-station survey is what the station runs on today.</a:t>
-            </a:r>
-          </a:p>
-          <a:p>
-            <a:pPr/>
-            <a:r>
-              <a:rPr sz="1400">
-                <a:solidFill>
-                  <a:srgbClr val="1A1A1A"/>
-                </a:solidFill>
-              </a:rPr>
-              <a:t>Make the units buildable and maintainable in Indonesia — R3, R8, R9, R10, R11.</a:t>
-            </a:r>
-          </a:p>
-          <a:p>
-            <a:pPr lvl="1"/>
-            <a:r>
-              <a:rPr sz="1250">
-                <a:solidFill>
-                  <a:srgbClr val="6B6A66"/>
-                </a:solidFill>
-              </a:rPr>
-              <a:t>You will buy under Indonesian procurement rules, so substitution is the expected case rather than a risk to be managed.</a:t>
+              <a:t>Two lessons: shutdown and startup are split across two systems and neither owns the cycle; and cheap parts can carry expensive operating costs.</a:t>
             </a:r>
           </a:p>
         </p:txBody>
@@ -5318,7 +5346,7 @@
                   <a:srgbClr val="6B6A66"/>
                 </a:solidFill>
               </a:rPr>
-              <a:t>11 / 21</a:t>
+              <a:t>11 / 25</a:t>
             </a:r>
           </a:p>
         </p:txBody>
@@ -5332,6 +5360,567 @@
 </file>
 
 <file path=ppt/slides/slide12.xml><?xml version="1.0" encoding="utf-8"?>
+<p:sld xmlns:a="http://schemas.openxmlformats.org/drawingml/2006/main" xmlns:p="http://schemas.openxmlformats.org/presentationml/2006/main" xmlns:r="http://schemas.openxmlformats.org/officeDocument/2006/relationships">
+  <p:cSld>
+    <p:spTree>
+      <p:nvGrpSpPr>
+        <p:cNvPr id="1" name=""/>
+        <p:cNvGrpSpPr/>
+        <p:nvPr/>
+      </p:nvGrpSpPr>
+      <p:grpSpPr/>
+      <p:sp>
+        <p:nvSpPr>
+          <p:cNvPr id="2" name="Title 1"/>
+          <p:cNvSpPr>
+            <a:spLocks noGrp="1"/>
+          </p:cNvSpPr>
+          <p:nvPr>
+            <p:ph type="title"/>
+          </p:nvPr>
+        </p:nvSpPr>
+        <p:spPr/>
+        <p:txBody>
+          <a:bodyPr wrap="square"/>
+          <a:lstStyle/>
+          <a:p>
+            <a:pPr/>
+            <a:r>
+              <a:rPr sz="2000">
+                <a:solidFill>
+                  <a:srgbClr val="1A1A1A"/>
+                </a:solidFill>
+              </a:rPr>
+              <a:t>The station measures water level reliably only at night</a:t>
+            </a:r>
+          </a:p>
+        </p:txBody>
+      </p:sp>
+      <p:pic>
+        <p:nvPicPr>
+          <p:cNvPr id="3" name="Picture 2" descr="Two panels from 200 captures. The upper panel counts captures by hour of day, split into those that produced a water level and those rejected; every rejection falls between 06:00 and 19:00, with peaks mid-morning and mid-afternoon and fewer in the early afternoon. The lower panel shows how confident each reading was against the threshold at which a water level is accepted."/>
+          <p:cNvPicPr>
+            <a:picLocks noChangeAspect="1"/>
+          </p:cNvPicPr>
+          <p:nvPr/>
+        </p:nvPicPr>
+        <p:blipFill>
+          <a:blip r:embed="rId2"/>
+          <a:stretch>
+            <a:fillRect/>
+          </a:stretch>
+        </p:blipFill>
+        <p:spPr>
+          <a:xfrm>
+            <a:off x="2238269" y="919607"/>
+            <a:ext cx="4667462" cy="3071749"/>
+          </a:xfrm>
+          <a:prstGeom prst="rect">
+            <a:avLst/>
+          </a:prstGeom>
+        </p:spPr>
+      </p:pic>
+      <p:sp>
+        <p:nvSpPr>
+          <p:cNvPr id="4" name="TextBox 3"/>
+          <p:cNvSpPr txBox="1"/>
+          <p:nvPr/>
+        </p:nvSpPr>
+        <p:spPr>
+          <a:xfrm>
+            <a:off x="457200" y="3991356"/>
+            <a:ext cx="8229600" cy="420624"/>
+          </a:xfrm>
+          <a:prstGeom prst="rect">
+            <a:avLst/>
+          </a:prstGeom>
+          <a:noFill/>
+        </p:spPr>
+        <p:txBody>
+          <a:bodyPr wrap="square">
+            <a:spAutoFit/>
+          </a:bodyPr>
+          <a:lstStyle/>
+          <a:p>
+            <a:pPr/>
+            <a:r>
+              <a:rPr sz="1000">
+                <a:solidFill>
+                  <a:srgbClr val="6B6A66"/>
+                </a:solidFill>
+              </a:rPr>
+              <a:t>The two peaks and the early-afternoon dip are the pattern a sun-angle effect produces.</a:t>
+            </a:r>
+          </a:p>
+        </p:txBody>
+      </p:sp>
+      <p:sp>
+        <p:nvSpPr>
+          <p:cNvPr id="5" name="Rectangle 4" descr=""/>
+          <p:cNvSpPr/>
+          <p:nvPr/>
+        </p:nvSpPr>
+        <p:spPr>
+          <a:xfrm>
+            <a:off x="274320" y="4443984"/>
+            <a:ext cx="1517904" cy="676656"/>
+          </a:xfrm>
+          <a:prstGeom prst="rect">
+            <a:avLst/>
+          </a:prstGeom>
+          <a:solidFill>
+            <a:srgbClr val="FFFFFF"/>
+          </a:solidFill>
+          <a:ln>
+            <a:noFill/>
+          </a:ln>
+          <a:effectLst/>
+        </p:spPr>
+        <p:txBody>
+          <a:bodyPr rtlCol="0" anchor="ctr"/>
+          <a:lstStyle/>
+          <a:p>
+            <a:pPr algn="ctr"/>
+          </a:p>
+        </p:txBody>
+      </p:sp>
+      <p:pic>
+        <p:nvPicPr>
+          <p:cNvPr id="6" name="Picture 5" descr="Palang Merah Indonesia logo"/>
+          <p:cNvPicPr>
+            <a:picLocks noChangeAspect="1"/>
+          </p:cNvPicPr>
+          <p:nvPr/>
+        </p:nvPicPr>
+        <p:blipFill>
+          <a:blip r:embed="rId3"/>
+          <a:stretch>
+            <a:fillRect/>
+          </a:stretch>
+        </p:blipFill>
+        <p:spPr>
+          <a:xfrm>
+            <a:off x="1369770" y="4576572"/>
+            <a:ext cx="939918" cy="365760"/>
+          </a:xfrm>
+          <a:prstGeom prst="rect">
+            <a:avLst/>
+          </a:prstGeom>
+        </p:spPr>
+      </p:pic>
+      <p:pic>
+        <p:nvPicPr>
+          <p:cNvPr id="7" name="Picture 6" descr="Institut Pertanian Bogor logo"/>
+          <p:cNvPicPr>
+            <a:picLocks noChangeAspect="1"/>
+          </p:cNvPicPr>
+          <p:nvPr/>
+        </p:nvPicPr>
+        <p:blipFill>
+          <a:blip r:embed="rId4"/>
+          <a:stretch>
+            <a:fillRect/>
+          </a:stretch>
+        </p:blipFill>
+        <p:spPr>
+          <a:xfrm>
+            <a:off x="2602296" y="4576572"/>
+            <a:ext cx="539014" cy="365760"/>
+          </a:xfrm>
+          <a:prstGeom prst="rect">
+            <a:avLst/>
+          </a:prstGeom>
+        </p:spPr>
+      </p:pic>
+      <p:pic>
+        <p:nvPicPr>
+          <p:cNvPr id="8" name="Picture 7" descr="Balai Hidrologi dan Lingkungan Keairan logo"/>
+          <p:cNvPicPr>
+            <a:picLocks noChangeAspect="1"/>
+          </p:cNvPicPr>
+          <p:nvPr/>
+        </p:nvPicPr>
+        <p:blipFill>
+          <a:blip r:embed="rId5"/>
+          <a:stretch>
+            <a:fillRect/>
+          </a:stretch>
+        </p:blipFill>
+        <p:spPr>
+          <a:xfrm>
+            <a:off x="3433918" y="4576572"/>
+            <a:ext cx="365760" cy="365760"/>
+          </a:xfrm>
+          <a:prstGeom prst="rect">
+            <a:avLst/>
+          </a:prstGeom>
+        </p:spPr>
+      </p:pic>
+      <p:pic>
+        <p:nvPicPr>
+          <p:cNvPr id="9" name="Picture 8" descr="American Red Cross logo"/>
+          <p:cNvPicPr>
+            <a:picLocks noChangeAspect="1"/>
+          </p:cNvPicPr>
+          <p:nvPr/>
+        </p:nvPicPr>
+        <p:blipFill>
+          <a:blip r:embed="rId6"/>
+          <a:stretch>
+            <a:fillRect/>
+          </a:stretch>
+        </p:blipFill>
+        <p:spPr>
+          <a:xfrm>
+            <a:off x="4092286" y="4576572"/>
+            <a:ext cx="1103335" cy="365760"/>
+          </a:xfrm>
+          <a:prstGeom prst="rect">
+            <a:avLst/>
+          </a:prstGeom>
+        </p:spPr>
+      </p:pic>
+      <p:sp>
+        <p:nvSpPr>
+          <p:cNvPr id="10" name="TextBox 9"/>
+          <p:cNvSpPr txBox="1"/>
+          <p:nvPr/>
+        </p:nvSpPr>
+        <p:spPr>
+          <a:xfrm>
+            <a:off x="6553200" y="4667250"/>
+            <a:ext cx="2133600" cy="274638"/>
+          </a:xfrm>
+          <a:prstGeom prst="rect">
+            <a:avLst/>
+          </a:prstGeom>
+          <a:noFill/>
+        </p:spPr>
+        <p:txBody>
+          <a:bodyPr wrap="square">
+            <a:spAutoFit/>
+          </a:bodyPr>
+          <a:lstStyle/>
+          <a:p>
+            <a:pPr algn="r"/>
+            <a:r>
+              <a:rPr sz="800">
+                <a:solidFill>
+                  <a:srgbClr val="6B6A66"/>
+                </a:solidFill>
+              </a:rPr>
+              <a:t>12 / 25</a:t>
+            </a:r>
+          </a:p>
+        </p:txBody>
+      </p:sp>
+    </p:spTree>
+  </p:cSld>
+  <p:clrMapOvr>
+    <a:masterClrMapping/>
+  </p:clrMapOvr>
+</p:sld>
+</file>
+
+<file path=ppt/slides/slide13.xml><?xml version="1.0" encoding="utf-8"?>
+<p:sld xmlns:a="http://schemas.openxmlformats.org/drawingml/2006/main" xmlns:p="http://schemas.openxmlformats.org/presentationml/2006/main" xmlns:r="http://schemas.openxmlformats.org/officeDocument/2006/relationships">
+  <p:cSld>
+    <p:spTree>
+      <p:nvGrpSpPr>
+        <p:cNvPr id="1" name=""/>
+        <p:cNvGrpSpPr/>
+        <p:nvPr/>
+      </p:nvGrpSpPr>
+      <p:grpSpPr/>
+      <p:sp>
+        <p:nvSpPr>
+          <p:cNvPr id="2" name="Title 1"/>
+          <p:cNvSpPr>
+            <a:spLocks noGrp="1"/>
+          </p:cNvSpPr>
+          <p:nvPr>
+            <p:ph type="title"/>
+          </p:nvPr>
+        </p:nvSpPr>
+        <p:spPr/>
+        <p:txBody>
+          <a:bodyPr wrap="square"/>
+          <a:lstStyle/>
+          <a:p>
+            <a:pPr/>
+            <a:r>
+              <a:rPr sz="2000">
+                <a:solidFill>
+                  <a:srgbClr val="1A1A1A"/>
+                </a:solidFill>
+              </a:rPr>
+              <a:t>Eleven things we would do differently</a:t>
+            </a:r>
+          </a:p>
+        </p:txBody>
+      </p:sp>
+      <p:sp>
+        <p:nvSpPr>
+          <p:cNvPr id="3" name="Text Placeholder 2"/>
+          <p:cNvSpPr>
+            <a:spLocks noGrp="1"/>
+          </p:cNvSpPr>
+          <p:nvPr>
+            <p:ph type="body" idx="12" sz="quarter"/>
+          </p:nvPr>
+        </p:nvSpPr>
+        <p:spPr/>
+        <p:txBody>
+          <a:bodyPr wrap="square"/>
+          <a:lstStyle/>
+          <a:p>
+            <a:pPr/>
+            <a:r>
+              <a:rPr sz="1400">
+                <a:solidFill>
+                  <a:srgbClr val="1A1A1A"/>
+                </a:solidFill>
+              </a:rPr>
+              <a:t>Offered as input to your design, not as corrections to ours. We would not expect them adopted as a set.</a:t>
+            </a:r>
+          </a:p>
+          <a:p>
+            <a:pPr/>
+            <a:r>
+              <a:rPr sz="1400">
+                <a:solidFill>
+                  <a:srgbClr val="1A1A1A"/>
+                </a:solidFill>
+              </a:rPr>
+              <a:t>Let the station account for itself — R4, R5, R6, R7.</a:t>
+            </a:r>
+          </a:p>
+          <a:p>
+            <a:pPr lvl="1"/>
+            <a:r>
+              <a:rPr sz="1250">
+                <a:solidFill>
+                  <a:srgbClr val="6B6A66"/>
+                </a:solidFill>
+              </a:rPr>
+              <a:t>Nothing here is difficult or costly. The setting behind nine of the thirteen interruptions was readable remotely the whole time, and no software asked.</a:t>
+            </a:r>
+          </a:p>
+          <a:p>
+            <a:pPr/>
+            <a:r>
+              <a:rPr sz="1400">
+                <a:solidFill>
+                  <a:srgbClr val="1A1A1A"/>
+                </a:solidFill>
+              </a:rPr>
+              <a:t>Make the measurement trustworthy — R1, R2.</a:t>
+            </a:r>
+          </a:p>
+          <a:p>
+            <a:pPr lvl="1"/>
+            <a:r>
+              <a:rPr sz="1250">
+                <a:solidFill>
+                  <a:srgbClr val="6B6A66"/>
+                </a:solidFill>
+              </a:rPr>
+              <a:t>An independent water-level reference, and survey planned as professional work from the start. We learned that the hard way; IPB's total-station survey is what the station runs on today.</a:t>
+            </a:r>
+          </a:p>
+          <a:p>
+            <a:pPr/>
+            <a:r>
+              <a:rPr sz="1400">
+                <a:solidFill>
+                  <a:srgbClr val="1A1A1A"/>
+                </a:solidFill>
+              </a:rPr>
+              <a:t>Make the units buildable and maintainable in Indonesia — R3, R8, R9, R10, R11.</a:t>
+            </a:r>
+          </a:p>
+          <a:p>
+            <a:pPr lvl="1"/>
+            <a:r>
+              <a:rPr sz="1250">
+                <a:solidFill>
+                  <a:srgbClr val="6B6A66"/>
+                </a:solidFill>
+              </a:rPr>
+              <a:t>You will buy under Indonesian procurement rules, so substitution is the expected case rather than a risk to be managed.</a:t>
+            </a:r>
+          </a:p>
+        </p:txBody>
+      </p:sp>
+      <p:sp>
+        <p:nvSpPr>
+          <p:cNvPr id="4" name="Rectangle 3" descr=""/>
+          <p:cNvSpPr/>
+          <p:nvPr/>
+        </p:nvSpPr>
+        <p:spPr>
+          <a:xfrm>
+            <a:off x="274320" y="4443984"/>
+            <a:ext cx="1517904" cy="676656"/>
+          </a:xfrm>
+          <a:prstGeom prst="rect">
+            <a:avLst/>
+          </a:prstGeom>
+          <a:solidFill>
+            <a:srgbClr val="FFFFFF"/>
+          </a:solidFill>
+          <a:ln>
+            <a:noFill/>
+          </a:ln>
+          <a:effectLst/>
+        </p:spPr>
+        <p:txBody>
+          <a:bodyPr rtlCol="0" anchor="ctr"/>
+          <a:lstStyle/>
+          <a:p>
+            <a:pPr algn="ctr"/>
+          </a:p>
+        </p:txBody>
+      </p:sp>
+      <p:pic>
+        <p:nvPicPr>
+          <p:cNvPr id="5" name="Picture 4" descr="Palang Merah Indonesia logo"/>
+          <p:cNvPicPr>
+            <a:picLocks noChangeAspect="1"/>
+          </p:cNvPicPr>
+          <p:nvPr/>
+        </p:nvPicPr>
+        <p:blipFill>
+          <a:blip r:embed="rId2"/>
+          <a:stretch>
+            <a:fillRect/>
+          </a:stretch>
+        </p:blipFill>
+        <p:spPr>
+          <a:xfrm>
+            <a:off x="1369770" y="4576572"/>
+            <a:ext cx="939918" cy="365760"/>
+          </a:xfrm>
+          <a:prstGeom prst="rect">
+            <a:avLst/>
+          </a:prstGeom>
+        </p:spPr>
+      </p:pic>
+      <p:pic>
+        <p:nvPicPr>
+          <p:cNvPr id="6" name="Picture 5" descr="Institut Pertanian Bogor logo"/>
+          <p:cNvPicPr>
+            <a:picLocks noChangeAspect="1"/>
+          </p:cNvPicPr>
+          <p:nvPr/>
+        </p:nvPicPr>
+        <p:blipFill>
+          <a:blip r:embed="rId3"/>
+          <a:stretch>
+            <a:fillRect/>
+          </a:stretch>
+        </p:blipFill>
+        <p:spPr>
+          <a:xfrm>
+            <a:off x="2602296" y="4576572"/>
+            <a:ext cx="539014" cy="365760"/>
+          </a:xfrm>
+          <a:prstGeom prst="rect">
+            <a:avLst/>
+          </a:prstGeom>
+        </p:spPr>
+      </p:pic>
+      <p:pic>
+        <p:nvPicPr>
+          <p:cNvPr id="7" name="Picture 6" descr="Balai Hidrologi dan Lingkungan Keairan logo"/>
+          <p:cNvPicPr>
+            <a:picLocks noChangeAspect="1"/>
+          </p:cNvPicPr>
+          <p:nvPr/>
+        </p:nvPicPr>
+        <p:blipFill>
+          <a:blip r:embed="rId4"/>
+          <a:stretch>
+            <a:fillRect/>
+          </a:stretch>
+        </p:blipFill>
+        <p:spPr>
+          <a:xfrm>
+            <a:off x="3433918" y="4576572"/>
+            <a:ext cx="365760" cy="365760"/>
+          </a:xfrm>
+          <a:prstGeom prst="rect">
+            <a:avLst/>
+          </a:prstGeom>
+        </p:spPr>
+      </p:pic>
+      <p:pic>
+        <p:nvPicPr>
+          <p:cNvPr id="8" name="Picture 7" descr="American Red Cross logo"/>
+          <p:cNvPicPr>
+            <a:picLocks noChangeAspect="1"/>
+          </p:cNvPicPr>
+          <p:nvPr/>
+        </p:nvPicPr>
+        <p:blipFill>
+          <a:blip r:embed="rId5"/>
+          <a:stretch>
+            <a:fillRect/>
+          </a:stretch>
+        </p:blipFill>
+        <p:spPr>
+          <a:xfrm>
+            <a:off x="4092286" y="4576572"/>
+            <a:ext cx="1103335" cy="365760"/>
+          </a:xfrm>
+          <a:prstGeom prst="rect">
+            <a:avLst/>
+          </a:prstGeom>
+        </p:spPr>
+      </p:pic>
+      <p:sp>
+        <p:nvSpPr>
+          <p:cNvPr id="9" name="TextBox 8"/>
+          <p:cNvSpPr txBox="1"/>
+          <p:nvPr/>
+        </p:nvSpPr>
+        <p:spPr>
+          <a:xfrm>
+            <a:off x="6553200" y="4667250"/>
+            <a:ext cx="2133600" cy="274638"/>
+          </a:xfrm>
+          <a:prstGeom prst="rect">
+            <a:avLst/>
+          </a:prstGeom>
+          <a:noFill/>
+        </p:spPr>
+        <p:txBody>
+          <a:bodyPr wrap="square">
+            <a:spAutoFit/>
+          </a:bodyPr>
+          <a:lstStyle/>
+          <a:p>
+            <a:pPr algn="r"/>
+            <a:r>
+              <a:rPr sz="800">
+                <a:solidFill>
+                  <a:srgbClr val="6B6A66"/>
+                </a:solidFill>
+              </a:rPr>
+              <a:t>13 / 25</a:t>
+            </a:r>
+          </a:p>
+        </p:txBody>
+      </p:sp>
+    </p:spTree>
+  </p:cSld>
+  <p:clrMapOvr>
+    <a:masterClrMapping/>
+  </p:clrMapOvr>
+</p:sld>
+</file>
+
+<file path=ppt/slides/slide14.xml><?xml version="1.0" encoding="utf-8"?>
 <p:sld xmlns:a="http://schemas.openxmlformats.org/drawingml/2006/main" xmlns:p="http://schemas.openxmlformats.org/presentationml/2006/main" xmlns:r="http://schemas.openxmlformats.org/officeDocument/2006/relationships">
   <p:cSld>
     <p:spTree>
@@ -6041,7 +6630,7 @@
                   <a:srgbClr val="6B6A66"/>
                 </a:solidFill>
               </a:rPr>
-              <a:t>12 / 21</a:t>
+              <a:t>14 / 25</a:t>
             </a:r>
           </a:p>
         </p:txBody>
@@ -6054,7 +6643,7 @@
 </p:sld>
 </file>
 
-<file path=ppt/slides/slide13.xml><?xml version="1.0" encoding="utf-8"?>
+<file path=ppt/slides/slide15.xml><?xml version="1.0" encoding="utf-8"?>
 <p:sld xmlns:a="http://schemas.openxmlformats.org/drawingml/2006/main" xmlns:p="http://schemas.openxmlformats.org/presentationml/2006/main" xmlns:r="http://schemas.openxmlformats.org/officeDocument/2006/relationships">
   <p:cSld>
     <p:spTree>
@@ -6694,598 +7283,7 @@
                   <a:srgbClr val="6B6A66"/>
                 </a:solidFill>
               </a:rPr>
-              <a:t>13 / 21</a:t>
-            </a:r>
-          </a:p>
-        </p:txBody>
-      </p:sp>
-    </p:spTree>
-  </p:cSld>
-  <p:clrMapOvr>
-    <a:masterClrMapping/>
-  </p:clrMapOvr>
-</p:sld>
-</file>
-
-<file path=ppt/slides/slide14.xml><?xml version="1.0" encoding="utf-8"?>
-<p:sld xmlns:a="http://schemas.openxmlformats.org/drawingml/2006/main" xmlns:p="http://schemas.openxmlformats.org/presentationml/2006/main" xmlns:r="http://schemas.openxmlformats.org/officeDocument/2006/relationships">
-  <p:cSld>
-    <p:spTree>
-      <p:nvGrpSpPr>
-        <p:cNvPr id="1" name=""/>
-        <p:cNvGrpSpPr/>
-        <p:nvPr/>
-      </p:nvGrpSpPr>
-      <p:grpSpPr/>
-      <p:sp>
-        <p:nvSpPr>
-          <p:cNvPr id="2" name="Title 1"/>
-          <p:cNvSpPr>
-            <a:spLocks noGrp="1"/>
-          </p:cNvSpPr>
-          <p:nvPr>
-            <p:ph type="title"/>
-          </p:nvPr>
-        </p:nvSpPr>
-        <p:spPr/>
-        <p:txBody>
-          <a:bodyPr wrap="square"/>
-          <a:lstStyle/>
-          <a:p>
-            <a:pPr/>
-            <a:r>
-              <a:rPr sz="1800">
-                <a:solidFill>
-                  <a:srgbClr val="1A1A1A"/>
-                </a:solidFill>
-              </a:rPr>
-              <a:t>R8 — the least proven change, and possibly the most useful</a:t>
-            </a:r>
-          </a:p>
-        </p:txBody>
-      </p:sp>
-      <p:pic>
-        <p:nvPicPr>
-          <p:cNvPr id="3" name="Picture 2" descr="Side-by-side comparison. On the left, the arrangement as built: camera, computer, modem and power system all in an enclosure at the riverbank, so all of it is in the weather and service means opening the enclosure on site. On the right, the arrangement proposed for the pilot units: only the camera stays at the river and the computer runs indoors at a BHLK or IPB facility over a network link."/>
-          <p:cNvPicPr>
-            <a:picLocks noChangeAspect="1"/>
-          </p:cNvPicPr>
-          <p:nvPr/>
-        </p:nvPicPr>
-        <p:blipFill>
-          <a:blip r:embed="rId2"/>
-          <a:stretch>
-            <a:fillRect/>
-          </a:stretch>
-        </p:blipFill>
-        <p:spPr>
-          <a:xfrm>
-            <a:off x="1929392" y="919607"/>
-            <a:ext cx="5285215" cy="3071749"/>
-          </a:xfrm>
-          <a:prstGeom prst="rect">
-            <a:avLst/>
-          </a:prstGeom>
-        </p:spPr>
-      </p:pic>
-      <p:sp>
-        <p:nvSpPr>
-          <p:cNvPr id="4" name="TextBox 3"/>
-          <p:cNvSpPr txBox="1"/>
-          <p:nvPr/>
-        </p:nvSpPr>
-        <p:spPr>
-          <a:xfrm>
-            <a:off x="457200" y="3991356"/>
-            <a:ext cx="8229600" cy="420624"/>
-          </a:xfrm>
-          <a:prstGeom prst="rect">
-            <a:avLst/>
-          </a:prstGeom>
-          <a:noFill/>
-        </p:spPr>
-        <p:txBody>
-          <a:bodyPr wrap="square">
-            <a:spAutoFit/>
-          </a:bodyPr>
-          <a:lstStyle/>
-          <a:p>
-            <a:pPr/>
-            <a:r>
-              <a:rPr sz="1000">
-                <a:solidFill>
-                  <a:srgbClr val="6B6A66"/>
-                </a:solidFill>
-              </a:rPr>
-              <a:t>Designed and not yet field tested — the pilot's first experiment, not a proven alternative.</a:t>
-            </a:r>
-          </a:p>
-        </p:txBody>
-      </p:sp>
-      <p:sp>
-        <p:nvSpPr>
-          <p:cNvPr id="5" name="Rectangle 4" descr=""/>
-          <p:cNvSpPr/>
-          <p:nvPr/>
-        </p:nvSpPr>
-        <p:spPr>
-          <a:xfrm>
-            <a:off x="274320" y="4443984"/>
-            <a:ext cx="1517904" cy="676656"/>
-          </a:xfrm>
-          <a:prstGeom prst="rect">
-            <a:avLst/>
-          </a:prstGeom>
-          <a:solidFill>
-            <a:srgbClr val="FFFFFF"/>
-          </a:solidFill>
-          <a:ln>
-            <a:noFill/>
-          </a:ln>
-          <a:effectLst/>
-        </p:spPr>
-        <p:txBody>
-          <a:bodyPr rtlCol="0" anchor="ctr"/>
-          <a:lstStyle/>
-          <a:p>
-            <a:pPr algn="ctr"/>
-          </a:p>
-        </p:txBody>
-      </p:sp>
-      <p:pic>
-        <p:nvPicPr>
-          <p:cNvPr id="6" name="Picture 5" descr="Palang Merah Indonesia logo"/>
-          <p:cNvPicPr>
-            <a:picLocks noChangeAspect="1"/>
-          </p:cNvPicPr>
-          <p:nvPr/>
-        </p:nvPicPr>
-        <p:blipFill>
-          <a:blip r:embed="rId3"/>
-          <a:stretch>
-            <a:fillRect/>
-          </a:stretch>
-        </p:blipFill>
-        <p:spPr>
-          <a:xfrm>
-            <a:off x="1369770" y="4576572"/>
-            <a:ext cx="939918" cy="365760"/>
-          </a:xfrm>
-          <a:prstGeom prst="rect">
-            <a:avLst/>
-          </a:prstGeom>
-        </p:spPr>
-      </p:pic>
-      <p:pic>
-        <p:nvPicPr>
-          <p:cNvPr id="7" name="Picture 6" descr="Institut Pertanian Bogor logo"/>
-          <p:cNvPicPr>
-            <a:picLocks noChangeAspect="1"/>
-          </p:cNvPicPr>
-          <p:nvPr/>
-        </p:nvPicPr>
-        <p:blipFill>
-          <a:blip r:embed="rId4"/>
-          <a:stretch>
-            <a:fillRect/>
-          </a:stretch>
-        </p:blipFill>
-        <p:spPr>
-          <a:xfrm>
-            <a:off x="2602296" y="4576572"/>
-            <a:ext cx="539014" cy="365760"/>
-          </a:xfrm>
-          <a:prstGeom prst="rect">
-            <a:avLst/>
-          </a:prstGeom>
-        </p:spPr>
-      </p:pic>
-      <p:pic>
-        <p:nvPicPr>
-          <p:cNvPr id="8" name="Picture 7" descr="Balai Hidrologi dan Lingkungan Keairan logo"/>
-          <p:cNvPicPr>
-            <a:picLocks noChangeAspect="1"/>
-          </p:cNvPicPr>
-          <p:nvPr/>
-        </p:nvPicPr>
-        <p:blipFill>
-          <a:blip r:embed="rId5"/>
-          <a:stretch>
-            <a:fillRect/>
-          </a:stretch>
-        </p:blipFill>
-        <p:spPr>
-          <a:xfrm>
-            <a:off x="3433918" y="4576572"/>
-            <a:ext cx="365760" cy="365760"/>
-          </a:xfrm>
-          <a:prstGeom prst="rect">
-            <a:avLst/>
-          </a:prstGeom>
-        </p:spPr>
-      </p:pic>
-      <p:pic>
-        <p:nvPicPr>
-          <p:cNvPr id="9" name="Picture 8" descr="American Red Cross logo"/>
-          <p:cNvPicPr>
-            <a:picLocks noChangeAspect="1"/>
-          </p:cNvPicPr>
-          <p:nvPr/>
-        </p:nvPicPr>
-        <p:blipFill>
-          <a:blip r:embed="rId6"/>
-          <a:stretch>
-            <a:fillRect/>
-          </a:stretch>
-        </p:blipFill>
-        <p:spPr>
-          <a:xfrm>
-            <a:off x="4092286" y="4576572"/>
-            <a:ext cx="1103335" cy="365760"/>
-          </a:xfrm>
-          <a:prstGeom prst="rect">
-            <a:avLst/>
-          </a:prstGeom>
-        </p:spPr>
-      </p:pic>
-      <p:sp>
-        <p:nvSpPr>
-          <p:cNvPr id="10" name="TextBox 9"/>
-          <p:cNvSpPr txBox="1"/>
-          <p:nvPr/>
-        </p:nvSpPr>
-        <p:spPr>
-          <a:xfrm>
-            <a:off x="6553200" y="4667250"/>
-            <a:ext cx="2133600" cy="274638"/>
-          </a:xfrm>
-          <a:prstGeom prst="rect">
-            <a:avLst/>
-          </a:prstGeom>
-          <a:noFill/>
-        </p:spPr>
-        <p:txBody>
-          <a:bodyPr wrap="square">
-            <a:spAutoFit/>
-          </a:bodyPr>
-          <a:lstStyle/>
-          <a:p>
-            <a:pPr algn="r"/>
-            <a:r>
-              <a:rPr sz="800">
-                <a:solidFill>
-                  <a:srgbClr val="6B6A66"/>
-                </a:solidFill>
-              </a:rPr>
-              <a:t>14 / 21</a:t>
-            </a:r>
-          </a:p>
-        </p:txBody>
-      </p:sp>
-    </p:spTree>
-  </p:cSld>
-  <p:clrMapOvr>
-    <a:masterClrMapping/>
-  </p:clrMapOvr>
-</p:sld>
-</file>
-
-<file path=ppt/slides/slide15.xml><?xml version="1.0" encoding="utf-8"?>
-<p:sld xmlns:a="http://schemas.openxmlformats.org/drawingml/2006/main" xmlns:p="http://schemas.openxmlformats.org/presentationml/2006/main" xmlns:r="http://schemas.openxmlformats.org/officeDocument/2006/relationships">
-  <p:cSld>
-    <p:spTree>
-      <p:nvGrpSpPr>
-        <p:cNvPr id="1" name=""/>
-        <p:cNvGrpSpPr/>
-        <p:nvPr/>
-      </p:nvGrpSpPr>
-      <p:grpSpPr/>
-      <p:sp>
-        <p:nvSpPr>
-          <p:cNvPr id="2" name="Title 1"/>
-          <p:cNvSpPr>
-            <a:spLocks noGrp="1"/>
-          </p:cNvSpPr>
-          <p:nvPr>
-            <p:ph type="title"/>
-          </p:nvPr>
-        </p:nvSpPr>
-        <p:spPr/>
-        <p:txBody>
-          <a:bodyPr wrap="square"/>
-          <a:lstStyle/>
-          <a:p>
-            <a:pPr/>
-            <a:r>
-              <a:rPr sz="2000">
-                <a:solidFill>
-                  <a:srgbClr val="1A1A1A"/>
-                </a:solidFill>
-              </a:rPr>
-              <a:t>One lesson about method</a:t>
-            </a:r>
-          </a:p>
-        </p:txBody>
-      </p:sp>
-      <p:sp>
-        <p:nvSpPr>
-          <p:cNvPr id="3" name="Text Placeholder 2"/>
-          <p:cNvSpPr>
-            <a:spLocks noGrp="1"/>
-          </p:cNvSpPr>
-          <p:nvPr>
-            <p:ph type="body" idx="12" sz="quarter"/>
-          </p:nvPr>
-        </p:nvSpPr>
-        <p:spPr>
-          <a:xfrm>
-            <a:off x="457200" y="1155065"/>
-            <a:ext cx="4773168" cy="3256915"/>
-          </a:xfrm>
-        </p:spPr>
-        <p:txBody>
-          <a:bodyPr wrap="square"/>
-          <a:lstStyle/>
-          <a:p>
-            <a:pPr/>
-            <a:r>
-              <a:rPr sz="1200">
-                <a:solidFill>
-                  <a:srgbClr val="1A1A1A"/>
-                </a:solidFill>
-              </a:rPr>
-              <a:t>The budget was applied part by part: the cheapest item meeting each requirement.</a:t>
-            </a:r>
-          </a:p>
-          <a:p>
-            <a:pPr/>
-            <a:r>
-              <a:rPr sz="1200">
-                <a:solidFill>
-                  <a:srgbClr val="1A1A1A"/>
-                </a:solidFill>
-              </a:rPr>
-              <a:t>It prices each part against its specification sheet, not against what that part's limits cost the rest of the system.</a:t>
-            </a:r>
-          </a:p>
-          <a:p>
-            <a:pPr/>
-            <a:r>
-              <a:rPr sz="1200">
-                <a:solidFill>
-                  <a:srgbClr val="1A1A1A"/>
-                </a:solidFill>
-              </a:rPr>
-              <a:t>The camera meets every line of its specification, and still costs a fifth of the video quality and 30–60 s of battery on every waking.</a:t>
-            </a:r>
-          </a:p>
-          <a:p>
-            <a:pPr/>
-            <a:r>
-              <a:rPr sz="1200">
-                <a:solidFill>
-                  <a:srgbClr val="1A1A1A"/>
-                </a:solidFill>
-              </a:rPr>
-              <a:t>Its light fires whenever it starts and cannot be turned off — 48 flashes a day at the present site.</a:t>
-            </a:r>
-          </a:p>
-        </p:txBody>
-      </p:sp>
-      <p:pic>
-        <p:nvPicPr>
-          <p:cNvPr id="4" name="Picture 3" descr="The camera as delivered, on a workbench mat with its mounting hardware, waterproof cable boot and printed manual."/>
-          <p:cNvPicPr>
-            <a:picLocks noChangeAspect="1"/>
-          </p:cNvPicPr>
-          <p:nvPr/>
-        </p:nvPicPr>
-        <p:blipFill>
-          <a:blip r:embed="rId2"/>
-          <a:stretch>
-            <a:fillRect/>
-          </a:stretch>
-        </p:blipFill>
-        <p:spPr>
-          <a:xfrm>
-            <a:off x="5458968" y="1298765"/>
-            <a:ext cx="3227832" cy="2420874"/>
-          </a:xfrm>
-          <a:prstGeom prst="rect">
-            <a:avLst/>
-          </a:prstGeom>
-        </p:spPr>
-      </p:pic>
-      <p:sp>
-        <p:nvSpPr>
-          <p:cNvPr id="5" name="TextBox 4"/>
-          <p:cNvSpPr txBox="1"/>
-          <p:nvPr/>
-        </p:nvSpPr>
-        <p:spPr>
-          <a:xfrm>
-            <a:off x="5458968" y="3863340"/>
-            <a:ext cx="3227832" cy="548640"/>
-          </a:xfrm>
-          <a:prstGeom prst="rect">
-            <a:avLst/>
-          </a:prstGeom>
-          <a:noFill/>
-        </p:spPr>
-        <p:txBody>
-          <a:bodyPr wrap="square">
-            <a:spAutoFit/>
-          </a:bodyPr>
-          <a:lstStyle/>
-          <a:p>
-            <a:pPr/>
-            <a:r>
-              <a:rPr sz="950">
-                <a:solidFill>
-                  <a:srgbClr val="42413E"/>
-                </a:solidFill>
-              </a:rPr>
-              <a:t>Capable hardware, running a reseller's version of the manufacturer's software.</a:t>
-            </a:r>
-          </a:p>
-        </p:txBody>
-      </p:sp>
-      <p:sp>
-        <p:nvSpPr>
-          <p:cNvPr id="6" name="Rectangle 5" descr=""/>
-          <p:cNvSpPr/>
-          <p:nvPr/>
-        </p:nvSpPr>
-        <p:spPr>
-          <a:xfrm>
-            <a:off x="274320" y="4443984"/>
-            <a:ext cx="1517904" cy="676656"/>
-          </a:xfrm>
-          <a:prstGeom prst="rect">
-            <a:avLst/>
-          </a:prstGeom>
-          <a:solidFill>
-            <a:srgbClr val="FFFFFF"/>
-          </a:solidFill>
-          <a:ln>
-            <a:noFill/>
-          </a:ln>
-          <a:effectLst/>
-        </p:spPr>
-        <p:txBody>
-          <a:bodyPr rtlCol="0" anchor="ctr"/>
-          <a:lstStyle/>
-          <a:p>
-            <a:pPr algn="ctr"/>
-          </a:p>
-        </p:txBody>
-      </p:sp>
-      <p:pic>
-        <p:nvPicPr>
-          <p:cNvPr id="7" name="Picture 6" descr="Palang Merah Indonesia logo"/>
-          <p:cNvPicPr>
-            <a:picLocks noChangeAspect="1"/>
-          </p:cNvPicPr>
-          <p:nvPr/>
-        </p:nvPicPr>
-        <p:blipFill>
-          <a:blip r:embed="rId3"/>
-          <a:stretch>
-            <a:fillRect/>
-          </a:stretch>
-        </p:blipFill>
-        <p:spPr>
-          <a:xfrm>
-            <a:off x="1369770" y="4576572"/>
-            <a:ext cx="939918" cy="365760"/>
-          </a:xfrm>
-          <a:prstGeom prst="rect">
-            <a:avLst/>
-          </a:prstGeom>
-        </p:spPr>
-      </p:pic>
-      <p:pic>
-        <p:nvPicPr>
-          <p:cNvPr id="8" name="Picture 7" descr="Institut Pertanian Bogor logo"/>
-          <p:cNvPicPr>
-            <a:picLocks noChangeAspect="1"/>
-          </p:cNvPicPr>
-          <p:nvPr/>
-        </p:nvPicPr>
-        <p:blipFill>
-          <a:blip r:embed="rId4"/>
-          <a:stretch>
-            <a:fillRect/>
-          </a:stretch>
-        </p:blipFill>
-        <p:spPr>
-          <a:xfrm>
-            <a:off x="2602296" y="4576572"/>
-            <a:ext cx="539014" cy="365760"/>
-          </a:xfrm>
-          <a:prstGeom prst="rect">
-            <a:avLst/>
-          </a:prstGeom>
-        </p:spPr>
-      </p:pic>
-      <p:pic>
-        <p:nvPicPr>
-          <p:cNvPr id="9" name="Picture 8" descr="Balai Hidrologi dan Lingkungan Keairan logo"/>
-          <p:cNvPicPr>
-            <a:picLocks noChangeAspect="1"/>
-          </p:cNvPicPr>
-          <p:nvPr/>
-        </p:nvPicPr>
-        <p:blipFill>
-          <a:blip r:embed="rId5"/>
-          <a:stretch>
-            <a:fillRect/>
-          </a:stretch>
-        </p:blipFill>
-        <p:spPr>
-          <a:xfrm>
-            <a:off x="3433918" y="4576572"/>
-            <a:ext cx="365760" cy="365760"/>
-          </a:xfrm>
-          <a:prstGeom prst="rect">
-            <a:avLst/>
-          </a:prstGeom>
-        </p:spPr>
-      </p:pic>
-      <p:pic>
-        <p:nvPicPr>
-          <p:cNvPr id="10" name="Picture 9" descr="American Red Cross logo"/>
-          <p:cNvPicPr>
-            <a:picLocks noChangeAspect="1"/>
-          </p:cNvPicPr>
-          <p:nvPr/>
-        </p:nvPicPr>
-        <p:blipFill>
-          <a:blip r:embed="rId6"/>
-          <a:stretch>
-            <a:fillRect/>
-          </a:stretch>
-        </p:blipFill>
-        <p:spPr>
-          <a:xfrm>
-            <a:off x="4092286" y="4576572"/>
-            <a:ext cx="1103335" cy="365760"/>
-          </a:xfrm>
-          <a:prstGeom prst="rect">
-            <a:avLst/>
-          </a:prstGeom>
-        </p:spPr>
-      </p:pic>
-      <p:sp>
-        <p:nvSpPr>
-          <p:cNvPr id="11" name="TextBox 10"/>
-          <p:cNvSpPr txBox="1"/>
-          <p:nvPr/>
-        </p:nvSpPr>
-        <p:spPr>
-          <a:xfrm>
-            <a:off x="6553200" y="4667250"/>
-            <a:ext cx="2133600" cy="274638"/>
-          </a:xfrm>
-          <a:prstGeom prst="rect">
-            <a:avLst/>
-          </a:prstGeom>
-          <a:noFill/>
-        </p:spPr>
-        <p:txBody>
-          <a:bodyPr wrap="square">
-            <a:spAutoFit/>
-          </a:bodyPr>
-          <a:lstStyle/>
-          <a:p>
-            <a:pPr algn="r"/>
-            <a:r>
-              <a:rPr sz="800">
-                <a:solidFill>
-                  <a:srgbClr val="6B6A66"/>
-                </a:solidFill>
-              </a:rPr>
-              <a:t>15 / 21</a:t>
+              <a:t>15 / 25</a:t>
             </a:r>
           </a:p>
         </p:txBody>
@@ -7325,90 +7323,77 @@
           <a:p>
             <a:pPr/>
             <a:r>
-              <a:rPr sz="2000">
+              <a:rPr sz="1800">
                 <a:solidFill>
                   <a:srgbClr val="1A1A1A"/>
                 </a:solidFill>
               </a:rPr>
-              <a:t>Building and looking after the units in Indonesia</a:t>
-            </a:r>
-          </a:p>
-        </p:txBody>
-      </p:sp>
-      <p:sp>
-        <p:nvSpPr>
-          <p:cNvPr id="3" name="Text Placeholder 2"/>
-          <p:cNvSpPr>
-            <a:spLocks noGrp="1"/>
-          </p:cNvSpPr>
-          <p:nvPr>
-            <p:ph type="body" idx="12" sz="quarter"/>
-          </p:nvPr>
-        </p:nvSpPr>
-        <p:spPr/>
-        <p:txBody>
-          <a:bodyPr wrap="square"/>
+              <a:t>R8 — the least proven change, and possibly the most useful</a:t>
+            </a:r>
+          </a:p>
+        </p:txBody>
+      </p:sp>
+      <p:pic>
+        <p:nvPicPr>
+          <p:cNvPr id="3" name="Picture 2" descr="Side-by-side comparison. On the left, the arrangement as built: camera, computer, modem and power system all in an enclosure at the riverbank, so all of it is in the weather and service means opening the enclosure on site. On the right, the arrangement proposed for the pilot units: only the camera stays at the river and the computer runs indoors at a BHLK or IPB facility over a network link."/>
+          <p:cNvPicPr>
+            <a:picLocks noChangeAspect="1"/>
+          </p:cNvPicPr>
+          <p:nvPr/>
+        </p:nvPicPr>
+        <p:blipFill>
+          <a:blip r:embed="rId2"/>
+          <a:stretch>
+            <a:fillRect/>
+          </a:stretch>
+        </p:blipFill>
+        <p:spPr>
+          <a:xfrm>
+            <a:off x="1929392" y="919607"/>
+            <a:ext cx="5285215" cy="3071749"/>
+          </a:xfrm>
+          <a:prstGeom prst="rect">
+            <a:avLst/>
+          </a:prstGeom>
+        </p:spPr>
+      </p:pic>
+      <p:sp>
+        <p:nvSpPr>
+          <p:cNvPr id="4" name="TextBox 3"/>
+          <p:cNvSpPr txBox="1"/>
+          <p:nvPr/>
+        </p:nvSpPr>
+        <p:spPr>
+          <a:xfrm>
+            <a:off x="457200" y="3991356"/>
+            <a:ext cx="8229600" cy="420624"/>
+          </a:xfrm>
+          <a:prstGeom prst="rect">
+            <a:avLst/>
+          </a:prstGeom>
+          <a:noFill/>
+        </p:spPr>
+        <p:txBody>
+          <a:bodyPr wrap="square">
+            <a:spAutoFit/>
+          </a:bodyPr>
           <a:lstStyle/>
           <a:p>
             <a:pPr/>
             <a:r>
-              <a:rPr sz="1400">
-                <a:solidFill>
-                  <a:srgbClr val="1A1A1A"/>
-                </a:solidFill>
-              </a:rPr>
-              <a:t>The design was made to be built by people who are not electronics specialists, with tools they already own.</a:t>
-            </a:r>
-          </a:p>
-          <a:p>
-            <a:pPr/>
-            <a:r>
-              <a:rPr sz="1400">
-                <a:solidFill>
-                  <a:srgbClr val="1A1A1A"/>
-                </a:solidFill>
-              </a:rPr>
-              <a:t>That intent only becomes real if the parts can be bought locally and the documentation supports substitution — R3.</a:t>
-            </a:r>
-          </a:p>
-          <a:p>
-            <a:pPr/>
-            <a:r>
-              <a:rPr sz="1400">
-                <a:solidFill>
-                  <a:srgbClr val="1A1A1A"/>
-                </a:solidFill>
-              </a:rPr>
-              <a:t>Spares held at the local PMI chapter turn a failure into a part swap rather than a shipment.</a:t>
-            </a:r>
-          </a:p>
-          <a:p>
-            <a:pPr/>
-            <a:r>
-              <a:rPr sz="1400">
-                <a:solidFill>
-                  <a:srgbClr val="1A1A1A"/>
-                </a:solidFill>
-              </a:rPr>
-              <a:t>Where the field unit is a standard security camera, support falls within a supply chain that already exists across Indonesia.</a:t>
-            </a:r>
-          </a:p>
-          <a:p>
-            <a:pPr/>
-            <a:r>
-              <a:rPr sz="1400">
-                <a:solidFill>
-                  <a:srgbClr val="1A1A1A"/>
-                </a:solidFill>
-              </a:rPr>
-              <a:t>We would rather help build the capacity to maintain these stations than remain the place they are sent when they break.</a:t>
-            </a:r>
-          </a:p>
-        </p:txBody>
-      </p:sp>
-      <p:sp>
-        <p:nvSpPr>
-          <p:cNvPr id="4" name="Rectangle 3" descr=""/>
+              <a:rPr sz="1000">
+                <a:solidFill>
+                  <a:srgbClr val="6B6A66"/>
+                </a:solidFill>
+              </a:rPr>
+              <a:t>Designed and not yet field tested — the pilot's first experiment, not a proven alternative.</a:t>
+            </a:r>
+          </a:p>
+        </p:txBody>
+      </p:sp>
+      <p:sp>
+        <p:nvSpPr>
+          <p:cNvPr id="5" name="Rectangle 4" descr=""/>
           <p:cNvSpPr/>
           <p:nvPr/>
         </p:nvSpPr>
@@ -7438,31 +7423,7 @@
       </p:sp>
       <p:pic>
         <p:nvPicPr>
-          <p:cNvPr id="5" name="Picture 4" descr="Palang Merah Indonesia logo"/>
-          <p:cNvPicPr>
-            <a:picLocks noChangeAspect="1"/>
-          </p:cNvPicPr>
-          <p:nvPr/>
-        </p:nvPicPr>
-        <p:blipFill>
-          <a:blip r:embed="rId2"/>
-          <a:stretch>
-            <a:fillRect/>
-          </a:stretch>
-        </p:blipFill>
-        <p:spPr>
-          <a:xfrm>
-            <a:off x="1369770" y="4576572"/>
-            <a:ext cx="939918" cy="365760"/>
-          </a:xfrm>
-          <a:prstGeom prst="rect">
-            <a:avLst/>
-          </a:prstGeom>
-        </p:spPr>
-      </p:pic>
-      <p:pic>
-        <p:nvPicPr>
-          <p:cNvPr id="6" name="Picture 5" descr="Institut Pertanian Bogor logo"/>
+          <p:cNvPr id="6" name="Picture 5" descr="Palang Merah Indonesia logo"/>
           <p:cNvPicPr>
             <a:picLocks noChangeAspect="1"/>
           </p:cNvPicPr>
@@ -7476,8 +7437,8 @@
         </p:blipFill>
         <p:spPr>
           <a:xfrm>
-            <a:off x="2602296" y="4576572"/>
-            <a:ext cx="539014" cy="365760"/>
+            <a:off x="1369770" y="4576572"/>
+            <a:ext cx="939918" cy="365760"/>
           </a:xfrm>
           <a:prstGeom prst="rect">
             <a:avLst/>
@@ -7486,7 +7447,7 @@
       </p:pic>
       <p:pic>
         <p:nvPicPr>
-          <p:cNvPr id="7" name="Picture 6" descr="Balai Hidrologi dan Lingkungan Keairan logo"/>
+          <p:cNvPr id="7" name="Picture 6" descr="Institut Pertanian Bogor logo"/>
           <p:cNvPicPr>
             <a:picLocks noChangeAspect="1"/>
           </p:cNvPicPr>
@@ -7500,8 +7461,8 @@
         </p:blipFill>
         <p:spPr>
           <a:xfrm>
-            <a:off x="3433918" y="4576572"/>
-            <a:ext cx="365760" cy="365760"/>
+            <a:off x="2602296" y="4576572"/>
+            <a:ext cx="539014" cy="365760"/>
           </a:xfrm>
           <a:prstGeom prst="rect">
             <a:avLst/>
@@ -7510,7 +7471,7 @@
       </p:pic>
       <p:pic>
         <p:nvPicPr>
-          <p:cNvPr id="8" name="Picture 7" descr="American Red Cross logo"/>
+          <p:cNvPr id="8" name="Picture 7" descr="Balai Hidrologi dan Lingkungan Keairan logo"/>
           <p:cNvPicPr>
             <a:picLocks noChangeAspect="1"/>
           </p:cNvPicPr>
@@ -7524,6 +7485,30 @@
         </p:blipFill>
         <p:spPr>
           <a:xfrm>
+            <a:off x="3433918" y="4576572"/>
+            <a:ext cx="365760" cy="365760"/>
+          </a:xfrm>
+          <a:prstGeom prst="rect">
+            <a:avLst/>
+          </a:prstGeom>
+        </p:spPr>
+      </p:pic>
+      <p:pic>
+        <p:nvPicPr>
+          <p:cNvPr id="9" name="Picture 8" descr="American Red Cross logo"/>
+          <p:cNvPicPr>
+            <a:picLocks noChangeAspect="1"/>
+          </p:cNvPicPr>
+          <p:nvPr/>
+        </p:nvPicPr>
+        <p:blipFill>
+          <a:blip r:embed="rId6"/>
+          <a:stretch>
+            <a:fillRect/>
+          </a:stretch>
+        </p:blipFill>
+        <p:spPr>
+          <a:xfrm>
             <a:off x="4092286" y="4576572"/>
             <a:ext cx="1103335" cy="365760"/>
           </a:xfrm>
@@ -7534,7 +7519,7 @@
       </p:pic>
       <p:sp>
         <p:nvSpPr>
-          <p:cNvPr id="9" name="TextBox 8"/>
+          <p:cNvPr id="10" name="TextBox 9"/>
           <p:cNvSpPr txBox="1"/>
           <p:nvPr/>
         </p:nvSpPr>
@@ -7561,7 +7546,7 @@
                   <a:srgbClr val="6B6A66"/>
                 </a:solidFill>
               </a:rPr>
-              <a:t>16 / 21</a:t>
+              <a:t>16 / 25</a:t>
             </a:r>
           </a:p>
         </p:txBody>
@@ -7606,7 +7591,7 @@
                   <a:srgbClr val="1A1A1A"/>
                 </a:solidFill>
               </a:rPr>
-              <a:t>Hosting the data in Indonesia</a:t>
+              <a:t>One lesson about method</a:t>
             </a:r>
           </a:p>
         </p:txBody>
@@ -7621,81 +7606,122 @@
             <p:ph type="body" idx="12" sz="quarter"/>
           </p:nvPr>
         </p:nvSpPr>
-        <p:spPr/>
+        <p:spPr>
+          <a:xfrm>
+            <a:off x="457200" y="1155065"/>
+            <a:ext cx="4773168" cy="3256915"/>
+          </a:xfrm>
+        </p:spPr>
         <p:txBody>
           <a:bodyPr wrap="square"/>
           <a:lstStyle/>
           <a:p>
             <a:pPr/>
             <a:r>
-              <a:rPr sz="1400">
+              <a:rPr sz="1200">
                 <a:solidFill>
                   <a:srgbClr val="1A1A1A"/>
                 </a:solidFill>
               </a:rPr>
-              <a:t>BHLK's offer suits the pilot, and holding the data in Indonesia carries a clear benefit for a government-partnered deployment.</a:t>
+              <a:t>The budget was applied part by part: the cheapest item meeting each requirement.</a:t>
             </a:r>
           </a:p>
           <a:p>
             <a:pPr/>
             <a:r>
-              <a:rPr sz="1400">
+              <a:rPr sz="1200">
                 <a:solidFill>
                   <a:srgbClr val="1A1A1A"/>
                 </a:solidFill>
               </a:rPr>
-              <a:t>Two constraints to design for rather than discover:</a:t>
-            </a:r>
-          </a:p>
-          <a:p>
-            <a:pPr lvl="1"/>
-            <a:r>
-              <a:rPr sz="1250">
-                <a:solidFill>
-                  <a:srgbClr val="6B6A66"/>
-                </a:solidFill>
-              </a:rPr>
-              <a:t>The video store and the database must share one filesystem. Plan storage as a single volume.</a:t>
-            </a:r>
-          </a:p>
-          <a:p>
-            <a:pPr lvl="1"/>
-            <a:r>
-              <a:rPr sz="1250">
-                <a:solidFill>
-                  <a:srgbClr val="6B6A66"/>
-                </a:solidFill>
-              </a:rPr>
-              <a:t>Server and station software versions are tied together, and a remote station cannot be upgraded on demand.</a:t>
+              <a:t>It prices each part against its specification sheet, not against what that part's limits cost the rest of the system.</a:t>
             </a:r>
           </a:p>
           <a:p>
             <a:pPr/>
             <a:r>
-              <a:rPr sz="1400">
+              <a:rPr sz="1200">
                 <a:solidFill>
                   <a:srgbClr val="1A1A1A"/>
                 </a:solidFill>
               </a:rPr>
-              <a:t>We would suggest running both instances in parallel until the new one has completed a full operating cycle, including an upgrade.</a:t>
+              <a:t>The camera meets every line of its specification, and still costs a fifth of the video quality and 30–60 s of battery on every waking.</a:t>
             </a:r>
           </a:p>
           <a:p>
             <a:pPr/>
             <a:r>
-              <a:rPr sz="1400">
+              <a:rPr sz="1200">
                 <a:solidFill>
                   <a:srgbClr val="1A1A1A"/>
                 </a:solidFill>
               </a:rPr>
-              <a:t>Worth agreeing in writing: where the authoritative copy sits, who administers it, who has access, and the retention policy.</a:t>
-            </a:r>
-          </a:p>
-        </p:txBody>
-      </p:sp>
-      <p:sp>
-        <p:nvSpPr>
-          <p:cNvPr id="4" name="Rectangle 3" descr=""/>
+              <a:t>Its light fires whenever it starts and cannot be turned off — 48 flashes a day at the present site.</a:t>
+            </a:r>
+          </a:p>
+        </p:txBody>
+      </p:sp>
+      <p:pic>
+        <p:nvPicPr>
+          <p:cNvPr id="4" name="Picture 3" descr="The camera as delivered, on a workbench mat with its mounting hardware, waterproof cable boot and printed manual."/>
+          <p:cNvPicPr>
+            <a:picLocks noChangeAspect="1"/>
+          </p:cNvPicPr>
+          <p:nvPr/>
+        </p:nvPicPr>
+        <p:blipFill>
+          <a:blip r:embed="rId2"/>
+          <a:stretch>
+            <a:fillRect/>
+          </a:stretch>
+        </p:blipFill>
+        <p:spPr>
+          <a:xfrm>
+            <a:off x="5458968" y="1298765"/>
+            <a:ext cx="3227832" cy="2420874"/>
+          </a:xfrm>
+          <a:prstGeom prst="rect">
+            <a:avLst/>
+          </a:prstGeom>
+        </p:spPr>
+      </p:pic>
+      <p:sp>
+        <p:nvSpPr>
+          <p:cNvPr id="5" name="TextBox 4"/>
+          <p:cNvSpPr txBox="1"/>
+          <p:nvPr/>
+        </p:nvSpPr>
+        <p:spPr>
+          <a:xfrm>
+            <a:off x="5458968" y="3863340"/>
+            <a:ext cx="3227832" cy="548640"/>
+          </a:xfrm>
+          <a:prstGeom prst="rect">
+            <a:avLst/>
+          </a:prstGeom>
+          <a:noFill/>
+        </p:spPr>
+        <p:txBody>
+          <a:bodyPr wrap="square">
+            <a:spAutoFit/>
+          </a:bodyPr>
+          <a:lstStyle/>
+          <a:p>
+            <a:pPr/>
+            <a:r>
+              <a:rPr sz="950">
+                <a:solidFill>
+                  <a:srgbClr val="42413E"/>
+                </a:solidFill>
+              </a:rPr>
+              <a:t>Capable hardware, running a reseller's version of the manufacturer's software.</a:t>
+            </a:r>
+          </a:p>
+        </p:txBody>
+      </p:sp>
+      <p:sp>
+        <p:nvSpPr>
+          <p:cNvPr id="6" name="Rectangle 5" descr=""/>
           <p:cNvSpPr/>
           <p:nvPr/>
         </p:nvSpPr>
@@ -7725,31 +7751,7 @@
       </p:sp>
       <p:pic>
         <p:nvPicPr>
-          <p:cNvPr id="5" name="Picture 4" descr="Palang Merah Indonesia logo"/>
-          <p:cNvPicPr>
-            <a:picLocks noChangeAspect="1"/>
-          </p:cNvPicPr>
-          <p:nvPr/>
-        </p:nvPicPr>
-        <p:blipFill>
-          <a:blip r:embed="rId2"/>
-          <a:stretch>
-            <a:fillRect/>
-          </a:stretch>
-        </p:blipFill>
-        <p:spPr>
-          <a:xfrm>
-            <a:off x="1369770" y="4576572"/>
-            <a:ext cx="939918" cy="365760"/>
-          </a:xfrm>
-          <a:prstGeom prst="rect">
-            <a:avLst/>
-          </a:prstGeom>
-        </p:spPr>
-      </p:pic>
-      <p:pic>
-        <p:nvPicPr>
-          <p:cNvPr id="6" name="Picture 5" descr="Institut Pertanian Bogor logo"/>
+          <p:cNvPr id="7" name="Picture 6" descr="Palang Merah Indonesia logo"/>
           <p:cNvPicPr>
             <a:picLocks noChangeAspect="1"/>
           </p:cNvPicPr>
@@ -7763,8 +7765,8 @@
         </p:blipFill>
         <p:spPr>
           <a:xfrm>
-            <a:off x="2602296" y="4576572"/>
-            <a:ext cx="539014" cy="365760"/>
+            <a:off x="1369770" y="4576572"/>
+            <a:ext cx="939918" cy="365760"/>
           </a:xfrm>
           <a:prstGeom prst="rect">
             <a:avLst/>
@@ -7773,7 +7775,7 @@
       </p:pic>
       <p:pic>
         <p:nvPicPr>
-          <p:cNvPr id="7" name="Picture 6" descr="Balai Hidrologi dan Lingkungan Keairan logo"/>
+          <p:cNvPr id="8" name="Picture 7" descr="Institut Pertanian Bogor logo"/>
           <p:cNvPicPr>
             <a:picLocks noChangeAspect="1"/>
           </p:cNvPicPr>
@@ -7787,8 +7789,8 @@
         </p:blipFill>
         <p:spPr>
           <a:xfrm>
-            <a:off x="3433918" y="4576572"/>
-            <a:ext cx="365760" cy="365760"/>
+            <a:off x="2602296" y="4576572"/>
+            <a:ext cx="539014" cy="365760"/>
           </a:xfrm>
           <a:prstGeom prst="rect">
             <a:avLst/>
@@ -7797,7 +7799,7 @@
       </p:pic>
       <p:pic>
         <p:nvPicPr>
-          <p:cNvPr id="8" name="Picture 7" descr="American Red Cross logo"/>
+          <p:cNvPr id="9" name="Picture 8" descr="Balai Hidrologi dan Lingkungan Keairan logo"/>
           <p:cNvPicPr>
             <a:picLocks noChangeAspect="1"/>
           </p:cNvPicPr>
@@ -7811,6 +7813,30 @@
         </p:blipFill>
         <p:spPr>
           <a:xfrm>
+            <a:off x="3433918" y="4576572"/>
+            <a:ext cx="365760" cy="365760"/>
+          </a:xfrm>
+          <a:prstGeom prst="rect">
+            <a:avLst/>
+          </a:prstGeom>
+        </p:spPr>
+      </p:pic>
+      <p:pic>
+        <p:nvPicPr>
+          <p:cNvPr id="10" name="Picture 9" descr="American Red Cross logo"/>
+          <p:cNvPicPr>
+            <a:picLocks noChangeAspect="1"/>
+          </p:cNvPicPr>
+          <p:nvPr/>
+        </p:nvPicPr>
+        <p:blipFill>
+          <a:blip r:embed="rId6"/>
+          <a:stretch>
+            <a:fillRect/>
+          </a:stretch>
+        </p:blipFill>
+        <p:spPr>
+          <a:xfrm>
             <a:off x="4092286" y="4576572"/>
             <a:ext cx="1103335" cy="365760"/>
           </a:xfrm>
@@ -7821,7 +7847,7 @@
       </p:pic>
       <p:sp>
         <p:nvSpPr>
-          <p:cNvPr id="9" name="TextBox 8"/>
+          <p:cNvPr id="11" name="TextBox 10"/>
           <p:cNvSpPr txBox="1"/>
           <p:nvPr/>
         </p:nvSpPr>
@@ -7848,7 +7874,7 @@
                   <a:srgbClr val="6B6A66"/>
                 </a:solidFill>
               </a:rPr>
-              <a:t>17 / 21</a:t>
+              <a:t>17 / 25</a:t>
             </a:r>
           </a:p>
         </p:txBody>
@@ -7893,7 +7919,7 @@
                   <a:srgbClr val="1A1A1A"/>
                 </a:solidFill>
               </a:rPr>
-              <a:t>Choosing the sites</a:t>
+              <a:t>Build the test station first</a:t>
             </a:r>
           </a:p>
         </p:txBody>
@@ -7915,89 +7941,56 @@
           <a:p>
             <a:pPr/>
             <a:r>
-              <a:rPr sz="1250">
+              <a:rPr sz="1500">
                 <a:solidFill>
                   <a:srgbClr val="1A1A1A"/>
                 </a:solidFill>
               </a:rPr>
-              <a:t>An open site helps with three problems at once: satellite positioning, the sun-water-camera angle, and the view across the section.</a:t>
+              <a:t>Everything we know about the failures was diagnosed on a solar station, on a river, awake for tens of seconds, that we could not touch.</a:t>
+            </a:r>
+          </a:p>
+          <a:p>
+            <a:pPr lvl="1"/>
+            <a:r>
+              <a:rPr sz="1350">
+                <a:solidFill>
+                  <a:srgbClr val="6B6A66"/>
+                </a:solidFill>
+              </a:rPr>
+              <a:t>We could not reproduce a fault, test a fix before committing it remotely, or tell a working change from a quiet week. Several diagnoses took months for that reason alone.</a:t>
             </a:r>
           </a:p>
           <a:p>
             <a:pPr/>
             <a:r>
-              <a:rPr sz="1250">
+              <a:rPr sz="1500">
                 <a:solidFill>
                   <a:srgbClr val="1A1A1A"/>
                 </a:solidFill>
               </a:rPr>
-              <a:t>A move costs a fresh survey and a fresh calibration, not only a relocation. The survey is the expensive part.</a:t>
+              <a:t>The Jakarta station was meant to be that test station and never became one. Its absence cost more than the site it was built for.</a:t>
             </a:r>
           </a:p>
           <a:p>
             <a:pPr/>
             <a:r>
-              <a:rPr sz="1250">
+              <a:rPr sz="1500">
                 <a:solidFill>
                   <a:srgbClr val="1A1A1A"/>
                 </a:solidFill>
               </a:rPr>
-              <a:t>Site permission should be settled before a unit is built for a particular site.</a:t>
-            </a:r>
-          </a:p>
-          <a:p>
-            <a:pPr lvl="1"/>
-            <a:r>
-              <a:rPr sz="1100">
-                <a:solidFill>
-                  <a:srgbClr val="6B6A66"/>
-                </a:solidFill>
-              </a:rPr>
-              <a:t>A complete station was built and tested for an intended Jakarta site. Permission fell through during the April visit.</a:t>
+              <a:t>A test station is not a spare: mains-powered, always on, somewhere someone can watch it, open it and break it deliberately.</a:t>
             </a:r>
           </a:p>
           <a:p>
             <a:pPr/>
             <a:r>
-              <a:rPr sz="1250">
+              <a:rPr sz="1500">
                 <a:solidFill>
                   <a:srgbClr val="1A1A1A"/>
                 </a:solidFill>
               </a:rPr>
-              <a:t>That station is still available. We suggest it serves best as a study and test unit.</a:t>
-            </a:r>
-          </a:p>
-          <a:p>
-            <a:pPr lvl="1"/>
-            <a:r>
-              <a:rPr sz="1100">
-                <a:solidFill>
-                  <a:srgbClr val="6B6A66"/>
-                </a:solidFill>
-              </a:rPr>
-              <a:t>Open it, trace it, power it up, take it apart — and install it somewhere convenient and local if that is useful, so it can be exercised against real water.</a:t>
-            </a:r>
-          </a:p>
-          <a:p>
-            <a:pPr lvl="1"/>
-            <a:r>
-              <a:rPr sz="1100">
-                <a:solidFill>
-                  <a:srgbClr val="6B6A66"/>
-                </a:solidFill>
-              </a:rPr>
-              <a:t>Not as an operational station with expectations of availability and consistent data. It carries the design this briefing recommends changing.</a:t>
-            </a:r>
-          </a:p>
-          <a:p>
-            <a:pPr/>
-            <a:r>
-              <a:rPr sz="1250">
-                <a:solidFill>
-                  <a:srgbClr val="1A1A1A"/>
-                </a:solidFill>
-              </a:rPr>
-              <a:t>We would not build to a site again before you tell us the permission is in place.</a:t>
+              <a:t>We would treat it as the first station a pilot builds, not the last.</a:t>
             </a:r>
           </a:p>
         </p:txBody>
@@ -8157,7 +8150,7 @@
                   <a:srgbClr val="6B6A66"/>
                 </a:solidFill>
               </a:rPr>
-              <a:t>18 / 21</a:t>
+              <a:t>18 / 25</a:t>
             </a:r>
           </a:p>
         </p:txBody>
@@ -8202,7 +8195,7 @@
                   <a:srgbClr val="1A1A1A"/>
                 </a:solidFill>
               </a:rPr>
-              <a:t>Working together</a:t>
+              <a:t>What is worth keeping</a:t>
             </a:r>
           </a:p>
         </p:txBody>
@@ -8229,7 +8222,7 @@
                   <a:srgbClr val="1A1A1A"/>
                 </a:solidFill>
               </a:rPr>
-              <a:t>BHLK — data processing, conformance with standards, and the route to acceptance within PUPR data systems. Offers server capacity.</a:t>
+              <a:t>The five constraints: commodity parts, no soldering, no specialist skills, common tools, five-minute replacement.</a:t>
             </a:r>
           </a:p>
           <a:p>
@@ -8240,7 +8233,29 @@
                   <a:srgbClr val="1A1A1A"/>
                 </a:solidFill>
               </a:rPr>
-              <a:t>IPB — design, calibration methodology, training material, and the development path for future sensor types.</a:t>
+              <a:t>The spare switched outputs. The relay module has four channels; one drives the camera and three are deliberately left free, wired and ready.</a:t>
+            </a:r>
+          </a:p>
+          <a:p>
+            <a:pPr lvl="1"/>
+            <a:r>
+              <a:rPr sz="1250">
+                <a:solidFill>
+                  <a:srgbClr val="6B6A66"/>
+                </a:solidFill>
+              </a:rPr>
+              <a:t>That is what lets a station drive a siren, a beacon or an alerting relay without reopening the design — and what turns a measurement station into something a community can act on.</a:t>
+            </a:r>
+          </a:p>
+          <a:p>
+            <a:pPr lvl="1"/>
+            <a:r>
+              <a:rPr sz="1250">
+                <a:solidFill>
+                  <a:srgbClr val="6B6A66"/>
+                </a:solidFill>
+              </a:rPr>
+              <a:t>We would ask that any replication keeps that spare capacity rather than removing it to save a few dollars.</a:t>
             </a:r>
           </a:p>
           <a:p>
@@ -8251,7 +8266,7 @@
                   <a:srgbClr val="1A1A1A"/>
                 </a:solidFill>
               </a:rPr>
-              <a:t>PMI — user of the information, and the operational side: installation, maintenance, siting, response, and spares.</a:t>
+              <a:t>The factory-sealed camera, which removed the humidity failure that killed the previous unit.</a:t>
             </a:r>
           </a:p>
           <a:p>
@@ -8262,18 +8277,7 @@
                   <a:srgbClr val="1A1A1A"/>
                 </a:solidFill>
               </a:rPr>
-              <a:t>Offered for your consideration: write the split into the collaboration agreement so it survives staff changes, and keep a light joint forum for what does not sort into one role.</a:t>
-            </a:r>
-          </a:p>
-          <a:p>
-            <a:pPr/>
-            <a:r>
-              <a:rPr sz="1400">
-                <a:solidFill>
-                  <a:srgbClr val="1A1A1A"/>
-                </a:solidFill>
-              </a:rPr>
-              <a:t>The commitments this implies for PMI have not been discussed with PMI National Headquarters.</a:t>
+              <a:t>The recovery kit, documentation in both languages, and spares at the local PMI chapter.</a:t>
             </a:r>
           </a:p>
         </p:txBody>
@@ -8433,7 +8437,7 @@
                   <a:srgbClr val="6B6A66"/>
                 </a:solidFill>
               </a:rPr>
-              <a:t>19 / 21</a:t>
+              <a:t>19 / 25</a:t>
             </a:r>
           </a:p>
         </p:txBody>
@@ -8478,7 +8482,7 @@
                   <a:srgbClr val="1A1A1A"/>
                 </a:solidFill>
               </a:rPr>
-              <a:t>The pilot, and what we think comes next</a:t>
+              <a:t>Thank you</a:t>
             </a:r>
           </a:p>
         </p:txBody>
@@ -8505,7 +8509,7 @@
                   <a:srgbClr val="1A1A1A"/>
                 </a:solidFill>
               </a:rPr>
-              <a:t>The pilot has been a good experience. A station in the water, four months of behaviour to learn from, and a working relationship between PMI, IPB and BHLK that did not exist before.</a:t>
+              <a:t>None of this exists without the people who built it and looked after it.</a:t>
             </a:r>
           </a:p>
           <a:p>
@@ -8516,29 +8520,7 @@
                   <a:srgbClr val="1A1A1A"/>
                 </a:solidFill>
               </a:rPr>
-              <a:t>Our recommendation is that the next step is yours.</a:t>
-            </a:r>
-          </a:p>
-          <a:p>
-            <a:pPr lvl="1"/>
-            <a:r>
-              <a:rPr sz="1350">
-                <a:solidFill>
-                  <a:srgbClr val="6B6A66"/>
-                </a:solidFill>
-              </a:rPr>
-              <a:t>Not because the partnership has run its course, but because of what the pilot produced: knowledge, not a body of measurements.</a:t>
-            </a:r>
-          </a:p>
-          <a:p>
-            <a:pPr lvl="1"/>
-            <a:r>
-              <a:rPr sz="1350">
-                <a:solidFill>
-                  <a:srgbClr val="6B6A66"/>
-                </a:solidFill>
-              </a:rPr>
-              <a:t>Knowledge is worth more to you as an input to your own approach than as a set of parts to copy.</a:t>
+              <a:t>PMI volunteers and staff at Sukabumi and Jakarta gave their time to a system that was new to them and that did not always work.</a:t>
             </a:r>
           </a:p>
           <a:p>
@@ -8549,7 +8531,29 @@
                   <a:srgbClr val="1A1A1A"/>
                 </a:solidFill>
               </a:rPr>
-              <a:t>We would rather help you start your own design than hand you ours to maintain.</a:t>
+              <a:t>IPB re-surveyed the site with a total station after our own survey failed twice. That survey is what the station runs on today.</a:t>
+            </a:r>
+          </a:p>
+          <a:p>
+            <a:pPr/>
+            <a:r>
+              <a:rPr sz="1500">
+                <a:solidFill>
+                  <a:srgbClr val="1A1A1A"/>
+                </a:solidFill>
+              </a:rPr>
+              <a:t>BHLK brought the standards knowledge, and the offer of server capacity, that make a pilot possible at all.</a:t>
+            </a:r>
+          </a:p>
+          <a:p>
+            <a:pPr/>
+            <a:r>
+              <a:rPr sz="1500">
+                <a:solidFill>
+                  <a:srgbClr val="1A1A1A"/>
+                </a:solidFill>
+              </a:rPr>
+              <a:t>What follows is largely a list of things we would do differently. Every one was learned because someone did the work that made it visible.</a:t>
             </a:r>
           </a:p>
         </p:txBody>
@@ -8709,7 +8713,7 @@
                   <a:srgbClr val="6B6A66"/>
                 </a:solidFill>
               </a:rPr>
-              <a:t>2 / 21</a:t>
+              <a:t>2 / 25</a:t>
             </a:r>
           </a:p>
         </p:txBody>
@@ -8754,7 +8758,7 @@
                   <a:srgbClr val="1A1A1A"/>
                 </a:solidFill>
               </a:rPr>
-              <a:t>Questions for consideration</a:t>
+              <a:t>Building and looking after the units in Indonesia</a:t>
             </a:r>
           </a:p>
         </p:txBody>
@@ -8781,7 +8785,7 @@
                   <a:srgbClr val="1A1A1A"/>
                 </a:solidFill>
               </a:rPr>
-              <a:t>Who should hold the Jakarta station as a study and test unit? It was to transfer to IPB for deployment. Whether IPB or BHLK is better placed to hold it is for the two of you.</a:t>
+              <a:t>The design was made to be built by people who are not electronics specialists, with tools they already own.</a:t>
             </a:r>
           </a:p>
           <a:p>
@@ -8792,7 +8796,7 @@
                   <a:srgbClr val="1A1A1A"/>
                 </a:solidFill>
               </a:rPr>
-              <a:t>Can a staff gauge be read from the camera image accurately enough? If it can, R1 needs no separate sensor.</a:t>
+              <a:t>That intent only becomes real if the parts can be bought locally and the documentation supports substitution — R3.</a:t>
             </a:r>
           </a:p>
           <a:p>
@@ -8803,7 +8807,7 @@
                   <a:srgbClr val="1A1A1A"/>
                 </a:solidFill>
               </a:rPr>
-              <a:t>Two of the thirteen interruptions remain unexplained.</a:t>
+              <a:t>Spares held at the local PMI chapter turn a failure into a part swap rather than a shipment.</a:t>
             </a:r>
           </a:p>
           <a:p>
@@ -8814,7 +8818,7 @@
                   <a:srgbClr val="1A1A1A"/>
                 </a:solidFill>
               </a:rPr>
-              <a:t>Does the recovery-voltage threshold bound how long an interruption lasts, or hold the station off?</a:t>
+              <a:t>Where the field unit is a standard security camera, support falls within a supply chain that already exists across Indonesia.</a:t>
             </a:r>
           </a:p>
           <a:p>
@@ -8825,29 +8829,7 @@
                   <a:srgbClr val="1A1A1A"/>
                 </a:solidFill>
               </a:rPr>
-              <a:t>How does the velocity measurement perform across the surface conditions the pilot sites present?</a:t>
-            </a:r>
-          </a:p>
-          <a:p>
-            <a:pPr/>
-            <a:r>
-              <a:rPr sz="1400">
-                <a:solidFill>
-                  <a:srgbClr val="1A1A1A"/>
-                </a:solidFill>
-              </a:rPr>
-              <a:t>Absolute discharge accuracy at Sukabumi, unresolved pending the survey.</a:t>
-            </a:r>
-          </a:p>
-          <a:p>
-            <a:pPr/>
-            <a:r>
-              <a:rPr sz="1400">
-                <a:solidFill>
-                  <a:srgbClr val="1A1A1A"/>
-                </a:solidFill>
-              </a:rPr>
-              <a:t>We expect your work to change some of what is written here. That is the point of handing it over rather than handing it down.</a:t>
+              <a:t>We would rather help build the capacity to maintain these stations than remain the place they are sent when they break.</a:t>
             </a:r>
           </a:p>
         </p:txBody>
@@ -9007,7 +8989,7 @@
                   <a:srgbClr val="6B6A66"/>
                 </a:solidFill>
               </a:rPr>
-              <a:t>20 / 21</a:t>
+              <a:t>20 / 25</a:t>
             </a:r>
           </a:p>
         </p:txBody>
@@ -9052,7 +9034,7 @@
                   <a:srgbClr val="1A1A1A"/>
                 </a:solidFill>
               </a:rPr>
-              <a:t>What we can offer from here</a:t>
+              <a:t>Hosting the data in Indonesia</a:t>
             </a:r>
           </a:p>
         </p:txBody>
@@ -9079,7 +9061,7 @@
                   <a:srgbClr val="1A1A1A"/>
                 </a:solidFill>
               </a:rPr>
-              <a:t>We are not proposing to build your stations.</a:t>
+              <a:t>BHLK's offer suits the pilot, and holding the data in Indonesia carries a clear benefit for a government-partnered deployment.</a:t>
             </a:r>
           </a:p>
           <a:p>
@@ -9090,7 +9072,29 @@
                   <a:srgbClr val="1A1A1A"/>
                 </a:solidFill>
               </a:rPr>
-              <a:t>What we can offer is the record: this briefing and its report, the appendix, the operator and assembly documentation in English and Bahasa Indonesia, the software, and the built station at Wisma PMI to take apart.</a:t>
+              <a:t>Two constraints to design for rather than discover:</a:t>
+            </a:r>
+          </a:p>
+          <a:p>
+            <a:pPr lvl="1"/>
+            <a:r>
+              <a:rPr sz="1250">
+                <a:solidFill>
+                  <a:srgbClr val="6B6A66"/>
+                </a:solidFill>
+              </a:rPr>
+              <a:t>The video store and the database must share one filesystem. Plan storage as a single volume.</a:t>
+            </a:r>
+          </a:p>
+          <a:p>
+            <a:pPr lvl="1"/>
+            <a:r>
+              <a:rPr sz="1250">
+                <a:solidFill>
+                  <a:srgbClr val="6B6A66"/>
+                </a:solidFill>
+              </a:rPr>
+              <a:t>Server and station software versions are tied together, and a remote station cannot be upgraded on demand.</a:t>
             </a:r>
           </a:p>
           <a:p>
@@ -9101,7 +9105,7 @@
                   <a:srgbClr val="1A1A1A"/>
                 </a:solidFill>
               </a:rPr>
-              <a:t>Beyond that, whatever is useful — reviewing a design, answering a question about something that surprised us, looking at data that does not behave.</a:t>
+              <a:t>We would suggest running both instances in parallel until the new one has completed a full operating cycle, including an upgrade.</a:t>
             </a:r>
           </a:p>
           <a:p>
@@ -9112,18 +9116,7 @@
                   <a:srgbClr val="1A1A1A"/>
                 </a:solidFill>
               </a:rPr>
-              <a:t>Sukabumi will keep running, and we will keep reporting what it does, including the parts that go wrong.</a:t>
-            </a:r>
-          </a:p>
-          <a:p>
-            <a:pPr/>
-            <a:r>
-              <a:rPr sz="1400">
-                <a:solidFill>
-                  <a:srgbClr val="1A1A1A"/>
-                </a:solidFill>
-              </a:rPr>
-              <a:t>The pilot found the problems while they were still cheap, and it introduced three organisations to one another. The next station in this story should be one you designed.</a:t>
+              <a:t>Worth agreeing in writing: where the authoritative copy sits, who administers it, who has access, and the retention policy.</a:t>
             </a:r>
           </a:p>
         </p:txBody>
@@ -9283,7 +9276,1166 @@
                   <a:srgbClr val="6B6A66"/>
                 </a:solidFill>
               </a:rPr>
-              <a:t>21 / 21</a:t>
+              <a:t>21 / 25</a:t>
+            </a:r>
+          </a:p>
+        </p:txBody>
+      </p:sp>
+    </p:spTree>
+  </p:cSld>
+  <p:clrMapOvr>
+    <a:masterClrMapping/>
+  </p:clrMapOvr>
+</p:sld>
+</file>
+
+<file path=ppt/slides/slide22.xml><?xml version="1.0" encoding="utf-8"?>
+<p:sld xmlns:a="http://schemas.openxmlformats.org/drawingml/2006/main" xmlns:p="http://schemas.openxmlformats.org/presentationml/2006/main" xmlns:r="http://schemas.openxmlformats.org/officeDocument/2006/relationships">
+  <p:cSld>
+    <p:spTree>
+      <p:nvGrpSpPr>
+        <p:cNvPr id="1" name=""/>
+        <p:cNvGrpSpPr/>
+        <p:nvPr/>
+      </p:nvGrpSpPr>
+      <p:grpSpPr/>
+      <p:sp>
+        <p:nvSpPr>
+          <p:cNvPr id="2" name="Title 1"/>
+          <p:cNvSpPr>
+            <a:spLocks noGrp="1"/>
+          </p:cNvSpPr>
+          <p:nvPr>
+            <p:ph type="title"/>
+          </p:nvPr>
+        </p:nvSpPr>
+        <p:spPr/>
+        <p:txBody>
+          <a:bodyPr wrap="square"/>
+          <a:lstStyle/>
+          <a:p>
+            <a:pPr/>
+            <a:r>
+              <a:rPr sz="2000">
+                <a:solidFill>
+                  <a:srgbClr val="1A1A1A"/>
+                </a:solidFill>
+              </a:rPr>
+              <a:t>Choosing the sites</a:t>
+            </a:r>
+          </a:p>
+        </p:txBody>
+      </p:sp>
+      <p:sp>
+        <p:nvSpPr>
+          <p:cNvPr id="3" name="Text Placeholder 2"/>
+          <p:cNvSpPr>
+            <a:spLocks noGrp="1"/>
+          </p:cNvSpPr>
+          <p:nvPr>
+            <p:ph type="body" idx="12" sz="quarter"/>
+          </p:nvPr>
+        </p:nvSpPr>
+        <p:spPr/>
+        <p:txBody>
+          <a:bodyPr wrap="square"/>
+          <a:lstStyle/>
+          <a:p>
+            <a:pPr/>
+            <a:r>
+              <a:rPr sz="1250">
+                <a:solidFill>
+                  <a:srgbClr val="1A1A1A"/>
+                </a:solidFill>
+              </a:rPr>
+              <a:t>An open site helps with three problems at once: satellite positioning, the sun-water-camera angle, and the view across the section.</a:t>
+            </a:r>
+          </a:p>
+          <a:p>
+            <a:pPr/>
+            <a:r>
+              <a:rPr sz="1250">
+                <a:solidFill>
+                  <a:srgbClr val="1A1A1A"/>
+                </a:solidFill>
+              </a:rPr>
+              <a:t>A move costs a fresh survey and a fresh calibration, not only a relocation. The survey is the expensive part.</a:t>
+            </a:r>
+          </a:p>
+          <a:p>
+            <a:pPr/>
+            <a:r>
+              <a:rPr sz="1250">
+                <a:solidFill>
+                  <a:srgbClr val="1A1A1A"/>
+                </a:solidFill>
+              </a:rPr>
+              <a:t>Site permission should be settled before a unit is built for a particular site.</a:t>
+            </a:r>
+          </a:p>
+          <a:p>
+            <a:pPr lvl="1"/>
+            <a:r>
+              <a:rPr sz="1100">
+                <a:solidFill>
+                  <a:srgbClr val="6B6A66"/>
+                </a:solidFill>
+              </a:rPr>
+              <a:t>A complete station was built and tested for an intended Jakarta site. Permission fell through during the April visit.</a:t>
+            </a:r>
+          </a:p>
+          <a:p>
+            <a:pPr/>
+            <a:r>
+              <a:rPr sz="1250">
+                <a:solidFill>
+                  <a:srgbClr val="1A1A1A"/>
+                </a:solidFill>
+              </a:rPr>
+              <a:t>That station is still available. We suggest it serves best as a study and test unit.</a:t>
+            </a:r>
+          </a:p>
+          <a:p>
+            <a:pPr lvl="1"/>
+            <a:r>
+              <a:rPr sz="1100">
+                <a:solidFill>
+                  <a:srgbClr val="6B6A66"/>
+                </a:solidFill>
+              </a:rPr>
+              <a:t>Open it, trace it, power it up, take it apart — and install it somewhere convenient and local if that is useful, so it can be exercised against real water.</a:t>
+            </a:r>
+          </a:p>
+          <a:p>
+            <a:pPr lvl="1"/>
+            <a:r>
+              <a:rPr sz="1100">
+                <a:solidFill>
+                  <a:srgbClr val="6B6A66"/>
+                </a:solidFill>
+              </a:rPr>
+              <a:t>Not as an operational station with expectations of availability and consistent data. It carries the design this briefing recommends changing.</a:t>
+            </a:r>
+          </a:p>
+          <a:p>
+            <a:pPr/>
+            <a:r>
+              <a:rPr sz="1250">
+                <a:solidFill>
+                  <a:srgbClr val="1A1A1A"/>
+                </a:solidFill>
+              </a:rPr>
+              <a:t>We would not build to a site again before you tell us the permission is in place.</a:t>
+            </a:r>
+          </a:p>
+        </p:txBody>
+      </p:sp>
+      <p:sp>
+        <p:nvSpPr>
+          <p:cNvPr id="4" name="Rectangle 3" descr=""/>
+          <p:cNvSpPr/>
+          <p:nvPr/>
+        </p:nvSpPr>
+        <p:spPr>
+          <a:xfrm>
+            <a:off x="274320" y="4443984"/>
+            <a:ext cx="1517904" cy="676656"/>
+          </a:xfrm>
+          <a:prstGeom prst="rect">
+            <a:avLst/>
+          </a:prstGeom>
+          <a:solidFill>
+            <a:srgbClr val="FFFFFF"/>
+          </a:solidFill>
+          <a:ln>
+            <a:noFill/>
+          </a:ln>
+          <a:effectLst/>
+        </p:spPr>
+        <p:txBody>
+          <a:bodyPr rtlCol="0" anchor="ctr"/>
+          <a:lstStyle/>
+          <a:p>
+            <a:pPr algn="ctr"/>
+          </a:p>
+        </p:txBody>
+      </p:sp>
+      <p:pic>
+        <p:nvPicPr>
+          <p:cNvPr id="5" name="Picture 4" descr="Palang Merah Indonesia logo"/>
+          <p:cNvPicPr>
+            <a:picLocks noChangeAspect="1"/>
+          </p:cNvPicPr>
+          <p:nvPr/>
+        </p:nvPicPr>
+        <p:blipFill>
+          <a:blip r:embed="rId2"/>
+          <a:stretch>
+            <a:fillRect/>
+          </a:stretch>
+        </p:blipFill>
+        <p:spPr>
+          <a:xfrm>
+            <a:off x="1369770" y="4576572"/>
+            <a:ext cx="939918" cy="365760"/>
+          </a:xfrm>
+          <a:prstGeom prst="rect">
+            <a:avLst/>
+          </a:prstGeom>
+        </p:spPr>
+      </p:pic>
+      <p:pic>
+        <p:nvPicPr>
+          <p:cNvPr id="6" name="Picture 5" descr="Institut Pertanian Bogor logo"/>
+          <p:cNvPicPr>
+            <a:picLocks noChangeAspect="1"/>
+          </p:cNvPicPr>
+          <p:nvPr/>
+        </p:nvPicPr>
+        <p:blipFill>
+          <a:blip r:embed="rId3"/>
+          <a:stretch>
+            <a:fillRect/>
+          </a:stretch>
+        </p:blipFill>
+        <p:spPr>
+          <a:xfrm>
+            <a:off x="2602296" y="4576572"/>
+            <a:ext cx="539014" cy="365760"/>
+          </a:xfrm>
+          <a:prstGeom prst="rect">
+            <a:avLst/>
+          </a:prstGeom>
+        </p:spPr>
+      </p:pic>
+      <p:pic>
+        <p:nvPicPr>
+          <p:cNvPr id="7" name="Picture 6" descr="Balai Hidrologi dan Lingkungan Keairan logo"/>
+          <p:cNvPicPr>
+            <a:picLocks noChangeAspect="1"/>
+          </p:cNvPicPr>
+          <p:nvPr/>
+        </p:nvPicPr>
+        <p:blipFill>
+          <a:blip r:embed="rId4"/>
+          <a:stretch>
+            <a:fillRect/>
+          </a:stretch>
+        </p:blipFill>
+        <p:spPr>
+          <a:xfrm>
+            <a:off x="3433918" y="4576572"/>
+            <a:ext cx="365760" cy="365760"/>
+          </a:xfrm>
+          <a:prstGeom prst="rect">
+            <a:avLst/>
+          </a:prstGeom>
+        </p:spPr>
+      </p:pic>
+      <p:pic>
+        <p:nvPicPr>
+          <p:cNvPr id="8" name="Picture 7" descr="American Red Cross logo"/>
+          <p:cNvPicPr>
+            <a:picLocks noChangeAspect="1"/>
+          </p:cNvPicPr>
+          <p:nvPr/>
+        </p:nvPicPr>
+        <p:blipFill>
+          <a:blip r:embed="rId5"/>
+          <a:stretch>
+            <a:fillRect/>
+          </a:stretch>
+        </p:blipFill>
+        <p:spPr>
+          <a:xfrm>
+            <a:off x="4092286" y="4576572"/>
+            <a:ext cx="1103335" cy="365760"/>
+          </a:xfrm>
+          <a:prstGeom prst="rect">
+            <a:avLst/>
+          </a:prstGeom>
+        </p:spPr>
+      </p:pic>
+      <p:sp>
+        <p:nvSpPr>
+          <p:cNvPr id="9" name="TextBox 8"/>
+          <p:cNvSpPr txBox="1"/>
+          <p:nvPr/>
+        </p:nvSpPr>
+        <p:spPr>
+          <a:xfrm>
+            <a:off x="6553200" y="4667250"/>
+            <a:ext cx="2133600" cy="274638"/>
+          </a:xfrm>
+          <a:prstGeom prst="rect">
+            <a:avLst/>
+          </a:prstGeom>
+          <a:noFill/>
+        </p:spPr>
+        <p:txBody>
+          <a:bodyPr wrap="square">
+            <a:spAutoFit/>
+          </a:bodyPr>
+          <a:lstStyle/>
+          <a:p>
+            <a:pPr algn="r"/>
+            <a:r>
+              <a:rPr sz="800">
+                <a:solidFill>
+                  <a:srgbClr val="6B6A66"/>
+                </a:solidFill>
+              </a:rPr>
+              <a:t>22 / 25</a:t>
+            </a:r>
+          </a:p>
+        </p:txBody>
+      </p:sp>
+    </p:spTree>
+  </p:cSld>
+  <p:clrMapOvr>
+    <a:masterClrMapping/>
+  </p:clrMapOvr>
+</p:sld>
+</file>
+
+<file path=ppt/slides/slide23.xml><?xml version="1.0" encoding="utf-8"?>
+<p:sld xmlns:a="http://schemas.openxmlformats.org/drawingml/2006/main" xmlns:p="http://schemas.openxmlformats.org/presentationml/2006/main" xmlns:r="http://schemas.openxmlformats.org/officeDocument/2006/relationships">
+  <p:cSld>
+    <p:spTree>
+      <p:nvGrpSpPr>
+        <p:cNvPr id="1" name=""/>
+        <p:cNvGrpSpPr/>
+        <p:nvPr/>
+      </p:nvGrpSpPr>
+      <p:grpSpPr/>
+      <p:sp>
+        <p:nvSpPr>
+          <p:cNvPr id="2" name="Title 1"/>
+          <p:cNvSpPr>
+            <a:spLocks noGrp="1"/>
+          </p:cNvSpPr>
+          <p:nvPr>
+            <p:ph type="title"/>
+          </p:nvPr>
+        </p:nvSpPr>
+        <p:spPr/>
+        <p:txBody>
+          <a:bodyPr wrap="square"/>
+          <a:lstStyle/>
+          <a:p>
+            <a:pPr/>
+            <a:r>
+              <a:rPr sz="2000">
+                <a:solidFill>
+                  <a:srgbClr val="1A1A1A"/>
+                </a:solidFill>
+              </a:rPr>
+              <a:t>Working together</a:t>
+            </a:r>
+          </a:p>
+        </p:txBody>
+      </p:sp>
+      <p:sp>
+        <p:nvSpPr>
+          <p:cNvPr id="3" name="Text Placeholder 2"/>
+          <p:cNvSpPr>
+            <a:spLocks noGrp="1"/>
+          </p:cNvSpPr>
+          <p:nvPr>
+            <p:ph type="body" idx="12" sz="quarter"/>
+          </p:nvPr>
+        </p:nvSpPr>
+        <p:spPr/>
+        <p:txBody>
+          <a:bodyPr wrap="square"/>
+          <a:lstStyle/>
+          <a:p>
+            <a:pPr/>
+            <a:r>
+              <a:rPr sz="1400">
+                <a:solidFill>
+                  <a:srgbClr val="1A1A1A"/>
+                </a:solidFill>
+              </a:rPr>
+              <a:t>BHLK — data processing, conformance with standards, and the route to acceptance within PUPR data systems. Offers server capacity.</a:t>
+            </a:r>
+          </a:p>
+          <a:p>
+            <a:pPr/>
+            <a:r>
+              <a:rPr sz="1400">
+                <a:solidFill>
+                  <a:srgbClr val="1A1A1A"/>
+                </a:solidFill>
+              </a:rPr>
+              <a:t>IPB — design, calibration methodology, training material, and the development path for future sensor types.</a:t>
+            </a:r>
+          </a:p>
+          <a:p>
+            <a:pPr/>
+            <a:r>
+              <a:rPr sz="1400">
+                <a:solidFill>
+                  <a:srgbClr val="1A1A1A"/>
+                </a:solidFill>
+              </a:rPr>
+              <a:t>PMI — user of the information, and the operational side: installation, maintenance, siting, response, and spares.</a:t>
+            </a:r>
+          </a:p>
+          <a:p>
+            <a:pPr/>
+            <a:r>
+              <a:rPr sz="1400">
+                <a:solidFill>
+                  <a:srgbClr val="1A1A1A"/>
+                </a:solidFill>
+              </a:rPr>
+              <a:t>Offered for your consideration: write the split into the collaboration agreement so it survives staff changes, and keep a light joint forum for what does not sort into one role.</a:t>
+            </a:r>
+          </a:p>
+          <a:p>
+            <a:pPr/>
+            <a:r>
+              <a:rPr sz="1400">
+                <a:solidFill>
+                  <a:srgbClr val="1A1A1A"/>
+                </a:solidFill>
+              </a:rPr>
+              <a:t>The commitments this implies for PMI have not been discussed with PMI National Headquarters.</a:t>
+            </a:r>
+          </a:p>
+        </p:txBody>
+      </p:sp>
+      <p:sp>
+        <p:nvSpPr>
+          <p:cNvPr id="4" name="Rectangle 3" descr=""/>
+          <p:cNvSpPr/>
+          <p:nvPr/>
+        </p:nvSpPr>
+        <p:spPr>
+          <a:xfrm>
+            <a:off x="274320" y="4443984"/>
+            <a:ext cx="1517904" cy="676656"/>
+          </a:xfrm>
+          <a:prstGeom prst="rect">
+            <a:avLst/>
+          </a:prstGeom>
+          <a:solidFill>
+            <a:srgbClr val="FFFFFF"/>
+          </a:solidFill>
+          <a:ln>
+            <a:noFill/>
+          </a:ln>
+          <a:effectLst/>
+        </p:spPr>
+        <p:txBody>
+          <a:bodyPr rtlCol="0" anchor="ctr"/>
+          <a:lstStyle/>
+          <a:p>
+            <a:pPr algn="ctr"/>
+          </a:p>
+        </p:txBody>
+      </p:sp>
+      <p:pic>
+        <p:nvPicPr>
+          <p:cNvPr id="5" name="Picture 4" descr="Palang Merah Indonesia logo"/>
+          <p:cNvPicPr>
+            <a:picLocks noChangeAspect="1"/>
+          </p:cNvPicPr>
+          <p:nvPr/>
+        </p:nvPicPr>
+        <p:blipFill>
+          <a:blip r:embed="rId2"/>
+          <a:stretch>
+            <a:fillRect/>
+          </a:stretch>
+        </p:blipFill>
+        <p:spPr>
+          <a:xfrm>
+            <a:off x="1369770" y="4576572"/>
+            <a:ext cx="939918" cy="365760"/>
+          </a:xfrm>
+          <a:prstGeom prst="rect">
+            <a:avLst/>
+          </a:prstGeom>
+        </p:spPr>
+      </p:pic>
+      <p:pic>
+        <p:nvPicPr>
+          <p:cNvPr id="6" name="Picture 5" descr="Institut Pertanian Bogor logo"/>
+          <p:cNvPicPr>
+            <a:picLocks noChangeAspect="1"/>
+          </p:cNvPicPr>
+          <p:nvPr/>
+        </p:nvPicPr>
+        <p:blipFill>
+          <a:blip r:embed="rId3"/>
+          <a:stretch>
+            <a:fillRect/>
+          </a:stretch>
+        </p:blipFill>
+        <p:spPr>
+          <a:xfrm>
+            <a:off x="2602296" y="4576572"/>
+            <a:ext cx="539014" cy="365760"/>
+          </a:xfrm>
+          <a:prstGeom prst="rect">
+            <a:avLst/>
+          </a:prstGeom>
+        </p:spPr>
+      </p:pic>
+      <p:pic>
+        <p:nvPicPr>
+          <p:cNvPr id="7" name="Picture 6" descr="Balai Hidrologi dan Lingkungan Keairan logo"/>
+          <p:cNvPicPr>
+            <a:picLocks noChangeAspect="1"/>
+          </p:cNvPicPr>
+          <p:nvPr/>
+        </p:nvPicPr>
+        <p:blipFill>
+          <a:blip r:embed="rId4"/>
+          <a:stretch>
+            <a:fillRect/>
+          </a:stretch>
+        </p:blipFill>
+        <p:spPr>
+          <a:xfrm>
+            <a:off x="3433918" y="4576572"/>
+            <a:ext cx="365760" cy="365760"/>
+          </a:xfrm>
+          <a:prstGeom prst="rect">
+            <a:avLst/>
+          </a:prstGeom>
+        </p:spPr>
+      </p:pic>
+      <p:pic>
+        <p:nvPicPr>
+          <p:cNvPr id="8" name="Picture 7" descr="American Red Cross logo"/>
+          <p:cNvPicPr>
+            <a:picLocks noChangeAspect="1"/>
+          </p:cNvPicPr>
+          <p:nvPr/>
+        </p:nvPicPr>
+        <p:blipFill>
+          <a:blip r:embed="rId5"/>
+          <a:stretch>
+            <a:fillRect/>
+          </a:stretch>
+        </p:blipFill>
+        <p:spPr>
+          <a:xfrm>
+            <a:off x="4092286" y="4576572"/>
+            <a:ext cx="1103335" cy="365760"/>
+          </a:xfrm>
+          <a:prstGeom prst="rect">
+            <a:avLst/>
+          </a:prstGeom>
+        </p:spPr>
+      </p:pic>
+      <p:sp>
+        <p:nvSpPr>
+          <p:cNvPr id="9" name="TextBox 8"/>
+          <p:cNvSpPr txBox="1"/>
+          <p:nvPr/>
+        </p:nvSpPr>
+        <p:spPr>
+          <a:xfrm>
+            <a:off x="6553200" y="4667250"/>
+            <a:ext cx="2133600" cy="274638"/>
+          </a:xfrm>
+          <a:prstGeom prst="rect">
+            <a:avLst/>
+          </a:prstGeom>
+          <a:noFill/>
+        </p:spPr>
+        <p:txBody>
+          <a:bodyPr wrap="square">
+            <a:spAutoFit/>
+          </a:bodyPr>
+          <a:lstStyle/>
+          <a:p>
+            <a:pPr algn="r"/>
+            <a:r>
+              <a:rPr sz="800">
+                <a:solidFill>
+                  <a:srgbClr val="6B6A66"/>
+                </a:solidFill>
+              </a:rPr>
+              <a:t>23 / 25</a:t>
+            </a:r>
+          </a:p>
+        </p:txBody>
+      </p:sp>
+    </p:spTree>
+  </p:cSld>
+  <p:clrMapOvr>
+    <a:masterClrMapping/>
+  </p:clrMapOvr>
+</p:sld>
+</file>
+
+<file path=ppt/slides/slide24.xml><?xml version="1.0" encoding="utf-8"?>
+<p:sld xmlns:a="http://schemas.openxmlformats.org/drawingml/2006/main" xmlns:p="http://schemas.openxmlformats.org/presentationml/2006/main" xmlns:r="http://schemas.openxmlformats.org/officeDocument/2006/relationships">
+  <p:cSld>
+    <p:spTree>
+      <p:nvGrpSpPr>
+        <p:cNvPr id="1" name=""/>
+        <p:cNvGrpSpPr/>
+        <p:nvPr/>
+      </p:nvGrpSpPr>
+      <p:grpSpPr/>
+      <p:sp>
+        <p:nvSpPr>
+          <p:cNvPr id="2" name="Title 1"/>
+          <p:cNvSpPr>
+            <a:spLocks noGrp="1"/>
+          </p:cNvSpPr>
+          <p:nvPr>
+            <p:ph type="title"/>
+          </p:nvPr>
+        </p:nvSpPr>
+        <p:spPr/>
+        <p:txBody>
+          <a:bodyPr wrap="square"/>
+          <a:lstStyle/>
+          <a:p>
+            <a:pPr/>
+            <a:r>
+              <a:rPr sz="2000">
+                <a:solidFill>
+                  <a:srgbClr val="1A1A1A"/>
+                </a:solidFill>
+              </a:rPr>
+              <a:t>Questions for consideration</a:t>
+            </a:r>
+          </a:p>
+        </p:txBody>
+      </p:sp>
+      <p:sp>
+        <p:nvSpPr>
+          <p:cNvPr id="3" name="Text Placeholder 2"/>
+          <p:cNvSpPr>
+            <a:spLocks noGrp="1"/>
+          </p:cNvSpPr>
+          <p:nvPr>
+            <p:ph type="body" idx="12" sz="quarter"/>
+          </p:nvPr>
+        </p:nvSpPr>
+        <p:spPr/>
+        <p:txBody>
+          <a:bodyPr wrap="square"/>
+          <a:lstStyle/>
+          <a:p>
+            <a:pPr/>
+            <a:r>
+              <a:rPr sz="1400">
+                <a:solidFill>
+                  <a:srgbClr val="1A1A1A"/>
+                </a:solidFill>
+              </a:rPr>
+              <a:t>Who should hold the Jakarta station as a study and test unit? It was to transfer to IPB for deployment. Whether IPB or BHLK is better placed to hold it is for the two of you.</a:t>
+            </a:r>
+          </a:p>
+          <a:p>
+            <a:pPr/>
+            <a:r>
+              <a:rPr sz="1400">
+                <a:solidFill>
+                  <a:srgbClr val="1A1A1A"/>
+                </a:solidFill>
+              </a:rPr>
+              <a:t>Can a staff gauge be read from the camera image accurately enough? If it can, R1 needs no separate sensor.</a:t>
+            </a:r>
+          </a:p>
+          <a:p>
+            <a:pPr/>
+            <a:r>
+              <a:rPr sz="1400">
+                <a:solidFill>
+                  <a:srgbClr val="1A1A1A"/>
+                </a:solidFill>
+              </a:rPr>
+              <a:t>Two of the thirteen interruptions remain unexplained.</a:t>
+            </a:r>
+          </a:p>
+          <a:p>
+            <a:pPr/>
+            <a:r>
+              <a:rPr sz="1400">
+                <a:solidFill>
+                  <a:srgbClr val="1A1A1A"/>
+                </a:solidFill>
+              </a:rPr>
+              <a:t>Does the recovery-voltage threshold bound how long an interruption lasts, or hold the station off?</a:t>
+            </a:r>
+          </a:p>
+          <a:p>
+            <a:pPr/>
+            <a:r>
+              <a:rPr sz="1400">
+                <a:solidFill>
+                  <a:srgbClr val="1A1A1A"/>
+                </a:solidFill>
+              </a:rPr>
+              <a:t>How does the velocity measurement perform across the surface conditions the pilot sites present?</a:t>
+            </a:r>
+          </a:p>
+          <a:p>
+            <a:pPr/>
+            <a:r>
+              <a:rPr sz="1400">
+                <a:solidFill>
+                  <a:srgbClr val="1A1A1A"/>
+                </a:solidFill>
+              </a:rPr>
+              <a:t>Absolute discharge accuracy at Sukabumi, unresolved pending the survey.</a:t>
+            </a:r>
+          </a:p>
+          <a:p>
+            <a:pPr/>
+            <a:r>
+              <a:rPr sz="1400">
+                <a:solidFill>
+                  <a:srgbClr val="1A1A1A"/>
+                </a:solidFill>
+              </a:rPr>
+              <a:t>We expect your work to change some of what is written here. That is the point of handing it over rather than handing it down.</a:t>
+            </a:r>
+          </a:p>
+        </p:txBody>
+      </p:sp>
+      <p:sp>
+        <p:nvSpPr>
+          <p:cNvPr id="4" name="Rectangle 3" descr=""/>
+          <p:cNvSpPr/>
+          <p:nvPr/>
+        </p:nvSpPr>
+        <p:spPr>
+          <a:xfrm>
+            <a:off x="274320" y="4443984"/>
+            <a:ext cx="1517904" cy="676656"/>
+          </a:xfrm>
+          <a:prstGeom prst="rect">
+            <a:avLst/>
+          </a:prstGeom>
+          <a:solidFill>
+            <a:srgbClr val="FFFFFF"/>
+          </a:solidFill>
+          <a:ln>
+            <a:noFill/>
+          </a:ln>
+          <a:effectLst/>
+        </p:spPr>
+        <p:txBody>
+          <a:bodyPr rtlCol="0" anchor="ctr"/>
+          <a:lstStyle/>
+          <a:p>
+            <a:pPr algn="ctr"/>
+          </a:p>
+        </p:txBody>
+      </p:sp>
+      <p:pic>
+        <p:nvPicPr>
+          <p:cNvPr id="5" name="Picture 4" descr="Palang Merah Indonesia logo"/>
+          <p:cNvPicPr>
+            <a:picLocks noChangeAspect="1"/>
+          </p:cNvPicPr>
+          <p:nvPr/>
+        </p:nvPicPr>
+        <p:blipFill>
+          <a:blip r:embed="rId2"/>
+          <a:stretch>
+            <a:fillRect/>
+          </a:stretch>
+        </p:blipFill>
+        <p:spPr>
+          <a:xfrm>
+            <a:off x="1369770" y="4576572"/>
+            <a:ext cx="939918" cy="365760"/>
+          </a:xfrm>
+          <a:prstGeom prst="rect">
+            <a:avLst/>
+          </a:prstGeom>
+        </p:spPr>
+      </p:pic>
+      <p:pic>
+        <p:nvPicPr>
+          <p:cNvPr id="6" name="Picture 5" descr="Institut Pertanian Bogor logo"/>
+          <p:cNvPicPr>
+            <a:picLocks noChangeAspect="1"/>
+          </p:cNvPicPr>
+          <p:nvPr/>
+        </p:nvPicPr>
+        <p:blipFill>
+          <a:blip r:embed="rId3"/>
+          <a:stretch>
+            <a:fillRect/>
+          </a:stretch>
+        </p:blipFill>
+        <p:spPr>
+          <a:xfrm>
+            <a:off x="2602296" y="4576572"/>
+            <a:ext cx="539014" cy="365760"/>
+          </a:xfrm>
+          <a:prstGeom prst="rect">
+            <a:avLst/>
+          </a:prstGeom>
+        </p:spPr>
+      </p:pic>
+      <p:pic>
+        <p:nvPicPr>
+          <p:cNvPr id="7" name="Picture 6" descr="Balai Hidrologi dan Lingkungan Keairan logo"/>
+          <p:cNvPicPr>
+            <a:picLocks noChangeAspect="1"/>
+          </p:cNvPicPr>
+          <p:nvPr/>
+        </p:nvPicPr>
+        <p:blipFill>
+          <a:blip r:embed="rId4"/>
+          <a:stretch>
+            <a:fillRect/>
+          </a:stretch>
+        </p:blipFill>
+        <p:spPr>
+          <a:xfrm>
+            <a:off x="3433918" y="4576572"/>
+            <a:ext cx="365760" cy="365760"/>
+          </a:xfrm>
+          <a:prstGeom prst="rect">
+            <a:avLst/>
+          </a:prstGeom>
+        </p:spPr>
+      </p:pic>
+      <p:pic>
+        <p:nvPicPr>
+          <p:cNvPr id="8" name="Picture 7" descr="American Red Cross logo"/>
+          <p:cNvPicPr>
+            <a:picLocks noChangeAspect="1"/>
+          </p:cNvPicPr>
+          <p:nvPr/>
+        </p:nvPicPr>
+        <p:blipFill>
+          <a:blip r:embed="rId5"/>
+          <a:stretch>
+            <a:fillRect/>
+          </a:stretch>
+        </p:blipFill>
+        <p:spPr>
+          <a:xfrm>
+            <a:off x="4092286" y="4576572"/>
+            <a:ext cx="1103335" cy="365760"/>
+          </a:xfrm>
+          <a:prstGeom prst="rect">
+            <a:avLst/>
+          </a:prstGeom>
+        </p:spPr>
+      </p:pic>
+      <p:sp>
+        <p:nvSpPr>
+          <p:cNvPr id="9" name="TextBox 8"/>
+          <p:cNvSpPr txBox="1"/>
+          <p:nvPr/>
+        </p:nvSpPr>
+        <p:spPr>
+          <a:xfrm>
+            <a:off x="6553200" y="4667250"/>
+            <a:ext cx="2133600" cy="274638"/>
+          </a:xfrm>
+          <a:prstGeom prst="rect">
+            <a:avLst/>
+          </a:prstGeom>
+          <a:noFill/>
+        </p:spPr>
+        <p:txBody>
+          <a:bodyPr wrap="square">
+            <a:spAutoFit/>
+          </a:bodyPr>
+          <a:lstStyle/>
+          <a:p>
+            <a:pPr algn="r"/>
+            <a:r>
+              <a:rPr sz="800">
+                <a:solidFill>
+                  <a:srgbClr val="6B6A66"/>
+                </a:solidFill>
+              </a:rPr>
+              <a:t>24 / 25</a:t>
+            </a:r>
+          </a:p>
+        </p:txBody>
+      </p:sp>
+    </p:spTree>
+  </p:cSld>
+  <p:clrMapOvr>
+    <a:masterClrMapping/>
+  </p:clrMapOvr>
+</p:sld>
+</file>
+
+<file path=ppt/slides/slide25.xml><?xml version="1.0" encoding="utf-8"?>
+<p:sld xmlns:a="http://schemas.openxmlformats.org/drawingml/2006/main" xmlns:p="http://schemas.openxmlformats.org/presentationml/2006/main" xmlns:r="http://schemas.openxmlformats.org/officeDocument/2006/relationships">
+  <p:cSld>
+    <p:spTree>
+      <p:nvGrpSpPr>
+        <p:cNvPr id="1" name=""/>
+        <p:cNvGrpSpPr/>
+        <p:nvPr/>
+      </p:nvGrpSpPr>
+      <p:grpSpPr/>
+      <p:sp>
+        <p:nvSpPr>
+          <p:cNvPr id="2" name="Title 1"/>
+          <p:cNvSpPr>
+            <a:spLocks noGrp="1"/>
+          </p:cNvSpPr>
+          <p:nvPr>
+            <p:ph type="title"/>
+          </p:nvPr>
+        </p:nvSpPr>
+        <p:spPr/>
+        <p:txBody>
+          <a:bodyPr wrap="square"/>
+          <a:lstStyle/>
+          <a:p>
+            <a:pPr/>
+            <a:r>
+              <a:rPr sz="2000">
+                <a:solidFill>
+                  <a:srgbClr val="1A1A1A"/>
+                </a:solidFill>
+              </a:rPr>
+              <a:t>What we can offer from here</a:t>
+            </a:r>
+          </a:p>
+        </p:txBody>
+      </p:sp>
+      <p:sp>
+        <p:nvSpPr>
+          <p:cNvPr id="3" name="Text Placeholder 2"/>
+          <p:cNvSpPr>
+            <a:spLocks noGrp="1"/>
+          </p:cNvSpPr>
+          <p:nvPr>
+            <p:ph type="body" idx="12" sz="quarter"/>
+          </p:nvPr>
+        </p:nvSpPr>
+        <p:spPr/>
+        <p:txBody>
+          <a:bodyPr wrap="square"/>
+          <a:lstStyle/>
+          <a:p>
+            <a:pPr/>
+            <a:r>
+              <a:rPr sz="1400">
+                <a:solidFill>
+                  <a:srgbClr val="1A1A1A"/>
+                </a:solidFill>
+              </a:rPr>
+              <a:t>We are not proposing to build your stations.</a:t>
+            </a:r>
+          </a:p>
+          <a:p>
+            <a:pPr/>
+            <a:r>
+              <a:rPr sz="1400">
+                <a:solidFill>
+                  <a:srgbClr val="1A1A1A"/>
+                </a:solidFill>
+              </a:rPr>
+              <a:t>What we can offer is the record: this briefing and its report, the appendix, the operator and assembly documentation in English and Bahasa Indonesia, the software, and the built station at Wisma PMI to take apart.</a:t>
+            </a:r>
+          </a:p>
+          <a:p>
+            <a:pPr/>
+            <a:r>
+              <a:rPr sz="1400">
+                <a:solidFill>
+                  <a:srgbClr val="1A1A1A"/>
+                </a:solidFill>
+              </a:rPr>
+              <a:t>Beyond that, whatever is useful — reviewing a design, answering a question about something that surprised us, looking at data that does not behave.</a:t>
+            </a:r>
+          </a:p>
+          <a:p>
+            <a:pPr/>
+            <a:r>
+              <a:rPr sz="1400">
+                <a:solidFill>
+                  <a:srgbClr val="1A1A1A"/>
+                </a:solidFill>
+              </a:rPr>
+              <a:t>Sukabumi will keep running, and we will keep reporting what it does, including the parts that go wrong.</a:t>
+            </a:r>
+          </a:p>
+          <a:p>
+            <a:pPr/>
+            <a:r>
+              <a:rPr sz="1400">
+                <a:solidFill>
+                  <a:srgbClr val="1A1A1A"/>
+                </a:solidFill>
+              </a:rPr>
+              <a:t>The pilot found the problems while they were still cheap, and it introduced three organisations to one another. The next station in this story should be one you designed.</a:t>
+            </a:r>
+          </a:p>
+        </p:txBody>
+      </p:sp>
+      <p:sp>
+        <p:nvSpPr>
+          <p:cNvPr id="4" name="Rectangle 3" descr=""/>
+          <p:cNvSpPr/>
+          <p:nvPr/>
+        </p:nvSpPr>
+        <p:spPr>
+          <a:xfrm>
+            <a:off x="274320" y="4443984"/>
+            <a:ext cx="1517904" cy="676656"/>
+          </a:xfrm>
+          <a:prstGeom prst="rect">
+            <a:avLst/>
+          </a:prstGeom>
+          <a:solidFill>
+            <a:srgbClr val="FFFFFF"/>
+          </a:solidFill>
+          <a:ln>
+            <a:noFill/>
+          </a:ln>
+          <a:effectLst/>
+        </p:spPr>
+        <p:txBody>
+          <a:bodyPr rtlCol="0" anchor="ctr"/>
+          <a:lstStyle/>
+          <a:p>
+            <a:pPr algn="ctr"/>
+          </a:p>
+        </p:txBody>
+      </p:sp>
+      <p:pic>
+        <p:nvPicPr>
+          <p:cNvPr id="5" name="Picture 4" descr="Palang Merah Indonesia logo"/>
+          <p:cNvPicPr>
+            <a:picLocks noChangeAspect="1"/>
+          </p:cNvPicPr>
+          <p:nvPr/>
+        </p:nvPicPr>
+        <p:blipFill>
+          <a:blip r:embed="rId2"/>
+          <a:stretch>
+            <a:fillRect/>
+          </a:stretch>
+        </p:blipFill>
+        <p:spPr>
+          <a:xfrm>
+            <a:off x="1369770" y="4576572"/>
+            <a:ext cx="939918" cy="365760"/>
+          </a:xfrm>
+          <a:prstGeom prst="rect">
+            <a:avLst/>
+          </a:prstGeom>
+        </p:spPr>
+      </p:pic>
+      <p:pic>
+        <p:nvPicPr>
+          <p:cNvPr id="6" name="Picture 5" descr="Institut Pertanian Bogor logo"/>
+          <p:cNvPicPr>
+            <a:picLocks noChangeAspect="1"/>
+          </p:cNvPicPr>
+          <p:nvPr/>
+        </p:nvPicPr>
+        <p:blipFill>
+          <a:blip r:embed="rId3"/>
+          <a:stretch>
+            <a:fillRect/>
+          </a:stretch>
+        </p:blipFill>
+        <p:spPr>
+          <a:xfrm>
+            <a:off x="2602296" y="4576572"/>
+            <a:ext cx="539014" cy="365760"/>
+          </a:xfrm>
+          <a:prstGeom prst="rect">
+            <a:avLst/>
+          </a:prstGeom>
+        </p:spPr>
+      </p:pic>
+      <p:pic>
+        <p:nvPicPr>
+          <p:cNvPr id="7" name="Picture 6" descr="Balai Hidrologi dan Lingkungan Keairan logo"/>
+          <p:cNvPicPr>
+            <a:picLocks noChangeAspect="1"/>
+          </p:cNvPicPr>
+          <p:nvPr/>
+        </p:nvPicPr>
+        <p:blipFill>
+          <a:blip r:embed="rId4"/>
+          <a:stretch>
+            <a:fillRect/>
+          </a:stretch>
+        </p:blipFill>
+        <p:spPr>
+          <a:xfrm>
+            <a:off x="3433918" y="4576572"/>
+            <a:ext cx="365760" cy="365760"/>
+          </a:xfrm>
+          <a:prstGeom prst="rect">
+            <a:avLst/>
+          </a:prstGeom>
+        </p:spPr>
+      </p:pic>
+      <p:pic>
+        <p:nvPicPr>
+          <p:cNvPr id="8" name="Picture 7" descr="American Red Cross logo"/>
+          <p:cNvPicPr>
+            <a:picLocks noChangeAspect="1"/>
+          </p:cNvPicPr>
+          <p:nvPr/>
+        </p:nvPicPr>
+        <p:blipFill>
+          <a:blip r:embed="rId5"/>
+          <a:stretch>
+            <a:fillRect/>
+          </a:stretch>
+        </p:blipFill>
+        <p:spPr>
+          <a:xfrm>
+            <a:off x="4092286" y="4576572"/>
+            <a:ext cx="1103335" cy="365760"/>
+          </a:xfrm>
+          <a:prstGeom prst="rect">
+            <a:avLst/>
+          </a:prstGeom>
+        </p:spPr>
+      </p:pic>
+      <p:sp>
+        <p:nvSpPr>
+          <p:cNvPr id="9" name="TextBox 8"/>
+          <p:cNvSpPr txBox="1"/>
+          <p:nvPr/>
+        </p:nvSpPr>
+        <p:spPr>
+          <a:xfrm>
+            <a:off x="6553200" y="4667250"/>
+            <a:ext cx="2133600" cy="274638"/>
+          </a:xfrm>
+          <a:prstGeom prst="rect">
+            <a:avLst/>
+          </a:prstGeom>
+          <a:noFill/>
+        </p:spPr>
+        <p:txBody>
+          <a:bodyPr wrap="square">
+            <a:spAutoFit/>
+          </a:bodyPr>
+          <a:lstStyle/>
+          <a:p>
+            <a:pPr algn="r"/>
+            <a:r>
+              <a:rPr sz="800">
+                <a:solidFill>
+                  <a:srgbClr val="6B6A66"/>
+                </a:solidFill>
+              </a:rPr>
+              <a:t>25 / 25</a:t>
             </a:r>
           </a:p>
         </p:txBody>
@@ -9328,7 +10480,7 @@
                   <a:srgbClr val="1A1A1A"/>
                 </a:solidFill>
               </a:rPr>
-              <a:t>What this briefing covers, and what it leaves to you</a:t>
+              <a:t>The pilot, and what we think comes next</a:t>
             </a:r>
           </a:p>
         </p:txBody>
@@ -9355,7 +10507,7 @@
                   <a:srgbClr val="1A1A1A"/>
                 </a:solidFill>
               </a:rPr>
-              <a:t>The technology only: the station as built, what four months in the field revealed, and what we would change before more units are constructed.</a:t>
+              <a:t>The pilot has been a good experience. A station in the water, four months of behaviour to learn from, and a working relationship between PMI, IPB and BHLK that did not exist before.</a:t>
             </a:r>
           </a:p>
           <a:p>
@@ -9366,7 +10518,7 @@
                   <a:srgbClr val="1A1A1A"/>
                 </a:solidFill>
               </a:rPr>
-              <a:t>Not in scope: what the data is fit to support, or what accuracy any application requires.</a:t>
+              <a:t>Our recommendation is that the next step is yours.</a:t>
             </a:r>
           </a:p>
           <a:p>
@@ -9377,7 +10529,7 @@
                   <a:srgbClr val="6B6A66"/>
                 </a:solidFill>
               </a:rPr>
-              <a:t>Those judgements belong with IPB, BHLK and their federal partners.</a:t>
+              <a:t>Not because the partnership has run its course, but because of what the pilot produced: knowledge, not a body of measurements.</a:t>
             </a:r>
           </a:p>
           <a:p>
@@ -9388,7 +10540,7 @@
                   <a:srgbClr val="6B6A66"/>
                 </a:solidFill>
               </a:rPr>
-              <a:t>Measurement requirements shown here are recorded from you, not proposed by us.</a:t>
+              <a:t>Knowledge is worth more to you as an input to your own approach than as a set of parts to copy.</a:t>
             </a:r>
           </a:p>
           <a:p>
@@ -9399,7 +10551,7 @@
                   <a:srgbClr val="1A1A1A"/>
                 </a:solidFill>
               </a:rPr>
-              <a:t>Written to give an accurate basis for your decision rather than an encouraging one.</a:t>
+              <a:t>We would rather help you start your own design than hand you ours to maintain.</a:t>
             </a:r>
           </a:p>
         </p:txBody>
@@ -9559,7 +10711,7 @@
                   <a:srgbClr val="6B6A66"/>
                 </a:solidFill>
               </a:rPr>
-              <a:t>3 / 21</a:t>
+              <a:t>3 / 25</a:t>
             </a:r>
           </a:p>
         </p:txBody>
@@ -9599,12 +10751,12 @@
           <a:p>
             <a:pPr/>
             <a:r>
-              <a:rPr sz="1800">
+              <a:rPr sz="2000">
                 <a:solidFill>
                   <a:srgbClr val="1A1A1A"/>
                 </a:solidFill>
               </a:rPr>
-              <a:t>Three offers were made on 21 August. We welcome all three.</a:t>
+              <a:t>What this briefing covers, and what it leaves to you</a:t>
             </a:r>
           </a:p>
         </p:txBody>
@@ -9631,7 +10783,18 @@
                   <a:srgbClr val="1A1A1A"/>
                 </a:solidFill>
               </a:rPr>
-              <a:t>Build one to three stations as a pilot.</a:t>
+              <a:t>The technology only: the station as built, what four months in the field revealed, and what we would change before more units are constructed.</a:t>
+            </a:r>
+          </a:p>
+          <a:p>
+            <a:pPr/>
+            <a:r>
+              <a:rPr sz="1500">
+                <a:solidFill>
+                  <a:srgbClr val="1A1A1A"/>
+                </a:solidFill>
+              </a:rPr>
+              <a:t>Not in scope: what the data is fit to support, or what accuracy any application requires.</a:t>
             </a:r>
           </a:p>
           <a:p>
@@ -9642,7 +10805,18 @@
                   <a:srgbClr val="6B6A66"/>
                 </a:solidFill>
               </a:rPr>
-              <a:t>Supported. What follows is what we would change first.</a:t>
+              <a:t>Those judgements belong with IPB, BHLK and their federal partners.</a:t>
+            </a:r>
+          </a:p>
+          <a:p>
+            <a:pPr lvl="1"/>
+            <a:r>
+              <a:rPr sz="1350">
+                <a:solidFill>
+                  <a:srgbClr val="6B6A66"/>
+                </a:solidFill>
+              </a:rPr>
+              <a:t>Measurement requirements shown here are recorded from you, not proposed by us.</a:t>
             </a:r>
           </a:p>
           <a:p>
@@ -9653,40 +10827,7 @@
                   <a:srgbClr val="1A1A1A"/>
                 </a:solidFill>
               </a:rPr>
-              <a:t>Provide server capacity for the data.</a:t>
-            </a:r>
-          </a:p>
-          <a:p>
-            <a:pPr lvl="1"/>
-            <a:r>
-              <a:rPr sz="1350">
-                <a:solidFill>
-                  <a:srgbClr val="6B6A66"/>
-                </a:solidFill>
-              </a:rPr>
-              <a:t>Well matched to the pilot, and holding the data in Indonesia carries a clear benefit.</a:t>
-            </a:r>
-          </a:p>
-          <a:p>
-            <a:pPr/>
-            <a:r>
-              <a:rPr sz="1500">
-                <a:solidFill>
-                  <a:srgbClr val="1A1A1A"/>
-                </a:solidFill>
-              </a:rPr>
-              <a:t>Move the present site to open ground.</a:t>
-            </a:r>
-          </a:p>
-          <a:p>
-            <a:pPr lvl="1"/>
-            <a:r>
-              <a:rPr sz="1350">
-                <a:solidFill>
-                  <a:srgbClr val="6B6A66"/>
-                </a:solidFill>
-              </a:rPr>
-              <a:t>Supported, and the field record adds independent evidence for it.</a:t>
+              <a:t>Written to give an accurate basis for your decision rather than an encouraging one.</a:t>
             </a:r>
           </a:p>
         </p:txBody>
@@ -9846,7 +10987,7 @@
                   <a:srgbClr val="6B6A66"/>
                 </a:solidFill>
               </a:rPr>
-              <a:t>4 / 21</a:t>
+              <a:t>4 / 25</a:t>
             </a:r>
           </a:p>
         </p:txBody>
@@ -9886,12 +11027,12 @@
           <a:p>
             <a:pPr/>
             <a:r>
-              <a:rPr sz="2000">
+              <a:rPr sz="1800">
                 <a:solidFill>
                   <a:srgbClr val="1A1A1A"/>
                 </a:solidFill>
               </a:rPr>
-              <a:t>Why a low-cost station is worth studying</a:t>
+              <a:t>Three offers were made on 21 August. We welcome all three.</a:t>
             </a:r>
           </a:p>
         </p:txBody>
@@ -9913,56 +11054,67 @@
           <a:p>
             <a:pPr/>
             <a:r>
-              <a:rPr sz="1400">
+              <a:rPr sz="1500">
                 <a:solidFill>
                   <a:srgbClr val="1A1A1A"/>
                 </a:solidFill>
               </a:rPr>
-              <a:t>A river gauge is only useful if there are enough of them. How many an agency can afford decides how much of a catchment it can observe.</a:t>
+              <a:t>Build one to three stations as a pilot.</a:t>
+            </a:r>
+          </a:p>
+          <a:p>
+            <a:pPr lvl="1"/>
+            <a:r>
+              <a:rPr sz="1350">
+                <a:solidFill>
+                  <a:srgbClr val="6B6A66"/>
+                </a:solidFill>
+              </a:rPr>
+              <a:t>Supported. What follows is what we would change first.</a:t>
             </a:r>
           </a:p>
           <a:p>
             <a:pPr/>
             <a:r>
-              <a:rPr sz="1400">
+              <a:rPr sz="1500">
                 <a:solidFill>
                   <a:srgbClr val="1A1A1A"/>
                 </a:solidFill>
               </a:rPr>
-              <a:t>This station: USD 1,340 in materials — electronics and enclosure only. Sukabumi already had its panel and battery, so a new solar site would add an array. A mains site would not.</a:t>
+              <a:t>Provide server capacity for the data.</a:t>
+            </a:r>
+          </a:p>
+          <a:p>
+            <a:pPr lvl="1"/>
+            <a:r>
+              <a:rPr sz="1350">
+                <a:solidFill>
+                  <a:srgbClr val="6B6A66"/>
+                </a:solidFill>
+              </a:rPr>
+              <a:t>Well matched to the pilot, and holding the data in Indonesia carries a clear benefit.</a:t>
             </a:r>
           </a:p>
           <a:p>
             <a:pPr/>
             <a:r>
-              <a:rPr sz="1400">
+              <a:rPr sz="1500">
                 <a:solidFill>
                   <a:srgbClr val="1A1A1A"/>
                 </a:solidFill>
               </a:rPr>
-              <a:t>Lowest-cost automatic water-level station on the government e-catalogue: about USD 3,600 before VAT, measuring stage only.</a:t>
+              <a:t>Move the present site to open ground.</a:t>
             </a:r>
           </a:p>
           <a:p>
             <a:pPr lvl="1"/>
             <a:r>
-              <a:rPr sz="1250">
+              <a:rPr sz="1350">
                 <a:solidFill>
                   <a:srgbClr val="6B6A66"/>
                 </a:solidFill>
               </a:rPr>
-              <a:t>Not like for like — that is a supported commercial instrument, this is a pilot-stage assembly.</a:t>
-            </a:r>
-          </a:p>
-          <a:p>
-            <a:pPr/>
-            <a:r>
-              <a:rPr sz="1400">
-                <a:solidFill>
-                  <a:srgbClr val="1A1A1A"/>
-                </a:solidFill>
-              </a:rPr>
-              <a:t>At this price a basin authority can consider a network where it might otherwise consider a single gauge. That possibility is the whole of the argument.</a:t>
+              <a:t>Supported, and the field record adds independent evidence for it.</a:t>
             </a:r>
           </a:p>
         </p:txBody>
@@ -10122,7 +11274,7 @@
                   <a:srgbClr val="6B6A66"/>
                 </a:solidFill>
               </a:rPr>
-              <a:t>5 / 21</a:t>
+              <a:t>5 / 25</a:t>
             </a:r>
           </a:p>
         </p:txBody>
@@ -10167,14 +11319,115 @@
                   <a:srgbClr val="1A1A1A"/>
                 </a:solidFill>
               </a:rPr>
-              <a:t>What is being offered for study</a:t>
-            </a:r>
+              <a:t>Why a low-cost station is worth studying</a:t>
+            </a:r>
+          </a:p>
+        </p:txBody>
+      </p:sp>
+      <p:sp>
+        <p:nvSpPr>
+          <p:cNvPr id="3" name="Text Placeholder 2"/>
+          <p:cNvSpPr>
+            <a:spLocks noGrp="1"/>
+          </p:cNvSpPr>
+          <p:nvPr>
+            <p:ph type="body" idx="12" sz="quarter"/>
+          </p:nvPr>
+        </p:nvSpPr>
+        <p:spPr/>
+        <p:txBody>
+          <a:bodyPr wrap="square"/>
+          <a:lstStyle/>
+          <a:p>
+            <a:pPr/>
+            <a:r>
+              <a:rPr sz="1400">
+                <a:solidFill>
+                  <a:srgbClr val="1A1A1A"/>
+                </a:solidFill>
+              </a:rPr>
+              <a:t>A river gauge is only useful if there are enough of them. How many an agency can afford decides how much of a catchment it can observe.</a:t>
+            </a:r>
+          </a:p>
+          <a:p>
+            <a:pPr/>
+            <a:r>
+              <a:rPr sz="1400">
+                <a:solidFill>
+                  <a:srgbClr val="1A1A1A"/>
+                </a:solidFill>
+              </a:rPr>
+              <a:t>This station: USD 1,340 in materials — electronics and enclosure only. Sukabumi already had its panel and battery, so a new solar site would add an array. A mains site would not.</a:t>
+            </a:r>
+          </a:p>
+          <a:p>
+            <a:pPr/>
+            <a:r>
+              <a:rPr sz="1400">
+                <a:solidFill>
+                  <a:srgbClr val="1A1A1A"/>
+                </a:solidFill>
+              </a:rPr>
+              <a:t>Lowest-cost automatic water-level station on the government e-catalogue: about USD 3,600 before VAT, measuring stage only.</a:t>
+            </a:r>
+          </a:p>
+          <a:p>
+            <a:pPr lvl="1"/>
+            <a:r>
+              <a:rPr sz="1250">
+                <a:solidFill>
+                  <a:srgbClr val="6B6A66"/>
+                </a:solidFill>
+              </a:rPr>
+              <a:t>Not like for like — that is a supported commercial instrument, this is a pilot-stage assembly.</a:t>
+            </a:r>
+          </a:p>
+          <a:p>
+            <a:pPr/>
+            <a:r>
+              <a:rPr sz="1400">
+                <a:solidFill>
+                  <a:srgbClr val="1A1A1A"/>
+                </a:solidFill>
+              </a:rPr>
+              <a:t>At this price a basin authority can consider a network where it might otherwise consider a single gauge. That possibility is the whole of the argument.</a:t>
+            </a:r>
+          </a:p>
+        </p:txBody>
+      </p:sp>
+      <p:sp>
+        <p:nvSpPr>
+          <p:cNvPr id="4" name="Rectangle 3" descr=""/>
+          <p:cNvSpPr/>
+          <p:nvPr/>
+        </p:nvSpPr>
+        <p:spPr>
+          <a:xfrm>
+            <a:off x="274320" y="4443984"/>
+            <a:ext cx="1517904" cy="676656"/>
+          </a:xfrm>
+          <a:prstGeom prst="rect">
+            <a:avLst/>
+          </a:prstGeom>
+          <a:solidFill>
+            <a:srgbClr val="FFFFFF"/>
+          </a:solidFill>
+          <a:ln>
+            <a:noFill/>
+          </a:ln>
+          <a:effectLst/>
+        </p:spPr>
+        <p:txBody>
+          <a:bodyPr rtlCol="0" anchor="ctr"/>
+          <a:lstStyle/>
+          <a:p>
+            <a:pPr algn="ctr"/>
           </a:p>
         </p:txBody>
       </p:sp>
       <p:pic>
         <p:nvPicPr>
-          <p:cNvPr id="3" name="Picture 2" descr="Flow diagram. A camera on a pole at the river sends video to a station computer, which works out a water level and a discharge figure; both travel over the mobile network to a server that keeps the record. Beneath the computer are the three things it depends on: a solar panel and battery, a scheduler that wakes it every 30 minutes, and a rain gauge that keeps recording while the station sleeps."/>
+          <p:cNvPr id="5" name="Picture 4" descr="Palang Merah Indonesia logo"/>
           <p:cNvPicPr>
             <a:picLocks noChangeAspect="1"/>
           </p:cNvPicPr>
@@ -10188,47 +11441,17 @@
         </p:blipFill>
         <p:spPr>
           <a:xfrm>
-            <a:off x="680499" y="919607"/>
-            <a:ext cx="7783002" cy="3492373"/>
+            <a:off x="1369770" y="4576572"/>
+            <a:ext cx="939918" cy="365760"/>
           </a:xfrm>
           <a:prstGeom prst="rect">
             <a:avLst/>
           </a:prstGeom>
         </p:spPr>
       </p:pic>
-      <p:sp>
-        <p:nvSpPr>
-          <p:cNvPr id="4" name="Rectangle 3" descr=""/>
-          <p:cNvSpPr/>
-          <p:nvPr/>
-        </p:nvSpPr>
-        <p:spPr>
-          <a:xfrm>
-            <a:off x="274320" y="4443984"/>
-            <a:ext cx="1517904" cy="676656"/>
-          </a:xfrm>
-          <a:prstGeom prst="rect">
-            <a:avLst/>
-          </a:prstGeom>
-          <a:solidFill>
-            <a:srgbClr val="FFFFFF"/>
-          </a:solidFill>
-          <a:ln>
-            <a:noFill/>
-          </a:ln>
-          <a:effectLst/>
-        </p:spPr>
-        <p:txBody>
-          <a:bodyPr rtlCol="0" anchor="ctr"/>
-          <a:lstStyle/>
-          <a:p>
-            <a:pPr algn="ctr"/>
-          </a:p>
-        </p:txBody>
-      </p:sp>
       <p:pic>
         <p:nvPicPr>
-          <p:cNvPr id="5" name="Picture 4" descr="Palang Merah Indonesia logo"/>
+          <p:cNvPr id="6" name="Picture 5" descr="Institut Pertanian Bogor logo"/>
           <p:cNvPicPr>
             <a:picLocks noChangeAspect="1"/>
           </p:cNvPicPr>
@@ -10242,8 +11465,8 @@
         </p:blipFill>
         <p:spPr>
           <a:xfrm>
-            <a:off x="1369770" y="4576572"/>
-            <a:ext cx="939918" cy="365760"/>
+            <a:off x="2602296" y="4576572"/>
+            <a:ext cx="539014" cy="365760"/>
           </a:xfrm>
           <a:prstGeom prst="rect">
             <a:avLst/>
@@ -10252,7 +11475,7 @@
       </p:pic>
       <p:pic>
         <p:nvPicPr>
-          <p:cNvPr id="6" name="Picture 5" descr="Institut Pertanian Bogor logo"/>
+          <p:cNvPr id="7" name="Picture 6" descr="Balai Hidrologi dan Lingkungan Keairan logo"/>
           <p:cNvPicPr>
             <a:picLocks noChangeAspect="1"/>
           </p:cNvPicPr>
@@ -10266,8 +11489,8 @@
         </p:blipFill>
         <p:spPr>
           <a:xfrm>
-            <a:off x="2602296" y="4576572"/>
-            <a:ext cx="539014" cy="365760"/>
+            <a:off x="3433918" y="4576572"/>
+            <a:ext cx="365760" cy="365760"/>
           </a:xfrm>
           <a:prstGeom prst="rect">
             <a:avLst/>
@@ -10276,7 +11499,7 @@
       </p:pic>
       <p:pic>
         <p:nvPicPr>
-          <p:cNvPr id="7" name="Picture 6" descr="Balai Hidrologi dan Lingkungan Keairan logo"/>
+          <p:cNvPr id="8" name="Picture 7" descr="American Red Cross logo"/>
           <p:cNvPicPr>
             <a:picLocks noChangeAspect="1"/>
           </p:cNvPicPr>
@@ -10290,30 +11513,6 @@
         </p:blipFill>
         <p:spPr>
           <a:xfrm>
-            <a:off x="3433918" y="4576572"/>
-            <a:ext cx="365760" cy="365760"/>
-          </a:xfrm>
-          <a:prstGeom prst="rect">
-            <a:avLst/>
-          </a:prstGeom>
-        </p:spPr>
-      </p:pic>
-      <p:pic>
-        <p:nvPicPr>
-          <p:cNvPr id="8" name="Picture 7" descr="American Red Cross logo"/>
-          <p:cNvPicPr>
-            <a:picLocks noChangeAspect="1"/>
-          </p:cNvPicPr>
-          <p:nvPr/>
-        </p:nvPicPr>
-        <p:blipFill>
-          <a:blip r:embed="rId6"/>
-          <a:stretch>
-            <a:fillRect/>
-          </a:stretch>
-        </p:blipFill>
-        <p:spPr>
-          <a:xfrm>
             <a:off x="4092286" y="4576572"/>
             <a:ext cx="1103335" cy="365760"/>
           </a:xfrm>
@@ -10351,7 +11550,7 @@
                   <a:srgbClr val="6B6A66"/>
                 </a:solidFill>
               </a:rPr>
-              <a:t>6 / 21</a:t>
+              <a:t>6 / 25</a:t>
             </a:r>
           </a:p>
         </p:txBody>
@@ -10391,19 +11590,19 @@
           <a:p>
             <a:pPr/>
             <a:r>
-              <a:rPr sz="1800">
+              <a:rPr sz="2000">
                 <a:solidFill>
                   <a:srgbClr val="1A1A1A"/>
                 </a:solidFill>
               </a:rPr>
-              <a:t>Built from commodity parts, so it can be repaired locally</a:t>
+              <a:t>What is being offered for study</a:t>
             </a:r>
           </a:p>
         </p:txBody>
       </p:sp>
       <p:pic>
         <p:nvPicPr>
-          <p:cNvPr id="3" name="Picture 2" descr="Components laid out on a workbench: enclosure mounting plate, two lengths of DIN rail, three fuse holders, the camera, the rain gauge dome, a small computer with its screw-terminal riser, a power converter, terminal blocks, a relay board, the mobile data modem and its antenna."/>
+          <p:cNvPr id="3" name="Picture 2" descr="Flow diagram. A camera on a pole at the river sends video to a station computer, which works out a water level and a discharge figure; both travel over the mobile network to a server that keeps the record. Beneath the computer are the three things it depends on: a solar panel and battery, a scheduler that wakes it every 30 minutes, and a rain gauge that keeps recording while the station sleeps."/>
           <p:cNvPicPr>
             <a:picLocks noChangeAspect="1"/>
           </p:cNvPicPr>
@@ -10417,8 +11616,8 @@
         </p:blipFill>
         <p:spPr>
           <a:xfrm>
-            <a:off x="1547003" y="1155065"/>
-            <a:ext cx="1798034" cy="2397379"/>
+            <a:off x="680499" y="919607"/>
+            <a:ext cx="7783002" cy="3492373"/>
           </a:xfrm>
           <a:prstGeom prst="rect">
             <a:avLst/>
@@ -10427,41 +11626,37 @@
       </p:pic>
       <p:sp>
         <p:nvSpPr>
-          <p:cNvPr id="4" name="TextBox 3"/>
-          <p:cNvSpPr txBox="1"/>
-          <p:nvPr/>
-        </p:nvSpPr>
-        <p:spPr>
-          <a:xfrm>
-            <a:off x="457200" y="3589020"/>
-            <a:ext cx="3977640" cy="457200"/>
-          </a:xfrm>
-          <a:prstGeom prst="rect">
-            <a:avLst/>
-          </a:prstGeom>
-          <a:noFill/>
-        </p:spPr>
-        <p:txBody>
-          <a:bodyPr wrap="square">
-            <a:spAutoFit/>
-          </a:bodyPr>
+          <p:cNvPr id="4" name="Rectangle 3" descr=""/>
+          <p:cNvSpPr/>
+          <p:nvPr/>
+        </p:nvSpPr>
+        <p:spPr>
+          <a:xfrm>
+            <a:off x="274320" y="4443984"/>
+            <a:ext cx="1517904" cy="676656"/>
+          </a:xfrm>
+          <a:prstGeom prst="rect">
+            <a:avLst/>
+          </a:prstGeom>
+          <a:solidFill>
+            <a:srgbClr val="FFFFFF"/>
+          </a:solidFill>
+          <a:ln>
+            <a:noFill/>
+          </a:ln>
+          <a:effectLst/>
+        </p:spPr>
+        <p:txBody>
+          <a:bodyPr rtlCol="0" anchor="ctr"/>
           <a:lstStyle/>
           <a:p>
-            <a:pPr/>
-            <a:r>
-              <a:rPr sz="1000">
-                <a:solidFill>
-                  <a:srgbClr val="42413E"/>
-                </a:solidFill>
-              </a:rPr>
-              <a:t>The parts for one station, before assembly.</a:t>
-            </a:r>
+            <a:pPr algn="ctr"/>
           </a:p>
         </p:txBody>
       </p:sp>
       <p:pic>
         <p:nvPicPr>
-          <p:cNvPr id="5" name="Picture 4" descr="The same components assembled onto the mounting plate and wired, with a bench power supply alongside reading 12.08 volts."/>
+          <p:cNvPr id="5" name="Picture 4" descr="Palang Merah Indonesia logo"/>
           <p:cNvPicPr>
             <a:picLocks noChangeAspect="1"/>
           </p:cNvPicPr>
@@ -10475,115 +11670,17 @@
         </p:blipFill>
         <p:spPr>
           <a:xfrm>
-            <a:off x="5798963" y="1155065"/>
-            <a:ext cx="1798034" cy="2397379"/>
+            <a:off x="1369770" y="4576572"/>
+            <a:ext cx="939918" cy="365760"/>
           </a:xfrm>
           <a:prstGeom prst="rect">
             <a:avLst/>
           </a:prstGeom>
         </p:spPr>
       </p:pic>
-      <p:sp>
-        <p:nvSpPr>
-          <p:cNvPr id="6" name="TextBox 5"/>
-          <p:cNvSpPr txBox="1"/>
-          <p:nvPr/>
-        </p:nvSpPr>
-        <p:spPr>
-          <a:xfrm>
-            <a:off x="4709160" y="3589020"/>
-            <a:ext cx="3977640" cy="457200"/>
-          </a:xfrm>
-          <a:prstGeom prst="rect">
-            <a:avLst/>
-          </a:prstGeom>
-          <a:noFill/>
-        </p:spPr>
-        <p:txBody>
-          <a:bodyPr wrap="square">
-            <a:spAutoFit/>
-          </a:bodyPr>
-          <a:lstStyle/>
-          <a:p>
-            <a:pPr/>
-            <a:r>
-              <a:rPr sz="1000">
-                <a:solidFill>
-                  <a:srgbClr val="42413E"/>
-                </a:solidFill>
-              </a:rPr>
-              <a:t>The same parts wired onto the plate, under bench power.</a:t>
-            </a:r>
-          </a:p>
-        </p:txBody>
-      </p:sp>
-      <p:sp>
-        <p:nvSpPr>
-          <p:cNvPr id="7" name="TextBox 6"/>
-          <p:cNvSpPr txBox="1"/>
-          <p:nvPr/>
-        </p:nvSpPr>
-        <p:spPr>
-          <a:xfrm>
-            <a:off x="457200" y="4009644"/>
-            <a:ext cx="8229600" cy="402336"/>
-          </a:xfrm>
-          <a:prstGeom prst="rect">
-            <a:avLst/>
-          </a:prstGeom>
-          <a:noFill/>
-        </p:spPr>
-        <p:txBody>
-          <a:bodyPr wrap="square">
-            <a:spAutoFit/>
-          </a:bodyPr>
-          <a:lstStyle/>
-          <a:p>
-            <a:pPr/>
-            <a:r>
-              <a:rPr sz="1000">
-                <a:solidFill>
-                  <a:srgbClr val="6B6A66"/>
-                </a:solidFill>
-              </a:rPr>
-              <a:t>No soldering, no fabrication, nothing single-source.</a:t>
-            </a:r>
-          </a:p>
-        </p:txBody>
-      </p:sp>
-      <p:sp>
-        <p:nvSpPr>
-          <p:cNvPr id="8" name="Rectangle 7" descr=""/>
-          <p:cNvSpPr/>
-          <p:nvPr/>
-        </p:nvSpPr>
-        <p:spPr>
-          <a:xfrm>
-            <a:off x="274320" y="4443984"/>
-            <a:ext cx="1517904" cy="676656"/>
-          </a:xfrm>
-          <a:prstGeom prst="rect">
-            <a:avLst/>
-          </a:prstGeom>
-          <a:solidFill>
-            <a:srgbClr val="FFFFFF"/>
-          </a:solidFill>
-          <a:ln>
-            <a:noFill/>
-          </a:ln>
-          <a:effectLst/>
-        </p:spPr>
-        <p:txBody>
-          <a:bodyPr rtlCol="0" anchor="ctr"/>
-          <a:lstStyle/>
-          <a:p>
-            <a:pPr algn="ctr"/>
-          </a:p>
-        </p:txBody>
-      </p:sp>
       <p:pic>
         <p:nvPicPr>
-          <p:cNvPr id="9" name="Picture 8" descr="Palang Merah Indonesia logo"/>
+          <p:cNvPr id="6" name="Picture 5" descr="Institut Pertanian Bogor logo"/>
           <p:cNvPicPr>
             <a:picLocks noChangeAspect="1"/>
           </p:cNvPicPr>
@@ -10597,8 +11694,8 @@
         </p:blipFill>
         <p:spPr>
           <a:xfrm>
-            <a:off x="1369770" y="4576572"/>
-            <a:ext cx="939918" cy="365760"/>
+            <a:off x="2602296" y="4576572"/>
+            <a:ext cx="539014" cy="365760"/>
           </a:xfrm>
           <a:prstGeom prst="rect">
             <a:avLst/>
@@ -10607,7 +11704,7 @@
       </p:pic>
       <p:pic>
         <p:nvPicPr>
-          <p:cNvPr id="10" name="Picture 9" descr="Institut Pertanian Bogor logo"/>
+          <p:cNvPr id="7" name="Picture 6" descr="Balai Hidrologi dan Lingkungan Keairan logo"/>
           <p:cNvPicPr>
             <a:picLocks noChangeAspect="1"/>
           </p:cNvPicPr>
@@ -10621,8 +11718,8 @@
         </p:blipFill>
         <p:spPr>
           <a:xfrm>
-            <a:off x="2602296" y="4576572"/>
-            <a:ext cx="539014" cy="365760"/>
+            <a:off x="3433918" y="4576572"/>
+            <a:ext cx="365760" cy="365760"/>
           </a:xfrm>
           <a:prstGeom prst="rect">
             <a:avLst/>
@@ -10631,7 +11728,7 @@
       </p:pic>
       <p:pic>
         <p:nvPicPr>
-          <p:cNvPr id="11" name="Picture 10" descr="Balai Hidrologi dan Lingkungan Keairan logo"/>
+          <p:cNvPr id="8" name="Picture 7" descr="American Red Cross logo"/>
           <p:cNvPicPr>
             <a:picLocks noChangeAspect="1"/>
           </p:cNvPicPr>
@@ -10645,30 +11742,6 @@
         </p:blipFill>
         <p:spPr>
           <a:xfrm>
-            <a:off x="3433918" y="4576572"/>
-            <a:ext cx="365760" cy="365760"/>
-          </a:xfrm>
-          <a:prstGeom prst="rect">
-            <a:avLst/>
-          </a:prstGeom>
-        </p:spPr>
-      </p:pic>
-      <p:pic>
-        <p:nvPicPr>
-          <p:cNvPr id="12" name="Picture 11" descr="American Red Cross logo"/>
-          <p:cNvPicPr>
-            <a:picLocks noChangeAspect="1"/>
-          </p:cNvPicPr>
-          <p:nvPr/>
-        </p:nvPicPr>
-        <p:blipFill>
-          <a:blip r:embed="rId7"/>
-          <a:stretch>
-            <a:fillRect/>
-          </a:stretch>
-        </p:blipFill>
-        <p:spPr>
-          <a:xfrm>
             <a:off x="4092286" y="4576572"/>
             <a:ext cx="1103335" cy="365760"/>
           </a:xfrm>
@@ -10679,7 +11752,7 @@
       </p:pic>
       <p:sp>
         <p:nvSpPr>
-          <p:cNvPr id="13" name="TextBox 12"/>
+          <p:cNvPr id="9" name="TextBox 8"/>
           <p:cNvSpPr txBox="1"/>
           <p:nvPr/>
         </p:nvSpPr>
@@ -10706,7 +11779,7 @@
                   <a:srgbClr val="6B6A66"/>
                 </a:solidFill>
               </a:rPr>
-              <a:t>7 / 21</a:t>
+              <a:t>7 / 25</a:t>
             </a:r>
           </a:p>
         </p:txBody>
@@ -10751,96 +11824,164 @@
                   <a:srgbClr val="1A1A1A"/>
                 </a:solidFill>
               </a:rPr>
-              <a:t>The evidence is thin, and we ask you to treat it as thin</a:t>
-            </a:r>
-          </a:p>
-        </p:txBody>
-      </p:sp>
-      <p:sp>
-        <p:nvSpPr>
-          <p:cNvPr id="3" name="Text Placeholder 2"/>
-          <p:cNvSpPr>
-            <a:spLocks noGrp="1"/>
-          </p:cNvSpPr>
-          <p:nvPr>
-            <p:ph type="body" idx="12" sz="quarter"/>
-          </p:nvPr>
-        </p:nvSpPr>
-        <p:spPr/>
-        <p:txBody>
-          <a:bodyPr wrap="square"/>
+              <a:t>Built from commodity parts, so it can be repaired locally</a:t>
+            </a:r>
+          </a:p>
+        </p:txBody>
+      </p:sp>
+      <p:pic>
+        <p:nvPicPr>
+          <p:cNvPr id="3" name="Picture 2" descr="Components laid out on a workbench: enclosure mounting plate, two lengths of DIN rail, three fuse holders, the camera, the rain gauge dome, a small computer with its screw-terminal riser, a power converter, terminal blocks, a relay board, the mobile data modem and its antenna."/>
+          <p:cNvPicPr>
+            <a:picLocks noChangeAspect="1"/>
+          </p:cNvPicPr>
+          <p:nvPr/>
+        </p:nvPicPr>
+        <p:blipFill>
+          <a:blip r:embed="rId2"/>
+          <a:stretch>
+            <a:fillRect/>
+          </a:stretch>
+        </p:blipFill>
+        <p:spPr>
+          <a:xfrm>
+            <a:off x="1547003" y="1155065"/>
+            <a:ext cx="1798034" cy="2397379"/>
+          </a:xfrm>
+          <a:prstGeom prst="rect">
+            <a:avLst/>
+          </a:prstGeom>
+        </p:spPr>
+      </p:pic>
+      <p:sp>
+        <p:nvSpPr>
+          <p:cNvPr id="4" name="TextBox 3"/>
+          <p:cNvSpPr txBox="1"/>
+          <p:nvPr/>
+        </p:nvSpPr>
+        <p:spPr>
+          <a:xfrm>
+            <a:off x="457200" y="3589020"/>
+            <a:ext cx="3977640" cy="457200"/>
+          </a:xfrm>
+          <a:prstGeom prst="rect">
+            <a:avLst/>
+          </a:prstGeom>
+          <a:noFill/>
+        </p:spPr>
+        <p:txBody>
+          <a:bodyPr wrap="square">
+            <a:spAutoFit/>
+          </a:bodyPr>
           <a:lstStyle/>
           <a:p>
             <a:pPr/>
             <a:r>
-              <a:rPr sz="1400">
-                <a:solidFill>
-                  <a:srgbClr val="1A1A1A"/>
-                </a:solidFill>
-              </a:rPr>
-              <a:t>One station, on one river, watched across part of one season — 16 April to 28 August 2026.</a:t>
-            </a:r>
-          </a:p>
+              <a:rPr sz="1000">
+                <a:solidFill>
+                  <a:srgbClr val="42413E"/>
+                </a:solidFill>
+              </a:rPr>
+              <a:t>The parts for one station, before assembly.</a:t>
+            </a:r>
+          </a:p>
+        </p:txBody>
+      </p:sp>
+      <p:pic>
+        <p:nvPicPr>
+          <p:cNvPr id="5" name="Picture 4" descr="The same components assembled onto the mounting plate and wired, with a bench power supply alongside reading 12.08 volts."/>
+          <p:cNvPicPr>
+            <a:picLocks noChangeAspect="1"/>
+          </p:cNvPicPr>
+          <p:nvPr/>
+        </p:nvPicPr>
+        <p:blipFill>
+          <a:blip r:embed="rId3"/>
+          <a:stretch>
+            <a:fillRect/>
+          </a:stretch>
+        </p:blipFill>
+        <p:spPr>
+          <a:xfrm>
+            <a:off x="5798963" y="1155065"/>
+            <a:ext cx="1798034" cy="2397379"/>
+          </a:xfrm>
+          <a:prstGeom prst="rect">
+            <a:avLst/>
+          </a:prstGeom>
+        </p:spPr>
+      </p:pic>
+      <p:sp>
+        <p:nvSpPr>
+          <p:cNvPr id="6" name="TextBox 5"/>
+          <p:cNvSpPr txBox="1"/>
+          <p:nvPr/>
+        </p:nvSpPr>
+        <p:spPr>
+          <a:xfrm>
+            <a:off x="4709160" y="3589020"/>
+            <a:ext cx="3977640" cy="457200"/>
+          </a:xfrm>
+          <a:prstGeom prst="rect">
+            <a:avLst/>
+          </a:prstGeom>
+          <a:noFill/>
+        </p:spPr>
+        <p:txBody>
+          <a:bodyPr wrap="square">
+            <a:spAutoFit/>
+          </a:bodyPr>
+          <a:lstStyle/>
           <a:p>
             <a:pPr/>
             <a:r>
-              <a:rPr sz="1400">
-                <a:solidFill>
-                  <a:srgbClr val="1A1A1A"/>
-                </a:solidFill>
-              </a:rPr>
-              <a:t>A second station was built but never installed.</a:t>
-            </a:r>
-          </a:p>
+              <a:rPr sz="1000">
+                <a:solidFill>
+                  <a:srgbClr val="42413E"/>
+                </a:solidFill>
+              </a:rPr>
+              <a:t>The same parts wired onto the plate, under bench power.</a:t>
+            </a:r>
+          </a:p>
+        </p:txBody>
+      </p:sp>
+      <p:sp>
+        <p:nvSpPr>
+          <p:cNvPr id="7" name="TextBox 6"/>
+          <p:cNvSpPr txBox="1"/>
+          <p:nvPr/>
+        </p:nvSpPr>
+        <p:spPr>
+          <a:xfrm>
+            <a:off x="457200" y="4009644"/>
+            <a:ext cx="8229600" cy="402336"/>
+          </a:xfrm>
+          <a:prstGeom prst="rect">
+            <a:avLst/>
+          </a:prstGeom>
+          <a:noFill/>
+        </p:spPr>
+        <p:txBody>
+          <a:bodyPr wrap="square">
+            <a:spAutoFit/>
+          </a:bodyPr>
+          <a:lstStyle/>
           <a:p>
             <a:pPr/>
             <a:r>
-              <a:rPr sz="1400">
-                <a:solidFill>
-                  <a:srgbClr val="1A1A1A"/>
-                </a:solidFill>
-              </a:rPr>
-              <a:t>What the deployment has produced so far is knowledge about the design, not a body of measurements.</a:t>
-            </a:r>
-          </a:p>
-          <a:p>
-            <a:pPr/>
-            <a:r>
-              <a:rPr sz="1400">
-                <a:solidFill>
-                  <a:srgbClr val="1A1A1A"/>
-                </a:solidFill>
-              </a:rPr>
-              <a:t>It is a volunteer pilot and should be read as one.</a:t>
-            </a:r>
-          </a:p>
-          <a:p>
-            <a:pPr lvl="1"/>
-            <a:r>
-              <a:rPr sz="1250">
+              <a:rPr sz="1000">
                 <a:solidFill>
                   <a:srgbClr val="6B6A66"/>
                 </a:solidFill>
               </a:rPr>
-              <a:t>Never built to production standards of availability or record continuity. Measuring it against an industrial instrument would be the wrong test, and unfair to the people who kept it running.</a:t>
-            </a:r>
-          </a:p>
-          <a:p>
-            <a:pPr lvl="1"/>
-            <a:r>
-              <a:rPr sz="1250">
-                <a:solidFill>
-                  <a:srgbClr val="6B6A66"/>
-                </a:solidFill>
-              </a:rPr>
-              <a:t>The useful question is narrower: what does this design make hard, and what should be built differently.</a:t>
-            </a:r>
-          </a:p>
-        </p:txBody>
-      </p:sp>
-      <p:sp>
-        <p:nvSpPr>
-          <p:cNvPr id="4" name="Rectangle 3" descr=""/>
+              <a:t>No soldering, no fabrication, nothing single-source.</a:t>
+            </a:r>
+          </a:p>
+        </p:txBody>
+      </p:sp>
+      <p:sp>
+        <p:nvSpPr>
+          <p:cNvPr id="8" name="Rectangle 7" descr=""/>
           <p:cNvSpPr/>
           <p:nvPr/>
         </p:nvSpPr>
@@ -10870,55 +12011,7 @@
       </p:sp>
       <p:pic>
         <p:nvPicPr>
-          <p:cNvPr id="5" name="Picture 4" descr="Palang Merah Indonesia logo"/>
-          <p:cNvPicPr>
-            <a:picLocks noChangeAspect="1"/>
-          </p:cNvPicPr>
-          <p:nvPr/>
-        </p:nvPicPr>
-        <p:blipFill>
-          <a:blip r:embed="rId2"/>
-          <a:stretch>
-            <a:fillRect/>
-          </a:stretch>
-        </p:blipFill>
-        <p:spPr>
-          <a:xfrm>
-            <a:off x="1369770" y="4576572"/>
-            <a:ext cx="939918" cy="365760"/>
-          </a:xfrm>
-          <a:prstGeom prst="rect">
-            <a:avLst/>
-          </a:prstGeom>
-        </p:spPr>
-      </p:pic>
-      <p:pic>
-        <p:nvPicPr>
-          <p:cNvPr id="6" name="Picture 5" descr="Institut Pertanian Bogor logo"/>
-          <p:cNvPicPr>
-            <a:picLocks noChangeAspect="1"/>
-          </p:cNvPicPr>
-          <p:nvPr/>
-        </p:nvPicPr>
-        <p:blipFill>
-          <a:blip r:embed="rId3"/>
-          <a:stretch>
-            <a:fillRect/>
-          </a:stretch>
-        </p:blipFill>
-        <p:spPr>
-          <a:xfrm>
-            <a:off x="2602296" y="4576572"/>
-            <a:ext cx="539014" cy="365760"/>
-          </a:xfrm>
-          <a:prstGeom prst="rect">
-            <a:avLst/>
-          </a:prstGeom>
-        </p:spPr>
-      </p:pic>
-      <p:pic>
-        <p:nvPicPr>
-          <p:cNvPr id="7" name="Picture 6" descr="Balai Hidrologi dan Lingkungan Keairan logo"/>
+          <p:cNvPr id="9" name="Picture 8" descr="Palang Merah Indonesia logo"/>
           <p:cNvPicPr>
             <a:picLocks noChangeAspect="1"/>
           </p:cNvPicPr>
@@ -10932,8 +12025,8 @@
         </p:blipFill>
         <p:spPr>
           <a:xfrm>
-            <a:off x="3433918" y="4576572"/>
-            <a:ext cx="365760" cy="365760"/>
+            <a:off x="1369770" y="4576572"/>
+            <a:ext cx="939918" cy="365760"/>
           </a:xfrm>
           <a:prstGeom prst="rect">
             <a:avLst/>
@@ -10942,7 +12035,7 @@
       </p:pic>
       <p:pic>
         <p:nvPicPr>
-          <p:cNvPr id="8" name="Picture 7" descr="American Red Cross logo"/>
+          <p:cNvPr id="10" name="Picture 9" descr="Institut Pertanian Bogor logo"/>
           <p:cNvPicPr>
             <a:picLocks noChangeAspect="1"/>
           </p:cNvPicPr>
@@ -10956,6 +12049,54 @@
         </p:blipFill>
         <p:spPr>
           <a:xfrm>
+            <a:off x="2602296" y="4576572"/>
+            <a:ext cx="539014" cy="365760"/>
+          </a:xfrm>
+          <a:prstGeom prst="rect">
+            <a:avLst/>
+          </a:prstGeom>
+        </p:spPr>
+      </p:pic>
+      <p:pic>
+        <p:nvPicPr>
+          <p:cNvPr id="11" name="Picture 10" descr="Balai Hidrologi dan Lingkungan Keairan logo"/>
+          <p:cNvPicPr>
+            <a:picLocks noChangeAspect="1"/>
+          </p:cNvPicPr>
+          <p:nvPr/>
+        </p:nvPicPr>
+        <p:blipFill>
+          <a:blip r:embed="rId6"/>
+          <a:stretch>
+            <a:fillRect/>
+          </a:stretch>
+        </p:blipFill>
+        <p:spPr>
+          <a:xfrm>
+            <a:off x="3433918" y="4576572"/>
+            <a:ext cx="365760" cy="365760"/>
+          </a:xfrm>
+          <a:prstGeom prst="rect">
+            <a:avLst/>
+          </a:prstGeom>
+        </p:spPr>
+      </p:pic>
+      <p:pic>
+        <p:nvPicPr>
+          <p:cNvPr id="12" name="Picture 11" descr="American Red Cross logo"/>
+          <p:cNvPicPr>
+            <a:picLocks noChangeAspect="1"/>
+          </p:cNvPicPr>
+          <p:nvPr/>
+        </p:nvPicPr>
+        <p:blipFill>
+          <a:blip r:embed="rId7"/>
+          <a:stretch>
+            <a:fillRect/>
+          </a:stretch>
+        </p:blipFill>
+        <p:spPr>
+          <a:xfrm>
             <a:off x="4092286" y="4576572"/>
             <a:ext cx="1103335" cy="365760"/>
           </a:xfrm>
@@ -10966,7 +12107,7 @@
       </p:pic>
       <p:sp>
         <p:nvSpPr>
-          <p:cNvPr id="9" name="TextBox 8"/>
+          <p:cNvPr id="13" name="TextBox 12"/>
           <p:cNvSpPr txBox="1"/>
           <p:nvPr/>
         </p:nvSpPr>
@@ -10993,7 +12134,7 @@
                   <a:srgbClr val="6B6A66"/>
                 </a:solidFill>
               </a:rPr>
-              <a:t>8 / 21</a:t>
+              <a:t>8 / 25</a:t>
             </a:r>
           </a:p>
         </p:txBody>
@@ -11033,12 +12174,12 @@
           <a:p>
             <a:pPr/>
             <a:r>
-              <a:rPr sz="2000">
+              <a:rPr sz="1800">
                 <a:solidFill>
                   <a:srgbClr val="1A1A1A"/>
                 </a:solidFill>
               </a:rPr>
-              <a:t>Three design gaps, and what we would build instead</a:t>
+              <a:t>The evidence is thin, and we ask you to treat it as thin</a:t>
             </a:r>
           </a:p>
         </p:txBody>
@@ -11060,67 +12201,67 @@
           <a:p>
             <a:pPr/>
             <a:r>
-              <a:rPr sz="1500">
+              <a:rPr sz="1400">
                 <a:solidFill>
                   <a:srgbClr val="1A1A1A"/>
                 </a:solidFill>
               </a:rPr>
-              <a:t>The station cannot report its own condition. When it stopped, it stopped quietly.</a:t>
+              <a:t>One station, on one river, watched across part of one season — 16 April to 28 August 2026.</a:t>
+            </a:r>
+          </a:p>
+          <a:p>
+            <a:pPr/>
+            <a:r>
+              <a:rPr sz="1400">
+                <a:solidFill>
+                  <a:srgbClr val="1A1A1A"/>
+                </a:solidFill>
+              </a:rPr>
+              <a:t>A second station was built but never installed.</a:t>
+            </a:r>
+          </a:p>
+          <a:p>
+            <a:pPr/>
+            <a:r>
+              <a:rPr sz="1400">
+                <a:solidFill>
+                  <a:srgbClr val="1A1A1A"/>
+                </a:solidFill>
+              </a:rPr>
+              <a:t>What the deployment has produced so far is knowledge about the design, not a body of measurements.</a:t>
+            </a:r>
+          </a:p>
+          <a:p>
+            <a:pPr/>
+            <a:r>
+              <a:rPr sz="1400">
+                <a:solidFill>
+                  <a:srgbClr val="1A1A1A"/>
+                </a:solidFill>
+              </a:rPr>
+              <a:t>It is a volunteer pilot and should be read as one.</a:t>
             </a:r>
           </a:p>
           <a:p>
             <a:pPr lvl="1"/>
             <a:r>
-              <a:rPr sz="1350">
+              <a:rPr sz="1250">
                 <a:solidFill>
                   <a:srgbClr val="6B6A66"/>
                 </a:solidFill>
               </a:rPr>
-              <a:t>Instead: report state on every waking, and make any mode that suppresses data expire on its own and raise an alert. R4, R5.</a:t>
-            </a:r>
-          </a:p>
-          <a:p>
-            <a:pPr/>
-            <a:r>
-              <a:rPr sz="1500">
-                <a:solidFill>
-                  <a:srgbClr val="1A1A1A"/>
-                </a:solidFill>
-              </a:rPr>
-              <a:t>Nothing reconciles what was recorded against what arrived.</a:t>
+              <a:t>Never built to production standards of availability or record continuity. Measuring it against an industrial instrument would be the wrong test, and unfair to the people who kept it running.</a:t>
             </a:r>
           </a:p>
           <a:p>
             <a:pPr lvl="1"/>
             <a:r>
-              <a:rPr sz="1350">
+              <a:rPr sz="1250">
                 <a:solidFill>
                   <a:srgbClr val="6B6A66"/>
                 </a:solidFill>
               </a:rPr>
-              <a:t>Instead: compare the station's record against the server's on a schedule. Small piece of software; should have been in version one. R7.</a:t>
-            </a:r>
-          </a:p>
-          <a:p>
-            <a:pPr/>
-            <a:r>
-              <a:rPr sz="1500">
-                <a:solidFill>
-                  <a:srgbClr val="1A1A1A"/>
-                </a:solidFill>
-              </a:rPr>
-              <a:t>Water level is read from the image, and daylight defeats it.</a:t>
-            </a:r>
-          </a:p>
-          <a:p>
-            <a:pPr lvl="1"/>
-            <a:r>
-              <a:rPr sz="1350">
-                <a:solidFill>
-                  <a:srgbClr val="6B6A66"/>
-                </a:solidFill>
-              </a:rPr>
-              <a:t>Instead: an independent water-level reference, so the measurement does not rest on one optical method succeeding. R1.</a:t>
+              <a:t>The useful question is narrower: what does this design make hard, and what should be built differently.</a:t>
             </a:r>
           </a:p>
         </p:txBody>
@@ -11280,7 +12421,7 @@
                   <a:srgbClr val="6B6A66"/>
                 </a:solidFill>
               </a:rPr>
-              <a:t>9 / 21</a:t>
+              <a:t>9 / 25</a:t>
             </a:r>
           </a:p>
         </p:txBody>

--- a/spring_2026_ID/docs/pdf/REPLICATION_RECOMMENDATIONS_BRIEFING.pptx
+++ b/spring_2026_ID/docs/pdf/REPLICATION_RECOMMENDATIONS_BRIEFING.pptx
@@ -35,7 +35,6 @@
     <p:sldId id="277" r:id="rId29"/>
     <p:sldId id="278" r:id="rId30"/>
     <p:sldId id="279" r:id="rId31"/>
-    <p:sldId id="280" r:id="rId32"/>
   </p:sldIdLst>
   <p:sldSz cx="9144000" cy="5143500" type="screen16x9"/>
   <p:notesSz cx="6858000" cy="9144000"/>
@@ -5048,7 +5047,7 @@
                   <a:srgbClr val="6B6A66"/>
                 </a:solidFill>
               </a:rPr>
-              <a:t>10 / 25</a:t>
+              <a:t>10 / 24</a:t>
             </a:r>
           </a:p>
         </p:txBody>
@@ -5346,7 +5345,7 @@
                   <a:srgbClr val="6B6A66"/>
                 </a:solidFill>
               </a:rPr>
-              <a:t>11 / 25</a:t>
+              <a:t>11 / 24</a:t>
             </a:r>
           </a:p>
         </p:txBody>
@@ -5609,7 +5608,7 @@
                   <a:srgbClr val="6B6A66"/>
                 </a:solidFill>
               </a:rPr>
-              <a:t>12 / 25</a:t>
+              <a:t>12 / 24</a:t>
             </a:r>
           </a:p>
         </p:txBody>
@@ -5654,107 +5653,506 @@
                   <a:srgbClr val="1A1A1A"/>
                 </a:solidFill>
               </a:rPr>
-              <a:t>Eleven things we would do differently</a:t>
-            </a:r>
-          </a:p>
-        </p:txBody>
-      </p:sp>
-      <p:sp>
-        <p:nvSpPr>
-          <p:cNvPr id="3" name="Text Placeholder 2"/>
-          <p:cNvSpPr>
-            <a:spLocks noGrp="1"/>
-          </p:cNvSpPr>
-          <p:nvPr>
-            <p:ph type="body" idx="12" sz="quarter"/>
-          </p:nvPr>
-        </p:nvSpPr>
-        <p:spPr/>
-        <p:txBody>
-          <a:bodyPr wrap="square"/>
+              <a:t>What we recommend</a:t>
+            </a:r>
+          </a:p>
+        </p:txBody>
+      </p:sp>
+      <p:graphicFrame>
+        <p:nvGraphicFramePr>
+          <p:cNvPr id="3" name="Table 2"/>
+          <p:cNvGraphicFramePr>
+            <a:graphicFrameLocks noGrp="1"/>
+          </p:cNvGraphicFramePr>
+          <p:nvPr/>
+        </p:nvGraphicFramePr>
+        <p:xfrm>
+          <a:off x="457200" y="1155065"/>
+          <a:ext cx="8229600" cy="2689980"/>
+        </p:xfrm>
+        <a:graphic>
+          <a:graphicData uri="http://schemas.openxmlformats.org/drawingml/2006/table">
+            <a:tbl>
+              <a:tblPr firstRow="1" bandRow="1">
+                <a:tableStyleId>{5C22544A-7EE6-4342-B048-85BDC9FD1C3A}</a:tableStyleId>
+              </a:tblPr>
+              <a:tblGrid>
+                <a:gridCol w="4114800"/>
+                <a:gridCol w="4114800"/>
+              </a:tblGrid>
+              <a:tr h="224165">
+                <a:tc>
+                  <a:txBody>
+                    <a:bodyPr/>
+                    <a:lstStyle/>
+                    <a:p>
+                      <a:r>
+                        <a:rPr sz="1000" b="1">
+                          <a:solidFill>
+                            <a:srgbClr val="1A1A1A"/>
+                          </a:solidFill>
+                        </a:rPr>
+                        <a:t>Group</a:t>
+                      </a:r>
+                    </a:p>
+                  </a:txBody>
+                  <a:tcPr marT="27432" marB="27432"/>
+                </a:tc>
+                <a:tc>
+                  <a:txBody>
+                    <a:bodyPr/>
+                    <a:lstStyle/>
+                    <a:p>
+                      <a:r>
+                        <a:rPr sz="1000" b="1">
+                          <a:solidFill>
+                            <a:srgbClr val="1A1A1A"/>
+                          </a:solidFill>
+                        </a:rPr>
+                        <a:t>Recommendations</a:t>
+                      </a:r>
+                    </a:p>
+                  </a:txBody>
+                  <a:tcPr marT="27432" marB="27432"/>
+                </a:tc>
+              </a:tr>
+              <a:tr h="224165">
+                <a:tc>
+                  <a:txBody>
+                    <a:bodyPr/>
+                    <a:lstStyle/>
+                    <a:p>
+                      <a:r>
+                        <a:rPr sz="900" b="0">
+                          <a:solidFill>
+                            <a:srgbClr val="1A1A1A"/>
+                          </a:solidFill>
+                        </a:rPr>
+                        <a:t>What is worth keeping</a:t>
+                      </a:r>
+                    </a:p>
+                  </a:txBody>
+                  <a:tcPr marT="27432" marB="27432"/>
+                </a:tc>
+                <a:tc>
+                  <a:txBody>
+                    <a:bodyPr/>
+                    <a:lstStyle/>
+                    <a:p>
+                      <a:r>
+                        <a:rPr sz="900" b="0">
+                          <a:solidFill>
+                            <a:srgbClr val="1A1A1A"/>
+                          </a:solidFill>
+                        </a:rPr>
+                        <a:t>R30, R31, R32, R33, R34, R35</a:t>
+                      </a:r>
+                    </a:p>
+                  </a:txBody>
+                  <a:tcPr marT="27432" marB="27432"/>
+                </a:tc>
+              </a:tr>
+              <a:tr h="224165">
+                <a:tc>
+                  <a:txBody>
+                    <a:bodyPr/>
+                    <a:lstStyle/>
+                    <a:p>
+                      <a:r>
+                        <a:rPr sz="900" b="0">
+                          <a:solidFill>
+                            <a:srgbClr val="1A1A1A"/>
+                          </a:solidFill>
+                        </a:rPr>
+                        <a:t>Keep a station you can break</a:t>
+                      </a:r>
+                    </a:p>
+                  </a:txBody>
+                  <a:tcPr marT="27432" marB="27432"/>
+                </a:tc>
+                <a:tc>
+                  <a:txBody>
+                    <a:bodyPr/>
+                    <a:lstStyle/>
+                    <a:p>
+                      <a:r>
+                        <a:rPr sz="900" b="0">
+                          <a:solidFill>
+                            <a:srgbClr val="1A1A1A"/>
+                          </a:solidFill>
+                        </a:rPr>
+                        <a:t>R36</a:t>
+                      </a:r>
+                    </a:p>
+                  </a:txBody>
+                  <a:tcPr marT="27432" marB="27432"/>
+                </a:tc>
+              </a:tr>
+              <a:tr h="224165">
+                <a:tc>
+                  <a:txBody>
+                    <a:bodyPr/>
+                    <a:lstStyle/>
+                    <a:p>
+                      <a:r>
+                        <a:rPr sz="900" b="0">
+                          <a:solidFill>
+                            <a:srgbClr val="1A1A1A"/>
+                          </a:solidFill>
+                        </a:rPr>
+                        <a:t>Choose the site before anything else</a:t>
+                      </a:r>
+                    </a:p>
+                  </a:txBody>
+                  <a:tcPr marT="27432" marB="27432"/>
+                </a:tc>
+                <a:tc>
+                  <a:txBody>
+                    <a:bodyPr/>
+                    <a:lstStyle/>
+                    <a:p>
+                      <a:r>
+                        <a:rPr sz="900" b="0">
+                          <a:solidFill>
+                            <a:srgbClr val="1A1A1A"/>
+                          </a:solidFill>
+                        </a:rPr>
+                        <a:t>R16, R17, R18</a:t>
+                      </a:r>
+                    </a:p>
+                  </a:txBody>
+                  <a:tcPr marT="27432" marB="27432"/>
+                </a:tc>
+              </a:tr>
+              <a:tr h="224165">
+                <a:tc>
+                  <a:txBody>
+                    <a:bodyPr/>
+                    <a:lstStyle/>
+                    <a:p>
+                      <a:r>
+                        <a:rPr sz="900" b="0">
+                          <a:solidFill>
+                            <a:srgbClr val="1A1A1A"/>
+                          </a:solidFill>
+                        </a:rPr>
+                        <a:t>Improve measurement accuracy</a:t>
+                      </a:r>
+                    </a:p>
+                  </a:txBody>
+                  <a:tcPr marT="27432" marB="27432"/>
+                </a:tc>
+                <a:tc>
+                  <a:txBody>
+                    <a:bodyPr/>
+                    <a:lstStyle/>
+                    <a:p>
+                      <a:r>
+                        <a:rPr sz="900" b="0">
+                          <a:solidFill>
+                            <a:srgbClr val="1A1A1A"/>
+                          </a:solidFill>
+                        </a:rPr>
+                        <a:t>R1, R2, R19, R20</a:t>
+                      </a:r>
+                    </a:p>
+                  </a:txBody>
+                  <a:tcPr marT="27432" marB="27432"/>
+                </a:tc>
+              </a:tr>
+              <a:tr h="224165">
+                <a:tc>
+                  <a:txBody>
+                    <a:bodyPr/>
+                    <a:lstStyle/>
+                    <a:p>
+                      <a:r>
+                        <a:rPr sz="900" b="0">
+                          <a:solidFill>
+                            <a:srgbClr val="1A1A1A"/>
+                          </a:solidFill>
+                        </a:rPr>
+                        <a:t>Improve monitoring</a:t>
+                      </a:r>
+                    </a:p>
+                  </a:txBody>
+                  <a:tcPr marT="27432" marB="27432"/>
+                </a:tc>
+                <a:tc>
+                  <a:txBody>
+                    <a:bodyPr/>
+                    <a:lstStyle/>
+                    <a:p>
+                      <a:r>
+                        <a:rPr sz="900" b="0">
+                          <a:solidFill>
+                            <a:srgbClr val="1A1A1A"/>
+                          </a:solidFill>
+                        </a:rPr>
+                        <a:t>R4, R5, R6, R21, R7</a:t>
+                      </a:r>
+                    </a:p>
+                  </a:txBody>
+                  <a:tcPr marT="27432" marB="27432"/>
+                </a:tc>
+              </a:tr>
+              <a:tr h="224165">
+                <a:tc>
+                  <a:txBody>
+                    <a:bodyPr/>
+                    <a:lstStyle/>
+                    <a:p>
+                      <a:r>
+                        <a:rPr sz="900" b="0">
+                          <a:solidFill>
+                            <a:srgbClr val="1A1A1A"/>
+                          </a:solidFill>
+                        </a:rPr>
+                        <a:t>Give one process control of the sleep and wake cycle</a:t>
+                      </a:r>
+                    </a:p>
+                  </a:txBody>
+                  <a:tcPr marT="27432" marB="27432"/>
+                </a:tc>
+                <a:tc>
+                  <a:txBody>
+                    <a:bodyPr/>
+                    <a:lstStyle/>
+                    <a:p>
+                      <a:r>
+                        <a:rPr sz="900" b="0">
+                          <a:solidFill>
+                            <a:srgbClr val="1A1A1A"/>
+                          </a:solidFill>
+                        </a:rPr>
+                        <a:t>R10, R12</a:t>
+                      </a:r>
+                    </a:p>
+                  </a:txBody>
+                  <a:tcPr marT="27432" marB="27432"/>
+                </a:tc>
+              </a:tr>
+              <a:tr h="224165">
+                <a:tc>
+                  <a:txBody>
+                    <a:bodyPr/>
+                    <a:lstStyle/>
+                    <a:p>
+                      <a:r>
+                        <a:rPr sz="900" b="0">
+                          <a:solidFill>
+                            <a:srgbClr val="1A1A1A"/>
+                          </a:solidFill>
+                        </a:rPr>
+                        <a:t>Improve the server and the processing chain</a:t>
+                      </a:r>
+                    </a:p>
+                  </a:txBody>
+                  <a:tcPr marT="27432" marB="27432"/>
+                </a:tc>
+                <a:tc>
+                  <a:txBody>
+                    <a:bodyPr/>
+                    <a:lstStyle/>
+                    <a:p>
+                      <a:r>
+                        <a:rPr sz="900" b="0">
+                          <a:solidFill>
+                            <a:srgbClr val="1A1A1A"/>
+                          </a:solidFill>
+                        </a:rPr>
+                        <a:t>R13, R14, R15, R22, R23, R24</a:t>
+                      </a:r>
+                    </a:p>
+                  </a:txBody>
+                  <a:tcPr marT="27432" marB="27432"/>
+                </a:tc>
+              </a:tr>
+              <a:tr h="224165">
+                <a:tc>
+                  <a:txBody>
+                    <a:bodyPr/>
+                    <a:lstStyle/>
+                    <a:p>
+                      <a:r>
+                        <a:rPr sz="900" b="0">
+                          <a:solidFill>
+                            <a:srgbClr val="1A1A1A"/>
+                          </a:solidFill>
+                        </a:rPr>
+                        <a:t>Choose parts for operating cost, not just purchase price</a:t>
+                      </a:r>
+                    </a:p>
+                  </a:txBody>
+                  <a:tcPr marT="27432" marB="27432"/>
+                </a:tc>
+                <a:tc>
+                  <a:txBody>
+                    <a:bodyPr/>
+                    <a:lstStyle/>
+                    <a:p>
+                      <a:r>
+                        <a:rPr sz="900" b="0">
+                          <a:solidFill>
+                            <a:srgbClr val="1A1A1A"/>
+                          </a:solidFill>
+                        </a:rPr>
+                        <a:t>R9, R25, R26</a:t>
+                      </a:r>
+                    </a:p>
+                  </a:txBody>
+                  <a:tcPr marT="27432" marB="27432"/>
+                </a:tc>
+              </a:tr>
+              <a:tr h="224165">
+                <a:tc>
+                  <a:txBody>
+                    <a:bodyPr/>
+                    <a:lstStyle/>
+                    <a:p>
+                      <a:r>
+                        <a:rPr sz="900" b="0">
+                          <a:solidFill>
+                            <a:srgbClr val="1A1A1A"/>
+                          </a:solidFill>
+                        </a:rPr>
+                        <a:t>Choose the architecture to suit the site</a:t>
+                      </a:r>
+                    </a:p>
+                  </a:txBody>
+                  <a:tcPr marT="27432" marB="27432"/>
+                </a:tc>
+                <a:tc>
+                  <a:txBody>
+                    <a:bodyPr/>
+                    <a:lstStyle/>
+                    <a:p>
+                      <a:r>
+                        <a:rPr sz="900" b="0">
+                          <a:solidFill>
+                            <a:srgbClr val="1A1A1A"/>
+                          </a:solidFill>
+                        </a:rPr>
+                        <a:t>R11, R8, R27</a:t>
+                      </a:r>
+                    </a:p>
+                  </a:txBody>
+                  <a:tcPr marT="27432" marB="27432"/>
+                </a:tc>
+              </a:tr>
+              <a:tr h="224165">
+                <a:tc>
+                  <a:txBody>
+                    <a:bodyPr/>
+                    <a:lstStyle/>
+                    <a:p>
+                      <a:r>
+                        <a:rPr sz="900" b="0">
+                          <a:solidFill>
+                            <a:srgbClr val="1A1A1A"/>
+                          </a:solidFill>
+                        </a:rPr>
+                        <a:t>Support local construction and maintenance</a:t>
+                      </a:r>
+                    </a:p>
+                  </a:txBody>
+                  <a:tcPr marT="27432" marB="27432"/>
+                </a:tc>
+                <a:tc>
+                  <a:txBody>
+                    <a:bodyPr/>
+                    <a:lstStyle/>
+                    <a:p>
+                      <a:r>
+                        <a:rPr sz="900" b="0">
+                          <a:solidFill>
+                            <a:srgbClr val="1A1A1A"/>
+                          </a:solidFill>
+                        </a:rPr>
+                        <a:t>R3, R28</a:t>
+                      </a:r>
+                    </a:p>
+                  </a:txBody>
+                  <a:tcPr marT="27432" marB="27432"/>
+                </a:tc>
+              </a:tr>
+              <a:tr h="224165">
+                <a:tc>
+                  <a:txBody>
+                    <a:bodyPr/>
+                    <a:lstStyle/>
+                    <a:p>
+                      <a:r>
+                        <a:rPr sz="900" b="0">
+                          <a:solidFill>
+                            <a:srgbClr val="1A1A1A"/>
+                          </a:solidFill>
+                        </a:rPr>
+                        <a:t>Divide responsibilities</a:t>
+                      </a:r>
+                    </a:p>
+                  </a:txBody>
+                  <a:tcPr marT="27432" marB="27432"/>
+                </a:tc>
+                <a:tc>
+                  <a:txBody>
+                    <a:bodyPr/>
+                    <a:lstStyle/>
+                    <a:p>
+                      <a:r>
+                        <a:rPr sz="900" b="0">
+                          <a:solidFill>
+                            <a:srgbClr val="1A1A1A"/>
+                          </a:solidFill>
+                        </a:rPr>
+                        <a:t>R29</a:t>
+                      </a:r>
+                    </a:p>
+                  </a:txBody>
+                  <a:tcPr marT="27432" marB="27432"/>
+                </a:tc>
+              </a:tr>
+            </a:tbl>
+          </a:graphicData>
+        </a:graphic>
+      </p:graphicFrame>
+      <p:sp>
+        <p:nvSpPr>
+          <p:cNvPr id="4" name="TextBox 3"/>
+          <p:cNvSpPr txBox="1"/>
+          <p:nvPr/>
+        </p:nvSpPr>
+        <p:spPr>
+          <a:xfrm>
+            <a:off x="457200" y="3982205"/>
+            <a:ext cx="8229600" cy="731520"/>
+          </a:xfrm>
+          <a:prstGeom prst="rect">
+            <a:avLst/>
+          </a:prstGeom>
+          <a:noFill/>
+        </p:spPr>
+        <p:txBody>
+          <a:bodyPr wrap="square">
+            <a:spAutoFit/>
+          </a:bodyPr>
           <a:lstStyle/>
           <a:p>
             <a:pPr/>
             <a:r>
-              <a:rPr sz="1400">
-                <a:solidFill>
-                  <a:srgbClr val="1A1A1A"/>
-                </a:solidFill>
-              </a:rPr>
-              <a:t>Offered as input to your design, not as corrections to ours. We would not expect them adopted as a set.</a:t>
-            </a:r>
-          </a:p>
-          <a:p>
-            <a:pPr/>
-            <a:r>
-              <a:rPr sz="1400">
-                <a:solidFill>
-                  <a:srgbClr val="1A1A1A"/>
-                </a:solidFill>
-              </a:rPr>
-              <a:t>Let the station account for itself — R4, R5, R6, R7.</a:t>
-            </a:r>
-          </a:p>
-          <a:p>
-            <a:pPr lvl="1"/>
-            <a:r>
-              <a:rPr sz="1250">
+              <a:rPr sz="1000">
                 <a:solidFill>
                   <a:srgbClr val="6B6A66"/>
                 </a:solidFill>
               </a:rPr>
-              <a:t>Nothing here is difficult or costly. The setting behind nine of the thirteen interruptions was readable remotely the whole time, and no software asked.</a:t>
-            </a:r>
-          </a:p>
-          <a:p>
-            <a:pPr/>
-            <a:r>
-              <a:rPr sz="1400">
-                <a:solidFill>
-                  <a:srgbClr val="1A1A1A"/>
-                </a:solidFill>
-              </a:rPr>
-              <a:t>Make the measurement trustworthy — R1, R2.</a:t>
-            </a:r>
-          </a:p>
-          <a:p>
-            <a:pPr lvl="1"/>
-            <a:r>
-              <a:rPr sz="1250">
-                <a:solidFill>
-                  <a:srgbClr val="6B6A66"/>
-                </a:solidFill>
-              </a:rPr>
-              <a:t>An independent water-level reference, and survey planned as professional work from the start. We learned that the hard way; IPB's total-station survey is what the station runs on today.</a:t>
-            </a:r>
-          </a:p>
-          <a:p>
-            <a:pPr/>
-            <a:r>
-              <a:rPr sz="1400">
-                <a:solidFill>
-                  <a:srgbClr val="1A1A1A"/>
-                </a:solidFill>
-              </a:rPr>
-              <a:t>Make the units buildable and maintainable in Indonesia — R3, R8, R9, R10, R11.</a:t>
-            </a:r>
-          </a:p>
-          <a:p>
-            <a:pPr lvl="1"/>
-            <a:r>
-              <a:rPr sz="1250">
-                <a:solidFill>
-                  <a:srgbClr val="6B6A66"/>
-                </a:solidFill>
-              </a:rPr>
-              <a:t>You will buy under Indonesian procurement rules, so substitution is the expected case rather than a risk to be managed.</a:t>
-            </a:r>
-          </a:p>
-        </p:txBody>
-      </p:sp>
-      <p:sp>
-        <p:nvSpPr>
-          <p:cNvPr id="4" name="Rectangle 3" descr=""/>
+              <a:t>Full text in the working list; the report carries an index of all of them. 36 recommendations in 11 groups.</a:t>
+            </a:r>
+          </a:p>
+        </p:txBody>
+      </p:sp>
+      <p:sp>
+        <p:nvSpPr>
+          <p:cNvPr id="5" name="Rectangle 4" descr=""/>
           <p:cNvSpPr/>
           <p:nvPr/>
         </p:nvSpPr>
@@ -5784,7 +6182,7 @@
       </p:sp>
       <p:pic>
         <p:nvPicPr>
-          <p:cNvPr id="5" name="Picture 4" descr="Palang Merah Indonesia logo"/>
+          <p:cNvPr id="6" name="Picture 5" descr="Palang Merah Indonesia logo"/>
           <p:cNvPicPr>
             <a:picLocks noChangeAspect="1"/>
           </p:cNvPicPr>
@@ -5808,7 +6206,7 @@
       </p:pic>
       <p:pic>
         <p:nvPicPr>
-          <p:cNvPr id="6" name="Picture 5" descr="Institut Pertanian Bogor logo"/>
+          <p:cNvPr id="7" name="Picture 6" descr="Institut Pertanian Bogor logo"/>
           <p:cNvPicPr>
             <a:picLocks noChangeAspect="1"/>
           </p:cNvPicPr>
@@ -5832,7 +6230,7 @@
       </p:pic>
       <p:pic>
         <p:nvPicPr>
-          <p:cNvPr id="7" name="Picture 6" descr="Balai Hidrologi dan Lingkungan Keairan logo"/>
+          <p:cNvPr id="8" name="Picture 7" descr="Balai Hidrologi dan Lingkungan Keairan logo"/>
           <p:cNvPicPr>
             <a:picLocks noChangeAspect="1"/>
           </p:cNvPicPr>
@@ -5856,7 +6254,7 @@
       </p:pic>
       <p:pic>
         <p:nvPicPr>
-          <p:cNvPr id="8" name="Picture 7" descr="American Red Cross logo"/>
+          <p:cNvPr id="9" name="Picture 8" descr="American Red Cross logo"/>
           <p:cNvPicPr>
             <a:picLocks noChangeAspect="1"/>
           </p:cNvPicPr>
@@ -5880,7 +6278,7 @@
       </p:pic>
       <p:sp>
         <p:nvSpPr>
-          <p:cNvPr id="9" name="TextBox 8"/>
+          <p:cNvPr id="10" name="TextBox 9"/>
           <p:cNvSpPr txBox="1"/>
           <p:nvPr/>
         </p:nvSpPr>
@@ -5907,7 +6305,7 @@
                   <a:srgbClr val="6B6A66"/>
                 </a:solidFill>
               </a:rPr>
-              <a:t>13 / 25</a:t>
+              <a:t>13 / 24</a:t>
             </a:r>
           </a:p>
         </p:txBody>
@@ -5952,529 +6350,93 @@
                   <a:srgbClr val="1A1A1A"/>
                 </a:solidFill>
               </a:rPr>
-              <a:t>R1–R6</a:t>
-            </a:r>
-          </a:p>
-        </p:txBody>
-      </p:sp>
-      <p:graphicFrame>
-        <p:nvGraphicFramePr>
-          <p:cNvPr id="3" name="Table 2"/>
-          <p:cNvGraphicFramePr>
-            <a:graphicFrameLocks noGrp="1"/>
-          </p:cNvGraphicFramePr>
-          <p:nvPr/>
-        </p:nvGraphicFramePr>
-        <p:xfrm>
-          <a:off x="457200" y="1155065"/>
-          <a:ext cx="8229600" cy="2176272"/>
-        </p:xfrm>
-        <a:graphic>
-          <a:graphicData uri="http://schemas.openxmlformats.org/drawingml/2006/table">
-            <a:tbl>
-              <a:tblPr firstRow="1" bandRow="1">
-                <a:tableStyleId>{5C22544A-7EE6-4342-B048-85BDC9FD1C3A}</a:tableStyleId>
-              </a:tblPr>
-              <a:tblGrid>
-                <a:gridCol w="457200"/>
-                <a:gridCol w="2590800"/>
-                <a:gridCol w="2590800"/>
-                <a:gridCol w="2590800"/>
-              </a:tblGrid>
-              <a:tr h="310896">
-                <a:tc>
-                  <a:txBody>
-                    <a:bodyPr/>
-                    <a:lstStyle/>
-                    <a:p>
-                      <a:r>
-                        <a:rPr sz="1000" b="1">
-                          <a:solidFill>
-                            <a:srgbClr val="1A1A1A"/>
-                          </a:solidFill>
-                        </a:rPr>
-                        <a:t>#</a:t>
-                      </a:r>
-                    </a:p>
-                  </a:txBody>
-                  <a:tcPr marT="27432" marB="27432"/>
-                </a:tc>
-                <a:tc>
-                  <a:txBody>
-                    <a:bodyPr/>
-                    <a:lstStyle/>
-                    <a:p>
-                      <a:r>
-                        <a:rPr sz="1000" b="1">
-                          <a:solidFill>
-                            <a:srgbClr val="1A1A1A"/>
-                          </a:solidFill>
-                        </a:rPr>
-                        <a:t>Change</a:t>
-                      </a:r>
-                    </a:p>
-                  </a:txBody>
-                  <a:tcPr marT="27432" marB="27432"/>
-                </a:tc>
-                <a:tc>
-                  <a:txBody>
-                    <a:bodyPr/>
-                    <a:lstStyle/>
-                    <a:p>
-                      <a:r>
-                        <a:rPr sz="1000" b="1">
-                          <a:solidFill>
-                            <a:srgbClr val="1A1A1A"/>
-                          </a:solidFill>
-                        </a:rPr>
-                        <a:t>What it buys</a:t>
-                      </a:r>
-                    </a:p>
-                  </a:txBody>
-                  <a:tcPr marT="27432" marB="27432"/>
-                </a:tc>
-                <a:tc>
-                  <a:txBody>
-                    <a:bodyPr/>
-                    <a:lstStyle/>
-                    <a:p>
-                      <a:r>
-                        <a:rPr sz="1000" b="1">
-                          <a:solidFill>
-                            <a:srgbClr val="1A1A1A"/>
-                          </a:solidFill>
-                        </a:rPr>
-                        <a:t>Cost</a:t>
-                      </a:r>
-                    </a:p>
-                  </a:txBody>
-                  <a:tcPr marT="27432" marB="27432"/>
-                </a:tc>
-              </a:tr>
-              <a:tr h="310896">
-                <a:tc>
-                  <a:txBody>
-                    <a:bodyPr/>
-                    <a:lstStyle/>
-                    <a:p>
-                      <a:r>
-                        <a:rPr sz="900" b="0">
-                          <a:solidFill>
-                            <a:srgbClr val="1A1A1A"/>
-                          </a:solidFill>
-                        </a:rPr>
-                        <a:t>R1</a:t>
-                      </a:r>
-                    </a:p>
-                  </a:txBody>
-                  <a:tcPr marT="27432" marB="27432"/>
-                </a:tc>
-                <a:tc>
-                  <a:txBody>
-                    <a:bodyPr/>
-                    <a:lstStyle/>
-                    <a:p>
-                      <a:r>
-                        <a:rPr sz="900" b="0">
-                          <a:solidFill>
-                            <a:srgbClr val="1A1A1A"/>
-                          </a:solidFill>
-                        </a:rPr>
-                        <a:t>Fit an independent water-level reference</a:t>
-                      </a:r>
-                    </a:p>
-                  </a:txBody>
-                  <a:tcPr marT="27432" marB="27432"/>
-                </a:tc>
-                <a:tc>
-                  <a:txBody>
-                    <a:bodyPr/>
-                    <a:lstStyle/>
-                    <a:p>
-                      <a:r>
-                        <a:rPr sz="900" b="0">
-                          <a:solidFill>
-                            <a:srgbClr val="1A1A1A"/>
-                          </a:solidFill>
-                        </a:rPr>
-                        <a:t>Measurement through the day</a:t>
-                      </a:r>
-                    </a:p>
-                  </a:txBody>
-                  <a:tcPr marT="27432" marB="27432"/>
-                </a:tc>
-                <a:tc>
-                  <a:txBody>
-                    <a:bodyPr/>
-                    <a:lstStyle/>
-                    <a:p>
-                      <a:r>
-                        <a:rPr sz="900" b="0">
-                          <a:solidFill>
-                            <a:srgbClr val="1A1A1A"/>
-                          </a:solidFill>
-                        </a:rPr>
-                        <a:t>A sensor, or a staff gauge in view</a:t>
-                      </a:r>
-                    </a:p>
-                  </a:txBody>
-                  <a:tcPr marT="27432" marB="27432"/>
-                </a:tc>
-              </a:tr>
-              <a:tr h="310896">
-                <a:tc>
-                  <a:txBody>
-                    <a:bodyPr/>
-                    <a:lstStyle/>
-                    <a:p>
-                      <a:r>
-                        <a:rPr sz="900" b="0">
-                          <a:solidFill>
-                            <a:srgbClr val="1A1A1A"/>
-                          </a:solidFill>
-                        </a:rPr>
-                        <a:t>R2</a:t>
-                      </a:r>
-                    </a:p>
-                  </a:txBody>
-                  <a:tcPr marT="27432" marB="27432"/>
-                </a:tc>
-                <a:tc>
-                  <a:txBody>
-                    <a:bodyPr/>
-                    <a:lstStyle/>
-                    <a:p>
-                      <a:r>
-                        <a:rPr sz="900" b="0">
-                          <a:solidFill>
-                            <a:srgbClr val="1A1A1A"/>
-                          </a:solidFill>
-                        </a:rPr>
-                        <a:t>Commission a professional survey first</a:t>
-                      </a:r>
-                    </a:p>
-                  </a:txBody>
-                  <a:tcPr marT="27432" marB="27432"/>
-                </a:tc>
-                <a:tc>
-                  <a:txBody>
-                    <a:bodyPr/>
-                    <a:lstStyle/>
-                    <a:p>
-                      <a:r>
-                        <a:rPr sz="900" b="0">
-                          <a:solidFill>
-                            <a:srgbClr val="1A1A1A"/>
-                          </a:solidFill>
-                        </a:rPr>
-                        <a:t>The one input processing cannot recover</a:t>
-                      </a:r>
-                    </a:p>
-                  </a:txBody>
-                  <a:tcPr marT="27432" marB="27432"/>
-                </a:tc>
-                <a:tc>
-                  <a:txBody>
-                    <a:bodyPr/>
-                    <a:lstStyle/>
-                    <a:p>
-                      <a:r>
-                        <a:rPr sz="900" b="0">
-                          <a:solidFill>
-                            <a:srgbClr val="1A1A1A"/>
-                          </a:solidFill>
-                        </a:rPr>
-                        <a:t>Rp 5–15 million per site</a:t>
-                      </a:r>
-                    </a:p>
-                  </a:txBody>
-                  <a:tcPr marT="27432" marB="27432"/>
-                </a:tc>
-              </a:tr>
-              <a:tr h="310896">
-                <a:tc>
-                  <a:txBody>
-                    <a:bodyPr/>
-                    <a:lstStyle/>
-                    <a:p>
-                      <a:r>
-                        <a:rPr sz="900" b="0">
-                          <a:solidFill>
-                            <a:srgbClr val="1A1A1A"/>
-                          </a:solidFill>
-                        </a:rPr>
-                        <a:t>R3</a:t>
-                      </a:r>
-                    </a:p>
-                  </a:txBody>
-                  <a:tcPr marT="27432" marB="27432"/>
-                </a:tc>
-                <a:tc>
-                  <a:txBody>
-                    <a:bodyPr/>
-                    <a:lstStyle/>
-                    <a:p>
-                      <a:r>
-                        <a:rPr sz="900" b="0">
-                          <a:solidFill>
-                            <a:srgbClr val="1A1A1A"/>
-                          </a:solidFill>
-                        </a:rPr>
-                        <a:t>Specify interfaces, not part numbers</a:t>
-                      </a:r>
-                    </a:p>
-                  </a:txBody>
-                  <a:tcPr marT="27432" marB="27432"/>
-                </a:tc>
-                <a:tc>
-                  <a:txBody>
-                    <a:bodyPr/>
-                    <a:lstStyle/>
-                    <a:p>
-                      <a:r>
-                        <a:rPr sz="900" b="0">
-                          <a:solidFill>
-                            <a:srgbClr val="1A1A1A"/>
-                          </a:solidFill>
-                        </a:rPr>
-                        <a:t>Local procurement without referring back to us</a:t>
-                      </a:r>
-                    </a:p>
-                  </a:txBody>
-                  <a:tcPr marT="27432" marB="27432"/>
-                </a:tc>
-                <a:tc>
-                  <a:txBody>
-                    <a:bodyPr/>
-                    <a:lstStyle/>
-                    <a:p>
-                      <a:r>
-                        <a:rPr sz="900" b="0">
-                          <a:solidFill>
-                            <a:srgbClr val="1A1A1A"/>
-                          </a:solidFill>
-                        </a:rPr>
-                        <a:t>Documentation only</a:t>
-                      </a:r>
-                    </a:p>
-                  </a:txBody>
-                  <a:tcPr marT="27432" marB="27432"/>
-                </a:tc>
-              </a:tr>
-              <a:tr h="310896">
-                <a:tc>
-                  <a:txBody>
-                    <a:bodyPr/>
-                    <a:lstStyle/>
-                    <a:p>
-                      <a:r>
-                        <a:rPr sz="900" b="0">
-                          <a:solidFill>
-                            <a:srgbClr val="1A1A1A"/>
-                          </a:solidFill>
-                        </a:rPr>
-                        <a:t>R4</a:t>
-                      </a:r>
-                    </a:p>
-                  </a:txBody>
-                  <a:tcPr marT="27432" marB="27432"/>
-                </a:tc>
-                <a:tc>
-                  <a:txBody>
-                    <a:bodyPr/>
-                    <a:lstStyle/>
-                    <a:p>
-                      <a:r>
-                        <a:rPr sz="900" b="0">
-                          <a:solidFill>
-                            <a:srgbClr val="1A1A1A"/>
-                          </a:solidFill>
-                        </a:rPr>
-                        <a:t>Health reporting and mode alarms as requirements</a:t>
-                      </a:r>
-                    </a:p>
-                  </a:txBody>
-                  <a:tcPr marT="27432" marB="27432"/>
-                </a:tc>
-                <a:tc>
-                  <a:txBody>
-                    <a:bodyPr/>
-                    <a:lstStyle/>
-                    <a:p>
-                      <a:r>
-                        <a:rPr sz="900" b="0">
-                          <a:solidFill>
-                            <a:srgbClr val="1A1A1A"/>
-                          </a:solidFill>
-                        </a:rPr>
-                        <a:t>The station reports its own condition</a:t>
-                      </a:r>
-                    </a:p>
-                  </a:txBody>
-                  <a:tcPr marT="27432" marB="27432"/>
-                </a:tc>
-                <a:tc>
-                  <a:txBody>
-                    <a:bodyPr/>
-                    <a:lstStyle/>
-                    <a:p>
-                      <a:r>
-                        <a:rPr sz="900" b="0">
-                          <a:solidFill>
-                            <a:srgbClr val="1A1A1A"/>
-                          </a:solidFill>
-                        </a:rPr>
-                        <a:t>Negligible</a:t>
-                      </a:r>
-                    </a:p>
-                  </a:txBody>
-                  <a:tcPr marT="27432" marB="27432"/>
-                </a:tc>
-              </a:tr>
-              <a:tr h="310896">
-                <a:tc>
-                  <a:txBody>
-                    <a:bodyPr/>
-                    <a:lstStyle/>
-                    <a:p>
-                      <a:r>
-                        <a:rPr sz="900" b="0">
-                          <a:solidFill>
-                            <a:srgbClr val="1A1A1A"/>
-                          </a:solidFill>
-                        </a:rPr>
-                        <a:t>R5</a:t>
-                      </a:r>
-                    </a:p>
-                  </a:txBody>
-                  <a:tcPr marT="27432" marB="27432"/>
-                </a:tc>
-                <a:tc>
-                  <a:txBody>
-                    <a:bodyPr/>
-                    <a:lstStyle/>
-                    <a:p>
-                      <a:r>
-                        <a:rPr sz="900" b="0">
-                          <a:solidFill>
-                            <a:srgbClr val="1A1A1A"/>
-                          </a:solidFill>
-                        </a:rPr>
-                        <a:t>Station sends diagnostics; no login required</a:t>
-                      </a:r>
-                    </a:p>
-                  </a:txBody>
-                  <a:tcPr marT="27432" marB="27432"/>
-                </a:tc>
-                <a:tc>
-                  <a:txBody>
-                    <a:bodyPr/>
-                    <a:lstStyle/>
-                    <a:p>
-                      <a:r>
-                        <a:rPr sz="900" b="0">
-                          <a:solidFill>
-                            <a:srgbClr val="1A1A1A"/>
-                          </a:solidFill>
-                        </a:rPr>
-                        <a:t>Support inside a short waking period</a:t>
-                      </a:r>
-                    </a:p>
-                  </a:txBody>
-                  <a:tcPr marT="27432" marB="27432"/>
-                </a:tc>
-                <a:tc>
-                  <a:txBody>
-                    <a:bodyPr/>
-                    <a:lstStyle/>
-                    <a:p>
-                      <a:r>
-                        <a:rPr sz="900" b="0">
-                          <a:solidFill>
-                            <a:srgbClr val="1A1A1A"/>
-                          </a:solidFill>
-                        </a:rPr>
-                        <a:t>Small</a:t>
-                      </a:r>
-                    </a:p>
-                  </a:txBody>
-                  <a:tcPr marT="27432" marB="27432"/>
-                </a:tc>
-              </a:tr>
-              <a:tr h="310896">
-                <a:tc>
-                  <a:txBody>
-                    <a:bodyPr/>
-                    <a:lstStyle/>
-                    <a:p>
-                      <a:r>
-                        <a:rPr sz="900" b="0">
-                          <a:solidFill>
-                            <a:srgbClr val="1A1A1A"/>
-                          </a:solidFill>
-                        </a:rPr>
-                        <a:t>R6</a:t>
-                      </a:r>
-                    </a:p>
-                  </a:txBody>
-                  <a:tcPr marT="27432" marB="27432"/>
-                </a:tc>
-                <a:tc>
-                  <a:txBody>
-                    <a:bodyPr/>
-                    <a:lstStyle/>
-                    <a:p>
-                      <a:r>
-                        <a:rPr sz="900" b="0">
-                          <a:solidFill>
-                            <a:srgbClr val="1A1A1A"/>
-                          </a:solidFill>
-                        </a:rPr>
-                        <a:t>Record voltage and current together</a:t>
-                      </a:r>
-                    </a:p>
-                  </a:txBody>
-                  <a:tcPr marT="27432" marB="27432"/>
-                </a:tc>
-                <a:tc>
-                  <a:txBody>
-                    <a:bodyPr/>
-                    <a:lstStyle/>
-                    <a:p>
-                      <a:r>
-                        <a:rPr sz="900" b="0">
-                          <a:solidFill>
-                            <a:srgbClr val="1A1A1A"/>
-                          </a:solidFill>
-                        </a:rPr>
-                        <a:t>Separates a failing battery from a heavy load</a:t>
-                      </a:r>
-                    </a:p>
-                  </a:txBody>
-                  <a:tcPr marT="27432" marB="27432"/>
-                </a:tc>
-                <a:tc>
-                  <a:txBody>
-                    <a:bodyPr/>
-                    <a:lstStyle/>
-                    <a:p>
-                      <a:r>
-                        <a:rPr sz="900" b="0">
-                          <a:solidFill>
-                            <a:srgbClr val="1A1A1A"/>
-                          </a:solidFill>
-                        </a:rPr>
-                        <a:t>A sensing module</a:t>
-                      </a:r>
-                    </a:p>
-                  </a:txBody>
-                  <a:tcPr marT="27432" marB="27432"/>
-                </a:tc>
-              </a:tr>
-            </a:tbl>
-          </a:graphicData>
-        </a:graphic>
-      </p:graphicFrame>
+              <a:t>The changes with the greatest effect</a:t>
+            </a:r>
+          </a:p>
+        </p:txBody>
+      </p:sp>
+      <p:sp>
+        <p:nvSpPr>
+          <p:cNvPr id="3" name="Text Placeholder 2"/>
+          <p:cNvSpPr>
+            <a:spLocks noGrp="1"/>
+          </p:cNvSpPr>
+          <p:nvPr>
+            <p:ph type="body" idx="12" sz="quarter"/>
+          </p:nvPr>
+        </p:nvSpPr>
+        <p:spPr/>
+        <p:txBody>
+          <a:bodyPr wrap="square"/>
+          <a:lstStyle/>
+          <a:p>
+            <a:pPr/>
+            <a:r>
+              <a:rPr sz="1400">
+                <a:solidFill>
+                  <a:srgbClr val="1A1A1A"/>
+                </a:solidFill>
+              </a:rPr>
+              <a:t>Build the test station first, so a fault can be reproduced and a fix tried before it goes to a river. R36</a:t>
+            </a:r>
+          </a:p>
+          <a:p>
+            <a:pPr/>
+            <a:r>
+              <a:rPr sz="1400">
+                <a:solidFill>
+                  <a:srgbClr val="1A1A1A"/>
+                </a:solidFill>
+              </a:rPr>
+              <a:t>Build monitoring for a fleet, not for one station. This is the highest-value work on the list. R4–R7</a:t>
+            </a:r>
+          </a:p>
+          <a:p>
+            <a:pPr/>
+            <a:r>
+              <a:rPr sz="1400">
+                <a:solidFill>
+                  <a:srgbClr val="1A1A1A"/>
+                </a:solidFill>
+              </a:rPr>
+              <a:t>Fit an independent water-level reference, and plan the survey as skilled work from the start. R1, R2, R19, R20</a:t>
+            </a:r>
+          </a:p>
+          <a:p>
+            <a:pPr/>
+            <a:r>
+              <a:rPr sz="1400">
+                <a:solidFill>
+                  <a:srgbClr val="1A1A1A"/>
+                </a:solidFill>
+              </a:rPr>
+              <a:t>Give one process control of the whole sleep and wake cycle, and make shutdown happen on a timer. R10, R12</a:t>
+            </a:r>
+          </a:p>
+          <a:p>
+            <a:pPr/>
+            <a:r>
+              <a:rPr sz="1400">
+                <a:solidFill>
+                  <a:srgbClr val="1A1A1A"/>
+                </a:solidFill>
+              </a:rPr>
+              <a:t>Make mains power the default; use solar only where mains is not available. R11</a:t>
+            </a:r>
+          </a:p>
+          <a:p>
+            <a:pPr/>
+            <a:r>
+              <a:rPr sz="1400">
+                <a:solidFill>
+                  <a:srgbClr val="1A1A1A"/>
+                </a:solidFill>
+              </a:rPr>
+              <a:t>Choose the site before anything else, and confirm permission in writing before building for it. R16–R18</a:t>
+            </a:r>
+          </a:p>
+        </p:txBody>
+      </p:sp>
       <p:sp>
         <p:nvSpPr>
           <p:cNvPr id="4" name="Rectangle 3" descr=""/>
@@ -6630,7 +6592,7 @@
                   <a:srgbClr val="6B6A66"/>
                 </a:solidFill>
               </a:rPr>
-              <a:t>14 / 25</a:t>
+              <a:t>14 / 24</a:t>
             </a:r>
           </a:p>
         </p:txBody>
@@ -6675,462 +6637,72 @@
                   <a:srgbClr val="1A1A1A"/>
                 </a:solidFill>
               </a:rPr>
-              <a:t>R7–R11</a:t>
-            </a:r>
-          </a:p>
-        </p:txBody>
-      </p:sp>
-      <p:graphicFrame>
-        <p:nvGraphicFramePr>
-          <p:cNvPr id="3" name="Table 2"/>
-          <p:cNvGraphicFramePr>
-            <a:graphicFrameLocks noGrp="1"/>
-          </p:cNvGraphicFramePr>
-          <p:nvPr/>
-        </p:nvGraphicFramePr>
-        <p:xfrm>
-          <a:off x="457200" y="1155065"/>
-          <a:ext cx="8229600" cy="1865376"/>
-        </p:xfrm>
-        <a:graphic>
-          <a:graphicData uri="http://schemas.openxmlformats.org/drawingml/2006/table">
-            <a:tbl>
-              <a:tblPr firstRow="1" bandRow="1">
-                <a:tableStyleId>{5C22544A-7EE6-4342-B048-85BDC9FD1C3A}</a:tableStyleId>
-              </a:tblPr>
-              <a:tblGrid>
-                <a:gridCol w="457200"/>
-                <a:gridCol w="2590800"/>
-                <a:gridCol w="2590800"/>
-                <a:gridCol w="2590800"/>
-              </a:tblGrid>
-              <a:tr h="310896">
-                <a:tc>
-                  <a:txBody>
-                    <a:bodyPr/>
-                    <a:lstStyle/>
-                    <a:p>
-                      <a:r>
-                        <a:rPr sz="1000" b="1">
-                          <a:solidFill>
-                            <a:srgbClr val="1A1A1A"/>
-                          </a:solidFill>
-                        </a:rPr>
-                        <a:t>#</a:t>
-                      </a:r>
-                    </a:p>
-                  </a:txBody>
-                  <a:tcPr marT="27432" marB="27432"/>
-                </a:tc>
-                <a:tc>
-                  <a:txBody>
-                    <a:bodyPr/>
-                    <a:lstStyle/>
-                    <a:p>
-                      <a:r>
-                        <a:rPr sz="1000" b="1">
-                          <a:solidFill>
-                            <a:srgbClr val="1A1A1A"/>
-                          </a:solidFill>
-                        </a:rPr>
-                        <a:t>Change</a:t>
-                      </a:r>
-                    </a:p>
-                  </a:txBody>
-                  <a:tcPr marT="27432" marB="27432"/>
-                </a:tc>
-                <a:tc>
-                  <a:txBody>
-                    <a:bodyPr/>
-                    <a:lstStyle/>
-                    <a:p>
-                      <a:r>
-                        <a:rPr sz="1000" b="1">
-                          <a:solidFill>
-                            <a:srgbClr val="1A1A1A"/>
-                          </a:solidFill>
-                        </a:rPr>
-                        <a:t>What it buys</a:t>
-                      </a:r>
-                    </a:p>
-                  </a:txBody>
-                  <a:tcPr marT="27432" marB="27432"/>
-                </a:tc>
-                <a:tc>
-                  <a:txBody>
-                    <a:bodyPr/>
-                    <a:lstStyle/>
-                    <a:p>
-                      <a:r>
-                        <a:rPr sz="1000" b="1">
-                          <a:solidFill>
-                            <a:srgbClr val="1A1A1A"/>
-                          </a:solidFill>
-                        </a:rPr>
-                        <a:t>Cost</a:t>
-                      </a:r>
-                    </a:p>
-                  </a:txBody>
-                  <a:tcPr marT="27432" marB="27432"/>
-                </a:tc>
-              </a:tr>
-              <a:tr h="310896">
-                <a:tc>
-                  <a:txBody>
-                    <a:bodyPr/>
-                    <a:lstStyle/>
-                    <a:p>
-                      <a:r>
-                        <a:rPr sz="900" b="0">
-                          <a:solidFill>
-                            <a:srgbClr val="1A1A1A"/>
-                          </a:solidFill>
-                        </a:rPr>
-                        <a:t>R7</a:t>
-                      </a:r>
-                    </a:p>
-                  </a:txBody>
-                  <a:tcPr marT="27432" marB="27432"/>
-                </a:tc>
-                <a:tc>
-                  <a:txBody>
-                    <a:bodyPr/>
-                    <a:lstStyle/>
-                    <a:p>
-                      <a:r>
-                        <a:rPr sz="900" b="0">
-                          <a:solidFill>
-                            <a:srgbClr val="1A1A1A"/>
-                          </a:solidFill>
-                        </a:rPr>
-                        <a:t>Compare recorded against received, automatically</a:t>
-                      </a:r>
-                    </a:p>
-                  </a:txBody>
-                  <a:tcPr marT="27432" marB="27432"/>
-                </a:tc>
-                <a:tc>
-                  <a:txBody>
-                    <a:bodyPr/>
-                    <a:lstStyle/>
-                    <a:p>
-                      <a:r>
-                        <a:rPr sz="900" b="0">
-                          <a:solidFill>
-                            <a:srgbClr val="1A1A1A"/>
-                          </a:solidFill>
-                        </a:rPr>
-                        <a:t>Loss is noticed, not discovered later</a:t>
-                      </a:r>
-                    </a:p>
-                  </a:txBody>
-                  <a:tcPr marT="27432" marB="27432"/>
-                </a:tc>
-                <a:tc>
-                  <a:txBody>
-                    <a:bodyPr/>
-                    <a:lstStyle/>
-                    <a:p>
-                      <a:r>
-                        <a:rPr sz="900" b="0">
-                          <a:solidFill>
-                            <a:srgbClr val="1A1A1A"/>
-                          </a:solidFill>
-                        </a:rPr>
-                        <a:t>Negligible</a:t>
-                      </a:r>
-                    </a:p>
-                  </a:txBody>
-                  <a:tcPr marT="27432" marB="27432"/>
-                </a:tc>
-              </a:tr>
-              <a:tr h="310896">
-                <a:tc>
-                  <a:txBody>
-                    <a:bodyPr/>
-                    <a:lstStyle/>
-                    <a:p>
-                      <a:r>
-                        <a:rPr sz="900" b="0">
-                          <a:solidFill>
-                            <a:srgbClr val="1A1A1A"/>
-                          </a:solidFill>
-                        </a:rPr>
-                        <a:t>R8</a:t>
-                      </a:r>
-                    </a:p>
-                  </a:txBody>
-                  <a:tcPr marT="27432" marB="27432"/>
-                </a:tc>
-                <a:tc>
-                  <a:txBody>
-                    <a:bodyPr/>
-                    <a:lstStyle/>
-                    <a:p>
-                      <a:r>
-                        <a:rPr sz="900" b="0">
-                          <a:solidFill>
-                            <a:srgbClr val="1A1A1A"/>
-                          </a:solidFill>
-                        </a:rPr>
-                        <a:t>Put the computer indoors</a:t>
-                      </a:r>
-                    </a:p>
-                  </a:txBody>
-                  <a:tcPr marT="27432" marB="27432"/>
-                </a:tc>
-                <a:tc>
-                  <a:txBody>
-                    <a:bodyPr/>
-                    <a:lstStyle/>
-                    <a:p>
-                      <a:r>
-                        <a:rPr sz="900" b="0">
-                          <a:solidFill>
-                            <a:srgbClr val="1A1A1A"/>
-                          </a:solidFill>
-                        </a:rPr>
-                        <a:t>Removes it from heat, humidity, dust and travel</a:t>
-                      </a:r>
-                    </a:p>
-                  </a:txBody>
-                  <a:tcPr marT="27432" marB="27432"/>
-                </a:tc>
-                <a:tc>
-                  <a:txBody>
-                    <a:bodyPr/>
-                    <a:lstStyle/>
-                    <a:p>
-                      <a:r>
-                        <a:rPr sz="900" b="0">
-                          <a:solidFill>
-                            <a:srgbClr val="1A1A1A"/>
-                          </a:solidFill>
-                        </a:rPr>
-                        <a:t>Designed, not yet field tested</a:t>
-                      </a:r>
-                    </a:p>
-                  </a:txBody>
-                  <a:tcPr marT="27432" marB="27432"/>
-                </a:tc>
-              </a:tr>
-              <a:tr h="310896">
-                <a:tc>
-                  <a:txBody>
-                    <a:bodyPr/>
-                    <a:lstStyle/>
-                    <a:p>
-                      <a:r>
-                        <a:rPr sz="900" b="0">
-                          <a:solidFill>
-                            <a:srgbClr val="1A1A1A"/>
-                          </a:solidFill>
-                        </a:rPr>
-                        <a:t>R9</a:t>
-                      </a:r>
-                    </a:p>
-                  </a:txBody>
-                  <a:tcPr marT="27432" marB="27432"/>
-                </a:tc>
-                <a:tc>
-                  <a:txBody>
-                    <a:bodyPr/>
-                    <a:lstStyle/>
-                    <a:p>
-                      <a:r>
-                        <a:rPr sz="900" b="0">
-                          <a:solidFill>
-                            <a:srgbClr val="1A1A1A"/>
-                          </a:solidFill>
-                        </a:rPr>
-                        <a:t>Budget per station; check the interface before buying</a:t>
-                      </a:r>
-                    </a:p>
-                  </a:txBody>
-                  <a:tcPr marT="27432" marB="27432"/>
-                </a:tc>
-                <a:tc>
-                  <a:txBody>
-                    <a:bodyPr/>
-                    <a:lstStyle/>
-                    <a:p>
-                      <a:r>
-                        <a:rPr sz="900" b="0">
-                          <a:solidFill>
-                            <a:srgbClr val="1A1A1A"/>
-                          </a:solidFill>
-                        </a:rPr>
-                        <a:t>A network that stays affordable</a:t>
-                      </a:r>
-                    </a:p>
-                  </a:txBody>
-                  <a:tcPr marT="27432" marB="27432"/>
-                </a:tc>
-                <a:tc>
-                  <a:txBody>
-                    <a:bodyPr/>
-                    <a:lstStyle/>
-                    <a:p>
-                      <a:r>
-                        <a:rPr sz="900" b="0">
-                          <a:solidFill>
-                            <a:srgbClr val="1A1A1A"/>
-                          </a:solidFill>
-                        </a:rPr>
-                        <a:t>Screening effort</a:t>
-                      </a:r>
-                    </a:p>
-                  </a:txBody>
-                  <a:tcPr marT="27432" marB="27432"/>
-                </a:tc>
-              </a:tr>
-              <a:tr h="310896">
-                <a:tc>
-                  <a:txBody>
-                    <a:bodyPr/>
-                    <a:lstStyle/>
-                    <a:p>
-                      <a:r>
-                        <a:rPr sz="900" b="0">
-                          <a:solidFill>
-                            <a:srgbClr val="1A1A1A"/>
-                          </a:solidFill>
-                        </a:rPr>
-                        <a:t>R10</a:t>
-                      </a:r>
-                    </a:p>
-                  </a:txBody>
-                  <a:tcPr marT="27432" marB="27432"/>
-                </a:tc>
-                <a:tc>
-                  <a:txBody>
-                    <a:bodyPr/>
-                    <a:lstStyle/>
-                    <a:p>
-                      <a:r>
-                        <a:rPr sz="900" b="0">
-                          <a:solidFill>
-                            <a:srgbClr val="1A1A1A"/>
-                          </a:solidFill>
-                        </a:rPr>
-                        <a:t>Use the computer's own clock where the site allows</a:t>
-                      </a:r>
-                    </a:p>
-                  </a:txBody>
-                  <a:tcPr marT="27432" marB="27432"/>
-                </a:tc>
-                <a:tc>
-                  <a:txBody>
-                    <a:bodyPr/>
-                    <a:lstStyle/>
-                    <a:p>
-                      <a:r>
-                        <a:rPr sz="900" b="0">
-                          <a:solidFill>
-                            <a:srgbClr val="1A1A1A"/>
-                          </a:solidFill>
-                        </a:rPr>
-                        <a:t>One less board to fail</a:t>
-                      </a:r>
-                    </a:p>
-                  </a:txBody>
-                  <a:tcPr marT="27432" marB="27432"/>
-                </a:tc>
-                <a:tc>
-                  <a:txBody>
-                    <a:bodyPr/>
-                    <a:lstStyle/>
-                    <a:p>
-                      <a:r>
-                        <a:rPr sz="900" b="0">
-                          <a:solidFill>
-                            <a:srgbClr val="1A1A1A"/>
-                          </a:solidFill>
-                        </a:rPr>
-                        <a:t>Saves about USD 50 per station</a:t>
-                      </a:r>
-                    </a:p>
-                  </a:txBody>
-                  <a:tcPr marT="27432" marB="27432"/>
-                </a:tc>
-              </a:tr>
-              <a:tr h="310896">
-                <a:tc>
-                  <a:txBody>
-                    <a:bodyPr/>
-                    <a:lstStyle/>
-                    <a:p>
-                      <a:r>
-                        <a:rPr sz="900" b="0">
-                          <a:solidFill>
-                            <a:srgbClr val="1A1A1A"/>
-                          </a:solidFill>
-                        </a:rPr>
-                        <a:t>R11</a:t>
-                      </a:r>
-                    </a:p>
-                  </a:txBody>
-                  <a:tcPr marT="27432" marB="27432"/>
-                </a:tc>
-                <a:tc>
-                  <a:txBody>
-                    <a:bodyPr/>
-                    <a:lstStyle/>
-                    <a:p>
-                      <a:r>
-                        <a:rPr sz="900" b="0">
-                          <a:solidFill>
-                            <a:srgbClr val="1A1A1A"/>
-                          </a:solidFill>
-                        </a:rPr>
-                        <a:t>Build on mains and leave it running, where continuous reporting is wanted</a:t>
-                      </a:r>
-                    </a:p>
-                  </a:txBody>
-                  <a:tcPr marT="27432" marB="27432"/>
-                </a:tc>
-                <a:tc>
-                  <a:txBody>
-                    <a:bodyPr/>
-                    <a:lstStyle/>
-                    <a:p>
-                      <a:r>
-                        <a:rPr sz="900" b="0">
-                          <a:solidFill>
-                            <a:srgbClr val="1A1A1A"/>
-                          </a:solidFill>
-                        </a:rPr>
-                        <a:t>Removes most of the gaps above</a:t>
-                      </a:r>
-                    </a:p>
-                  </a:txBody>
-                  <a:tcPr marT="27432" marB="27432"/>
-                </a:tc>
-                <a:tc>
-                  <a:txBody>
-                    <a:bodyPr/>
-                    <a:lstStyle/>
-                    <a:p>
-                      <a:r>
-                        <a:rPr sz="900" b="0">
-                          <a:solidFill>
-                            <a:srgbClr val="1A1A1A"/>
-                          </a:solidFill>
-                        </a:rPr>
-                        <a:t>No solar array to buy; constrains siting</a:t>
-                      </a:r>
-                    </a:p>
-                  </a:txBody>
-                  <a:tcPr marT="27432" marB="27432"/>
-                </a:tc>
-              </a:tr>
-            </a:tbl>
-          </a:graphicData>
-        </a:graphic>
-      </p:graphicFrame>
-      <p:sp>
-        <p:nvSpPr>
-          <p:cNvPr id="4" name="Rectangle 3" descr=""/>
+              <a:t>Camera at the river, computer indoors (R8)</a:t>
+            </a:r>
+          </a:p>
+        </p:txBody>
+      </p:sp>
+      <p:pic>
+        <p:nvPicPr>
+          <p:cNvPr id="3" name="Picture 2" descr="Side-by-side comparison. On the left, the arrangement as built: camera, computer, modem and power system all in an enclosure at the riverbank, so all of it is in the weather and service means opening the enclosure on site. On the right, the arrangement proposed for the pilot units: only the camera stays at the river and the computer runs indoors at a BHLK or IPB facility over a network link."/>
+          <p:cNvPicPr>
+            <a:picLocks noChangeAspect="1"/>
+          </p:cNvPicPr>
+          <p:nvPr/>
+        </p:nvPicPr>
+        <p:blipFill>
+          <a:blip r:embed="rId2"/>
+          <a:stretch>
+            <a:fillRect/>
+          </a:stretch>
+        </p:blipFill>
+        <p:spPr>
+          <a:xfrm>
+            <a:off x="1929392" y="919607"/>
+            <a:ext cx="5285215" cy="3071749"/>
+          </a:xfrm>
+          <a:prstGeom prst="rect">
+            <a:avLst/>
+          </a:prstGeom>
+        </p:spPr>
+      </p:pic>
+      <p:sp>
+        <p:nvSpPr>
+          <p:cNvPr id="4" name="TextBox 3"/>
+          <p:cNvSpPr txBox="1"/>
+          <p:nvPr/>
+        </p:nvSpPr>
+        <p:spPr>
+          <a:xfrm>
+            <a:off x="457200" y="3991356"/>
+            <a:ext cx="8229600" cy="420624"/>
+          </a:xfrm>
+          <a:prstGeom prst="rect">
+            <a:avLst/>
+          </a:prstGeom>
+          <a:noFill/>
+        </p:spPr>
+        <p:txBody>
+          <a:bodyPr wrap="square">
+            <a:spAutoFit/>
+          </a:bodyPr>
+          <a:lstStyle/>
+          <a:p>
+            <a:pPr/>
+            <a:r>
+              <a:rPr sz="1000">
+                <a:solidFill>
+                  <a:srgbClr val="6B6A66"/>
+                </a:solidFill>
+              </a:rPr>
+              <a:t>Designed and not yet field tested — the pilot's first experiment, not a proven alternative.</a:t>
+            </a:r>
+          </a:p>
+        </p:txBody>
+      </p:sp>
+      <p:sp>
+        <p:nvSpPr>
+          <p:cNvPr id="5" name="Rectangle 4" descr=""/>
           <p:cNvSpPr/>
           <p:nvPr/>
         </p:nvSpPr>
@@ -7160,31 +6732,7 @@
       </p:sp>
       <p:pic>
         <p:nvPicPr>
-          <p:cNvPr id="5" name="Picture 4" descr="Palang Merah Indonesia logo"/>
-          <p:cNvPicPr>
-            <a:picLocks noChangeAspect="1"/>
-          </p:cNvPicPr>
-          <p:nvPr/>
-        </p:nvPicPr>
-        <p:blipFill>
-          <a:blip r:embed="rId2"/>
-          <a:stretch>
-            <a:fillRect/>
-          </a:stretch>
-        </p:blipFill>
-        <p:spPr>
-          <a:xfrm>
-            <a:off x="1369770" y="4576572"/>
-            <a:ext cx="939918" cy="365760"/>
-          </a:xfrm>
-          <a:prstGeom prst="rect">
-            <a:avLst/>
-          </a:prstGeom>
-        </p:spPr>
-      </p:pic>
-      <p:pic>
-        <p:nvPicPr>
-          <p:cNvPr id="6" name="Picture 5" descr="Institut Pertanian Bogor logo"/>
+          <p:cNvPr id="6" name="Picture 5" descr="Palang Merah Indonesia logo"/>
           <p:cNvPicPr>
             <a:picLocks noChangeAspect="1"/>
           </p:cNvPicPr>
@@ -7198,8 +6746,8 @@
         </p:blipFill>
         <p:spPr>
           <a:xfrm>
-            <a:off x="2602296" y="4576572"/>
-            <a:ext cx="539014" cy="365760"/>
+            <a:off x="1369770" y="4576572"/>
+            <a:ext cx="939918" cy="365760"/>
           </a:xfrm>
           <a:prstGeom prst="rect">
             <a:avLst/>
@@ -7208,7 +6756,7 @@
       </p:pic>
       <p:pic>
         <p:nvPicPr>
-          <p:cNvPr id="7" name="Picture 6" descr="Balai Hidrologi dan Lingkungan Keairan logo"/>
+          <p:cNvPr id="7" name="Picture 6" descr="Institut Pertanian Bogor logo"/>
           <p:cNvPicPr>
             <a:picLocks noChangeAspect="1"/>
           </p:cNvPicPr>
@@ -7222,8 +6770,8 @@
         </p:blipFill>
         <p:spPr>
           <a:xfrm>
-            <a:off x="3433918" y="4576572"/>
-            <a:ext cx="365760" cy="365760"/>
+            <a:off x="2602296" y="4576572"/>
+            <a:ext cx="539014" cy="365760"/>
           </a:xfrm>
           <a:prstGeom prst="rect">
             <a:avLst/>
@@ -7232,7 +6780,7 @@
       </p:pic>
       <p:pic>
         <p:nvPicPr>
-          <p:cNvPr id="8" name="Picture 7" descr="American Red Cross logo"/>
+          <p:cNvPr id="8" name="Picture 7" descr="Balai Hidrologi dan Lingkungan Keairan logo"/>
           <p:cNvPicPr>
             <a:picLocks noChangeAspect="1"/>
           </p:cNvPicPr>
@@ -7246,6 +6794,30 @@
         </p:blipFill>
         <p:spPr>
           <a:xfrm>
+            <a:off x="3433918" y="4576572"/>
+            <a:ext cx="365760" cy="365760"/>
+          </a:xfrm>
+          <a:prstGeom prst="rect">
+            <a:avLst/>
+          </a:prstGeom>
+        </p:spPr>
+      </p:pic>
+      <p:pic>
+        <p:nvPicPr>
+          <p:cNvPr id="9" name="Picture 8" descr="American Red Cross logo"/>
+          <p:cNvPicPr>
+            <a:picLocks noChangeAspect="1"/>
+          </p:cNvPicPr>
+          <p:nvPr/>
+        </p:nvPicPr>
+        <p:blipFill>
+          <a:blip r:embed="rId6"/>
+          <a:stretch>
+            <a:fillRect/>
+          </a:stretch>
+        </p:blipFill>
+        <p:spPr>
+          <a:xfrm>
             <a:off x="4092286" y="4576572"/>
             <a:ext cx="1103335" cy="365760"/>
           </a:xfrm>
@@ -7256,7 +6828,7 @@
       </p:pic>
       <p:sp>
         <p:nvSpPr>
-          <p:cNvPr id="9" name="TextBox 8"/>
+          <p:cNvPr id="10" name="TextBox 9"/>
           <p:cNvSpPr txBox="1"/>
           <p:nvPr/>
         </p:nvSpPr>
@@ -7283,7 +6855,7 @@
                   <a:srgbClr val="6B6A66"/>
                 </a:solidFill>
               </a:rPr>
-              <a:t>15 / 25</a:t>
+              <a:t>15 / 24</a:t>
             </a:r>
           </a:p>
         </p:txBody>
@@ -7323,19 +6895,84 @@
           <a:p>
             <a:pPr/>
             <a:r>
-              <a:rPr sz="1800">
+              <a:rPr sz="2000">
                 <a:solidFill>
                   <a:srgbClr val="1A1A1A"/>
                 </a:solidFill>
               </a:rPr>
-              <a:t>R8 — the least proven change, and possibly the most useful</a:t>
+              <a:t>One lesson about method</a:t>
+            </a:r>
+          </a:p>
+        </p:txBody>
+      </p:sp>
+      <p:sp>
+        <p:nvSpPr>
+          <p:cNvPr id="3" name="Text Placeholder 2"/>
+          <p:cNvSpPr>
+            <a:spLocks noGrp="1"/>
+          </p:cNvSpPr>
+          <p:nvPr>
+            <p:ph type="body" idx="12" sz="quarter"/>
+          </p:nvPr>
+        </p:nvSpPr>
+        <p:spPr>
+          <a:xfrm>
+            <a:off x="457200" y="1155065"/>
+            <a:ext cx="4773168" cy="3256915"/>
+          </a:xfrm>
+        </p:spPr>
+        <p:txBody>
+          <a:bodyPr wrap="square"/>
+          <a:lstStyle/>
+          <a:p>
+            <a:pPr/>
+            <a:r>
+              <a:rPr sz="1200">
+                <a:solidFill>
+                  <a:srgbClr val="1A1A1A"/>
+                </a:solidFill>
+              </a:rPr>
+              <a:t>The budget was applied part by part: the cheapest item meeting each requirement.</a:t>
+            </a:r>
+          </a:p>
+          <a:p>
+            <a:pPr/>
+            <a:r>
+              <a:rPr sz="1200">
+                <a:solidFill>
+                  <a:srgbClr val="1A1A1A"/>
+                </a:solidFill>
+              </a:rPr>
+              <a:t>It prices each part against its specification sheet, not against what that part's limits cost the rest of the system.</a:t>
+            </a:r>
+          </a:p>
+          <a:p>
+            <a:pPr/>
+            <a:r>
+              <a:rPr sz="1200">
+                <a:solidFill>
+                  <a:srgbClr val="1A1A1A"/>
+                </a:solidFill>
+              </a:rPr>
+              <a:t>The camera meets every line of its specification, and still costs a fifth of the video quality and 30–60 s of battery on every waking.</a:t>
+            </a:r>
+          </a:p>
+          <a:p>
+            <a:pPr/>
+            <a:r>
+              <a:rPr sz="1200">
+                <a:solidFill>
+                  <a:srgbClr val="1A1A1A"/>
+                </a:solidFill>
+              </a:rPr>
+              <a:t>Its light fires whenever it starts and cannot be turned off — 48 flashes a day at the present site.</a:t>
             </a:r>
           </a:p>
         </p:txBody>
       </p:sp>
       <p:pic>
         <p:nvPicPr>
-          <p:cNvPr id="3" name="Picture 2" descr="Side-by-side comparison. On the left, the arrangement as built: camera, computer, modem and power system all in an enclosure at the riverbank, so all of it is in the weather and service means opening the enclosure on site. On the right, the arrangement proposed for the pilot units: only the camera stays at the river and the computer runs indoors at a BHLK or IPB facility over a network link."/>
+          <p:cNvPr id="4" name="Picture 3" descr="The camera as delivered, on a workbench mat with its mounting hardware, waterproof cable boot and printed manual."/>
           <p:cNvPicPr>
             <a:picLocks noChangeAspect="1"/>
           </p:cNvPicPr>
@@ -7349,8 +6986,8 @@
         </p:blipFill>
         <p:spPr>
           <a:xfrm>
-            <a:off x="1929392" y="919607"/>
-            <a:ext cx="5285215" cy="3071749"/>
+            <a:off x="5458968" y="1298765"/>
+            <a:ext cx="3227832" cy="2420874"/>
           </a:xfrm>
           <a:prstGeom prst="rect">
             <a:avLst/>
@@ -7359,14 +6996,14 @@
       </p:pic>
       <p:sp>
         <p:nvSpPr>
-          <p:cNvPr id="4" name="TextBox 3"/>
+          <p:cNvPr id="5" name="TextBox 4"/>
           <p:cNvSpPr txBox="1"/>
           <p:nvPr/>
         </p:nvSpPr>
         <p:spPr>
           <a:xfrm>
-            <a:off x="457200" y="3991356"/>
-            <a:ext cx="8229600" cy="420624"/>
+            <a:off x="5458968" y="3863340"/>
+            <a:ext cx="3227832" cy="548640"/>
           </a:xfrm>
           <a:prstGeom prst="rect">
             <a:avLst/>
@@ -7381,19 +7018,19 @@
           <a:p>
             <a:pPr/>
             <a:r>
-              <a:rPr sz="1000">
-                <a:solidFill>
-                  <a:srgbClr val="6B6A66"/>
-                </a:solidFill>
-              </a:rPr>
-              <a:t>Designed and not yet field tested — the pilot's first experiment, not a proven alternative.</a:t>
-            </a:r>
-          </a:p>
-        </p:txBody>
-      </p:sp>
-      <p:sp>
-        <p:nvSpPr>
-          <p:cNvPr id="5" name="Rectangle 4" descr=""/>
+              <a:rPr sz="950">
+                <a:solidFill>
+                  <a:srgbClr val="42413E"/>
+                </a:solidFill>
+              </a:rPr>
+              <a:t>Capable hardware, running a reseller's version of the manufacturer's software.</a:t>
+            </a:r>
+          </a:p>
+        </p:txBody>
+      </p:sp>
+      <p:sp>
+        <p:nvSpPr>
+          <p:cNvPr id="6" name="Rectangle 5" descr=""/>
           <p:cNvSpPr/>
           <p:nvPr/>
         </p:nvSpPr>
@@ -7423,7 +7060,7 @@
       </p:sp>
       <p:pic>
         <p:nvPicPr>
-          <p:cNvPr id="6" name="Picture 5" descr="Palang Merah Indonesia logo"/>
+          <p:cNvPr id="7" name="Picture 6" descr="Palang Merah Indonesia logo"/>
           <p:cNvPicPr>
             <a:picLocks noChangeAspect="1"/>
           </p:cNvPicPr>
@@ -7447,7 +7084,7 @@
       </p:pic>
       <p:pic>
         <p:nvPicPr>
-          <p:cNvPr id="7" name="Picture 6" descr="Institut Pertanian Bogor logo"/>
+          <p:cNvPr id="8" name="Picture 7" descr="Institut Pertanian Bogor logo"/>
           <p:cNvPicPr>
             <a:picLocks noChangeAspect="1"/>
           </p:cNvPicPr>
@@ -7471,7 +7108,7 @@
       </p:pic>
       <p:pic>
         <p:nvPicPr>
-          <p:cNvPr id="8" name="Picture 7" descr="Balai Hidrologi dan Lingkungan Keairan logo"/>
+          <p:cNvPr id="9" name="Picture 8" descr="Balai Hidrologi dan Lingkungan Keairan logo"/>
           <p:cNvPicPr>
             <a:picLocks noChangeAspect="1"/>
           </p:cNvPicPr>
@@ -7495,7 +7132,7 @@
       </p:pic>
       <p:pic>
         <p:nvPicPr>
-          <p:cNvPr id="9" name="Picture 8" descr="American Red Cross logo"/>
+          <p:cNvPr id="10" name="Picture 9" descr="American Red Cross logo"/>
           <p:cNvPicPr>
             <a:picLocks noChangeAspect="1"/>
           </p:cNvPicPr>
@@ -7519,7 +7156,7 @@
       </p:pic>
       <p:sp>
         <p:nvSpPr>
-          <p:cNvPr id="10" name="TextBox 9"/>
+          <p:cNvPr id="11" name="TextBox 10"/>
           <p:cNvSpPr txBox="1"/>
           <p:nvPr/>
         </p:nvSpPr>
@@ -7546,7 +7183,7 @@
                   <a:srgbClr val="6B6A66"/>
                 </a:solidFill>
               </a:rPr>
-              <a:t>16 / 25</a:t>
+              <a:t>16 / 24</a:t>
             </a:r>
           </a:p>
         </p:txBody>
@@ -7591,7 +7228,7 @@
                   <a:srgbClr val="1A1A1A"/>
                 </a:solidFill>
               </a:rPr>
-              <a:t>One lesson about method</a:t>
+              <a:t>Build the test station first</a:t>
             </a:r>
           </a:p>
         </p:txBody>
@@ -7606,64 +7243,100 @@
             <p:ph type="body" idx="12" sz="quarter"/>
           </p:nvPr>
         </p:nvSpPr>
-        <p:spPr>
-          <a:xfrm>
-            <a:off x="457200" y="1155065"/>
-            <a:ext cx="4773168" cy="3256915"/>
-          </a:xfrm>
-        </p:spPr>
+        <p:spPr/>
         <p:txBody>
           <a:bodyPr wrap="square"/>
           <a:lstStyle/>
           <a:p>
             <a:pPr/>
             <a:r>
-              <a:rPr sz="1200">
+              <a:rPr sz="1500">
                 <a:solidFill>
                   <a:srgbClr val="1A1A1A"/>
                 </a:solidFill>
               </a:rPr>
-              <a:t>The budget was applied part by part: the cheapest item meeting each requirement.</a:t>
+              <a:t>Everything we know about the failures was diagnosed on a solar station, on a river, awake for tens of seconds, that we could not touch.</a:t>
+            </a:r>
+          </a:p>
+          <a:p>
+            <a:pPr lvl="1"/>
+            <a:r>
+              <a:rPr sz="1350">
+                <a:solidFill>
+                  <a:srgbClr val="6B6A66"/>
+                </a:solidFill>
+              </a:rPr>
+              <a:t>We could not reproduce a fault, test a fix before committing it remotely, or tell a working change from a quiet week. Several diagnoses took months for that reason alone.</a:t>
             </a:r>
           </a:p>
           <a:p>
             <a:pPr/>
             <a:r>
-              <a:rPr sz="1200">
+              <a:rPr sz="1500">
                 <a:solidFill>
                   <a:srgbClr val="1A1A1A"/>
                 </a:solidFill>
               </a:rPr>
-              <a:t>It prices each part against its specification sheet, not against what that part's limits cost the rest of the system.</a:t>
+              <a:t>The Jakarta station was meant to be that test station and never became one. Its absence cost more than the site it was built for.</a:t>
             </a:r>
           </a:p>
           <a:p>
             <a:pPr/>
             <a:r>
-              <a:rPr sz="1200">
+              <a:rPr sz="1500">
                 <a:solidFill>
                   <a:srgbClr val="1A1A1A"/>
                 </a:solidFill>
               </a:rPr>
-              <a:t>The camera meets every line of its specification, and still costs a fifth of the video quality and 30–60 s of battery on every waking.</a:t>
+              <a:t>A test station is not a spare: mains-powered, always on, somewhere someone can watch it, open it and break it deliberately.</a:t>
             </a:r>
           </a:p>
           <a:p>
             <a:pPr/>
             <a:r>
-              <a:rPr sz="1200">
+              <a:rPr sz="1500">
                 <a:solidFill>
                   <a:srgbClr val="1A1A1A"/>
                 </a:solidFill>
               </a:rPr>
-              <a:t>Its light fires whenever it starts and cannot be turned off — 48 flashes a day at the present site.</a:t>
-            </a:r>
+              <a:t>We would treat it as the first station a pilot builds, not the last.</a:t>
+            </a:r>
+          </a:p>
+        </p:txBody>
+      </p:sp>
+      <p:sp>
+        <p:nvSpPr>
+          <p:cNvPr id="4" name="Rectangle 3" descr=""/>
+          <p:cNvSpPr/>
+          <p:nvPr/>
+        </p:nvSpPr>
+        <p:spPr>
+          <a:xfrm>
+            <a:off x="274320" y="4443984"/>
+            <a:ext cx="1517904" cy="676656"/>
+          </a:xfrm>
+          <a:prstGeom prst="rect">
+            <a:avLst/>
+          </a:prstGeom>
+          <a:solidFill>
+            <a:srgbClr val="FFFFFF"/>
+          </a:solidFill>
+          <a:ln>
+            <a:noFill/>
+          </a:ln>
+          <a:effectLst/>
+        </p:spPr>
+        <p:txBody>
+          <a:bodyPr rtlCol="0" anchor="ctr"/>
+          <a:lstStyle/>
+          <a:p>
+            <a:pPr algn="ctr"/>
           </a:p>
         </p:txBody>
       </p:sp>
       <p:pic>
         <p:nvPicPr>
-          <p:cNvPr id="4" name="Picture 3" descr="The camera as delivered, on a workbench mat with its mounting hardware, waterproof cable boot and printed manual."/>
+          <p:cNvPr id="5" name="Picture 4" descr="Palang Merah Indonesia logo"/>
           <p:cNvPicPr>
             <a:picLocks noChangeAspect="1"/>
           </p:cNvPicPr>
@@ -7677,81 +7350,17 @@
         </p:blipFill>
         <p:spPr>
           <a:xfrm>
-            <a:off x="5458968" y="1298765"/>
-            <a:ext cx="3227832" cy="2420874"/>
+            <a:off x="1369770" y="4576572"/>
+            <a:ext cx="939918" cy="365760"/>
           </a:xfrm>
           <a:prstGeom prst="rect">
             <a:avLst/>
           </a:prstGeom>
         </p:spPr>
       </p:pic>
-      <p:sp>
-        <p:nvSpPr>
-          <p:cNvPr id="5" name="TextBox 4"/>
-          <p:cNvSpPr txBox="1"/>
-          <p:nvPr/>
-        </p:nvSpPr>
-        <p:spPr>
-          <a:xfrm>
-            <a:off x="5458968" y="3863340"/>
-            <a:ext cx="3227832" cy="548640"/>
-          </a:xfrm>
-          <a:prstGeom prst="rect">
-            <a:avLst/>
-          </a:prstGeom>
-          <a:noFill/>
-        </p:spPr>
-        <p:txBody>
-          <a:bodyPr wrap="square">
-            <a:spAutoFit/>
-          </a:bodyPr>
-          <a:lstStyle/>
-          <a:p>
-            <a:pPr/>
-            <a:r>
-              <a:rPr sz="950">
-                <a:solidFill>
-                  <a:srgbClr val="42413E"/>
-                </a:solidFill>
-              </a:rPr>
-              <a:t>Capable hardware, running a reseller's version of the manufacturer's software.</a:t>
-            </a:r>
-          </a:p>
-        </p:txBody>
-      </p:sp>
-      <p:sp>
-        <p:nvSpPr>
-          <p:cNvPr id="6" name="Rectangle 5" descr=""/>
-          <p:cNvSpPr/>
-          <p:nvPr/>
-        </p:nvSpPr>
-        <p:spPr>
-          <a:xfrm>
-            <a:off x="274320" y="4443984"/>
-            <a:ext cx="1517904" cy="676656"/>
-          </a:xfrm>
-          <a:prstGeom prst="rect">
-            <a:avLst/>
-          </a:prstGeom>
-          <a:solidFill>
-            <a:srgbClr val="FFFFFF"/>
-          </a:solidFill>
-          <a:ln>
-            <a:noFill/>
-          </a:ln>
-          <a:effectLst/>
-        </p:spPr>
-        <p:txBody>
-          <a:bodyPr rtlCol="0" anchor="ctr"/>
-          <a:lstStyle/>
-          <a:p>
-            <a:pPr algn="ctr"/>
-          </a:p>
-        </p:txBody>
-      </p:sp>
       <p:pic>
         <p:nvPicPr>
-          <p:cNvPr id="7" name="Picture 6" descr="Palang Merah Indonesia logo"/>
+          <p:cNvPr id="6" name="Picture 5" descr="Institut Pertanian Bogor logo"/>
           <p:cNvPicPr>
             <a:picLocks noChangeAspect="1"/>
           </p:cNvPicPr>
@@ -7765,8 +7374,8 @@
         </p:blipFill>
         <p:spPr>
           <a:xfrm>
-            <a:off x="1369770" y="4576572"/>
-            <a:ext cx="939918" cy="365760"/>
+            <a:off x="2602296" y="4576572"/>
+            <a:ext cx="539014" cy="365760"/>
           </a:xfrm>
           <a:prstGeom prst="rect">
             <a:avLst/>
@@ -7775,7 +7384,7 @@
       </p:pic>
       <p:pic>
         <p:nvPicPr>
-          <p:cNvPr id="8" name="Picture 7" descr="Institut Pertanian Bogor logo"/>
+          <p:cNvPr id="7" name="Picture 6" descr="Balai Hidrologi dan Lingkungan Keairan logo"/>
           <p:cNvPicPr>
             <a:picLocks noChangeAspect="1"/>
           </p:cNvPicPr>
@@ -7789,8 +7398,8 @@
         </p:blipFill>
         <p:spPr>
           <a:xfrm>
-            <a:off x="2602296" y="4576572"/>
-            <a:ext cx="539014" cy="365760"/>
+            <a:off x="3433918" y="4576572"/>
+            <a:ext cx="365760" cy="365760"/>
           </a:xfrm>
           <a:prstGeom prst="rect">
             <a:avLst/>
@@ -7799,7 +7408,7 @@
       </p:pic>
       <p:pic>
         <p:nvPicPr>
-          <p:cNvPr id="9" name="Picture 8" descr="Balai Hidrologi dan Lingkungan Keairan logo"/>
+          <p:cNvPr id="8" name="Picture 7" descr="American Red Cross logo"/>
           <p:cNvPicPr>
             <a:picLocks noChangeAspect="1"/>
           </p:cNvPicPr>
@@ -7813,30 +7422,6 @@
         </p:blipFill>
         <p:spPr>
           <a:xfrm>
-            <a:off x="3433918" y="4576572"/>
-            <a:ext cx="365760" cy="365760"/>
-          </a:xfrm>
-          <a:prstGeom prst="rect">
-            <a:avLst/>
-          </a:prstGeom>
-        </p:spPr>
-      </p:pic>
-      <p:pic>
-        <p:nvPicPr>
-          <p:cNvPr id="10" name="Picture 9" descr="American Red Cross logo"/>
-          <p:cNvPicPr>
-            <a:picLocks noChangeAspect="1"/>
-          </p:cNvPicPr>
-          <p:nvPr/>
-        </p:nvPicPr>
-        <p:blipFill>
-          <a:blip r:embed="rId6"/>
-          <a:stretch>
-            <a:fillRect/>
-          </a:stretch>
-        </p:blipFill>
-        <p:spPr>
-          <a:xfrm>
             <a:off x="4092286" y="4576572"/>
             <a:ext cx="1103335" cy="365760"/>
           </a:xfrm>
@@ -7847,7 +7432,7 @@
       </p:pic>
       <p:sp>
         <p:nvSpPr>
-          <p:cNvPr id="11" name="TextBox 10"/>
+          <p:cNvPr id="9" name="TextBox 8"/>
           <p:cNvSpPr txBox="1"/>
           <p:nvPr/>
         </p:nvSpPr>
@@ -7874,7 +7459,7 @@
                   <a:srgbClr val="6B6A66"/>
                 </a:solidFill>
               </a:rPr>
-              <a:t>17 / 25</a:t>
+              <a:t>17 / 24</a:t>
             </a:r>
           </a:p>
         </p:txBody>
@@ -7919,7 +7504,7 @@
                   <a:srgbClr val="1A1A1A"/>
                 </a:solidFill>
               </a:rPr>
-              <a:t>Build the test station first</a:t>
+              <a:t>What is worth keeping</a:t>
             </a:r>
           </a:p>
         </p:txBody>
@@ -7941,56 +7526,67 @@
           <a:p>
             <a:pPr/>
             <a:r>
-              <a:rPr sz="1500">
+              <a:rPr sz="1400">
                 <a:solidFill>
                   <a:srgbClr val="1A1A1A"/>
                 </a:solidFill>
               </a:rPr>
-              <a:t>Everything we know about the failures was diagnosed on a solar station, on a river, awake for tens of seconds, that we could not touch.</a:t>
+              <a:t>The five constraints: commodity parts, no soldering, no specialist skills, common tools, five-minute replacement.</a:t>
+            </a:r>
+          </a:p>
+          <a:p>
+            <a:pPr/>
+            <a:r>
+              <a:rPr sz="1400">
+                <a:solidFill>
+                  <a:srgbClr val="1A1A1A"/>
+                </a:solidFill>
+              </a:rPr>
+              <a:t>The spare switched outputs. The relay module has four channels; one drives the camera and three are deliberately left free, wired and ready.</a:t>
             </a:r>
           </a:p>
           <a:p>
             <a:pPr lvl="1"/>
             <a:r>
-              <a:rPr sz="1350">
+              <a:rPr sz="1250">
                 <a:solidFill>
                   <a:srgbClr val="6B6A66"/>
                 </a:solidFill>
               </a:rPr>
-              <a:t>We could not reproduce a fault, test a fix before committing it remotely, or tell a working change from a quiet week. Several diagnoses took months for that reason alone.</a:t>
+              <a:t>That is what lets a station drive a siren, a beacon or an alerting relay without reopening the design — and what turns a measurement station into something a community can act on.</a:t>
+            </a:r>
+          </a:p>
+          <a:p>
+            <a:pPr lvl="1"/>
+            <a:r>
+              <a:rPr sz="1250">
+                <a:solidFill>
+                  <a:srgbClr val="6B6A66"/>
+                </a:solidFill>
+              </a:rPr>
+              <a:t>We would ask that any replication keeps that spare capacity rather than removing it to save a few dollars.</a:t>
             </a:r>
           </a:p>
           <a:p>
             <a:pPr/>
             <a:r>
-              <a:rPr sz="1500">
+              <a:rPr sz="1400">
                 <a:solidFill>
                   <a:srgbClr val="1A1A1A"/>
                 </a:solidFill>
               </a:rPr>
-              <a:t>The Jakarta station was meant to be that test station and never became one. Its absence cost more than the site it was built for.</a:t>
+              <a:t>The factory-sealed camera, which removed the humidity failure that killed the previous unit.</a:t>
             </a:r>
           </a:p>
           <a:p>
             <a:pPr/>
             <a:r>
-              <a:rPr sz="1500">
+              <a:rPr sz="1400">
                 <a:solidFill>
                   <a:srgbClr val="1A1A1A"/>
                 </a:solidFill>
               </a:rPr>
-              <a:t>A test station is not a spare: mains-powered, always on, somewhere someone can watch it, open it and break it deliberately.</a:t>
-            </a:r>
-          </a:p>
-          <a:p>
-            <a:pPr/>
-            <a:r>
-              <a:rPr sz="1500">
-                <a:solidFill>
-                  <a:srgbClr val="1A1A1A"/>
-                </a:solidFill>
-              </a:rPr>
-              <a:t>We would treat it as the first station a pilot builds, not the last.</a:t>
+              <a:t>The recovery kit, documentation in both languages, and spares at the local PMI chapter.</a:t>
             </a:r>
           </a:p>
         </p:txBody>
@@ -8150,7 +7746,7 @@
                   <a:srgbClr val="6B6A66"/>
                 </a:solidFill>
               </a:rPr>
-              <a:t>18 / 25</a:t>
+              <a:t>18 / 24</a:t>
             </a:r>
           </a:p>
         </p:txBody>
@@ -8195,7 +7791,7 @@
                   <a:srgbClr val="1A1A1A"/>
                 </a:solidFill>
               </a:rPr>
-              <a:t>What is worth keeping</a:t>
+              <a:t>Building and looking after the units in Indonesia</a:t>
             </a:r>
           </a:p>
         </p:txBody>
@@ -8222,7 +7818,7 @@
                   <a:srgbClr val="1A1A1A"/>
                 </a:solidFill>
               </a:rPr>
-              <a:t>The five constraints: commodity parts, no soldering, no specialist skills, common tools, five-minute replacement.</a:t>
+              <a:t>The design was made to be built by people who are not electronics specialists, with tools they already own.</a:t>
             </a:r>
           </a:p>
           <a:p>
@@ -8233,29 +7829,7 @@
                   <a:srgbClr val="1A1A1A"/>
                 </a:solidFill>
               </a:rPr>
-              <a:t>The spare switched outputs. The relay module has four channels; one drives the camera and three are deliberately left free, wired and ready.</a:t>
-            </a:r>
-          </a:p>
-          <a:p>
-            <a:pPr lvl="1"/>
-            <a:r>
-              <a:rPr sz="1250">
-                <a:solidFill>
-                  <a:srgbClr val="6B6A66"/>
-                </a:solidFill>
-              </a:rPr>
-              <a:t>That is what lets a station drive a siren, a beacon or an alerting relay without reopening the design — and what turns a measurement station into something a community can act on.</a:t>
-            </a:r>
-          </a:p>
-          <a:p>
-            <a:pPr lvl="1"/>
-            <a:r>
-              <a:rPr sz="1250">
-                <a:solidFill>
-                  <a:srgbClr val="6B6A66"/>
-                </a:solidFill>
-              </a:rPr>
-              <a:t>We would ask that any replication keeps that spare capacity rather than removing it to save a few dollars.</a:t>
+              <a:t>That intent only becomes real if the parts can be bought locally and the documentation supports substitution — R3.</a:t>
             </a:r>
           </a:p>
           <a:p>
@@ -8266,7 +7840,7 @@
                   <a:srgbClr val="1A1A1A"/>
                 </a:solidFill>
               </a:rPr>
-              <a:t>The factory-sealed camera, which removed the humidity failure that killed the previous unit.</a:t>
+              <a:t>Spares held at the local PMI chapter turn a failure into a part swap rather than a shipment.</a:t>
             </a:r>
           </a:p>
           <a:p>
@@ -8277,7 +7851,18 @@
                   <a:srgbClr val="1A1A1A"/>
                 </a:solidFill>
               </a:rPr>
-              <a:t>The recovery kit, documentation in both languages, and spares at the local PMI chapter.</a:t>
+              <a:t>Where the field unit is a standard security camera, support falls within a supply chain that already exists across Indonesia.</a:t>
+            </a:r>
+          </a:p>
+          <a:p>
+            <a:pPr/>
+            <a:r>
+              <a:rPr sz="1400">
+                <a:solidFill>
+                  <a:srgbClr val="1A1A1A"/>
+                </a:solidFill>
+              </a:rPr>
+              <a:t>We would rather help build the capacity to maintain these stations than remain the place they are sent when they break.</a:t>
             </a:r>
           </a:p>
         </p:txBody>
@@ -8437,7 +8022,7 @@
                   <a:srgbClr val="6B6A66"/>
                 </a:solidFill>
               </a:rPr>
-              <a:t>19 / 25</a:t>
+              <a:t>19 / 24</a:t>
             </a:r>
           </a:p>
         </p:txBody>
@@ -8713,7 +8298,7 @@
                   <a:srgbClr val="6B6A66"/>
                 </a:solidFill>
               </a:rPr>
-              <a:t>2 / 25</a:t>
+              <a:t>2 / 24</a:t>
             </a:r>
           </a:p>
         </p:txBody>
@@ -8758,7 +8343,7 @@
                   <a:srgbClr val="1A1A1A"/>
                 </a:solidFill>
               </a:rPr>
-              <a:t>Building and looking after the units in Indonesia</a:t>
+              <a:t>Hosting the data in Indonesia</a:t>
             </a:r>
           </a:p>
         </p:txBody>
@@ -8785,7 +8370,7 @@
                   <a:srgbClr val="1A1A1A"/>
                 </a:solidFill>
               </a:rPr>
-              <a:t>The design was made to be built by people who are not electronics specialists, with tools they already own.</a:t>
+              <a:t>BHLK's offer suits the pilot, and holding the data in Indonesia carries a clear benefit for a government-partnered deployment.</a:t>
             </a:r>
           </a:p>
           <a:p>
@@ -8796,7 +8381,29 @@
                   <a:srgbClr val="1A1A1A"/>
                 </a:solidFill>
               </a:rPr>
-              <a:t>That intent only becomes real if the parts can be bought locally and the documentation supports substitution — R3.</a:t>
+              <a:t>Two constraints to design for rather than discover:</a:t>
+            </a:r>
+          </a:p>
+          <a:p>
+            <a:pPr lvl="1"/>
+            <a:r>
+              <a:rPr sz="1250">
+                <a:solidFill>
+                  <a:srgbClr val="6B6A66"/>
+                </a:solidFill>
+              </a:rPr>
+              <a:t>The video store and the database must share one filesystem. Plan storage as a single volume.</a:t>
+            </a:r>
+          </a:p>
+          <a:p>
+            <a:pPr lvl="1"/>
+            <a:r>
+              <a:rPr sz="1250">
+                <a:solidFill>
+                  <a:srgbClr val="6B6A66"/>
+                </a:solidFill>
+              </a:rPr>
+              <a:t>Server and station software versions are tied together, and a remote station cannot be upgraded on demand.</a:t>
             </a:r>
           </a:p>
           <a:p>
@@ -8807,7 +8414,7 @@
                   <a:srgbClr val="1A1A1A"/>
                 </a:solidFill>
               </a:rPr>
-              <a:t>Spares held at the local PMI chapter turn a failure into a part swap rather than a shipment.</a:t>
+              <a:t>We would suggest running both instances in parallel until the new one has completed a full operating cycle, including an upgrade.</a:t>
             </a:r>
           </a:p>
           <a:p>
@@ -8818,18 +8425,7 @@
                   <a:srgbClr val="1A1A1A"/>
                 </a:solidFill>
               </a:rPr>
-              <a:t>Where the field unit is a standard security camera, support falls within a supply chain that already exists across Indonesia.</a:t>
-            </a:r>
-          </a:p>
-          <a:p>
-            <a:pPr/>
-            <a:r>
-              <a:rPr sz="1400">
-                <a:solidFill>
-                  <a:srgbClr val="1A1A1A"/>
-                </a:solidFill>
-              </a:rPr>
-              <a:t>We would rather help build the capacity to maintain these stations than remain the place they are sent when they break.</a:t>
+              <a:t>Worth agreeing in writing: where the authoritative copy sits, who administers it, who has access, and the retention policy.</a:t>
             </a:r>
           </a:p>
         </p:txBody>
@@ -8989,7 +8585,7 @@
                   <a:srgbClr val="6B6A66"/>
                 </a:solidFill>
               </a:rPr>
-              <a:t>20 / 25</a:t>
+              <a:t>20 / 24</a:t>
             </a:r>
           </a:p>
         </p:txBody>
@@ -9034,7 +8630,7 @@
                   <a:srgbClr val="1A1A1A"/>
                 </a:solidFill>
               </a:rPr>
-              <a:t>Hosting the data in Indonesia</a:t>
+              <a:t>Choosing the sites</a:t>
             </a:r>
           </a:p>
         </p:txBody>
@@ -9056,67 +8652,89 @@
           <a:p>
             <a:pPr/>
             <a:r>
-              <a:rPr sz="1400">
+              <a:rPr sz="1250">
                 <a:solidFill>
                   <a:srgbClr val="1A1A1A"/>
                 </a:solidFill>
               </a:rPr>
-              <a:t>BHLK's offer suits the pilot, and holding the data in Indonesia carries a clear benefit for a government-partnered deployment.</a:t>
+              <a:t>An open site helps with three problems at once: satellite positioning, the sun-water-camera angle, and the view across the section.</a:t>
             </a:r>
           </a:p>
           <a:p>
             <a:pPr/>
             <a:r>
-              <a:rPr sz="1400">
+              <a:rPr sz="1250">
                 <a:solidFill>
                   <a:srgbClr val="1A1A1A"/>
                 </a:solidFill>
               </a:rPr>
-              <a:t>Two constraints to design for rather than discover:</a:t>
+              <a:t>A move costs a fresh survey and a fresh calibration, not only a relocation. The survey is the expensive part.</a:t>
+            </a:r>
+          </a:p>
+          <a:p>
+            <a:pPr/>
+            <a:r>
+              <a:rPr sz="1250">
+                <a:solidFill>
+                  <a:srgbClr val="1A1A1A"/>
+                </a:solidFill>
+              </a:rPr>
+              <a:t>Site permission should be settled before a unit is built for a particular site.</a:t>
             </a:r>
           </a:p>
           <a:p>
             <a:pPr lvl="1"/>
             <a:r>
+              <a:rPr sz="1100">
+                <a:solidFill>
+                  <a:srgbClr val="6B6A66"/>
+                </a:solidFill>
+              </a:rPr>
+              <a:t>A complete station was built and tested for an intended Jakarta site. Permission fell through during the April visit.</a:t>
+            </a:r>
+          </a:p>
+          <a:p>
+            <a:pPr/>
+            <a:r>
               <a:rPr sz="1250">
                 <a:solidFill>
+                  <a:srgbClr val="1A1A1A"/>
+                </a:solidFill>
+              </a:rPr>
+              <a:t>That station is still available. We suggest it serves best as a study and test unit.</a:t>
+            </a:r>
+          </a:p>
+          <a:p>
+            <a:pPr lvl="1"/>
+            <a:r>
+              <a:rPr sz="1100">
+                <a:solidFill>
                   <a:srgbClr val="6B6A66"/>
                 </a:solidFill>
               </a:rPr>
-              <a:t>The video store and the database must share one filesystem. Plan storage as a single volume.</a:t>
+              <a:t>Open it, trace it, power it up, take it apart — and install it somewhere convenient and local if that is useful, so it can be exercised against real water.</a:t>
             </a:r>
           </a:p>
           <a:p>
             <a:pPr lvl="1"/>
             <a:r>
+              <a:rPr sz="1100">
+                <a:solidFill>
+                  <a:srgbClr val="6B6A66"/>
+                </a:solidFill>
+              </a:rPr>
+              <a:t>Not as an operational station with expectations of availability and consistent data. It carries the design this briefing recommends changing.</a:t>
+            </a:r>
+          </a:p>
+          <a:p>
+            <a:pPr/>
+            <a:r>
               <a:rPr sz="1250">
                 <a:solidFill>
-                  <a:srgbClr val="6B6A66"/>
-                </a:solidFill>
-              </a:rPr>
-              <a:t>Server and station software versions are tied together, and a remote station cannot be upgraded on demand.</a:t>
-            </a:r>
-          </a:p>
-          <a:p>
-            <a:pPr/>
-            <a:r>
-              <a:rPr sz="1400">
-                <a:solidFill>
                   <a:srgbClr val="1A1A1A"/>
                 </a:solidFill>
               </a:rPr>
-              <a:t>We would suggest running both instances in parallel until the new one has completed a full operating cycle, including an upgrade.</a:t>
-            </a:r>
-          </a:p>
-          <a:p>
-            <a:pPr/>
-            <a:r>
-              <a:rPr sz="1400">
-                <a:solidFill>
-                  <a:srgbClr val="1A1A1A"/>
-                </a:solidFill>
-              </a:rPr>
-              <a:t>Worth agreeing in writing: where the authoritative copy sits, who administers it, who has access, and the retention policy.</a:t>
+              <a:t>We would not build to a site again before you tell us the permission is in place.</a:t>
             </a:r>
           </a:p>
         </p:txBody>
@@ -9276,7 +8894,7 @@
                   <a:srgbClr val="6B6A66"/>
                 </a:solidFill>
               </a:rPr>
-              <a:t>21 / 25</a:t>
+              <a:t>21 / 24</a:t>
             </a:r>
           </a:p>
         </p:txBody>
@@ -9321,7 +8939,7 @@
                   <a:srgbClr val="1A1A1A"/>
                 </a:solidFill>
               </a:rPr>
-              <a:t>Choosing the sites</a:t>
+              <a:t>Working together</a:t>
             </a:r>
           </a:p>
         </p:txBody>
@@ -9343,89 +8961,56 @@
           <a:p>
             <a:pPr/>
             <a:r>
-              <a:rPr sz="1250">
+              <a:rPr sz="1400">
                 <a:solidFill>
                   <a:srgbClr val="1A1A1A"/>
                 </a:solidFill>
               </a:rPr>
-              <a:t>An open site helps with three problems at once: satellite positioning, the sun-water-camera angle, and the view across the section.</a:t>
+              <a:t>BHLK — data processing, conformance with standards, and the route to acceptance within PUPR data systems. Offers server capacity.</a:t>
             </a:r>
           </a:p>
           <a:p>
             <a:pPr/>
             <a:r>
-              <a:rPr sz="1250">
+              <a:rPr sz="1400">
                 <a:solidFill>
                   <a:srgbClr val="1A1A1A"/>
                 </a:solidFill>
               </a:rPr>
-              <a:t>A move costs a fresh survey and a fresh calibration, not only a relocation. The survey is the expensive part.</a:t>
+              <a:t>IPB — design, calibration methodology, training material, and the development path for future sensor types.</a:t>
             </a:r>
           </a:p>
           <a:p>
             <a:pPr/>
             <a:r>
-              <a:rPr sz="1250">
+              <a:rPr sz="1400">
                 <a:solidFill>
                   <a:srgbClr val="1A1A1A"/>
                 </a:solidFill>
               </a:rPr>
-              <a:t>Site permission should be settled before a unit is built for a particular site.</a:t>
-            </a:r>
-          </a:p>
-          <a:p>
-            <a:pPr lvl="1"/>
-            <a:r>
-              <a:rPr sz="1100">
-                <a:solidFill>
-                  <a:srgbClr val="6B6A66"/>
-                </a:solidFill>
-              </a:rPr>
-              <a:t>A complete station was built and tested for an intended Jakarta site. Permission fell through during the April visit.</a:t>
+              <a:t>PMI — user of the information, and the operational side: installation, maintenance, siting, response, and spares.</a:t>
             </a:r>
           </a:p>
           <a:p>
             <a:pPr/>
             <a:r>
-              <a:rPr sz="1250">
+              <a:rPr sz="1400">
                 <a:solidFill>
                   <a:srgbClr val="1A1A1A"/>
                 </a:solidFill>
               </a:rPr>
-              <a:t>That station is still available. We suggest it serves best as a study and test unit.</a:t>
-            </a:r>
-          </a:p>
-          <a:p>
-            <a:pPr lvl="1"/>
-            <a:r>
-              <a:rPr sz="1100">
-                <a:solidFill>
-                  <a:srgbClr val="6B6A66"/>
-                </a:solidFill>
-              </a:rPr>
-              <a:t>Open it, trace it, power it up, take it apart — and install it somewhere convenient and local if that is useful, so it can be exercised against real water.</a:t>
-            </a:r>
-          </a:p>
-          <a:p>
-            <a:pPr lvl="1"/>
-            <a:r>
-              <a:rPr sz="1100">
-                <a:solidFill>
-                  <a:srgbClr val="6B6A66"/>
-                </a:solidFill>
-              </a:rPr>
-              <a:t>Not as an operational station with expectations of availability and consistent data. It carries the design this briefing recommends changing.</a:t>
+              <a:t>Offered for your consideration: write the split into the collaboration agreement so it survives staff changes, and keep a light joint forum for what does not sort into one role.</a:t>
             </a:r>
           </a:p>
           <a:p>
             <a:pPr/>
             <a:r>
-              <a:rPr sz="1250">
+              <a:rPr sz="1400">
                 <a:solidFill>
                   <a:srgbClr val="1A1A1A"/>
                 </a:solidFill>
               </a:rPr>
-              <a:t>We would not build to a site again before you tell us the permission is in place.</a:t>
+              <a:t>The commitments this implies for PMI have not been discussed with PMI National Headquarters.</a:t>
             </a:r>
           </a:p>
         </p:txBody>
@@ -9585,7 +9170,7 @@
                   <a:srgbClr val="6B6A66"/>
                 </a:solidFill>
               </a:rPr>
-              <a:t>22 / 25</a:t>
+              <a:t>22 / 24</a:t>
             </a:r>
           </a:p>
         </p:txBody>
@@ -9630,7 +9215,7 @@
                   <a:srgbClr val="1A1A1A"/>
                 </a:solidFill>
               </a:rPr>
-              <a:t>Working together</a:t>
+              <a:t>Questions for consideration</a:t>
             </a:r>
           </a:p>
         </p:txBody>
@@ -9657,7 +9242,7 @@
                   <a:srgbClr val="1A1A1A"/>
                 </a:solidFill>
               </a:rPr>
-              <a:t>BHLK — data processing, conformance with standards, and the route to acceptance within PUPR data systems. Offers server capacity.</a:t>
+              <a:t>Who should hold the Jakarta station as a study and test unit? It was to transfer to IPB for deployment. Whether IPB or BHLK is better placed to hold it is for the two of you.</a:t>
             </a:r>
           </a:p>
           <a:p>
@@ -9668,7 +9253,7 @@
                   <a:srgbClr val="1A1A1A"/>
                 </a:solidFill>
               </a:rPr>
-              <a:t>IPB — design, calibration methodology, training material, and the development path for future sensor types.</a:t>
+              <a:t>Can a staff gauge be read from the camera image accurately enough? If it can, R1 needs no separate sensor.</a:t>
             </a:r>
           </a:p>
           <a:p>
@@ -9679,7 +9264,7 @@
                   <a:srgbClr val="1A1A1A"/>
                 </a:solidFill>
               </a:rPr>
-              <a:t>PMI — user of the information, and the operational side: installation, maintenance, siting, response, and spares.</a:t>
+              <a:t>Two of the thirteen interruptions remain unexplained.</a:t>
             </a:r>
           </a:p>
           <a:p>
@@ -9690,7 +9275,7 @@
                   <a:srgbClr val="1A1A1A"/>
                 </a:solidFill>
               </a:rPr>
-              <a:t>Offered for your consideration: write the split into the collaboration agreement so it survives staff changes, and keep a light joint forum for what does not sort into one role.</a:t>
+              <a:t>Does the recovery-voltage threshold bound how long an interruption lasts, or hold the station off?</a:t>
             </a:r>
           </a:p>
           <a:p>
@@ -9701,7 +9286,29 @@
                   <a:srgbClr val="1A1A1A"/>
                 </a:solidFill>
               </a:rPr>
-              <a:t>The commitments this implies for PMI have not been discussed with PMI National Headquarters.</a:t>
+              <a:t>How does the velocity measurement perform across the surface conditions the pilot sites present?</a:t>
+            </a:r>
+          </a:p>
+          <a:p>
+            <a:pPr/>
+            <a:r>
+              <a:rPr sz="1400">
+                <a:solidFill>
+                  <a:srgbClr val="1A1A1A"/>
+                </a:solidFill>
+              </a:rPr>
+              <a:t>Absolute discharge accuracy at Sukabumi, unresolved pending the survey.</a:t>
+            </a:r>
+          </a:p>
+          <a:p>
+            <a:pPr/>
+            <a:r>
+              <a:rPr sz="1400">
+                <a:solidFill>
+                  <a:srgbClr val="1A1A1A"/>
+                </a:solidFill>
+              </a:rPr>
+              <a:t>We expect your work to change some of what is written here. That is the point of handing it over rather than handing it down.</a:t>
             </a:r>
           </a:p>
         </p:txBody>
@@ -9861,7 +9468,7 @@
                   <a:srgbClr val="6B6A66"/>
                 </a:solidFill>
               </a:rPr>
-              <a:t>23 / 25</a:t>
+              <a:t>23 / 24</a:t>
             </a:r>
           </a:p>
         </p:txBody>
@@ -9906,7 +9513,7 @@
                   <a:srgbClr val="1A1A1A"/>
                 </a:solidFill>
               </a:rPr>
-              <a:t>Questions for consideration</a:t>
+              <a:t>What we can offer from here</a:t>
             </a:r>
           </a:p>
         </p:txBody>
@@ -9933,7 +9540,7 @@
                   <a:srgbClr val="1A1A1A"/>
                 </a:solidFill>
               </a:rPr>
-              <a:t>Who should hold the Jakarta station as a study and test unit? It was to transfer to IPB for deployment. Whether IPB or BHLK is better placed to hold it is for the two of you.</a:t>
+              <a:t>We are not proposing to build your stations.</a:t>
             </a:r>
           </a:p>
           <a:p>
@@ -9944,7 +9551,7 @@
                   <a:srgbClr val="1A1A1A"/>
                 </a:solidFill>
               </a:rPr>
-              <a:t>Can a staff gauge be read from the camera image accurately enough? If it can, R1 needs no separate sensor.</a:t>
+              <a:t>What we can offer is the record: this briefing and its report, the appendix, the operator and assembly documentation in English and Bahasa Indonesia, the software, and the built station at Wisma PMI to take apart.</a:t>
             </a:r>
           </a:p>
           <a:p>
@@ -9955,7 +9562,7 @@
                   <a:srgbClr val="1A1A1A"/>
                 </a:solidFill>
               </a:rPr>
-              <a:t>Two of the thirteen interruptions remain unexplained.</a:t>
+              <a:t>Beyond that, whatever is useful — reviewing a design, answering a question about something that surprised us, looking at data that does not behave.</a:t>
             </a:r>
           </a:p>
           <a:p>
@@ -9966,7 +9573,7 @@
                   <a:srgbClr val="1A1A1A"/>
                 </a:solidFill>
               </a:rPr>
-              <a:t>Does the recovery-voltage threshold bound how long an interruption lasts, or hold the station off?</a:t>
+              <a:t>Sukabumi will keep running, and we will keep reporting what it does, including the parts that go wrong.</a:t>
             </a:r>
           </a:p>
           <a:p>
@@ -9977,29 +9584,7 @@
                   <a:srgbClr val="1A1A1A"/>
                 </a:solidFill>
               </a:rPr>
-              <a:t>How does the velocity measurement perform across the surface conditions the pilot sites present?</a:t>
-            </a:r>
-          </a:p>
-          <a:p>
-            <a:pPr/>
-            <a:r>
-              <a:rPr sz="1400">
-                <a:solidFill>
-                  <a:srgbClr val="1A1A1A"/>
-                </a:solidFill>
-              </a:rPr>
-              <a:t>Absolute discharge accuracy at Sukabumi, unresolved pending the survey.</a:t>
-            </a:r>
-          </a:p>
-          <a:p>
-            <a:pPr/>
-            <a:r>
-              <a:rPr sz="1400">
-                <a:solidFill>
-                  <a:srgbClr val="1A1A1A"/>
-                </a:solidFill>
-              </a:rPr>
-              <a:t>We expect your work to change some of what is written here. That is the point of handing it over rather than handing it down.</a:t>
+              <a:t>The pilot found the problems while they were still cheap, and it introduced three organisations to one another. The next station in this story should be one you designed.</a:t>
             </a:r>
           </a:p>
         </p:txBody>
@@ -10159,283 +9744,7 @@
                   <a:srgbClr val="6B6A66"/>
                 </a:solidFill>
               </a:rPr>
-              <a:t>24 / 25</a:t>
-            </a:r>
-          </a:p>
-        </p:txBody>
-      </p:sp>
-    </p:spTree>
-  </p:cSld>
-  <p:clrMapOvr>
-    <a:masterClrMapping/>
-  </p:clrMapOvr>
-</p:sld>
-</file>
-
-<file path=ppt/slides/slide25.xml><?xml version="1.0" encoding="utf-8"?>
-<p:sld xmlns:a="http://schemas.openxmlformats.org/drawingml/2006/main" xmlns:p="http://schemas.openxmlformats.org/presentationml/2006/main" xmlns:r="http://schemas.openxmlformats.org/officeDocument/2006/relationships">
-  <p:cSld>
-    <p:spTree>
-      <p:nvGrpSpPr>
-        <p:cNvPr id="1" name=""/>
-        <p:cNvGrpSpPr/>
-        <p:nvPr/>
-      </p:nvGrpSpPr>
-      <p:grpSpPr/>
-      <p:sp>
-        <p:nvSpPr>
-          <p:cNvPr id="2" name="Title 1"/>
-          <p:cNvSpPr>
-            <a:spLocks noGrp="1"/>
-          </p:cNvSpPr>
-          <p:nvPr>
-            <p:ph type="title"/>
-          </p:nvPr>
-        </p:nvSpPr>
-        <p:spPr/>
-        <p:txBody>
-          <a:bodyPr wrap="square"/>
-          <a:lstStyle/>
-          <a:p>
-            <a:pPr/>
-            <a:r>
-              <a:rPr sz="2000">
-                <a:solidFill>
-                  <a:srgbClr val="1A1A1A"/>
-                </a:solidFill>
-              </a:rPr>
-              <a:t>What we can offer from here</a:t>
-            </a:r>
-          </a:p>
-        </p:txBody>
-      </p:sp>
-      <p:sp>
-        <p:nvSpPr>
-          <p:cNvPr id="3" name="Text Placeholder 2"/>
-          <p:cNvSpPr>
-            <a:spLocks noGrp="1"/>
-          </p:cNvSpPr>
-          <p:nvPr>
-            <p:ph type="body" idx="12" sz="quarter"/>
-          </p:nvPr>
-        </p:nvSpPr>
-        <p:spPr/>
-        <p:txBody>
-          <a:bodyPr wrap="square"/>
-          <a:lstStyle/>
-          <a:p>
-            <a:pPr/>
-            <a:r>
-              <a:rPr sz="1400">
-                <a:solidFill>
-                  <a:srgbClr val="1A1A1A"/>
-                </a:solidFill>
-              </a:rPr>
-              <a:t>We are not proposing to build your stations.</a:t>
-            </a:r>
-          </a:p>
-          <a:p>
-            <a:pPr/>
-            <a:r>
-              <a:rPr sz="1400">
-                <a:solidFill>
-                  <a:srgbClr val="1A1A1A"/>
-                </a:solidFill>
-              </a:rPr>
-              <a:t>What we can offer is the record: this briefing and its report, the appendix, the operator and assembly documentation in English and Bahasa Indonesia, the software, and the built station at Wisma PMI to take apart.</a:t>
-            </a:r>
-          </a:p>
-          <a:p>
-            <a:pPr/>
-            <a:r>
-              <a:rPr sz="1400">
-                <a:solidFill>
-                  <a:srgbClr val="1A1A1A"/>
-                </a:solidFill>
-              </a:rPr>
-              <a:t>Beyond that, whatever is useful — reviewing a design, answering a question about something that surprised us, looking at data that does not behave.</a:t>
-            </a:r>
-          </a:p>
-          <a:p>
-            <a:pPr/>
-            <a:r>
-              <a:rPr sz="1400">
-                <a:solidFill>
-                  <a:srgbClr val="1A1A1A"/>
-                </a:solidFill>
-              </a:rPr>
-              <a:t>Sukabumi will keep running, and we will keep reporting what it does, including the parts that go wrong.</a:t>
-            </a:r>
-          </a:p>
-          <a:p>
-            <a:pPr/>
-            <a:r>
-              <a:rPr sz="1400">
-                <a:solidFill>
-                  <a:srgbClr val="1A1A1A"/>
-                </a:solidFill>
-              </a:rPr>
-              <a:t>The pilot found the problems while they were still cheap, and it introduced three organisations to one another. The next station in this story should be one you designed.</a:t>
-            </a:r>
-          </a:p>
-        </p:txBody>
-      </p:sp>
-      <p:sp>
-        <p:nvSpPr>
-          <p:cNvPr id="4" name="Rectangle 3" descr=""/>
-          <p:cNvSpPr/>
-          <p:nvPr/>
-        </p:nvSpPr>
-        <p:spPr>
-          <a:xfrm>
-            <a:off x="274320" y="4443984"/>
-            <a:ext cx="1517904" cy="676656"/>
-          </a:xfrm>
-          <a:prstGeom prst="rect">
-            <a:avLst/>
-          </a:prstGeom>
-          <a:solidFill>
-            <a:srgbClr val="FFFFFF"/>
-          </a:solidFill>
-          <a:ln>
-            <a:noFill/>
-          </a:ln>
-          <a:effectLst/>
-        </p:spPr>
-        <p:txBody>
-          <a:bodyPr rtlCol="0" anchor="ctr"/>
-          <a:lstStyle/>
-          <a:p>
-            <a:pPr algn="ctr"/>
-          </a:p>
-        </p:txBody>
-      </p:sp>
-      <p:pic>
-        <p:nvPicPr>
-          <p:cNvPr id="5" name="Picture 4" descr="Palang Merah Indonesia logo"/>
-          <p:cNvPicPr>
-            <a:picLocks noChangeAspect="1"/>
-          </p:cNvPicPr>
-          <p:nvPr/>
-        </p:nvPicPr>
-        <p:blipFill>
-          <a:blip r:embed="rId2"/>
-          <a:stretch>
-            <a:fillRect/>
-          </a:stretch>
-        </p:blipFill>
-        <p:spPr>
-          <a:xfrm>
-            <a:off x="1369770" y="4576572"/>
-            <a:ext cx="939918" cy="365760"/>
-          </a:xfrm>
-          <a:prstGeom prst="rect">
-            <a:avLst/>
-          </a:prstGeom>
-        </p:spPr>
-      </p:pic>
-      <p:pic>
-        <p:nvPicPr>
-          <p:cNvPr id="6" name="Picture 5" descr="Institut Pertanian Bogor logo"/>
-          <p:cNvPicPr>
-            <a:picLocks noChangeAspect="1"/>
-          </p:cNvPicPr>
-          <p:nvPr/>
-        </p:nvPicPr>
-        <p:blipFill>
-          <a:blip r:embed="rId3"/>
-          <a:stretch>
-            <a:fillRect/>
-          </a:stretch>
-        </p:blipFill>
-        <p:spPr>
-          <a:xfrm>
-            <a:off x="2602296" y="4576572"/>
-            <a:ext cx="539014" cy="365760"/>
-          </a:xfrm>
-          <a:prstGeom prst="rect">
-            <a:avLst/>
-          </a:prstGeom>
-        </p:spPr>
-      </p:pic>
-      <p:pic>
-        <p:nvPicPr>
-          <p:cNvPr id="7" name="Picture 6" descr="Balai Hidrologi dan Lingkungan Keairan logo"/>
-          <p:cNvPicPr>
-            <a:picLocks noChangeAspect="1"/>
-          </p:cNvPicPr>
-          <p:nvPr/>
-        </p:nvPicPr>
-        <p:blipFill>
-          <a:blip r:embed="rId4"/>
-          <a:stretch>
-            <a:fillRect/>
-          </a:stretch>
-        </p:blipFill>
-        <p:spPr>
-          <a:xfrm>
-            <a:off x="3433918" y="4576572"/>
-            <a:ext cx="365760" cy="365760"/>
-          </a:xfrm>
-          <a:prstGeom prst="rect">
-            <a:avLst/>
-          </a:prstGeom>
-        </p:spPr>
-      </p:pic>
-      <p:pic>
-        <p:nvPicPr>
-          <p:cNvPr id="8" name="Picture 7" descr="American Red Cross logo"/>
-          <p:cNvPicPr>
-            <a:picLocks noChangeAspect="1"/>
-          </p:cNvPicPr>
-          <p:nvPr/>
-        </p:nvPicPr>
-        <p:blipFill>
-          <a:blip r:embed="rId5"/>
-          <a:stretch>
-            <a:fillRect/>
-          </a:stretch>
-        </p:blipFill>
-        <p:spPr>
-          <a:xfrm>
-            <a:off x="4092286" y="4576572"/>
-            <a:ext cx="1103335" cy="365760"/>
-          </a:xfrm>
-          <a:prstGeom prst="rect">
-            <a:avLst/>
-          </a:prstGeom>
-        </p:spPr>
-      </p:pic>
-      <p:sp>
-        <p:nvSpPr>
-          <p:cNvPr id="9" name="TextBox 8"/>
-          <p:cNvSpPr txBox="1"/>
-          <p:nvPr/>
-        </p:nvSpPr>
-        <p:spPr>
-          <a:xfrm>
-            <a:off x="6553200" y="4667250"/>
-            <a:ext cx="2133600" cy="274638"/>
-          </a:xfrm>
-          <a:prstGeom prst="rect">
-            <a:avLst/>
-          </a:prstGeom>
-          <a:noFill/>
-        </p:spPr>
-        <p:txBody>
-          <a:bodyPr wrap="square">
-            <a:spAutoFit/>
-          </a:bodyPr>
-          <a:lstStyle/>
-          <a:p>
-            <a:pPr algn="r"/>
-            <a:r>
-              <a:rPr sz="800">
-                <a:solidFill>
-                  <a:srgbClr val="6B6A66"/>
-                </a:solidFill>
-              </a:rPr>
-              <a:t>25 / 25</a:t>
+              <a:t>24 / 24</a:t>
             </a:r>
           </a:p>
         </p:txBody>
@@ -10711,7 +10020,7 @@
                   <a:srgbClr val="6B6A66"/>
                 </a:solidFill>
               </a:rPr>
-              <a:t>3 / 25</a:t>
+              <a:t>3 / 24</a:t>
             </a:r>
           </a:p>
         </p:txBody>
@@ -10987,7 +10296,7 @@
                   <a:srgbClr val="6B6A66"/>
                 </a:solidFill>
               </a:rPr>
-              <a:t>4 / 25</a:t>
+              <a:t>4 / 24</a:t>
             </a:r>
           </a:p>
         </p:txBody>
@@ -11274,7 +10583,7 @@
                   <a:srgbClr val="6B6A66"/>
                 </a:solidFill>
               </a:rPr>
-              <a:t>5 / 25</a:t>
+              <a:t>5 / 24</a:t>
             </a:r>
           </a:p>
         </p:txBody>
@@ -11550,7 +10859,7 @@
                   <a:srgbClr val="6B6A66"/>
                 </a:solidFill>
               </a:rPr>
-              <a:t>6 / 25</a:t>
+              <a:t>6 / 24</a:t>
             </a:r>
           </a:p>
         </p:txBody>
@@ -11779,7 +11088,7 @@
                   <a:srgbClr val="6B6A66"/>
                 </a:solidFill>
               </a:rPr>
-              <a:t>7 / 25</a:t>
+              <a:t>7 / 24</a:t>
             </a:r>
           </a:p>
         </p:txBody>
@@ -12134,7 +11443,7 @@
                   <a:srgbClr val="6B6A66"/>
                 </a:solidFill>
               </a:rPr>
-              <a:t>8 / 25</a:t>
+              <a:t>8 / 24</a:t>
             </a:r>
           </a:p>
         </p:txBody>
@@ -12421,7 +11730,7 @@
                   <a:srgbClr val="6B6A66"/>
                 </a:solidFill>
               </a:rPr>
-              <a:t>9 / 25</a:t>
+              <a:t>9 / 24</a:t>
             </a:r>
           </a:p>
         </p:txBody>

--- a/spring_2026_ID/docs/pdf/REPLICATION_RECOMMENDATIONS_BRIEFING.pptx
+++ b/spring_2026_ID/docs/pdf/REPLICATION_RECOMMENDATIONS_BRIEFING.pptx
@@ -5114,7 +5114,7 @@
           <a:p>
             <a:pPr/>
             <a:r>
-              <a:rPr sz="1400">
+              <a:rPr sz="1250">
                 <a:solidFill>
                   <a:srgbClr val="1A1A1A"/>
                 </a:solidFill>
@@ -5125,67 +5125,78 @@
           <a:p>
             <a:pPr lvl="1"/>
             <a:r>
+              <a:rPr sz="1100">
+                <a:solidFill>
+                  <a:srgbClr val="6B6A66"/>
+                </a:solidFill>
+              </a:rPr>
+              <a:t>The USB storage drive caused a driver fault at boot, so it was removed rather than fixed.</a:t>
+            </a:r>
+          </a:p>
+          <a:p>
+            <a:pPr lvl="1"/>
+            <a:r>
+              <a:rPr sz="1100">
+                <a:solidFill>
+                  <a:srgbClr val="6B6A66"/>
+                </a:solidFill>
+              </a:rPr>
+              <a:t>That left the SD card as the only volume — small enough to sit at the level where it deletes old recordings.</a:t>
+            </a:r>
+          </a:p>
+          <a:p>
+            <a:pPr lvl="1"/>
+            <a:r>
+              <a:rPr sz="1100">
+                <a:solidFill>
+                  <a:srgbClr val="6B6A66"/>
+                </a:solidFill>
+              </a:rPr>
+              <a:t>That caused processing to fail on 43% of videos.</a:t>
+            </a:r>
+          </a:p>
+          <a:p>
+            <a:pPr lvl="1"/>
+            <a:r>
+              <a:rPr sz="1100">
+                <a:solidFill>
+                  <a:srgbClr val="6B6A66"/>
+                </a:solidFill>
+              </a:rPr>
+              <a:t>The station shuts down after processing finishes, so a failed run never shut down: awake to a 25-minute backstop instead of two minutes, about twelve times the energy.</a:t>
+            </a:r>
+          </a:p>
+          <a:p>
+            <a:pPr lvl="1"/>
+            <a:r>
+              <a:rPr sz="1100">
+                <a:solidFill>
+                  <a:srgbClr val="6B6A66"/>
+                </a:solidFill>
+              </a:rPr>
+              <a:t>Repeated across a night, that flattened the battery. A missed wake then left the next-startup alarm in the past.</a:t>
+            </a:r>
+          </a:p>
+          <a:p>
+            <a:pPr/>
+            <a:r>
               <a:rPr sz="1250">
                 <a:solidFill>
-                  <a:srgbClr val="6B6A66"/>
-                </a:solidFill>
-              </a:rPr>
-              <a:t>The USB storage drive caused a driver fault at boot, so it was removed rather than fixed.</a:t>
-            </a:r>
-          </a:p>
-          <a:p>
-            <a:pPr lvl="1"/>
+                  <a:srgbClr val="1A1A1A"/>
+                </a:solidFill>
+              </a:rPr>
+              <a:t>Two lessons: shutdown and startup are split across two systems and neither owns the cycle; and cheap parts can carry expensive operating costs.</a:t>
+            </a:r>
+          </a:p>
+          <a:p>
+            <a:pPr/>
             <a:r>
               <a:rPr sz="1250">
                 <a:solidFill>
-                  <a:srgbClr val="6B6A66"/>
-                </a:solidFill>
-              </a:rPr>
-              <a:t>That left the SD card as the only volume — small enough to sit at the level where it deletes old recordings.</a:t>
-            </a:r>
-          </a:p>
-          <a:p>
-            <a:pPr lvl="1"/>
-            <a:r>
-              <a:rPr sz="1250">
-                <a:solidFill>
-                  <a:srgbClr val="6B6A66"/>
-                </a:solidFill>
-              </a:rPr>
-              <a:t>That caused processing to fail on 43% of videos.</a:t>
-            </a:r>
-          </a:p>
-          <a:p>
-            <a:pPr lvl="1"/>
-            <a:r>
-              <a:rPr sz="1250">
-                <a:solidFill>
-                  <a:srgbClr val="6B6A66"/>
-                </a:solidFill>
-              </a:rPr>
-              <a:t>The station shuts down after processing finishes, so a failed run never shut down: awake to a 25-minute backstop instead of two minutes, about twelve times the energy.</a:t>
-            </a:r>
-          </a:p>
-          <a:p>
-            <a:pPr lvl="1"/>
-            <a:r>
-              <a:rPr sz="1250">
-                <a:solidFill>
-                  <a:srgbClr val="6B6A66"/>
-                </a:solidFill>
-              </a:rPr>
-              <a:t>Repeated across a night, that flattened the battery. A missed wake then left the next-startup alarm in the past.</a:t>
-            </a:r>
-          </a:p>
-          <a:p>
-            <a:pPr/>
-            <a:r>
-              <a:rPr sz="1400">
-                <a:solidFill>
                   <a:srgbClr val="1A1A1A"/>
                 </a:solidFill>
               </a:rPr>
-              <a:t>Two lessons: shutdown and startup are split across two systems and neither owns the cycle; and cheap parts can carry expensive operating costs.</a:t>
+              <a:t>A common root: the computer's own clock battery connector broke on both boards. Losing it is why a separate scheduling board was fitted, which is what split the cycle. R37</a:t>
             </a:r>
           </a:p>
         </p:txBody>
@@ -5997,7 +6008,7 @@
                             <a:srgbClr val="1A1A1A"/>
                           </a:solidFill>
                         </a:rPr>
-                        <a:t>R9, R25, R26</a:t>
+                        <a:t>R37, R9, R25, R26</a:t>
                       </a:r>
                     </a:p>
                   </a:txBody>
@@ -6145,7 +6156,7 @@
                   <a:srgbClr val="6B6A66"/>
                 </a:solidFill>
               </a:rPr>
-              <a:t>Full text in the working list; the report carries an index of all of them. 36 recommendations in 11 groups.</a:t>
+              <a:t>Full text in the working list; the report carries an index of all of them. 37 recommendations in 11 groups.</a:t>
             </a:r>
           </a:p>
         </p:txBody>
@@ -6372,18 +6383,29 @@
           <a:p>
             <a:pPr/>
             <a:r>
-              <a:rPr sz="1400">
+              <a:rPr sz="1250">
                 <a:solidFill>
                   <a:srgbClr val="1A1A1A"/>
                 </a:solidFill>
               </a:rPr>
+              <a:t>Use an industrial Pi carrier with NVMe, a protected clock and an integrated UPS. Most of the failures above meet at one place, and this removes them in a single part. R37</a:t>
+            </a:r>
+          </a:p>
+          <a:p>
+            <a:pPr/>
+            <a:r>
+              <a:rPr sz="1250">
+                <a:solidFill>
+                  <a:srgbClr val="1A1A1A"/>
+                </a:solidFill>
+              </a:rPr>
               <a:t>Build the test station first, so a fault can be reproduced and a fix tried before it goes to a river. R36</a:t>
             </a:r>
           </a:p>
           <a:p>
             <a:pPr/>
             <a:r>
-              <a:rPr sz="1400">
+              <a:rPr sz="1250">
                 <a:solidFill>
                   <a:srgbClr val="1A1A1A"/>
                 </a:solidFill>
@@ -6394,7 +6416,7 @@
           <a:p>
             <a:pPr/>
             <a:r>
-              <a:rPr sz="1400">
+              <a:rPr sz="1250">
                 <a:solidFill>
                   <a:srgbClr val="1A1A1A"/>
                 </a:solidFill>
@@ -6405,7 +6427,7 @@
           <a:p>
             <a:pPr/>
             <a:r>
-              <a:rPr sz="1400">
+              <a:rPr sz="1250">
                 <a:solidFill>
                   <a:srgbClr val="1A1A1A"/>
                 </a:solidFill>
@@ -6416,7 +6438,7 @@
           <a:p>
             <a:pPr/>
             <a:r>
-              <a:rPr sz="1400">
+              <a:rPr sz="1250">
                 <a:solidFill>
                   <a:srgbClr val="1A1A1A"/>
                 </a:solidFill>
@@ -6427,7 +6449,7 @@
           <a:p>
             <a:pPr/>
             <a:r>
-              <a:rPr sz="1400">
+              <a:rPr sz="1250">
                 <a:solidFill>
                   <a:srgbClr val="1A1A1A"/>
                 </a:solidFill>
